--- a/docs/pptx/whole/jx-linsubhr-ratio-throm2.pptx
+++ b/docs/pptx/whole/jx-linsubhr-ratio-throm2.pptx
@@ -2271,7 +2271,7 @@
           </p:nvSpPr>
           <p:spPr>
             <a:xfrm>
-              <a:off x="817517" y="5114368"/>
+              <a:off x="817517" y="5142518"/>
               <a:ext cx="7799693" cy="0"/>
             </a:xfrm>
             <a:custGeom>
@@ -2314,7 +2314,7 @@
           </p:nvSpPr>
           <p:spPr>
             <a:xfrm>
-              <a:off x="817517" y="4244691"/>
+              <a:off x="817517" y="4313054"/>
               <a:ext cx="7799693" cy="0"/>
             </a:xfrm>
             <a:custGeom>
@@ -2357,7 +2357,7 @@
           </p:nvSpPr>
           <p:spPr>
             <a:xfrm>
-              <a:off x="817517" y="3375014"/>
+              <a:off x="817517" y="3483591"/>
               <a:ext cx="7799693" cy="0"/>
             </a:xfrm>
             <a:custGeom>
@@ -2400,7 +2400,7 @@
           </p:nvSpPr>
           <p:spPr>
             <a:xfrm>
-              <a:off x="817517" y="2505337"/>
+              <a:off x="817517" y="2654127"/>
               <a:ext cx="7799693" cy="0"/>
             </a:xfrm>
             <a:custGeom>
@@ -2443,15 +2443,15 @@
           </p:nvSpPr>
           <p:spPr>
             <a:xfrm>
-              <a:off x="1615213" y="1896563"/>
-              <a:ext cx="0" cy="3826579"/>
+              <a:off x="1615213" y="2073503"/>
+              <a:ext cx="0" cy="3649639"/>
             </a:xfrm>
             <a:custGeom>
               <a:avLst/>
               <a:pathLst>
-                <a:path w="0" h="3826579">
+                <a:path w="0" h="3649639">
                   <a:moveTo>
-                    <a:pt x="0" y="3826579"/>
+                    <a:pt x="0" y="3649639"/>
                   </a:moveTo>
                   <a:lnTo>
                     <a:pt x="0" y="0"/>
@@ -2486,15 +2486,15 @@
           </p:nvSpPr>
           <p:spPr>
             <a:xfrm>
-              <a:off x="3387871" y="1896563"/>
-              <a:ext cx="0" cy="3826579"/>
+              <a:off x="3387871" y="2073503"/>
+              <a:ext cx="0" cy="3649639"/>
             </a:xfrm>
             <a:custGeom>
               <a:avLst/>
               <a:pathLst>
-                <a:path w="0" h="3826579">
+                <a:path w="0" h="3649639">
                   <a:moveTo>
-                    <a:pt x="0" y="3826579"/>
+                    <a:pt x="0" y="3649639"/>
                   </a:moveTo>
                   <a:lnTo>
                     <a:pt x="0" y="0"/>
@@ -2529,15 +2529,15 @@
           </p:nvSpPr>
           <p:spPr>
             <a:xfrm>
-              <a:off x="5160528" y="1896563"/>
-              <a:ext cx="0" cy="3826579"/>
+              <a:off x="5160528" y="2073503"/>
+              <a:ext cx="0" cy="3649639"/>
             </a:xfrm>
             <a:custGeom>
               <a:avLst/>
               <a:pathLst>
-                <a:path w="0" h="3826579">
+                <a:path w="0" h="3649639">
                   <a:moveTo>
-                    <a:pt x="0" y="3826579"/>
+                    <a:pt x="0" y="3649639"/>
                   </a:moveTo>
                   <a:lnTo>
                     <a:pt x="0" y="0"/>
@@ -2572,15 +2572,15 @@
           </p:nvSpPr>
           <p:spPr>
             <a:xfrm>
-              <a:off x="6933186" y="1896563"/>
-              <a:ext cx="0" cy="3826579"/>
+              <a:off x="6933186" y="2073503"/>
+              <a:ext cx="0" cy="3649639"/>
             </a:xfrm>
             <a:custGeom>
               <a:avLst/>
               <a:pathLst>
-                <a:path w="0" h="3826579">
+                <a:path w="0" h="3649639">
                   <a:moveTo>
-                    <a:pt x="0" y="3826579"/>
+                    <a:pt x="0" y="3649639"/>
                   </a:moveTo>
                   <a:lnTo>
                     <a:pt x="0" y="0"/>
@@ -2615,7 +2615,7 @@
           </p:nvSpPr>
           <p:spPr>
             <a:xfrm>
-              <a:off x="817517" y="5549207"/>
+              <a:off x="817517" y="5557249"/>
               <a:ext cx="7799693" cy="0"/>
             </a:xfrm>
             <a:custGeom>
@@ -2658,7 +2658,7 @@
           </p:nvSpPr>
           <p:spPr>
             <a:xfrm>
-              <a:off x="817517" y="4679530"/>
+              <a:off x="817517" y="4727786"/>
               <a:ext cx="7799693" cy="0"/>
             </a:xfrm>
             <a:custGeom>
@@ -2701,7 +2701,7 @@
           </p:nvSpPr>
           <p:spPr>
             <a:xfrm>
-              <a:off x="817517" y="3809853"/>
+              <a:off x="817517" y="3898322"/>
               <a:ext cx="7799693" cy="0"/>
             </a:xfrm>
             <a:custGeom>
@@ -2744,7 +2744,7 @@
           </p:nvSpPr>
           <p:spPr>
             <a:xfrm>
-              <a:off x="817517" y="2940175"/>
+              <a:off x="817517" y="3068859"/>
               <a:ext cx="7799693" cy="0"/>
             </a:xfrm>
             <a:custGeom>
@@ -2787,7 +2787,7 @@
           </p:nvSpPr>
           <p:spPr>
             <a:xfrm>
-              <a:off x="817517" y="2070498"/>
+              <a:off x="817517" y="2239395"/>
               <a:ext cx="7799693" cy="0"/>
             </a:xfrm>
             <a:custGeom>
@@ -2830,15 +2830,15 @@
           </p:nvSpPr>
           <p:spPr>
             <a:xfrm>
-              <a:off x="2501542" y="1896563"/>
-              <a:ext cx="0" cy="3826579"/>
+              <a:off x="2501542" y="2073503"/>
+              <a:ext cx="0" cy="3649639"/>
             </a:xfrm>
             <a:custGeom>
               <a:avLst/>
               <a:pathLst>
-                <a:path w="0" h="3826579">
+                <a:path w="0" h="3649639">
                   <a:moveTo>
-                    <a:pt x="0" y="3826579"/>
+                    <a:pt x="0" y="3649639"/>
                   </a:moveTo>
                   <a:lnTo>
                     <a:pt x="0" y="0"/>
@@ -2873,15 +2873,15 @@
           </p:nvSpPr>
           <p:spPr>
             <a:xfrm>
-              <a:off x="4274200" y="1896563"/>
-              <a:ext cx="0" cy="3826579"/>
+              <a:off x="4274200" y="2073503"/>
+              <a:ext cx="0" cy="3649639"/>
             </a:xfrm>
             <a:custGeom>
               <a:avLst/>
               <a:pathLst>
-                <a:path w="0" h="3826579">
+                <a:path w="0" h="3649639">
                   <a:moveTo>
-                    <a:pt x="0" y="3826579"/>
+                    <a:pt x="0" y="3649639"/>
                   </a:moveTo>
                   <a:lnTo>
                     <a:pt x="0" y="0"/>
@@ -2916,15 +2916,15 @@
           </p:nvSpPr>
           <p:spPr>
             <a:xfrm>
-              <a:off x="6046857" y="1896563"/>
-              <a:ext cx="0" cy="3826579"/>
+              <a:off x="6046857" y="2073503"/>
+              <a:ext cx="0" cy="3649639"/>
             </a:xfrm>
             <a:custGeom>
               <a:avLst/>
               <a:pathLst>
-                <a:path w="0" h="3826579">
+                <a:path w="0" h="3649639">
                   <a:moveTo>
-                    <a:pt x="0" y="3826579"/>
+                    <a:pt x="0" y="3649639"/>
                   </a:moveTo>
                   <a:lnTo>
                     <a:pt x="0" y="0"/>
@@ -2959,15 +2959,15 @@
           </p:nvSpPr>
           <p:spPr>
             <a:xfrm>
-              <a:off x="7819515" y="1896563"/>
-              <a:ext cx="0" cy="3826579"/>
+              <a:off x="7819515" y="2073503"/>
+              <a:ext cx="0" cy="3649639"/>
             </a:xfrm>
             <a:custGeom>
               <a:avLst/>
               <a:pathLst>
-                <a:path w="0" h="3826579">
+                <a:path w="0" h="3649639">
                   <a:moveTo>
-                    <a:pt x="0" y="3826579"/>
+                    <a:pt x="0" y="3649639"/>
                   </a:moveTo>
                   <a:lnTo>
                     <a:pt x="0" y="0"/>
@@ -3002,603 +3002,603 @@
           </p:nvSpPr>
           <p:spPr>
             <a:xfrm>
-              <a:off x="817517" y="1896563"/>
-              <a:ext cx="7235830" cy="3489557"/>
+              <a:off x="817517" y="2073503"/>
+              <a:ext cx="7235830" cy="3328201"/>
             </a:xfrm>
             <a:custGeom>
               <a:avLst/>
               <a:pathLst>
-                <a:path w="7235830" h="3489557">
+                <a:path w="7235830" h="3328201">
                   <a:moveTo>
                     <a:pt x="207477" y="0"/>
                   </a:moveTo>
                   <a:lnTo>
-                    <a:pt x="228627" y="34407"/>
-                  </a:lnTo>
-                  <a:lnTo>
-                    <a:pt x="302387" y="150550"/>
-                  </a:lnTo>
-                  <a:lnTo>
-                    <a:pt x="376147" y="262965"/>
-                  </a:lnTo>
-                  <a:lnTo>
-                    <a:pt x="449907" y="371772"/>
-                  </a:lnTo>
-                  <a:lnTo>
-                    <a:pt x="523667" y="477086"/>
-                  </a:lnTo>
-                  <a:lnTo>
-                    <a:pt x="597427" y="579020"/>
-                  </a:lnTo>
-                  <a:lnTo>
-                    <a:pt x="671187" y="677682"/>
-                  </a:lnTo>
-                  <a:lnTo>
-                    <a:pt x="744947" y="773176"/>
-                  </a:lnTo>
-                  <a:lnTo>
-                    <a:pt x="818707" y="865606"/>
-                  </a:lnTo>
-                  <a:lnTo>
-                    <a:pt x="892467" y="955068"/>
-                  </a:lnTo>
-                  <a:lnTo>
-                    <a:pt x="966227" y="1041659"/>
-                  </a:lnTo>
-                  <a:lnTo>
-                    <a:pt x="1039987" y="1125470"/>
-                  </a:lnTo>
-                  <a:lnTo>
-                    <a:pt x="1113747" y="1206591"/>
-                  </a:lnTo>
-                  <a:lnTo>
-                    <a:pt x="1187508" y="1285108"/>
-                  </a:lnTo>
-                  <a:lnTo>
-                    <a:pt x="1261268" y="1361104"/>
-                  </a:lnTo>
-                  <a:lnTo>
-                    <a:pt x="1335028" y="1434661"/>
-                  </a:lnTo>
-                  <a:lnTo>
-                    <a:pt x="1408788" y="1505857"/>
-                  </a:lnTo>
-                  <a:lnTo>
-                    <a:pt x="1482548" y="1574768"/>
-                  </a:lnTo>
-                  <a:lnTo>
-                    <a:pt x="1556308" y="1641467"/>
-                  </a:lnTo>
-                  <a:lnTo>
-                    <a:pt x="1630068" y="1706024"/>
-                  </a:lnTo>
-                  <a:lnTo>
-                    <a:pt x="1703828" y="1768510"/>
-                  </a:lnTo>
-                  <a:lnTo>
-                    <a:pt x="1777588" y="1828989"/>
-                  </a:lnTo>
-                  <a:lnTo>
-                    <a:pt x="1851348" y="1887528"/>
-                  </a:lnTo>
-                  <a:lnTo>
-                    <a:pt x="1925108" y="1944187"/>
-                  </a:lnTo>
-                  <a:lnTo>
-                    <a:pt x="1998868" y="1999027"/>
-                  </a:lnTo>
-                  <a:lnTo>
-                    <a:pt x="2072628" y="2052107"/>
-                  </a:lnTo>
-                  <a:lnTo>
-                    <a:pt x="2146388" y="2103484"/>
-                  </a:lnTo>
-                  <a:lnTo>
-                    <a:pt x="2220148" y="2153211"/>
-                  </a:lnTo>
-                  <a:lnTo>
-                    <a:pt x="2293908" y="2201342"/>
-                  </a:lnTo>
-                  <a:lnTo>
-                    <a:pt x="2367668" y="2247928"/>
-                  </a:lnTo>
-                  <a:lnTo>
-                    <a:pt x="2441428" y="2293018"/>
-                  </a:lnTo>
-                  <a:lnTo>
-                    <a:pt x="2515188" y="2336662"/>
-                  </a:lnTo>
-                  <a:lnTo>
-                    <a:pt x="2588948" y="2378904"/>
-                  </a:lnTo>
-                  <a:lnTo>
-                    <a:pt x="2662708" y="2419790"/>
-                  </a:lnTo>
-                  <a:lnTo>
-                    <a:pt x="2736468" y="2459364"/>
-                  </a:lnTo>
-                  <a:lnTo>
-                    <a:pt x="2810228" y="2497668"/>
-                  </a:lnTo>
-                  <a:lnTo>
-                    <a:pt x="2883988" y="2534742"/>
-                  </a:lnTo>
-                  <a:lnTo>
-                    <a:pt x="2957748" y="2570626"/>
-                  </a:lnTo>
-                  <a:lnTo>
-                    <a:pt x="3031508" y="2605358"/>
-                  </a:lnTo>
-                  <a:lnTo>
-                    <a:pt x="3105268" y="2638975"/>
-                  </a:lnTo>
-                  <a:lnTo>
-                    <a:pt x="3179028" y="2671513"/>
-                  </a:lnTo>
-                  <a:lnTo>
-                    <a:pt x="3252788" y="2703007"/>
-                  </a:lnTo>
-                  <a:lnTo>
-                    <a:pt x="3326548" y="2733490"/>
-                  </a:lnTo>
-                  <a:lnTo>
-                    <a:pt x="3400308" y="2762994"/>
-                  </a:lnTo>
-                  <a:lnTo>
-                    <a:pt x="3474068" y="2786250"/>
-                  </a:lnTo>
-                  <a:lnTo>
-                    <a:pt x="3547828" y="2796961"/>
-                  </a:lnTo>
-                  <a:lnTo>
-                    <a:pt x="3621588" y="2807540"/>
-                  </a:lnTo>
-                  <a:lnTo>
-                    <a:pt x="3695348" y="2817987"/>
-                  </a:lnTo>
-                  <a:lnTo>
-                    <a:pt x="3769108" y="2828306"/>
-                  </a:lnTo>
-                  <a:lnTo>
-                    <a:pt x="3842868" y="2838497"/>
-                  </a:lnTo>
-                  <a:lnTo>
-                    <a:pt x="3916628" y="2848563"/>
-                  </a:lnTo>
-                  <a:lnTo>
-                    <a:pt x="3990388" y="2858503"/>
-                  </a:lnTo>
-                  <a:lnTo>
-                    <a:pt x="4064149" y="2868321"/>
-                  </a:lnTo>
-                  <a:lnTo>
-                    <a:pt x="4137909" y="2878018"/>
-                  </a:lnTo>
-                  <a:lnTo>
-                    <a:pt x="4211669" y="2887594"/>
-                  </a:lnTo>
-                  <a:lnTo>
-                    <a:pt x="4285429" y="2897053"/>
-                  </a:lnTo>
-                  <a:lnTo>
-                    <a:pt x="4359189" y="2906394"/>
-                  </a:lnTo>
-                  <a:lnTo>
-                    <a:pt x="4432949" y="2915620"/>
-                  </a:lnTo>
-                  <a:lnTo>
-                    <a:pt x="4506709" y="2924731"/>
-                  </a:lnTo>
-                  <a:lnTo>
-                    <a:pt x="4580469" y="2933730"/>
-                  </a:lnTo>
-                  <a:lnTo>
-                    <a:pt x="4654229" y="2942618"/>
-                  </a:lnTo>
-                  <a:lnTo>
-                    <a:pt x="4727989" y="2951396"/>
-                  </a:lnTo>
-                  <a:lnTo>
-                    <a:pt x="4801749" y="2960066"/>
-                  </a:lnTo>
-                  <a:lnTo>
-                    <a:pt x="4875509" y="2968628"/>
-                  </a:lnTo>
-                  <a:lnTo>
-                    <a:pt x="4949269" y="2977084"/>
-                  </a:lnTo>
-                  <a:lnTo>
-                    <a:pt x="5023029" y="2985436"/>
-                  </a:lnTo>
-                  <a:lnTo>
-                    <a:pt x="5096789" y="2993685"/>
-                  </a:lnTo>
-                  <a:lnTo>
-                    <a:pt x="5170549" y="3001831"/>
-                  </a:lnTo>
-                  <a:lnTo>
-                    <a:pt x="5244309" y="3009877"/>
-                  </a:lnTo>
-                  <a:lnTo>
-                    <a:pt x="5318069" y="3017824"/>
-                  </a:lnTo>
-                  <a:lnTo>
-                    <a:pt x="5391829" y="3025672"/>
-                  </a:lnTo>
-                  <a:lnTo>
-                    <a:pt x="5465589" y="3033423"/>
-                  </a:lnTo>
-                  <a:lnTo>
-                    <a:pt x="5539349" y="3041078"/>
-                  </a:lnTo>
-                  <a:lnTo>
-                    <a:pt x="5613109" y="3048639"/>
-                  </a:lnTo>
-                  <a:lnTo>
-                    <a:pt x="5686869" y="3056106"/>
-                  </a:lnTo>
-                  <a:lnTo>
-                    <a:pt x="5760629" y="3063481"/>
-                  </a:lnTo>
-                  <a:lnTo>
-                    <a:pt x="5834389" y="3070765"/>
-                  </a:lnTo>
-                  <a:lnTo>
-                    <a:pt x="5908149" y="3077959"/>
-                  </a:lnTo>
-                  <a:lnTo>
-                    <a:pt x="5981909" y="3085064"/>
-                  </a:lnTo>
-                  <a:lnTo>
-                    <a:pt x="6055669" y="3092080"/>
-                  </a:lnTo>
-                  <a:lnTo>
-                    <a:pt x="6129429" y="3099011"/>
-                  </a:lnTo>
-                  <a:lnTo>
-                    <a:pt x="6203189" y="3105855"/>
-                  </a:lnTo>
-                  <a:lnTo>
-                    <a:pt x="6276949" y="3112615"/>
-                  </a:lnTo>
-                  <a:lnTo>
-                    <a:pt x="6350709" y="3119291"/>
-                  </a:lnTo>
-                  <a:lnTo>
-                    <a:pt x="6424469" y="3125885"/>
-                  </a:lnTo>
-                  <a:lnTo>
-                    <a:pt x="6498229" y="3132397"/>
-                  </a:lnTo>
-                  <a:lnTo>
-                    <a:pt x="6571989" y="3138829"/>
-                  </a:lnTo>
-                  <a:lnTo>
-                    <a:pt x="6645749" y="3145181"/>
-                  </a:lnTo>
-                  <a:lnTo>
-                    <a:pt x="6719509" y="3151455"/>
-                  </a:lnTo>
-                  <a:lnTo>
-                    <a:pt x="6793269" y="3157651"/>
-                  </a:lnTo>
-                  <a:lnTo>
-                    <a:pt x="6867029" y="3163771"/>
-                  </a:lnTo>
-                  <a:lnTo>
-                    <a:pt x="6940789" y="3169814"/>
-                  </a:lnTo>
-                  <a:lnTo>
-                    <a:pt x="7014550" y="3175784"/>
-                  </a:lnTo>
-                  <a:lnTo>
-                    <a:pt x="7088310" y="3181679"/>
-                  </a:lnTo>
-                  <a:lnTo>
-                    <a:pt x="7162070" y="3187501"/>
-                  </a:lnTo>
-                  <a:lnTo>
-                    <a:pt x="7235830" y="3193252"/>
-                  </a:lnTo>
-                  <a:lnTo>
-                    <a:pt x="7235830" y="3489557"/>
-                  </a:lnTo>
-                  <a:lnTo>
-                    <a:pt x="7162070" y="3484149"/>
-                  </a:lnTo>
-                  <a:lnTo>
-                    <a:pt x="7088310" y="3478561"/>
-                  </a:lnTo>
-                  <a:lnTo>
-                    <a:pt x="7014550" y="3472787"/>
-                  </a:lnTo>
-                  <a:lnTo>
-                    <a:pt x="6940789" y="3466823"/>
-                  </a:lnTo>
-                  <a:lnTo>
-                    <a:pt x="6867029" y="3460660"/>
-                  </a:lnTo>
-                  <a:lnTo>
-                    <a:pt x="6793269" y="3454293"/>
-                  </a:lnTo>
-                  <a:lnTo>
-                    <a:pt x="6719509" y="3447715"/>
-                  </a:lnTo>
-                  <a:lnTo>
-                    <a:pt x="6645749" y="3440919"/>
-                  </a:lnTo>
-                  <a:lnTo>
-                    <a:pt x="6571989" y="3433897"/>
-                  </a:lnTo>
-                  <a:lnTo>
-                    <a:pt x="6498229" y="3426643"/>
-                  </a:lnTo>
-                  <a:lnTo>
-                    <a:pt x="6424469" y="3419148"/>
-                  </a:lnTo>
-                  <a:lnTo>
-                    <a:pt x="6350709" y="3411404"/>
-                  </a:lnTo>
-                  <a:lnTo>
-                    <a:pt x="6276949" y="3403403"/>
-                  </a:lnTo>
-                  <a:lnTo>
-                    <a:pt x="6203189" y="3395138"/>
-                  </a:lnTo>
-                  <a:lnTo>
-                    <a:pt x="6129429" y="3386598"/>
-                  </a:lnTo>
-                  <a:lnTo>
-                    <a:pt x="6055669" y="3377775"/>
-                  </a:lnTo>
-                  <a:lnTo>
-                    <a:pt x="5981909" y="3368659"/>
-                  </a:lnTo>
-                  <a:lnTo>
-                    <a:pt x="5908149" y="3359241"/>
-                  </a:lnTo>
-                  <a:lnTo>
-                    <a:pt x="5834389" y="3349510"/>
-                  </a:lnTo>
-                  <a:lnTo>
-                    <a:pt x="5760629" y="3339457"/>
-                  </a:lnTo>
-                  <a:lnTo>
-                    <a:pt x="5686869" y="3329071"/>
-                  </a:lnTo>
-                  <a:lnTo>
-                    <a:pt x="5613109" y="3318340"/>
-                  </a:lnTo>
-                  <a:lnTo>
-                    <a:pt x="5539349" y="3307253"/>
-                  </a:lnTo>
-                  <a:lnTo>
-                    <a:pt x="5465589" y="3295798"/>
-                  </a:lnTo>
-                  <a:lnTo>
-                    <a:pt x="5391829" y="3283964"/>
-                  </a:lnTo>
-                  <a:lnTo>
-                    <a:pt x="5318069" y="3271737"/>
-                  </a:lnTo>
-                  <a:lnTo>
-                    <a:pt x="5244309" y="3259105"/>
-                  </a:lnTo>
-                  <a:lnTo>
-                    <a:pt x="5170549" y="3246054"/>
-                  </a:lnTo>
-                  <a:lnTo>
-                    <a:pt x="5096789" y="3232569"/>
-                  </a:lnTo>
-                  <a:lnTo>
-                    <a:pt x="5023029" y="3218638"/>
-                  </a:lnTo>
-                  <a:lnTo>
-                    <a:pt x="4949269" y="3204245"/>
-                  </a:lnTo>
-                  <a:lnTo>
-                    <a:pt x="4875509" y="3189374"/>
-                  </a:lnTo>
-                  <a:lnTo>
-                    <a:pt x="4801749" y="3174010"/>
-                  </a:lnTo>
-                  <a:lnTo>
-                    <a:pt x="4727989" y="3158137"/>
-                  </a:lnTo>
-                  <a:lnTo>
-                    <a:pt x="4654229" y="3141737"/>
-                  </a:lnTo>
-                  <a:lnTo>
-                    <a:pt x="4580469" y="3124793"/>
-                  </a:lnTo>
-                  <a:lnTo>
-                    <a:pt x="4506709" y="3107288"/>
-                  </a:lnTo>
-                  <a:lnTo>
-                    <a:pt x="4432949" y="3089202"/>
-                  </a:lnTo>
-                  <a:lnTo>
-                    <a:pt x="4359189" y="3070516"/>
-                  </a:lnTo>
-                  <a:lnTo>
-                    <a:pt x="4285429" y="3051210"/>
-                  </a:lnTo>
-                  <a:lnTo>
-                    <a:pt x="4211669" y="3031264"/>
-                  </a:lnTo>
-                  <a:lnTo>
-                    <a:pt x="4137909" y="3010657"/>
-                  </a:lnTo>
-                  <a:lnTo>
-                    <a:pt x="4064149" y="2989366"/>
-                  </a:lnTo>
-                  <a:lnTo>
-                    <a:pt x="3990388" y="2967369"/>
-                  </a:lnTo>
-                  <a:lnTo>
-                    <a:pt x="3916628" y="2944642"/>
-                  </a:lnTo>
-                  <a:lnTo>
-                    <a:pt x="3842868" y="2921162"/>
-                  </a:lnTo>
-                  <a:lnTo>
-                    <a:pt x="3769108" y="2896903"/>
-                  </a:lnTo>
-                  <a:lnTo>
-                    <a:pt x="3695348" y="2871840"/>
-                  </a:lnTo>
-                  <a:lnTo>
-                    <a:pt x="3621588" y="2845945"/>
-                  </a:lnTo>
-                  <a:lnTo>
-                    <a:pt x="3547828" y="2819192"/>
-                  </a:lnTo>
-                  <a:lnTo>
-                    <a:pt x="3474068" y="2791552"/>
-                  </a:lnTo>
-                  <a:lnTo>
-                    <a:pt x="3400308" y="2775405"/>
-                  </a:lnTo>
-                  <a:lnTo>
-                    <a:pt x="3326548" y="2764424"/>
-                  </a:lnTo>
-                  <a:lnTo>
-                    <a:pt x="3252788" y="2753305"/>
-                  </a:lnTo>
-                  <a:lnTo>
-                    <a:pt x="3179028" y="2742048"/>
-                  </a:lnTo>
-                  <a:lnTo>
-                    <a:pt x="3105268" y="2730649"/>
-                  </a:lnTo>
-                  <a:lnTo>
-                    <a:pt x="3031508" y="2719108"/>
-                  </a:lnTo>
-                  <a:lnTo>
-                    <a:pt x="2957748" y="2707422"/>
-                  </a:lnTo>
-                  <a:lnTo>
-                    <a:pt x="2883988" y="2695590"/>
-                  </a:lnTo>
-                  <a:lnTo>
-                    <a:pt x="2810228" y="2683610"/>
-                  </a:lnTo>
-                  <a:lnTo>
-                    <a:pt x="2736468" y="2671480"/>
-                  </a:lnTo>
-                  <a:lnTo>
-                    <a:pt x="2662708" y="2659198"/>
-                  </a:lnTo>
-                  <a:lnTo>
-                    <a:pt x="2588948" y="2646763"/>
-                  </a:lnTo>
-                  <a:lnTo>
-                    <a:pt x="2515188" y="2634172"/>
-                  </a:lnTo>
-                  <a:lnTo>
-                    <a:pt x="2441428" y="2621423"/>
-                  </a:lnTo>
-                  <a:lnTo>
-                    <a:pt x="2367668" y="2608514"/>
-                  </a:lnTo>
-                  <a:lnTo>
-                    <a:pt x="2293908" y="2595444"/>
-                  </a:lnTo>
-                  <a:lnTo>
-                    <a:pt x="2220148" y="2582211"/>
-                  </a:lnTo>
-                  <a:lnTo>
-                    <a:pt x="2146388" y="2568811"/>
-                  </a:lnTo>
-                  <a:lnTo>
-                    <a:pt x="2072628" y="2555244"/>
-                  </a:lnTo>
-                  <a:lnTo>
-                    <a:pt x="1998868" y="2541507"/>
-                  </a:lnTo>
-                  <a:lnTo>
-                    <a:pt x="1925108" y="2527599"/>
-                  </a:lnTo>
-                  <a:lnTo>
-                    <a:pt x="1851348" y="2513516"/>
-                  </a:lnTo>
-                  <a:lnTo>
-                    <a:pt x="1777588" y="2499257"/>
-                  </a:lnTo>
-                  <a:lnTo>
-                    <a:pt x="1703828" y="2484819"/>
-                  </a:lnTo>
-                  <a:lnTo>
-                    <a:pt x="1630068" y="2470201"/>
-                  </a:lnTo>
-                  <a:lnTo>
-                    <a:pt x="1556308" y="2455399"/>
-                  </a:lnTo>
-                  <a:lnTo>
-                    <a:pt x="1482548" y="2440412"/>
-                  </a:lnTo>
-                  <a:lnTo>
-                    <a:pt x="1408788" y="2425238"/>
-                  </a:lnTo>
-                  <a:lnTo>
-                    <a:pt x="1335028" y="2409874"/>
-                  </a:lnTo>
-                  <a:lnTo>
-                    <a:pt x="1261268" y="2394317"/>
-                  </a:lnTo>
-                  <a:lnTo>
-                    <a:pt x="1187508" y="2378566"/>
-                  </a:lnTo>
-                  <a:lnTo>
-                    <a:pt x="1113747" y="2362618"/>
-                  </a:lnTo>
-                  <a:lnTo>
-                    <a:pt x="1039987" y="2346470"/>
-                  </a:lnTo>
-                  <a:lnTo>
-                    <a:pt x="966227" y="2330120"/>
-                  </a:lnTo>
-                  <a:lnTo>
-                    <a:pt x="892467" y="2313565"/>
-                  </a:lnTo>
-                  <a:lnTo>
-                    <a:pt x="818707" y="2296803"/>
-                  </a:lnTo>
-                  <a:lnTo>
-                    <a:pt x="744947" y="2279831"/>
-                  </a:lnTo>
-                  <a:lnTo>
-                    <a:pt x="671187" y="2262646"/>
-                  </a:lnTo>
-                  <a:lnTo>
-                    <a:pt x="597427" y="2245247"/>
-                  </a:lnTo>
-                  <a:lnTo>
-                    <a:pt x="523667" y="2227629"/>
-                  </a:lnTo>
-                  <a:lnTo>
-                    <a:pt x="449907" y="2209792"/>
-                  </a:lnTo>
-                  <a:lnTo>
-                    <a:pt x="376147" y="2191731"/>
-                  </a:lnTo>
-                  <a:lnTo>
-                    <a:pt x="302387" y="2173443"/>
-                  </a:lnTo>
-                  <a:lnTo>
-                    <a:pt x="228627" y="2154927"/>
-                  </a:lnTo>
-                  <a:lnTo>
-                    <a:pt x="154867" y="2136179"/>
-                  </a:lnTo>
-                  <a:lnTo>
-                    <a:pt x="81107" y="2117197"/>
-                  </a:lnTo>
-                  <a:lnTo>
-                    <a:pt x="7347" y="2097977"/>
-                  </a:lnTo>
-                  <a:lnTo>
-                    <a:pt x="0" y="2096038"/>
+                    <a:pt x="228627" y="32816"/>
+                  </a:lnTo>
+                  <a:lnTo>
+                    <a:pt x="302387" y="143589"/>
+                  </a:lnTo>
+                  <a:lnTo>
+                    <a:pt x="376147" y="250806"/>
+                  </a:lnTo>
+                  <a:lnTo>
+                    <a:pt x="449907" y="354582"/>
+                  </a:lnTo>
+                  <a:lnTo>
+                    <a:pt x="523667" y="455026"/>
+                  </a:lnTo>
+                  <a:lnTo>
+                    <a:pt x="597427" y="552246"/>
+                  </a:lnTo>
+                  <a:lnTo>
+                    <a:pt x="671187" y="646346"/>
+                  </a:lnTo>
+                  <a:lnTo>
+                    <a:pt x="744947" y="737425"/>
+                  </a:lnTo>
+                  <a:lnTo>
+                    <a:pt x="818707" y="825580"/>
+                  </a:lnTo>
+                  <a:lnTo>
+                    <a:pt x="892467" y="910906"/>
+                  </a:lnTo>
+                  <a:lnTo>
+                    <a:pt x="966227" y="993493"/>
+                  </a:lnTo>
+                  <a:lnTo>
+                    <a:pt x="1039987" y="1073428"/>
+                  </a:lnTo>
+                  <a:lnTo>
+                    <a:pt x="1113747" y="1150798"/>
+                  </a:lnTo>
+                  <a:lnTo>
+                    <a:pt x="1187508" y="1225685"/>
+                  </a:lnTo>
+                  <a:lnTo>
+                    <a:pt x="1261268" y="1298167"/>
+                  </a:lnTo>
+                  <a:lnTo>
+                    <a:pt x="1335028" y="1368323"/>
+                  </a:lnTo>
+                  <a:lnTo>
+                    <a:pt x="1408788" y="1436227"/>
+                  </a:lnTo>
+                  <a:lnTo>
+                    <a:pt x="1482548" y="1501951"/>
+                  </a:lnTo>
+                  <a:lnTo>
+                    <a:pt x="1556308" y="1565566"/>
+                  </a:lnTo>
+                  <a:lnTo>
+                    <a:pt x="1630068" y="1627138"/>
+                  </a:lnTo>
+                  <a:lnTo>
+                    <a:pt x="1703828" y="1686734"/>
+                  </a:lnTo>
+                  <a:lnTo>
+                    <a:pt x="1777588" y="1744417"/>
+                  </a:lnTo>
+                  <a:lnTo>
+                    <a:pt x="1851348" y="1800249"/>
+                  </a:lnTo>
+                  <a:lnTo>
+                    <a:pt x="1925108" y="1854288"/>
+                  </a:lnTo>
+                  <a:lnTo>
+                    <a:pt x="1998868" y="1906593"/>
+                  </a:lnTo>
+                  <a:lnTo>
+                    <a:pt x="2072628" y="1957219"/>
+                  </a:lnTo>
+                  <a:lnTo>
+                    <a:pt x="2146388" y="2006219"/>
+                  </a:lnTo>
+                  <a:lnTo>
+                    <a:pt x="2220148" y="2053647"/>
+                  </a:lnTo>
+                  <a:lnTo>
+                    <a:pt x="2293908" y="2099553"/>
+                  </a:lnTo>
+                  <a:lnTo>
+                    <a:pt x="2367668" y="2143984"/>
+                  </a:lnTo>
+                  <a:lnTo>
+                    <a:pt x="2441428" y="2186990"/>
+                  </a:lnTo>
+                  <a:lnTo>
+                    <a:pt x="2515188" y="2228615"/>
+                  </a:lnTo>
+                  <a:lnTo>
+                    <a:pt x="2588948" y="2268904"/>
+                  </a:lnTo>
+                  <a:lnTo>
+                    <a:pt x="2662708" y="2307900"/>
+                  </a:lnTo>
+                  <a:lnTo>
+                    <a:pt x="2736468" y="2345644"/>
+                  </a:lnTo>
+                  <a:lnTo>
+                    <a:pt x="2810228" y="2382176"/>
+                  </a:lnTo>
+                  <a:lnTo>
+                    <a:pt x="2883988" y="2417536"/>
+                  </a:lnTo>
+                  <a:lnTo>
+                    <a:pt x="2957748" y="2451761"/>
+                  </a:lnTo>
+                  <a:lnTo>
+                    <a:pt x="3031508" y="2484887"/>
+                  </a:lnTo>
+                  <a:lnTo>
+                    <a:pt x="3105268" y="2516950"/>
+                  </a:lnTo>
+                  <a:lnTo>
+                    <a:pt x="3179028" y="2547984"/>
+                  </a:lnTo>
+                  <a:lnTo>
+                    <a:pt x="3252788" y="2578021"/>
+                  </a:lnTo>
+                  <a:lnTo>
+                    <a:pt x="3326548" y="2607094"/>
+                  </a:lnTo>
+                  <a:lnTo>
+                    <a:pt x="3400308" y="2635234"/>
+                  </a:lnTo>
+                  <a:lnTo>
+                    <a:pt x="3474068" y="2657415"/>
+                  </a:lnTo>
+                  <a:lnTo>
+                    <a:pt x="3547828" y="2667630"/>
+                  </a:lnTo>
+                  <a:lnTo>
+                    <a:pt x="3621588" y="2677720"/>
+                  </a:lnTo>
+                  <a:lnTo>
+                    <a:pt x="3695348" y="2687685"/>
+                  </a:lnTo>
+                  <a:lnTo>
+                    <a:pt x="3769108" y="2697526"/>
+                  </a:lnTo>
+                  <a:lnTo>
+                    <a:pt x="3842868" y="2707246"/>
+                  </a:lnTo>
+                  <a:lnTo>
+                    <a:pt x="3916628" y="2716846"/>
+                  </a:lnTo>
+                  <a:lnTo>
+                    <a:pt x="3990388" y="2726327"/>
+                  </a:lnTo>
+                  <a:lnTo>
+                    <a:pt x="4064149" y="2735691"/>
+                  </a:lnTo>
+                  <a:lnTo>
+                    <a:pt x="4137909" y="2744939"/>
+                  </a:lnTo>
+                  <a:lnTo>
+                    <a:pt x="4211669" y="2754073"/>
+                  </a:lnTo>
+                  <a:lnTo>
+                    <a:pt x="4285429" y="2763094"/>
+                  </a:lnTo>
+                  <a:lnTo>
+                    <a:pt x="4359189" y="2772003"/>
+                  </a:lnTo>
+                  <a:lnTo>
+                    <a:pt x="4432949" y="2780802"/>
+                  </a:lnTo>
+                  <a:lnTo>
+                    <a:pt x="4506709" y="2789493"/>
+                  </a:lnTo>
+                  <a:lnTo>
+                    <a:pt x="4580469" y="2798076"/>
+                  </a:lnTo>
+                  <a:lnTo>
+                    <a:pt x="4654229" y="2806553"/>
+                  </a:lnTo>
+                  <a:lnTo>
+                    <a:pt x="4727989" y="2814925"/>
+                  </a:lnTo>
+                  <a:lnTo>
+                    <a:pt x="4801749" y="2823193"/>
+                  </a:lnTo>
+                  <a:lnTo>
+                    <a:pt x="4875509" y="2831360"/>
+                  </a:lnTo>
+                  <a:lnTo>
+                    <a:pt x="4949269" y="2839425"/>
+                  </a:lnTo>
+                  <a:lnTo>
+                    <a:pt x="5023029" y="2847391"/>
+                  </a:lnTo>
+                  <a:lnTo>
+                    <a:pt x="5096789" y="2855258"/>
+                  </a:lnTo>
+                  <a:lnTo>
+                    <a:pt x="5170549" y="2863028"/>
+                  </a:lnTo>
+                  <a:lnTo>
+                    <a:pt x="5244309" y="2870702"/>
+                  </a:lnTo>
+                  <a:lnTo>
+                    <a:pt x="5318069" y="2878281"/>
+                  </a:lnTo>
+                  <a:lnTo>
+                    <a:pt x="5391829" y="2885766"/>
+                  </a:lnTo>
+                  <a:lnTo>
+                    <a:pt x="5465589" y="2893159"/>
+                  </a:lnTo>
+                  <a:lnTo>
+                    <a:pt x="5539349" y="2900460"/>
+                  </a:lnTo>
+                  <a:lnTo>
+                    <a:pt x="5613109" y="2907671"/>
+                  </a:lnTo>
+                  <a:lnTo>
+                    <a:pt x="5686869" y="2914793"/>
+                  </a:lnTo>
+                  <a:lnTo>
+                    <a:pt x="5760629" y="2921827"/>
+                  </a:lnTo>
+                  <a:lnTo>
+                    <a:pt x="5834389" y="2928774"/>
+                  </a:lnTo>
+                  <a:lnTo>
+                    <a:pt x="5908149" y="2935635"/>
+                  </a:lnTo>
+                  <a:lnTo>
+                    <a:pt x="5981909" y="2942411"/>
+                  </a:lnTo>
+                  <a:lnTo>
+                    <a:pt x="6055669" y="2949104"/>
+                  </a:lnTo>
+                  <a:lnTo>
+                    <a:pt x="6129429" y="2955713"/>
+                  </a:lnTo>
+                  <a:lnTo>
+                    <a:pt x="6203189" y="2962241"/>
+                  </a:lnTo>
+                  <a:lnTo>
+                    <a:pt x="6276949" y="2968689"/>
+                  </a:lnTo>
+                  <a:lnTo>
+                    <a:pt x="6350709" y="2975056"/>
+                  </a:lnTo>
+                  <a:lnTo>
+                    <a:pt x="6424469" y="2981345"/>
+                  </a:lnTo>
+                  <a:lnTo>
+                    <a:pt x="6498229" y="2987556"/>
+                  </a:lnTo>
+                  <a:lnTo>
+                    <a:pt x="6571989" y="2993691"/>
+                  </a:lnTo>
+                  <a:lnTo>
+                    <a:pt x="6645749" y="2999749"/>
+                  </a:lnTo>
+                  <a:lnTo>
+                    <a:pt x="6719509" y="3005733"/>
+                  </a:lnTo>
+                  <a:lnTo>
+                    <a:pt x="6793269" y="3011642"/>
+                  </a:lnTo>
+                  <a:lnTo>
+                    <a:pt x="6867029" y="3017479"/>
+                  </a:lnTo>
+                  <a:lnTo>
+                    <a:pt x="6940789" y="3023243"/>
+                  </a:lnTo>
+                  <a:lnTo>
+                    <a:pt x="7014550" y="3028937"/>
+                  </a:lnTo>
+                  <a:lnTo>
+                    <a:pt x="7088310" y="3034559"/>
+                  </a:lnTo>
+                  <a:lnTo>
+                    <a:pt x="7162070" y="3040113"/>
+                  </a:lnTo>
+                  <a:lnTo>
+                    <a:pt x="7235830" y="3045597"/>
+                  </a:lnTo>
+                  <a:lnTo>
+                    <a:pt x="7235830" y="3328201"/>
+                  </a:lnTo>
+                  <a:lnTo>
+                    <a:pt x="7162070" y="3323043"/>
+                  </a:lnTo>
+                  <a:lnTo>
+                    <a:pt x="7088310" y="3317713"/>
+                  </a:lnTo>
+                  <a:lnTo>
+                    <a:pt x="7014550" y="3312207"/>
+                  </a:lnTo>
+                  <a:lnTo>
+                    <a:pt x="6940789" y="3306518"/>
+                  </a:lnTo>
+                  <a:lnTo>
+                    <a:pt x="6867029" y="3300640"/>
+                  </a:lnTo>
+                  <a:lnTo>
+                    <a:pt x="6793269" y="3294568"/>
+                  </a:lnTo>
+                  <a:lnTo>
+                    <a:pt x="6719509" y="3288294"/>
+                  </a:lnTo>
+                  <a:lnTo>
+                    <a:pt x="6645749" y="3281812"/>
+                  </a:lnTo>
+                  <a:lnTo>
+                    <a:pt x="6571989" y="3275115"/>
+                  </a:lnTo>
+                  <a:lnTo>
+                    <a:pt x="6498229" y="3268196"/>
+                  </a:lnTo>
+                  <a:lnTo>
+                    <a:pt x="6424469" y="3261047"/>
+                  </a:lnTo>
+                  <a:lnTo>
+                    <a:pt x="6350709" y="3253662"/>
+                  </a:lnTo>
+                  <a:lnTo>
+                    <a:pt x="6276949" y="3246031"/>
+                  </a:lnTo>
+                  <a:lnTo>
+                    <a:pt x="6203189" y="3238148"/>
+                  </a:lnTo>
+                  <a:lnTo>
+                    <a:pt x="6129429" y="3230003"/>
+                  </a:lnTo>
+                  <a:lnTo>
+                    <a:pt x="6055669" y="3221588"/>
+                  </a:lnTo>
+                  <a:lnTo>
+                    <a:pt x="5981909" y="3212893"/>
+                  </a:lnTo>
+                  <a:lnTo>
+                    <a:pt x="5908149" y="3203911"/>
+                  </a:lnTo>
+                  <a:lnTo>
+                    <a:pt x="5834389" y="3194630"/>
+                  </a:lnTo>
+                  <a:lnTo>
+                    <a:pt x="5760629" y="3185042"/>
+                  </a:lnTo>
+                  <a:lnTo>
+                    <a:pt x="5686869" y="3175136"/>
+                  </a:lnTo>
+                  <a:lnTo>
+                    <a:pt x="5613109" y="3164901"/>
+                  </a:lnTo>
+                  <a:lnTo>
+                    <a:pt x="5539349" y="3154327"/>
+                  </a:lnTo>
+                  <a:lnTo>
+                    <a:pt x="5465589" y="3143402"/>
+                  </a:lnTo>
+                  <a:lnTo>
+                    <a:pt x="5391829" y="3132115"/>
+                  </a:lnTo>
+                  <a:lnTo>
+                    <a:pt x="5318069" y="3120453"/>
+                  </a:lnTo>
+                  <a:lnTo>
+                    <a:pt x="5244309" y="3108405"/>
+                  </a:lnTo>
+                  <a:lnTo>
+                    <a:pt x="5170549" y="3095957"/>
+                  </a:lnTo>
+                  <a:lnTo>
+                    <a:pt x="5096789" y="3083097"/>
+                  </a:lnTo>
+                  <a:lnTo>
+                    <a:pt x="5023029" y="3069809"/>
+                  </a:lnTo>
+                  <a:lnTo>
+                    <a:pt x="4949269" y="3056082"/>
+                  </a:lnTo>
+                  <a:lnTo>
+                    <a:pt x="4875509" y="3041899"/>
+                  </a:lnTo>
+                  <a:lnTo>
+                    <a:pt x="4801749" y="3027245"/>
+                  </a:lnTo>
+                  <a:lnTo>
+                    <a:pt x="4727989" y="3012106"/>
+                  </a:lnTo>
+                  <a:lnTo>
+                    <a:pt x="4654229" y="2996464"/>
+                  </a:lnTo>
+                  <a:lnTo>
+                    <a:pt x="4580469" y="2980304"/>
+                  </a:lnTo>
+                  <a:lnTo>
+                    <a:pt x="4506709" y="2963608"/>
+                  </a:lnTo>
+                  <a:lnTo>
+                    <a:pt x="4432949" y="2946358"/>
+                  </a:lnTo>
+                  <a:lnTo>
+                    <a:pt x="4359189" y="2928536"/>
+                  </a:lnTo>
+                  <a:lnTo>
+                    <a:pt x="4285429" y="2910123"/>
+                  </a:lnTo>
+                  <a:lnTo>
+                    <a:pt x="4211669" y="2891099"/>
+                  </a:lnTo>
+                  <a:lnTo>
+                    <a:pt x="4137909" y="2871445"/>
+                  </a:lnTo>
+                  <a:lnTo>
+                    <a:pt x="4064149" y="2851138"/>
+                  </a:lnTo>
+                  <a:lnTo>
+                    <a:pt x="3990388" y="2830159"/>
+                  </a:lnTo>
+                  <a:lnTo>
+                    <a:pt x="3916628" y="2808483"/>
+                  </a:lnTo>
+                  <a:lnTo>
+                    <a:pt x="3842868" y="2786089"/>
+                  </a:lnTo>
+                  <a:lnTo>
+                    <a:pt x="3769108" y="2762952"/>
+                  </a:lnTo>
+                  <a:lnTo>
+                    <a:pt x="3695348" y="2739047"/>
+                  </a:lnTo>
+                  <a:lnTo>
+                    <a:pt x="3621588" y="2714350"/>
+                  </a:lnTo>
+                  <a:lnTo>
+                    <a:pt x="3547828" y="2688834"/>
+                  </a:lnTo>
+                  <a:lnTo>
+                    <a:pt x="3474068" y="2662471"/>
+                  </a:lnTo>
+                  <a:lnTo>
+                    <a:pt x="3400308" y="2647071"/>
+                  </a:lnTo>
+                  <a:lnTo>
+                    <a:pt x="3326548" y="2636598"/>
+                  </a:lnTo>
+                  <a:lnTo>
+                    <a:pt x="3252788" y="2625993"/>
+                  </a:lnTo>
+                  <a:lnTo>
+                    <a:pt x="3179028" y="2615256"/>
+                  </a:lnTo>
+                  <a:lnTo>
+                    <a:pt x="3105268" y="2604385"/>
+                  </a:lnTo>
+                  <a:lnTo>
+                    <a:pt x="3031508" y="2593377"/>
+                  </a:lnTo>
+                  <a:lnTo>
+                    <a:pt x="2957748" y="2582232"/>
+                  </a:lnTo>
+                  <a:lnTo>
+                    <a:pt x="2883988" y="2570947"/>
+                  </a:lnTo>
+                  <a:lnTo>
+                    <a:pt x="2810228" y="2559521"/>
+                  </a:lnTo>
+                  <a:lnTo>
+                    <a:pt x="2736468" y="2547952"/>
+                  </a:lnTo>
+                  <a:lnTo>
+                    <a:pt x="2662708" y="2536238"/>
+                  </a:lnTo>
+                  <a:lnTo>
+                    <a:pt x="2588948" y="2524377"/>
+                  </a:lnTo>
+                  <a:lnTo>
+                    <a:pt x="2515188" y="2512368"/>
+                  </a:lnTo>
+                  <a:lnTo>
+                    <a:pt x="2441428" y="2500209"/>
+                  </a:lnTo>
+                  <a:lnTo>
+                    <a:pt x="2367668" y="2487898"/>
+                  </a:lnTo>
+                  <a:lnTo>
+                    <a:pt x="2293908" y="2475432"/>
+                  </a:lnTo>
+                  <a:lnTo>
+                    <a:pt x="2220148" y="2462810"/>
+                  </a:lnTo>
+                  <a:lnTo>
+                    <a:pt x="2146388" y="2450030"/>
+                  </a:lnTo>
+                  <a:lnTo>
+                    <a:pt x="2072628" y="2437091"/>
+                  </a:lnTo>
+                  <a:lnTo>
+                    <a:pt x="1998868" y="2423989"/>
+                  </a:lnTo>
+                  <a:lnTo>
+                    <a:pt x="1925108" y="2410723"/>
+                  </a:lnTo>
+                  <a:lnTo>
+                    <a:pt x="1851348" y="2397292"/>
+                  </a:lnTo>
+                  <a:lnTo>
+                    <a:pt x="1777588" y="2383692"/>
+                  </a:lnTo>
+                  <a:lnTo>
+                    <a:pt x="1703828" y="2369922"/>
+                  </a:lnTo>
+                  <a:lnTo>
+                    <a:pt x="1630068" y="2355979"/>
+                  </a:lnTo>
+                  <a:lnTo>
+                    <a:pt x="1556308" y="2341862"/>
+                  </a:lnTo>
+                  <a:lnTo>
+                    <a:pt x="1482548" y="2327569"/>
+                  </a:lnTo>
+                  <a:lnTo>
+                    <a:pt x="1408788" y="2313096"/>
+                  </a:lnTo>
+                  <a:lnTo>
+                    <a:pt x="1335028" y="2298442"/>
+                  </a:lnTo>
+                  <a:lnTo>
+                    <a:pt x="1261268" y="2283605"/>
+                  </a:lnTo>
+                  <a:lnTo>
+                    <a:pt x="1187508" y="2268582"/>
+                  </a:lnTo>
+                  <a:lnTo>
+                    <a:pt x="1113747" y="2253371"/>
+                  </a:lnTo>
+                  <a:lnTo>
+                    <a:pt x="1039987" y="2237970"/>
+                  </a:lnTo>
+                  <a:lnTo>
+                    <a:pt x="966227" y="2222376"/>
+                  </a:lnTo>
+                  <a:lnTo>
+                    <a:pt x="892467" y="2206586"/>
+                  </a:lnTo>
+                  <a:lnTo>
+                    <a:pt x="818707" y="2190599"/>
+                  </a:lnTo>
+                  <a:lnTo>
+                    <a:pt x="744947" y="2174412"/>
+                  </a:lnTo>
+                  <a:lnTo>
+                    <a:pt x="671187" y="2158022"/>
+                  </a:lnTo>
+                  <a:lnTo>
+                    <a:pt x="597427" y="2141427"/>
+                  </a:lnTo>
+                  <a:lnTo>
+                    <a:pt x="523667" y="2124625"/>
+                  </a:lnTo>
+                  <a:lnTo>
+                    <a:pt x="449907" y="2107612"/>
+                  </a:lnTo>
+                  <a:lnTo>
+                    <a:pt x="376147" y="2090386"/>
+                  </a:lnTo>
+                  <a:lnTo>
+                    <a:pt x="302387" y="2072944"/>
+                  </a:lnTo>
+                  <a:lnTo>
+                    <a:pt x="228627" y="2055284"/>
+                  </a:lnTo>
+                  <a:lnTo>
+                    <a:pt x="154867" y="2037403"/>
+                  </a:lnTo>
+                  <a:lnTo>
+                    <a:pt x="81107" y="2019299"/>
+                  </a:lnTo>
+                  <a:lnTo>
+                    <a:pt x="7347" y="2000967"/>
+                  </a:lnTo>
+                  <a:lnTo>
+                    <a:pt x="0" y="1999118"/>
                   </a:lnTo>
                   <a:close/>
                 </a:path>
@@ -3624,303 +3624,303 @@
           </p:nvSpPr>
           <p:spPr>
             <a:xfrm>
-              <a:off x="1024995" y="1896563"/>
-              <a:ext cx="7028352" cy="3193252"/>
+              <a:off x="1024995" y="2073503"/>
+              <a:ext cx="7028352" cy="3045597"/>
             </a:xfrm>
             <a:custGeom>
               <a:avLst/>
               <a:pathLst>
-                <a:path w="7028352" h="3193252">
+                <a:path w="7028352" h="3045597">
                   <a:moveTo>
                     <a:pt x="0" y="0"/>
                   </a:moveTo>
                   <a:lnTo>
-                    <a:pt x="21149" y="34407"/>
-                  </a:lnTo>
-                  <a:lnTo>
-                    <a:pt x="94909" y="150550"/>
-                  </a:lnTo>
-                  <a:lnTo>
-                    <a:pt x="168669" y="262965"/>
-                  </a:lnTo>
-                  <a:lnTo>
-                    <a:pt x="242429" y="371772"/>
-                  </a:lnTo>
-                  <a:lnTo>
-                    <a:pt x="316190" y="477086"/>
-                  </a:lnTo>
-                  <a:lnTo>
-                    <a:pt x="389950" y="579020"/>
-                  </a:lnTo>
-                  <a:lnTo>
-                    <a:pt x="463710" y="677682"/>
-                  </a:lnTo>
-                  <a:lnTo>
-                    <a:pt x="537470" y="773176"/>
-                  </a:lnTo>
-                  <a:lnTo>
-                    <a:pt x="611230" y="865606"/>
-                  </a:lnTo>
-                  <a:lnTo>
-                    <a:pt x="684990" y="955068"/>
-                  </a:lnTo>
-                  <a:lnTo>
-                    <a:pt x="758750" y="1041659"/>
-                  </a:lnTo>
-                  <a:lnTo>
-                    <a:pt x="832510" y="1125470"/>
-                  </a:lnTo>
-                  <a:lnTo>
-                    <a:pt x="906270" y="1206591"/>
-                  </a:lnTo>
-                  <a:lnTo>
-                    <a:pt x="980030" y="1285108"/>
-                  </a:lnTo>
-                  <a:lnTo>
-                    <a:pt x="1053790" y="1361104"/>
-                  </a:lnTo>
-                  <a:lnTo>
-                    <a:pt x="1127550" y="1434661"/>
-                  </a:lnTo>
-                  <a:lnTo>
-                    <a:pt x="1201310" y="1505857"/>
-                  </a:lnTo>
-                  <a:lnTo>
-                    <a:pt x="1275070" y="1574768"/>
-                  </a:lnTo>
-                  <a:lnTo>
-                    <a:pt x="1348830" y="1641467"/>
-                  </a:lnTo>
-                  <a:lnTo>
-                    <a:pt x="1422590" y="1706024"/>
-                  </a:lnTo>
-                  <a:lnTo>
-                    <a:pt x="1496350" y="1768510"/>
-                  </a:lnTo>
-                  <a:lnTo>
-                    <a:pt x="1570110" y="1828989"/>
-                  </a:lnTo>
-                  <a:lnTo>
-                    <a:pt x="1643870" y="1887528"/>
-                  </a:lnTo>
-                  <a:lnTo>
-                    <a:pt x="1717630" y="1944187"/>
-                  </a:lnTo>
-                  <a:lnTo>
-                    <a:pt x="1791390" y="1999027"/>
-                  </a:lnTo>
-                  <a:lnTo>
-                    <a:pt x="1865150" y="2052107"/>
-                  </a:lnTo>
-                  <a:lnTo>
-                    <a:pt x="1938910" y="2103484"/>
-                  </a:lnTo>
-                  <a:lnTo>
-                    <a:pt x="2012670" y="2153211"/>
-                  </a:lnTo>
-                  <a:lnTo>
-                    <a:pt x="2086430" y="2201342"/>
-                  </a:lnTo>
-                  <a:lnTo>
-                    <a:pt x="2160190" y="2247928"/>
-                  </a:lnTo>
-                  <a:lnTo>
-                    <a:pt x="2233950" y="2293018"/>
-                  </a:lnTo>
-                  <a:lnTo>
-                    <a:pt x="2307710" y="2336662"/>
-                  </a:lnTo>
-                  <a:lnTo>
-                    <a:pt x="2381470" y="2378904"/>
-                  </a:lnTo>
-                  <a:lnTo>
-                    <a:pt x="2455230" y="2419790"/>
-                  </a:lnTo>
-                  <a:lnTo>
-                    <a:pt x="2528990" y="2459364"/>
-                  </a:lnTo>
-                  <a:lnTo>
-                    <a:pt x="2602750" y="2497668"/>
-                  </a:lnTo>
-                  <a:lnTo>
-                    <a:pt x="2676510" y="2534742"/>
-                  </a:lnTo>
-                  <a:lnTo>
-                    <a:pt x="2750270" y="2570626"/>
-                  </a:lnTo>
-                  <a:lnTo>
-                    <a:pt x="2824030" y="2605358"/>
-                  </a:lnTo>
-                  <a:lnTo>
-                    <a:pt x="2897790" y="2638975"/>
-                  </a:lnTo>
-                  <a:lnTo>
-                    <a:pt x="2971550" y="2671513"/>
-                  </a:lnTo>
-                  <a:lnTo>
-                    <a:pt x="3045310" y="2703007"/>
-                  </a:lnTo>
-                  <a:lnTo>
-                    <a:pt x="3119070" y="2733490"/>
-                  </a:lnTo>
-                  <a:lnTo>
-                    <a:pt x="3192831" y="2762994"/>
-                  </a:lnTo>
-                  <a:lnTo>
-                    <a:pt x="3266591" y="2786250"/>
-                  </a:lnTo>
-                  <a:lnTo>
-                    <a:pt x="3340351" y="2796961"/>
-                  </a:lnTo>
-                  <a:lnTo>
-                    <a:pt x="3414111" y="2807540"/>
-                  </a:lnTo>
-                  <a:lnTo>
-                    <a:pt x="3487871" y="2817987"/>
-                  </a:lnTo>
-                  <a:lnTo>
-                    <a:pt x="3561631" y="2828306"/>
-                  </a:lnTo>
-                  <a:lnTo>
-                    <a:pt x="3635391" y="2838497"/>
-                  </a:lnTo>
-                  <a:lnTo>
-                    <a:pt x="3709151" y="2848563"/>
-                  </a:lnTo>
-                  <a:lnTo>
-                    <a:pt x="3782911" y="2858503"/>
-                  </a:lnTo>
-                  <a:lnTo>
-                    <a:pt x="3856671" y="2868321"/>
-                  </a:lnTo>
-                  <a:lnTo>
-                    <a:pt x="3930431" y="2878018"/>
-                  </a:lnTo>
-                  <a:lnTo>
-                    <a:pt x="4004191" y="2887594"/>
-                  </a:lnTo>
-                  <a:lnTo>
-                    <a:pt x="4077951" y="2897053"/>
-                  </a:lnTo>
-                  <a:lnTo>
-                    <a:pt x="4151711" y="2906394"/>
-                  </a:lnTo>
-                  <a:lnTo>
-                    <a:pt x="4225471" y="2915620"/>
-                  </a:lnTo>
-                  <a:lnTo>
-                    <a:pt x="4299231" y="2924731"/>
-                  </a:lnTo>
-                  <a:lnTo>
-                    <a:pt x="4372991" y="2933730"/>
-                  </a:lnTo>
-                  <a:lnTo>
-                    <a:pt x="4446751" y="2942618"/>
-                  </a:lnTo>
-                  <a:lnTo>
-                    <a:pt x="4520511" y="2951396"/>
-                  </a:lnTo>
-                  <a:lnTo>
-                    <a:pt x="4594271" y="2960066"/>
-                  </a:lnTo>
-                  <a:lnTo>
-                    <a:pt x="4668031" y="2968628"/>
-                  </a:lnTo>
-                  <a:lnTo>
-                    <a:pt x="4741791" y="2977084"/>
-                  </a:lnTo>
-                  <a:lnTo>
-                    <a:pt x="4815551" y="2985436"/>
-                  </a:lnTo>
-                  <a:lnTo>
-                    <a:pt x="4889311" y="2993685"/>
-                  </a:lnTo>
-                  <a:lnTo>
-                    <a:pt x="4963071" y="3001831"/>
-                  </a:lnTo>
-                  <a:lnTo>
-                    <a:pt x="5036831" y="3009877"/>
-                  </a:lnTo>
-                  <a:lnTo>
-                    <a:pt x="5110591" y="3017824"/>
-                  </a:lnTo>
-                  <a:lnTo>
-                    <a:pt x="5184351" y="3025672"/>
-                  </a:lnTo>
-                  <a:lnTo>
-                    <a:pt x="5258111" y="3033423"/>
-                  </a:lnTo>
-                  <a:lnTo>
-                    <a:pt x="5331871" y="3041078"/>
-                  </a:lnTo>
-                  <a:lnTo>
-                    <a:pt x="5405631" y="3048639"/>
-                  </a:lnTo>
-                  <a:lnTo>
-                    <a:pt x="5479391" y="3056106"/>
-                  </a:lnTo>
-                  <a:lnTo>
-                    <a:pt x="5553151" y="3063481"/>
-                  </a:lnTo>
-                  <a:lnTo>
-                    <a:pt x="5626911" y="3070765"/>
-                  </a:lnTo>
-                  <a:lnTo>
-                    <a:pt x="5700671" y="3077959"/>
-                  </a:lnTo>
-                  <a:lnTo>
-                    <a:pt x="5774431" y="3085064"/>
-                  </a:lnTo>
-                  <a:lnTo>
-                    <a:pt x="5848191" y="3092080"/>
-                  </a:lnTo>
-                  <a:lnTo>
-                    <a:pt x="5921951" y="3099011"/>
-                  </a:lnTo>
-                  <a:lnTo>
-                    <a:pt x="5995711" y="3105855"/>
-                  </a:lnTo>
-                  <a:lnTo>
-                    <a:pt x="6069471" y="3112615"/>
-                  </a:lnTo>
-                  <a:lnTo>
-                    <a:pt x="6143232" y="3119291"/>
-                  </a:lnTo>
-                  <a:lnTo>
-                    <a:pt x="6216992" y="3125885"/>
-                  </a:lnTo>
-                  <a:lnTo>
-                    <a:pt x="6290752" y="3132397"/>
-                  </a:lnTo>
-                  <a:lnTo>
-                    <a:pt x="6364512" y="3138829"/>
-                  </a:lnTo>
-                  <a:lnTo>
-                    <a:pt x="6438272" y="3145181"/>
-                  </a:lnTo>
-                  <a:lnTo>
-                    <a:pt x="6512032" y="3151455"/>
-                  </a:lnTo>
-                  <a:lnTo>
-                    <a:pt x="6585792" y="3157651"/>
-                  </a:lnTo>
-                  <a:lnTo>
-                    <a:pt x="6659552" y="3163771"/>
-                  </a:lnTo>
-                  <a:lnTo>
-                    <a:pt x="6733312" y="3169814"/>
-                  </a:lnTo>
-                  <a:lnTo>
-                    <a:pt x="6807072" y="3175784"/>
-                  </a:lnTo>
-                  <a:lnTo>
-                    <a:pt x="6880832" y="3181679"/>
-                  </a:lnTo>
-                  <a:lnTo>
-                    <a:pt x="6954592" y="3187501"/>
-                  </a:lnTo>
-                  <a:lnTo>
-                    <a:pt x="7028352" y="3193252"/>
+                    <a:pt x="21149" y="32816"/>
+                  </a:lnTo>
+                  <a:lnTo>
+                    <a:pt x="94909" y="143589"/>
+                  </a:lnTo>
+                  <a:lnTo>
+                    <a:pt x="168669" y="250806"/>
+                  </a:lnTo>
+                  <a:lnTo>
+                    <a:pt x="242429" y="354582"/>
+                  </a:lnTo>
+                  <a:lnTo>
+                    <a:pt x="316190" y="455026"/>
+                  </a:lnTo>
+                  <a:lnTo>
+                    <a:pt x="389950" y="552246"/>
+                  </a:lnTo>
+                  <a:lnTo>
+                    <a:pt x="463710" y="646346"/>
+                  </a:lnTo>
+                  <a:lnTo>
+                    <a:pt x="537470" y="737425"/>
+                  </a:lnTo>
+                  <a:lnTo>
+                    <a:pt x="611230" y="825580"/>
+                  </a:lnTo>
+                  <a:lnTo>
+                    <a:pt x="684990" y="910906"/>
+                  </a:lnTo>
+                  <a:lnTo>
+                    <a:pt x="758750" y="993493"/>
+                  </a:lnTo>
+                  <a:lnTo>
+                    <a:pt x="832510" y="1073428"/>
+                  </a:lnTo>
+                  <a:lnTo>
+                    <a:pt x="906270" y="1150798"/>
+                  </a:lnTo>
+                  <a:lnTo>
+                    <a:pt x="980030" y="1225685"/>
+                  </a:lnTo>
+                  <a:lnTo>
+                    <a:pt x="1053790" y="1298167"/>
+                  </a:lnTo>
+                  <a:lnTo>
+                    <a:pt x="1127550" y="1368323"/>
+                  </a:lnTo>
+                  <a:lnTo>
+                    <a:pt x="1201310" y="1436227"/>
+                  </a:lnTo>
+                  <a:lnTo>
+                    <a:pt x="1275070" y="1501951"/>
+                  </a:lnTo>
+                  <a:lnTo>
+                    <a:pt x="1348830" y="1565566"/>
+                  </a:lnTo>
+                  <a:lnTo>
+                    <a:pt x="1422590" y="1627138"/>
+                  </a:lnTo>
+                  <a:lnTo>
+                    <a:pt x="1496350" y="1686734"/>
+                  </a:lnTo>
+                  <a:lnTo>
+                    <a:pt x="1570110" y="1744417"/>
+                  </a:lnTo>
+                  <a:lnTo>
+                    <a:pt x="1643870" y="1800249"/>
+                  </a:lnTo>
+                  <a:lnTo>
+                    <a:pt x="1717630" y="1854288"/>
+                  </a:lnTo>
+                  <a:lnTo>
+                    <a:pt x="1791390" y="1906593"/>
+                  </a:lnTo>
+                  <a:lnTo>
+                    <a:pt x="1865150" y="1957219"/>
+                  </a:lnTo>
+                  <a:lnTo>
+                    <a:pt x="1938910" y="2006219"/>
+                  </a:lnTo>
+                  <a:lnTo>
+                    <a:pt x="2012670" y="2053647"/>
+                  </a:lnTo>
+                  <a:lnTo>
+                    <a:pt x="2086430" y="2099553"/>
+                  </a:lnTo>
+                  <a:lnTo>
+                    <a:pt x="2160190" y="2143984"/>
+                  </a:lnTo>
+                  <a:lnTo>
+                    <a:pt x="2233950" y="2186990"/>
+                  </a:lnTo>
+                  <a:lnTo>
+                    <a:pt x="2307710" y="2228615"/>
+                  </a:lnTo>
+                  <a:lnTo>
+                    <a:pt x="2381470" y="2268904"/>
+                  </a:lnTo>
+                  <a:lnTo>
+                    <a:pt x="2455230" y="2307900"/>
+                  </a:lnTo>
+                  <a:lnTo>
+                    <a:pt x="2528990" y="2345644"/>
+                  </a:lnTo>
+                  <a:lnTo>
+                    <a:pt x="2602750" y="2382176"/>
+                  </a:lnTo>
+                  <a:lnTo>
+                    <a:pt x="2676510" y="2417536"/>
+                  </a:lnTo>
+                  <a:lnTo>
+                    <a:pt x="2750270" y="2451761"/>
+                  </a:lnTo>
+                  <a:lnTo>
+                    <a:pt x="2824030" y="2484887"/>
+                  </a:lnTo>
+                  <a:lnTo>
+                    <a:pt x="2897790" y="2516950"/>
+                  </a:lnTo>
+                  <a:lnTo>
+                    <a:pt x="2971550" y="2547984"/>
+                  </a:lnTo>
+                  <a:lnTo>
+                    <a:pt x="3045310" y="2578021"/>
+                  </a:lnTo>
+                  <a:lnTo>
+                    <a:pt x="3119070" y="2607094"/>
+                  </a:lnTo>
+                  <a:lnTo>
+                    <a:pt x="3192831" y="2635234"/>
+                  </a:lnTo>
+                  <a:lnTo>
+                    <a:pt x="3266591" y="2657415"/>
+                  </a:lnTo>
+                  <a:lnTo>
+                    <a:pt x="3340351" y="2667630"/>
+                  </a:lnTo>
+                  <a:lnTo>
+                    <a:pt x="3414111" y="2677720"/>
+                  </a:lnTo>
+                  <a:lnTo>
+                    <a:pt x="3487871" y="2687685"/>
+                  </a:lnTo>
+                  <a:lnTo>
+                    <a:pt x="3561631" y="2697526"/>
+                  </a:lnTo>
+                  <a:lnTo>
+                    <a:pt x="3635391" y="2707246"/>
+                  </a:lnTo>
+                  <a:lnTo>
+                    <a:pt x="3709151" y="2716846"/>
+                  </a:lnTo>
+                  <a:lnTo>
+                    <a:pt x="3782911" y="2726327"/>
+                  </a:lnTo>
+                  <a:lnTo>
+                    <a:pt x="3856671" y="2735691"/>
+                  </a:lnTo>
+                  <a:lnTo>
+                    <a:pt x="3930431" y="2744939"/>
+                  </a:lnTo>
+                  <a:lnTo>
+                    <a:pt x="4004191" y="2754073"/>
+                  </a:lnTo>
+                  <a:lnTo>
+                    <a:pt x="4077951" y="2763094"/>
+                  </a:lnTo>
+                  <a:lnTo>
+                    <a:pt x="4151711" y="2772003"/>
+                  </a:lnTo>
+                  <a:lnTo>
+                    <a:pt x="4225471" y="2780802"/>
+                  </a:lnTo>
+                  <a:lnTo>
+                    <a:pt x="4299231" y="2789493"/>
+                  </a:lnTo>
+                  <a:lnTo>
+                    <a:pt x="4372991" y="2798076"/>
+                  </a:lnTo>
+                  <a:lnTo>
+                    <a:pt x="4446751" y="2806553"/>
+                  </a:lnTo>
+                  <a:lnTo>
+                    <a:pt x="4520511" y="2814925"/>
+                  </a:lnTo>
+                  <a:lnTo>
+                    <a:pt x="4594271" y="2823193"/>
+                  </a:lnTo>
+                  <a:lnTo>
+                    <a:pt x="4668031" y="2831360"/>
+                  </a:lnTo>
+                  <a:lnTo>
+                    <a:pt x="4741791" y="2839425"/>
+                  </a:lnTo>
+                  <a:lnTo>
+                    <a:pt x="4815551" y="2847391"/>
+                  </a:lnTo>
+                  <a:lnTo>
+                    <a:pt x="4889311" y="2855258"/>
+                  </a:lnTo>
+                  <a:lnTo>
+                    <a:pt x="4963071" y="2863028"/>
+                  </a:lnTo>
+                  <a:lnTo>
+                    <a:pt x="5036831" y="2870702"/>
+                  </a:lnTo>
+                  <a:lnTo>
+                    <a:pt x="5110591" y="2878281"/>
+                  </a:lnTo>
+                  <a:lnTo>
+                    <a:pt x="5184351" y="2885766"/>
+                  </a:lnTo>
+                  <a:lnTo>
+                    <a:pt x="5258111" y="2893159"/>
+                  </a:lnTo>
+                  <a:lnTo>
+                    <a:pt x="5331871" y="2900460"/>
+                  </a:lnTo>
+                  <a:lnTo>
+                    <a:pt x="5405631" y="2907671"/>
+                  </a:lnTo>
+                  <a:lnTo>
+                    <a:pt x="5479391" y="2914793"/>
+                  </a:lnTo>
+                  <a:lnTo>
+                    <a:pt x="5553151" y="2921827"/>
+                  </a:lnTo>
+                  <a:lnTo>
+                    <a:pt x="5626911" y="2928774"/>
+                  </a:lnTo>
+                  <a:lnTo>
+                    <a:pt x="5700671" y="2935635"/>
+                  </a:lnTo>
+                  <a:lnTo>
+                    <a:pt x="5774431" y="2942411"/>
+                  </a:lnTo>
+                  <a:lnTo>
+                    <a:pt x="5848191" y="2949104"/>
+                  </a:lnTo>
+                  <a:lnTo>
+                    <a:pt x="5921951" y="2955713"/>
+                  </a:lnTo>
+                  <a:lnTo>
+                    <a:pt x="5995711" y="2962241"/>
+                  </a:lnTo>
+                  <a:lnTo>
+                    <a:pt x="6069471" y="2968689"/>
+                  </a:lnTo>
+                  <a:lnTo>
+                    <a:pt x="6143232" y="2975056"/>
+                  </a:lnTo>
+                  <a:lnTo>
+                    <a:pt x="6216992" y="2981345"/>
+                  </a:lnTo>
+                  <a:lnTo>
+                    <a:pt x="6290752" y="2987556"/>
+                  </a:lnTo>
+                  <a:lnTo>
+                    <a:pt x="6364512" y="2993691"/>
+                  </a:lnTo>
+                  <a:lnTo>
+                    <a:pt x="6438272" y="2999749"/>
+                  </a:lnTo>
+                  <a:lnTo>
+                    <a:pt x="6512032" y="3005733"/>
+                  </a:lnTo>
+                  <a:lnTo>
+                    <a:pt x="6585792" y="3011642"/>
+                  </a:lnTo>
+                  <a:lnTo>
+                    <a:pt x="6659552" y="3017479"/>
+                  </a:lnTo>
+                  <a:lnTo>
+                    <a:pt x="6733312" y="3023243"/>
+                  </a:lnTo>
+                  <a:lnTo>
+                    <a:pt x="6807072" y="3028937"/>
+                  </a:lnTo>
+                  <a:lnTo>
+                    <a:pt x="6880832" y="3034559"/>
+                  </a:lnTo>
+                  <a:lnTo>
+                    <a:pt x="6954592" y="3040113"/>
+                  </a:lnTo>
+                  <a:lnTo>
+                    <a:pt x="7028352" y="3045597"/>
                   </a:lnTo>
                 </a:path>
               </a:pathLst>
@@ -3940,309 +3940,309 @@
           </p:nvSpPr>
           <p:spPr>
             <a:xfrm>
-              <a:off x="817517" y="3992602"/>
-              <a:ext cx="7235830" cy="1393518"/>
+              <a:off x="817517" y="4072621"/>
+              <a:ext cx="7235830" cy="1329083"/>
             </a:xfrm>
             <a:custGeom>
               <a:avLst/>
               <a:pathLst>
-                <a:path w="7235830" h="1393518">
+                <a:path w="7235830" h="1329083">
                   <a:moveTo>
-                    <a:pt x="7235830" y="1393518"/>
+                    <a:pt x="7235830" y="1329083"/>
                   </a:moveTo>
                   <a:lnTo>
-                    <a:pt x="7162070" y="1388110"/>
-                  </a:lnTo>
-                  <a:lnTo>
-                    <a:pt x="7088310" y="1382522"/>
-                  </a:lnTo>
-                  <a:lnTo>
-                    <a:pt x="7014550" y="1376749"/>
-                  </a:lnTo>
-                  <a:lnTo>
-                    <a:pt x="6940789" y="1370784"/>
-                  </a:lnTo>
-                  <a:lnTo>
-                    <a:pt x="6867029" y="1364621"/>
-                  </a:lnTo>
-                  <a:lnTo>
-                    <a:pt x="6793269" y="1358254"/>
-                  </a:lnTo>
-                  <a:lnTo>
-                    <a:pt x="6719509" y="1351676"/>
-                  </a:lnTo>
-                  <a:lnTo>
-                    <a:pt x="6645749" y="1344880"/>
-                  </a:lnTo>
-                  <a:lnTo>
-                    <a:pt x="6571989" y="1337858"/>
-                  </a:lnTo>
-                  <a:lnTo>
-                    <a:pt x="6498229" y="1330604"/>
-                  </a:lnTo>
-                  <a:lnTo>
-                    <a:pt x="6424469" y="1323109"/>
-                  </a:lnTo>
-                  <a:lnTo>
-                    <a:pt x="6350709" y="1315365"/>
-                  </a:lnTo>
-                  <a:lnTo>
-                    <a:pt x="6276949" y="1307365"/>
-                  </a:lnTo>
-                  <a:lnTo>
-                    <a:pt x="6203189" y="1299099"/>
-                  </a:lnTo>
-                  <a:lnTo>
-                    <a:pt x="6129429" y="1290559"/>
-                  </a:lnTo>
-                  <a:lnTo>
-                    <a:pt x="6055669" y="1281736"/>
-                  </a:lnTo>
-                  <a:lnTo>
-                    <a:pt x="5981909" y="1272620"/>
-                  </a:lnTo>
-                  <a:lnTo>
-                    <a:pt x="5908149" y="1263202"/>
-                  </a:lnTo>
-                  <a:lnTo>
-                    <a:pt x="5834389" y="1253472"/>
-                  </a:lnTo>
-                  <a:lnTo>
-                    <a:pt x="5760629" y="1243419"/>
-                  </a:lnTo>
-                  <a:lnTo>
-                    <a:pt x="5686869" y="1233032"/>
-                  </a:lnTo>
-                  <a:lnTo>
-                    <a:pt x="5613109" y="1222301"/>
-                  </a:lnTo>
-                  <a:lnTo>
-                    <a:pt x="5539349" y="1211214"/>
-                  </a:lnTo>
-                  <a:lnTo>
-                    <a:pt x="5465589" y="1199760"/>
-                  </a:lnTo>
-                  <a:lnTo>
-                    <a:pt x="5391829" y="1187925"/>
-                  </a:lnTo>
-                  <a:lnTo>
-                    <a:pt x="5318069" y="1175699"/>
-                  </a:lnTo>
-                  <a:lnTo>
-                    <a:pt x="5244309" y="1163066"/>
-                  </a:lnTo>
-                  <a:lnTo>
-                    <a:pt x="5170549" y="1150015"/>
-                  </a:lnTo>
-                  <a:lnTo>
-                    <a:pt x="5096789" y="1136531"/>
-                  </a:lnTo>
-                  <a:lnTo>
-                    <a:pt x="5023029" y="1122599"/>
-                  </a:lnTo>
-                  <a:lnTo>
-                    <a:pt x="4949269" y="1108206"/>
-                  </a:lnTo>
-                  <a:lnTo>
-                    <a:pt x="4875509" y="1093335"/>
-                  </a:lnTo>
-                  <a:lnTo>
-                    <a:pt x="4801749" y="1077972"/>
-                  </a:lnTo>
-                  <a:lnTo>
-                    <a:pt x="4727989" y="1062098"/>
-                  </a:lnTo>
-                  <a:lnTo>
-                    <a:pt x="4654229" y="1045698"/>
-                  </a:lnTo>
-                  <a:lnTo>
-                    <a:pt x="4580469" y="1028755"/>
-                  </a:lnTo>
-                  <a:lnTo>
-                    <a:pt x="4506709" y="1011249"/>
-                  </a:lnTo>
-                  <a:lnTo>
-                    <a:pt x="4432949" y="993163"/>
-                  </a:lnTo>
-                  <a:lnTo>
-                    <a:pt x="4359189" y="974477"/>
-                  </a:lnTo>
-                  <a:lnTo>
-                    <a:pt x="4285429" y="955171"/>
-                  </a:lnTo>
-                  <a:lnTo>
-                    <a:pt x="4211669" y="935225"/>
-                  </a:lnTo>
-                  <a:lnTo>
-                    <a:pt x="4137909" y="914618"/>
-                  </a:lnTo>
-                  <a:lnTo>
-                    <a:pt x="4064149" y="893327"/>
-                  </a:lnTo>
-                  <a:lnTo>
-                    <a:pt x="3990388" y="871330"/>
-                  </a:lnTo>
-                  <a:lnTo>
-                    <a:pt x="3916628" y="848604"/>
-                  </a:lnTo>
-                  <a:lnTo>
-                    <a:pt x="3842868" y="825123"/>
-                  </a:lnTo>
-                  <a:lnTo>
-                    <a:pt x="3769108" y="800865"/>
-                  </a:lnTo>
-                  <a:lnTo>
-                    <a:pt x="3695348" y="775801"/>
-                  </a:lnTo>
-                  <a:lnTo>
-                    <a:pt x="3621588" y="749907"/>
-                  </a:lnTo>
-                  <a:lnTo>
-                    <a:pt x="3547828" y="723153"/>
-                  </a:lnTo>
-                  <a:lnTo>
-                    <a:pt x="3474068" y="695513"/>
-                  </a:lnTo>
-                  <a:lnTo>
-                    <a:pt x="3400308" y="679366"/>
-                  </a:lnTo>
-                  <a:lnTo>
-                    <a:pt x="3326548" y="668385"/>
-                  </a:lnTo>
-                  <a:lnTo>
-                    <a:pt x="3252788" y="657267"/>
-                  </a:lnTo>
-                  <a:lnTo>
-                    <a:pt x="3179028" y="646009"/>
-                  </a:lnTo>
-                  <a:lnTo>
-                    <a:pt x="3105268" y="634610"/>
-                  </a:lnTo>
-                  <a:lnTo>
-                    <a:pt x="3031508" y="623069"/>
-                  </a:lnTo>
-                  <a:lnTo>
-                    <a:pt x="2957748" y="611384"/>
-                  </a:lnTo>
-                  <a:lnTo>
-                    <a:pt x="2883988" y="599552"/>
-                  </a:lnTo>
-                  <a:lnTo>
-                    <a:pt x="2810228" y="587572"/>
-                  </a:lnTo>
-                  <a:lnTo>
-                    <a:pt x="2736468" y="575442"/>
-                  </a:lnTo>
-                  <a:lnTo>
-                    <a:pt x="2662708" y="563160"/>
-                  </a:lnTo>
-                  <a:lnTo>
-                    <a:pt x="2588948" y="550724"/>
-                  </a:lnTo>
-                  <a:lnTo>
-                    <a:pt x="2515188" y="538133"/>
-                  </a:lnTo>
-                  <a:lnTo>
-                    <a:pt x="2441428" y="525384"/>
-                  </a:lnTo>
-                  <a:lnTo>
-                    <a:pt x="2367668" y="512476"/>
-                  </a:lnTo>
-                  <a:lnTo>
-                    <a:pt x="2293908" y="499406"/>
-                  </a:lnTo>
-                  <a:lnTo>
-                    <a:pt x="2220148" y="486172"/>
-                  </a:lnTo>
-                  <a:lnTo>
-                    <a:pt x="2146388" y="472773"/>
-                  </a:lnTo>
-                  <a:lnTo>
-                    <a:pt x="2072628" y="459206"/>
-                  </a:lnTo>
-                  <a:lnTo>
-                    <a:pt x="1998868" y="445469"/>
-                  </a:lnTo>
-                  <a:lnTo>
-                    <a:pt x="1925108" y="431560"/>
-                  </a:lnTo>
-                  <a:lnTo>
-                    <a:pt x="1851348" y="417477"/>
-                  </a:lnTo>
-                  <a:lnTo>
-                    <a:pt x="1777588" y="403218"/>
-                  </a:lnTo>
-                  <a:lnTo>
-                    <a:pt x="1703828" y="388780"/>
-                  </a:lnTo>
-                  <a:lnTo>
-                    <a:pt x="1630068" y="374162"/>
-                  </a:lnTo>
-                  <a:lnTo>
-                    <a:pt x="1556308" y="359360"/>
-                  </a:lnTo>
-                  <a:lnTo>
-                    <a:pt x="1482548" y="344374"/>
-                  </a:lnTo>
-                  <a:lnTo>
-                    <a:pt x="1408788" y="329200"/>
-                  </a:lnTo>
-                  <a:lnTo>
-                    <a:pt x="1335028" y="313835"/>
-                  </a:lnTo>
-                  <a:lnTo>
-                    <a:pt x="1261268" y="298279"/>
-                  </a:lnTo>
-                  <a:lnTo>
-                    <a:pt x="1187508" y="282528"/>
-                  </a:lnTo>
-                  <a:lnTo>
-                    <a:pt x="1113747" y="266579"/>
-                  </a:lnTo>
-                  <a:lnTo>
-                    <a:pt x="1039987" y="250431"/>
-                  </a:lnTo>
-                  <a:lnTo>
-                    <a:pt x="966227" y="234081"/>
-                  </a:lnTo>
-                  <a:lnTo>
-                    <a:pt x="892467" y="217526"/>
-                  </a:lnTo>
-                  <a:lnTo>
-                    <a:pt x="818707" y="200764"/>
-                  </a:lnTo>
-                  <a:lnTo>
-                    <a:pt x="744947" y="183792"/>
-                  </a:lnTo>
-                  <a:lnTo>
-                    <a:pt x="671187" y="166608"/>
-                  </a:lnTo>
-                  <a:lnTo>
-                    <a:pt x="597427" y="149208"/>
-                  </a:lnTo>
-                  <a:lnTo>
-                    <a:pt x="523667" y="131591"/>
-                  </a:lnTo>
-                  <a:lnTo>
-                    <a:pt x="449907" y="113753"/>
-                  </a:lnTo>
-                  <a:lnTo>
-                    <a:pt x="376147" y="95692"/>
-                  </a:lnTo>
-                  <a:lnTo>
-                    <a:pt x="302387" y="77405"/>
-                  </a:lnTo>
-                  <a:lnTo>
-                    <a:pt x="228627" y="58889"/>
-                  </a:lnTo>
-                  <a:lnTo>
-                    <a:pt x="154867" y="40141"/>
-                  </a:lnTo>
-                  <a:lnTo>
-                    <a:pt x="81107" y="21158"/>
-                  </a:lnTo>
-                  <a:lnTo>
-                    <a:pt x="7347" y="1938"/>
+                    <a:pt x="7162070" y="1323924"/>
+                  </a:lnTo>
+                  <a:lnTo>
+                    <a:pt x="7088310" y="1318595"/>
+                  </a:lnTo>
+                  <a:lnTo>
+                    <a:pt x="7014550" y="1313088"/>
+                  </a:lnTo>
+                  <a:lnTo>
+                    <a:pt x="6940789" y="1307399"/>
+                  </a:lnTo>
+                  <a:lnTo>
+                    <a:pt x="6867029" y="1301522"/>
+                  </a:lnTo>
+                  <a:lnTo>
+                    <a:pt x="6793269" y="1295449"/>
+                  </a:lnTo>
+                  <a:lnTo>
+                    <a:pt x="6719509" y="1289175"/>
+                  </a:lnTo>
+                  <a:lnTo>
+                    <a:pt x="6645749" y="1282693"/>
+                  </a:lnTo>
+                  <a:lnTo>
+                    <a:pt x="6571989" y="1275996"/>
+                  </a:lnTo>
+                  <a:lnTo>
+                    <a:pt x="6498229" y="1269077"/>
+                  </a:lnTo>
+                  <a:lnTo>
+                    <a:pt x="6424469" y="1261929"/>
+                  </a:lnTo>
+                  <a:lnTo>
+                    <a:pt x="6350709" y="1254543"/>
+                  </a:lnTo>
+                  <a:lnTo>
+                    <a:pt x="6276949" y="1246913"/>
+                  </a:lnTo>
+                  <a:lnTo>
+                    <a:pt x="6203189" y="1239029"/>
+                  </a:lnTo>
+                  <a:lnTo>
+                    <a:pt x="6129429" y="1230884"/>
+                  </a:lnTo>
+                  <a:lnTo>
+                    <a:pt x="6055669" y="1222469"/>
+                  </a:lnTo>
+                  <a:lnTo>
+                    <a:pt x="5981909" y="1213775"/>
+                  </a:lnTo>
+                  <a:lnTo>
+                    <a:pt x="5908149" y="1204792"/>
+                  </a:lnTo>
+                  <a:lnTo>
+                    <a:pt x="5834389" y="1195512"/>
+                  </a:lnTo>
+                  <a:lnTo>
+                    <a:pt x="5760629" y="1185923"/>
+                  </a:lnTo>
+                  <a:lnTo>
+                    <a:pt x="5686869" y="1176017"/>
+                  </a:lnTo>
+                  <a:lnTo>
+                    <a:pt x="5613109" y="1165782"/>
+                  </a:lnTo>
+                  <a:lnTo>
+                    <a:pt x="5539349" y="1155208"/>
+                  </a:lnTo>
+                  <a:lnTo>
+                    <a:pt x="5465589" y="1144283"/>
+                  </a:lnTo>
+                  <a:lnTo>
+                    <a:pt x="5391829" y="1132996"/>
+                  </a:lnTo>
+                  <a:lnTo>
+                    <a:pt x="5318069" y="1121335"/>
+                  </a:lnTo>
+                  <a:lnTo>
+                    <a:pt x="5244309" y="1109286"/>
+                  </a:lnTo>
+                  <a:lnTo>
+                    <a:pt x="5170549" y="1096839"/>
+                  </a:lnTo>
+                  <a:lnTo>
+                    <a:pt x="5096789" y="1083978"/>
+                  </a:lnTo>
+                  <a:lnTo>
+                    <a:pt x="5023029" y="1070691"/>
+                  </a:lnTo>
+                  <a:lnTo>
+                    <a:pt x="4949269" y="1056963"/>
+                  </a:lnTo>
+                  <a:lnTo>
+                    <a:pt x="4875509" y="1042780"/>
+                  </a:lnTo>
+                  <a:lnTo>
+                    <a:pt x="4801749" y="1028126"/>
+                  </a:lnTo>
+                  <a:lnTo>
+                    <a:pt x="4727989" y="1012987"/>
+                  </a:lnTo>
+                  <a:lnTo>
+                    <a:pt x="4654229" y="997346"/>
+                  </a:lnTo>
+                  <a:lnTo>
+                    <a:pt x="4580469" y="981185"/>
+                  </a:lnTo>
+                  <a:lnTo>
+                    <a:pt x="4506709" y="964489"/>
+                  </a:lnTo>
+                  <a:lnTo>
+                    <a:pt x="4432949" y="947239"/>
+                  </a:lnTo>
+                  <a:lnTo>
+                    <a:pt x="4359189" y="929417"/>
+                  </a:lnTo>
+                  <a:lnTo>
+                    <a:pt x="4285429" y="911004"/>
+                  </a:lnTo>
+                  <a:lnTo>
+                    <a:pt x="4211669" y="891981"/>
+                  </a:lnTo>
+                  <a:lnTo>
+                    <a:pt x="4137909" y="872326"/>
+                  </a:lnTo>
+                  <a:lnTo>
+                    <a:pt x="4064149" y="852020"/>
+                  </a:lnTo>
+                  <a:lnTo>
+                    <a:pt x="3990388" y="831040"/>
+                  </a:lnTo>
+                  <a:lnTo>
+                    <a:pt x="3916628" y="809364"/>
+                  </a:lnTo>
+                  <a:lnTo>
+                    <a:pt x="3842868" y="786970"/>
+                  </a:lnTo>
+                  <a:lnTo>
+                    <a:pt x="3769108" y="763833"/>
+                  </a:lnTo>
+                  <a:lnTo>
+                    <a:pt x="3695348" y="739929"/>
+                  </a:lnTo>
+                  <a:lnTo>
+                    <a:pt x="3621588" y="715231"/>
+                  </a:lnTo>
+                  <a:lnTo>
+                    <a:pt x="3547828" y="689715"/>
+                  </a:lnTo>
+                  <a:lnTo>
+                    <a:pt x="3474068" y="663353"/>
+                  </a:lnTo>
+                  <a:lnTo>
+                    <a:pt x="3400308" y="647952"/>
+                  </a:lnTo>
+                  <a:lnTo>
+                    <a:pt x="3326548" y="637479"/>
+                  </a:lnTo>
+                  <a:lnTo>
+                    <a:pt x="3252788" y="626875"/>
+                  </a:lnTo>
+                  <a:lnTo>
+                    <a:pt x="3179028" y="616138"/>
+                  </a:lnTo>
+                  <a:lnTo>
+                    <a:pt x="3105268" y="605266"/>
+                  </a:lnTo>
+                  <a:lnTo>
+                    <a:pt x="3031508" y="594259"/>
+                  </a:lnTo>
+                  <a:lnTo>
+                    <a:pt x="2957748" y="583113"/>
+                  </a:lnTo>
+                  <a:lnTo>
+                    <a:pt x="2883988" y="571829"/>
+                  </a:lnTo>
+                  <a:lnTo>
+                    <a:pt x="2810228" y="560402"/>
+                  </a:lnTo>
+                  <a:lnTo>
+                    <a:pt x="2736468" y="548833"/>
+                  </a:lnTo>
+                  <a:lnTo>
+                    <a:pt x="2662708" y="537119"/>
+                  </a:lnTo>
+                  <a:lnTo>
+                    <a:pt x="2588948" y="525259"/>
+                  </a:lnTo>
+                  <a:lnTo>
+                    <a:pt x="2515188" y="513250"/>
+                  </a:lnTo>
+                  <a:lnTo>
+                    <a:pt x="2441428" y="501090"/>
+                  </a:lnTo>
+                  <a:lnTo>
+                    <a:pt x="2367668" y="488779"/>
+                  </a:lnTo>
+                  <a:lnTo>
+                    <a:pt x="2293908" y="476313"/>
+                  </a:lnTo>
+                  <a:lnTo>
+                    <a:pt x="2220148" y="463692"/>
+                  </a:lnTo>
+                  <a:lnTo>
+                    <a:pt x="2146388" y="450912"/>
+                  </a:lnTo>
+                  <a:lnTo>
+                    <a:pt x="2072628" y="437972"/>
+                  </a:lnTo>
+                  <a:lnTo>
+                    <a:pt x="1998868" y="424870"/>
+                  </a:lnTo>
+                  <a:lnTo>
+                    <a:pt x="1925108" y="411605"/>
+                  </a:lnTo>
+                  <a:lnTo>
+                    <a:pt x="1851348" y="398173"/>
+                  </a:lnTo>
+                  <a:lnTo>
+                    <a:pt x="1777588" y="384573"/>
+                  </a:lnTo>
+                  <a:lnTo>
+                    <a:pt x="1703828" y="370803"/>
+                  </a:lnTo>
+                  <a:lnTo>
+                    <a:pt x="1630068" y="356861"/>
+                  </a:lnTo>
+                  <a:lnTo>
+                    <a:pt x="1556308" y="342744"/>
+                  </a:lnTo>
+                  <a:lnTo>
+                    <a:pt x="1482548" y="328450"/>
+                  </a:lnTo>
+                  <a:lnTo>
+                    <a:pt x="1408788" y="313977"/>
+                  </a:lnTo>
+                  <a:lnTo>
+                    <a:pt x="1335028" y="299324"/>
+                  </a:lnTo>
+                  <a:lnTo>
+                    <a:pt x="1261268" y="284486"/>
+                  </a:lnTo>
+                  <a:lnTo>
+                    <a:pt x="1187508" y="269464"/>
+                  </a:lnTo>
+                  <a:lnTo>
+                    <a:pt x="1113747" y="254253"/>
+                  </a:lnTo>
+                  <a:lnTo>
+                    <a:pt x="1039987" y="238851"/>
+                  </a:lnTo>
+                  <a:lnTo>
+                    <a:pt x="966227" y="223257"/>
+                  </a:lnTo>
+                  <a:lnTo>
+                    <a:pt x="892467" y="207468"/>
+                  </a:lnTo>
+                  <a:lnTo>
+                    <a:pt x="818707" y="191481"/>
+                  </a:lnTo>
+                  <a:lnTo>
+                    <a:pt x="744947" y="175293"/>
+                  </a:lnTo>
+                  <a:lnTo>
+                    <a:pt x="671187" y="158904"/>
+                  </a:lnTo>
+                  <a:lnTo>
+                    <a:pt x="597427" y="142309"/>
+                  </a:lnTo>
+                  <a:lnTo>
+                    <a:pt x="523667" y="125506"/>
+                  </a:lnTo>
+                  <a:lnTo>
+                    <a:pt x="449907" y="108493"/>
+                  </a:lnTo>
+                  <a:lnTo>
+                    <a:pt x="376147" y="91267"/>
+                  </a:lnTo>
+                  <a:lnTo>
+                    <a:pt x="302387" y="73826"/>
+                  </a:lnTo>
+                  <a:lnTo>
+                    <a:pt x="228627" y="56166"/>
+                  </a:lnTo>
+                  <a:lnTo>
+                    <a:pt x="154867" y="38285"/>
+                  </a:lnTo>
+                  <a:lnTo>
+                    <a:pt x="81107" y="20180"/>
+                  </a:lnTo>
+                  <a:lnTo>
+                    <a:pt x="7347" y="1848"/>
                   </a:lnTo>
                   <a:lnTo>
                     <a:pt x="0" y="0"/>
@@ -4265,312 +4265,312 @@
           </p:nvSpPr>
           <p:spPr>
             <a:xfrm>
-              <a:off x="817517" y="3052855"/>
-              <a:ext cx="7235830" cy="2222635"/>
+              <a:off x="817517" y="3176328"/>
+              <a:ext cx="7235830" cy="2119861"/>
             </a:xfrm>
             <a:custGeom>
               <a:avLst/>
               <a:pathLst>
-                <a:path w="7235830" h="2222635">
+                <a:path w="7235830" h="2119861">
                   <a:moveTo>
                     <a:pt x="0" y="0"/>
                   </a:moveTo>
                   <a:lnTo>
-                    <a:pt x="7347" y="5654"/>
-                  </a:lnTo>
-                  <a:lnTo>
-                    <a:pt x="81107" y="61149"/>
-                  </a:lnTo>
-                  <a:lnTo>
-                    <a:pt x="154867" y="115407"/>
-                  </a:lnTo>
-                  <a:lnTo>
-                    <a:pt x="228627" y="168457"/>
-                  </a:lnTo>
-                  <a:lnTo>
-                    <a:pt x="302387" y="220325"/>
-                  </a:lnTo>
-                  <a:lnTo>
-                    <a:pt x="376147" y="271037"/>
-                  </a:lnTo>
-                  <a:lnTo>
-                    <a:pt x="449907" y="320619"/>
-                  </a:lnTo>
-                  <a:lnTo>
-                    <a:pt x="523667" y="369096"/>
-                  </a:lnTo>
-                  <a:lnTo>
-                    <a:pt x="597427" y="416494"/>
-                  </a:lnTo>
-                  <a:lnTo>
-                    <a:pt x="671187" y="462835"/>
-                  </a:lnTo>
-                  <a:lnTo>
-                    <a:pt x="744947" y="508144"/>
-                  </a:lnTo>
-                  <a:lnTo>
-                    <a:pt x="818707" y="552443"/>
-                  </a:lnTo>
-                  <a:lnTo>
-                    <a:pt x="892467" y="595755"/>
-                  </a:lnTo>
-                  <a:lnTo>
-                    <a:pt x="966227" y="638102"/>
-                  </a:lnTo>
-                  <a:lnTo>
-                    <a:pt x="1039987" y="679506"/>
-                  </a:lnTo>
-                  <a:lnTo>
-                    <a:pt x="1113747" y="719987"/>
-                  </a:lnTo>
-                  <a:lnTo>
-                    <a:pt x="1187508" y="759566"/>
-                  </a:lnTo>
-                  <a:lnTo>
-                    <a:pt x="1261268" y="798263"/>
-                  </a:lnTo>
-                  <a:lnTo>
-                    <a:pt x="1335028" y="836098"/>
-                  </a:lnTo>
-                  <a:lnTo>
-                    <a:pt x="1408788" y="873090"/>
-                  </a:lnTo>
-                  <a:lnTo>
-                    <a:pt x="1482548" y="909258"/>
-                  </a:lnTo>
-                  <a:lnTo>
-                    <a:pt x="1556308" y="944620"/>
-                  </a:lnTo>
-                  <a:lnTo>
-                    <a:pt x="1630068" y="979194"/>
-                  </a:lnTo>
-                  <a:lnTo>
-                    <a:pt x="1703828" y="1012998"/>
-                  </a:lnTo>
-                  <a:lnTo>
-                    <a:pt x="1777588" y="1046048"/>
-                  </a:lnTo>
-                  <a:lnTo>
-                    <a:pt x="1851348" y="1078362"/>
-                  </a:lnTo>
-                  <a:lnTo>
-                    <a:pt x="1925108" y="1109957"/>
-                  </a:lnTo>
-                  <a:lnTo>
-                    <a:pt x="1998868" y="1140847"/>
-                  </a:lnTo>
-                  <a:lnTo>
-                    <a:pt x="2072628" y="1171049"/>
-                  </a:lnTo>
-                  <a:lnTo>
-                    <a:pt x="2146388" y="1200578"/>
-                  </a:lnTo>
-                  <a:lnTo>
-                    <a:pt x="2220148" y="1229449"/>
-                  </a:lnTo>
-                  <a:lnTo>
-                    <a:pt x="2293908" y="1257677"/>
-                  </a:lnTo>
-                  <a:lnTo>
-                    <a:pt x="2367668" y="1285276"/>
-                  </a:lnTo>
-                  <a:lnTo>
-                    <a:pt x="2441428" y="1312259"/>
-                  </a:lnTo>
-                  <a:lnTo>
-                    <a:pt x="2515188" y="1338642"/>
-                  </a:lnTo>
-                  <a:lnTo>
-                    <a:pt x="2588948" y="1364437"/>
-                  </a:lnTo>
-                  <a:lnTo>
-                    <a:pt x="2662708" y="1389657"/>
-                  </a:lnTo>
-                  <a:lnTo>
-                    <a:pt x="2736468" y="1414315"/>
-                  </a:lnTo>
-                  <a:lnTo>
-                    <a:pt x="2810228" y="1438424"/>
-                  </a:lnTo>
-                  <a:lnTo>
-                    <a:pt x="2883988" y="1461996"/>
-                  </a:lnTo>
-                  <a:lnTo>
-                    <a:pt x="2957748" y="1485042"/>
-                  </a:lnTo>
-                  <a:lnTo>
-                    <a:pt x="3031508" y="1507575"/>
-                  </a:lnTo>
-                  <a:lnTo>
-                    <a:pt x="3105268" y="1529606"/>
-                  </a:lnTo>
-                  <a:lnTo>
-                    <a:pt x="3179028" y="1551146"/>
-                  </a:lnTo>
-                  <a:lnTo>
-                    <a:pt x="3252788" y="1572206"/>
-                  </a:lnTo>
-                  <a:lnTo>
-                    <a:pt x="3326548" y="1592797"/>
-                  </a:lnTo>
-                  <a:lnTo>
-                    <a:pt x="3400308" y="1612929"/>
-                  </a:lnTo>
-                  <a:lnTo>
-                    <a:pt x="3474068" y="1632613"/>
-                  </a:lnTo>
-                  <a:lnTo>
-                    <a:pt x="3547828" y="1651857"/>
-                  </a:lnTo>
-                  <a:lnTo>
-                    <a:pt x="3621588" y="1670674"/>
-                  </a:lnTo>
-                  <a:lnTo>
-                    <a:pt x="3695348" y="1689071"/>
-                  </a:lnTo>
-                  <a:lnTo>
-                    <a:pt x="3769108" y="1707058"/>
-                  </a:lnTo>
-                  <a:lnTo>
-                    <a:pt x="3842868" y="1724644"/>
-                  </a:lnTo>
-                  <a:lnTo>
-                    <a:pt x="3916628" y="1741838"/>
-                  </a:lnTo>
-                  <a:lnTo>
-                    <a:pt x="3990388" y="1758649"/>
-                  </a:lnTo>
-                  <a:lnTo>
-                    <a:pt x="4064149" y="1775086"/>
-                  </a:lnTo>
-                  <a:lnTo>
-                    <a:pt x="4137909" y="1791157"/>
-                  </a:lnTo>
-                  <a:lnTo>
-                    <a:pt x="4211669" y="1806869"/>
-                  </a:lnTo>
-                  <a:lnTo>
-                    <a:pt x="4285429" y="1822231"/>
-                  </a:lnTo>
-                  <a:lnTo>
-                    <a:pt x="4359189" y="1837251"/>
-                  </a:lnTo>
-                  <a:lnTo>
-                    <a:pt x="4432949" y="1851937"/>
-                  </a:lnTo>
-                  <a:lnTo>
-                    <a:pt x="4506709" y="1866295"/>
-                  </a:lnTo>
-                  <a:lnTo>
-                    <a:pt x="4580469" y="1880333"/>
-                  </a:lnTo>
-                  <a:lnTo>
-                    <a:pt x="4654229" y="1894059"/>
-                  </a:lnTo>
-                  <a:lnTo>
-                    <a:pt x="4727989" y="1907478"/>
-                  </a:lnTo>
-                  <a:lnTo>
-                    <a:pt x="4801749" y="1920599"/>
-                  </a:lnTo>
-                  <a:lnTo>
-                    <a:pt x="4875509" y="1933427"/>
-                  </a:lnTo>
-                  <a:lnTo>
-                    <a:pt x="4949269" y="1945970"/>
-                  </a:lnTo>
-                  <a:lnTo>
-                    <a:pt x="5023029" y="1958233"/>
-                  </a:lnTo>
-                  <a:lnTo>
-                    <a:pt x="5096789" y="1970223"/>
-                  </a:lnTo>
-                  <a:lnTo>
-                    <a:pt x="5170549" y="1981945"/>
-                  </a:lnTo>
-                  <a:lnTo>
-                    <a:pt x="5244309" y="1993407"/>
-                  </a:lnTo>
-                  <a:lnTo>
-                    <a:pt x="5318069" y="2004613"/>
-                  </a:lnTo>
-                  <a:lnTo>
-                    <a:pt x="5391829" y="2015569"/>
-                  </a:lnTo>
-                  <a:lnTo>
-                    <a:pt x="5465589" y="2026281"/>
-                  </a:lnTo>
-                  <a:lnTo>
-                    <a:pt x="5539349" y="2036755"/>
-                  </a:lnTo>
-                  <a:lnTo>
-                    <a:pt x="5613109" y="2046995"/>
-                  </a:lnTo>
-                  <a:lnTo>
-                    <a:pt x="5686869" y="2057007"/>
-                  </a:lnTo>
-                  <a:lnTo>
-                    <a:pt x="5760629" y="2066796"/>
-                  </a:lnTo>
-                  <a:lnTo>
-                    <a:pt x="5834389" y="2076367"/>
-                  </a:lnTo>
-                  <a:lnTo>
-                    <a:pt x="5908149" y="2085725"/>
-                  </a:lnTo>
-                  <a:lnTo>
-                    <a:pt x="5981909" y="2094874"/>
-                  </a:lnTo>
-                  <a:lnTo>
-                    <a:pt x="6055669" y="2103819"/>
-                  </a:lnTo>
-                  <a:lnTo>
-                    <a:pt x="6129429" y="2112565"/>
-                  </a:lnTo>
-                  <a:lnTo>
-                    <a:pt x="6203189" y="2121116"/>
-                  </a:lnTo>
-                  <a:lnTo>
-                    <a:pt x="6276949" y="2129477"/>
-                  </a:lnTo>
-                  <a:lnTo>
-                    <a:pt x="6350709" y="2137651"/>
-                  </a:lnTo>
-                  <a:lnTo>
-                    <a:pt x="6424469" y="2145644"/>
-                  </a:lnTo>
-                  <a:lnTo>
-                    <a:pt x="6498229" y="2153458"/>
-                  </a:lnTo>
-                  <a:lnTo>
-                    <a:pt x="6571989" y="2161098"/>
-                  </a:lnTo>
-                  <a:lnTo>
-                    <a:pt x="6645749" y="2168567"/>
-                  </a:lnTo>
-                  <a:lnTo>
-                    <a:pt x="6719509" y="2175871"/>
-                  </a:lnTo>
-                  <a:lnTo>
-                    <a:pt x="6793269" y="2183011"/>
-                  </a:lnTo>
-                  <a:lnTo>
-                    <a:pt x="6867029" y="2189993"/>
-                  </a:lnTo>
-                  <a:lnTo>
-                    <a:pt x="6940789" y="2196819"/>
-                  </a:lnTo>
-                  <a:lnTo>
-                    <a:pt x="7014550" y="2203493"/>
-                  </a:lnTo>
-                  <a:lnTo>
-                    <a:pt x="7088310" y="2210018"/>
-                  </a:lnTo>
-                  <a:lnTo>
-                    <a:pt x="7162070" y="2216398"/>
-                  </a:lnTo>
-                  <a:lnTo>
-                    <a:pt x="7235830" y="2222635"/>
+                    <a:pt x="7347" y="5392"/>
+                  </a:lnTo>
+                  <a:lnTo>
+                    <a:pt x="81107" y="58321"/>
+                  </a:lnTo>
+                  <a:lnTo>
+                    <a:pt x="154867" y="110071"/>
+                  </a:lnTo>
+                  <a:lnTo>
+                    <a:pt x="228627" y="160668"/>
+                  </a:lnTo>
+                  <a:lnTo>
+                    <a:pt x="302387" y="210137"/>
+                  </a:lnTo>
+                  <a:lnTo>
+                    <a:pt x="376147" y="258504"/>
+                  </a:lnTo>
+                  <a:lnTo>
+                    <a:pt x="449907" y="305794"/>
+                  </a:lnTo>
+                  <a:lnTo>
+                    <a:pt x="523667" y="352030"/>
+                  </a:lnTo>
+                  <a:lnTo>
+                    <a:pt x="597427" y="397235"/>
+                  </a:lnTo>
+                  <a:lnTo>
+                    <a:pt x="671187" y="441434"/>
+                  </a:lnTo>
+                  <a:lnTo>
+                    <a:pt x="744947" y="484647"/>
+                  </a:lnTo>
+                  <a:lnTo>
+                    <a:pt x="818707" y="526898"/>
+                  </a:lnTo>
+                  <a:lnTo>
+                    <a:pt x="892467" y="568208"/>
+                  </a:lnTo>
+                  <a:lnTo>
+                    <a:pt x="966227" y="608597"/>
+                  </a:lnTo>
+                  <a:lnTo>
+                    <a:pt x="1039987" y="648086"/>
+                  </a:lnTo>
+                  <a:lnTo>
+                    <a:pt x="1113747" y="686695"/>
+                  </a:lnTo>
+                  <a:lnTo>
+                    <a:pt x="1187508" y="724444"/>
+                  </a:lnTo>
+                  <a:lnTo>
+                    <a:pt x="1261268" y="761352"/>
+                  </a:lnTo>
+                  <a:lnTo>
+                    <a:pt x="1335028" y="797437"/>
+                  </a:lnTo>
+                  <a:lnTo>
+                    <a:pt x="1408788" y="832719"/>
+                  </a:lnTo>
+                  <a:lnTo>
+                    <a:pt x="1482548" y="867214"/>
+                  </a:lnTo>
+                  <a:lnTo>
+                    <a:pt x="1556308" y="900941"/>
+                  </a:lnTo>
+                  <a:lnTo>
+                    <a:pt x="1630068" y="933916"/>
+                  </a:lnTo>
+                  <a:lnTo>
+                    <a:pt x="1703828" y="966157"/>
+                  </a:lnTo>
+                  <a:lnTo>
+                    <a:pt x="1777588" y="997679"/>
+                  </a:lnTo>
+                  <a:lnTo>
+                    <a:pt x="1851348" y="1028499"/>
+                  </a:lnTo>
+                  <a:lnTo>
+                    <a:pt x="1925108" y="1058633"/>
+                  </a:lnTo>
+                  <a:lnTo>
+                    <a:pt x="1998868" y="1088094"/>
+                  </a:lnTo>
+                  <a:lnTo>
+                    <a:pt x="2072628" y="1116900"/>
+                  </a:lnTo>
+                  <a:lnTo>
+                    <a:pt x="2146388" y="1145063"/>
+                  </a:lnTo>
+                  <a:lnTo>
+                    <a:pt x="2220148" y="1172600"/>
+                  </a:lnTo>
+                  <a:lnTo>
+                    <a:pt x="2293908" y="1199522"/>
+                  </a:lnTo>
+                  <a:lnTo>
+                    <a:pt x="2367668" y="1225845"/>
+                  </a:lnTo>
+                  <a:lnTo>
+                    <a:pt x="2441428" y="1251581"/>
+                  </a:lnTo>
+                  <a:lnTo>
+                    <a:pt x="2515188" y="1276744"/>
+                  </a:lnTo>
+                  <a:lnTo>
+                    <a:pt x="2588948" y="1301346"/>
+                  </a:lnTo>
+                  <a:lnTo>
+                    <a:pt x="2662708" y="1325400"/>
+                  </a:lnTo>
+                  <a:lnTo>
+                    <a:pt x="2736468" y="1348918"/>
+                  </a:lnTo>
+                  <a:lnTo>
+                    <a:pt x="2810228" y="1371912"/>
+                  </a:lnTo>
+                  <a:lnTo>
+                    <a:pt x="2883988" y="1394394"/>
+                  </a:lnTo>
+                  <a:lnTo>
+                    <a:pt x="2957748" y="1416374"/>
+                  </a:lnTo>
+                  <a:lnTo>
+                    <a:pt x="3031508" y="1437865"/>
+                  </a:lnTo>
+                  <a:lnTo>
+                    <a:pt x="3105268" y="1458878"/>
+                  </a:lnTo>
+                  <a:lnTo>
+                    <a:pt x="3179028" y="1479422"/>
+                  </a:lnTo>
+                  <a:lnTo>
+                    <a:pt x="3252788" y="1499508"/>
+                  </a:lnTo>
+                  <a:lnTo>
+                    <a:pt x="3326548" y="1519147"/>
+                  </a:lnTo>
+                  <a:lnTo>
+                    <a:pt x="3400308" y="1538348"/>
+                  </a:lnTo>
+                  <a:lnTo>
+                    <a:pt x="3474068" y="1557121"/>
+                  </a:lnTo>
+                  <a:lnTo>
+                    <a:pt x="3547828" y="1575476"/>
+                  </a:lnTo>
+                  <a:lnTo>
+                    <a:pt x="3621588" y="1593422"/>
+                  </a:lnTo>
+                  <a:lnTo>
+                    <a:pt x="3695348" y="1610968"/>
+                  </a:lnTo>
+                  <a:lnTo>
+                    <a:pt x="3769108" y="1628124"/>
+                  </a:lnTo>
+                  <a:lnTo>
+                    <a:pt x="3842868" y="1644897"/>
+                  </a:lnTo>
+                  <a:lnTo>
+                    <a:pt x="3916628" y="1661296"/>
+                  </a:lnTo>
+                  <a:lnTo>
+                    <a:pt x="3990388" y="1677330"/>
+                  </a:lnTo>
+                  <a:lnTo>
+                    <a:pt x="4064149" y="1693007"/>
+                  </a:lnTo>
+                  <a:lnTo>
+                    <a:pt x="4137909" y="1708334"/>
+                  </a:lnTo>
+                  <a:lnTo>
+                    <a:pt x="4211669" y="1723320"/>
+                  </a:lnTo>
+                  <a:lnTo>
+                    <a:pt x="4285429" y="1737972"/>
+                  </a:lnTo>
+                  <a:lnTo>
+                    <a:pt x="4359189" y="1752298"/>
+                  </a:lnTo>
+                  <a:lnTo>
+                    <a:pt x="4432949" y="1766304"/>
+                  </a:lnTo>
+                  <a:lnTo>
+                    <a:pt x="4506709" y="1779998"/>
+                  </a:lnTo>
+                  <a:lnTo>
+                    <a:pt x="4580469" y="1793387"/>
+                  </a:lnTo>
+                  <a:lnTo>
+                    <a:pt x="4654229" y="1806478"/>
+                  </a:lnTo>
+                  <a:lnTo>
+                    <a:pt x="4727989" y="1819277"/>
+                  </a:lnTo>
+                  <a:lnTo>
+                    <a:pt x="4801749" y="1831791"/>
+                  </a:lnTo>
+                  <a:lnTo>
+                    <a:pt x="4875509" y="1844026"/>
+                  </a:lnTo>
+                  <a:lnTo>
+                    <a:pt x="4949269" y="1855989"/>
+                  </a:lnTo>
+                  <a:lnTo>
+                    <a:pt x="5023029" y="1867685"/>
+                  </a:lnTo>
+                  <a:lnTo>
+                    <a:pt x="5096789" y="1879120"/>
+                  </a:lnTo>
+                  <a:lnTo>
+                    <a:pt x="5170549" y="1890301"/>
+                  </a:lnTo>
+                  <a:lnTo>
+                    <a:pt x="5244309" y="1901232"/>
+                  </a:lnTo>
+                  <a:lnTo>
+                    <a:pt x="5318069" y="1911920"/>
+                  </a:lnTo>
+                  <a:lnTo>
+                    <a:pt x="5391829" y="1922370"/>
+                  </a:lnTo>
+                  <a:lnTo>
+                    <a:pt x="5465589" y="1932587"/>
+                  </a:lnTo>
+                  <a:lnTo>
+                    <a:pt x="5539349" y="1942576"/>
+                  </a:lnTo>
+                  <a:lnTo>
+                    <a:pt x="5613109" y="1952343"/>
+                  </a:lnTo>
+                  <a:lnTo>
+                    <a:pt x="5686869" y="1961892"/>
+                  </a:lnTo>
+                  <a:lnTo>
+                    <a:pt x="5760629" y="1971228"/>
+                  </a:lnTo>
+                  <a:lnTo>
+                    <a:pt x="5834389" y="1980357"/>
+                  </a:lnTo>
+                  <a:lnTo>
+                    <a:pt x="5908149" y="1989282"/>
+                  </a:lnTo>
+                  <a:lnTo>
+                    <a:pt x="5981909" y="1998008"/>
+                  </a:lnTo>
+                  <a:lnTo>
+                    <a:pt x="6055669" y="2006540"/>
+                  </a:lnTo>
+                  <a:lnTo>
+                    <a:pt x="6129429" y="2014881"/>
+                  </a:lnTo>
+                  <a:lnTo>
+                    <a:pt x="6203189" y="2023037"/>
+                  </a:lnTo>
+                  <a:lnTo>
+                    <a:pt x="6276949" y="2031011"/>
+                  </a:lnTo>
+                  <a:lnTo>
+                    <a:pt x="6350709" y="2038807"/>
+                  </a:lnTo>
+                  <a:lnTo>
+                    <a:pt x="6424469" y="2046430"/>
+                  </a:lnTo>
+                  <a:lnTo>
+                    <a:pt x="6498229" y="2053883"/>
+                  </a:lnTo>
+                  <a:lnTo>
+                    <a:pt x="6571989" y="2061169"/>
+                  </a:lnTo>
+                  <a:lnTo>
+                    <a:pt x="6645749" y="2068294"/>
+                  </a:lnTo>
+                  <a:lnTo>
+                    <a:pt x="6719509" y="2075259"/>
+                  </a:lnTo>
+                  <a:lnTo>
+                    <a:pt x="6793269" y="2082070"/>
+                  </a:lnTo>
+                  <a:lnTo>
+                    <a:pt x="6867029" y="2088728"/>
+                  </a:lnTo>
+                  <a:lnTo>
+                    <a:pt x="6940789" y="2095239"/>
+                  </a:lnTo>
+                  <a:lnTo>
+                    <a:pt x="7014550" y="2101604"/>
+                  </a:lnTo>
+                  <a:lnTo>
+                    <a:pt x="7088310" y="2107827"/>
+                  </a:lnTo>
+                  <a:lnTo>
+                    <a:pt x="7162070" y="2113912"/>
+                  </a:lnTo>
+                  <a:lnTo>
+                    <a:pt x="7235830" y="2119861"/>
                   </a:lnTo>
                 </a:path>
               </a:pathLst>
@@ -4599,7 +4599,7 @@
           </p:nvSpPr>
           <p:spPr>
             <a:xfrm>
-              <a:off x="817517" y="4679530"/>
+              <a:off x="817517" y="4727786"/>
               <a:ext cx="7799693" cy="0"/>
             </a:xfrm>
             <a:custGeom>
@@ -4642,15 +4642,15 @@
           </p:nvSpPr>
           <p:spPr>
             <a:xfrm>
-              <a:off x="4269157" y="1896563"/>
-              <a:ext cx="0" cy="3826579"/>
+              <a:off x="4269157" y="2073503"/>
+              <a:ext cx="0" cy="3649639"/>
             </a:xfrm>
             <a:custGeom>
               <a:avLst/>
               <a:pathLst>
-                <a:path w="0" h="3826579">
+                <a:path w="0" h="3649639">
                   <a:moveTo>
-                    <a:pt x="0" y="3826579"/>
+                    <a:pt x="0" y="3649639"/>
                   </a:moveTo>
                   <a:lnTo>
                     <a:pt x="0" y="0"/>
@@ -4685,7 +4685,7 @@
           </p:nvSpPr>
           <p:spPr>
             <a:xfrm>
-              <a:off x="692708" y="5509156"/>
+              <a:off x="692708" y="5517199"/>
               <a:ext cx="62179" cy="80101"/>
             </a:xfrm>
             <a:prstGeom prst="rect">
@@ -4731,7 +4731,7 @@
           </p:nvSpPr>
           <p:spPr>
             <a:xfrm>
-              <a:off x="692708" y="4639479"/>
+              <a:off x="692708" y="4687735"/>
               <a:ext cx="62179" cy="80101"/>
             </a:xfrm>
             <a:prstGeom prst="rect">
@@ -4777,7 +4777,7 @@
           </p:nvSpPr>
           <p:spPr>
             <a:xfrm>
-              <a:off x="692708" y="3769802"/>
+              <a:off x="692708" y="3858272"/>
               <a:ext cx="62179" cy="80101"/>
             </a:xfrm>
             <a:prstGeom prst="rect">
@@ -4823,7 +4823,7 @@
           </p:nvSpPr>
           <p:spPr>
             <a:xfrm>
-              <a:off x="692708" y="2900125"/>
+              <a:off x="692708" y="3028808"/>
               <a:ext cx="62179" cy="80101"/>
             </a:xfrm>
             <a:prstGeom prst="rect">
@@ -4869,7 +4869,7 @@
           </p:nvSpPr>
           <p:spPr>
             <a:xfrm>
-              <a:off x="692708" y="2030448"/>
+              <a:off x="692708" y="2199345"/>
               <a:ext cx="62179" cy="80101"/>
             </a:xfrm>
             <a:prstGeom prst="rect">
@@ -5145,7 +5145,7 @@
           </p:nvSpPr>
           <p:spPr>
             <a:xfrm rot="-5400000">
-              <a:off x="68446" y="3759743"/>
+              <a:off x="68446" y="3848213"/>
               <a:ext cx="1016904" cy="100218"/>
             </a:xfrm>
             <a:prstGeom prst="rect">
@@ -5186,6 +5186,52 @@
         <p:sp>
           <p:nvSpPr>
             <p:cNvPr id="38" name="tx38"/>
+            <p:cNvSpPr/>
+            <p:nvPr/>
+          </p:nvSpPr>
+          <p:spPr>
+            <a:xfrm>
+              <a:off x="817517" y="1896563"/>
+              <a:ext cx="5626211" cy="82021"/>
+            </a:xfrm>
+            <a:prstGeom prst="rect">
+              <a:avLst/>
+            </a:prstGeom>
+            <a:noFill/>
+          </p:spPr>
+          <p:txBody>
+            <a:bodyPr lIns="0" rIns="0" tIns="0" bIns="0" anchorCtr="1" anchor="ctr" wrap="none"/>
+            <a:lstStyle/>
+            <a:p>
+              <a:pPr algn="l" marL="0" marR="0" indent="0">
+                <a:lnSpc>
+                  <a:spcPts val="900"/>
+                </a:lnSpc>
+                <a:spcBef>
+                  <a:spcPts val="0"/>
+                </a:spcBef>
+                <a:spcAft>
+                  <a:spcPts val="0"/>
+                </a:spcAft>
+              </a:pPr>
+              <a:r>
+                <a:rPr sz="900">
+                  <a:solidFill>
+                    <a:srgbClr val="404040">
+                      <a:alpha val="100000"/>
+                    </a:srgbClr>
+                  </a:solidFill>
+                  <a:latin typeface="Helvetica"/>
+                  <a:cs typeface="Helvetica"/>
+                </a:rPr>
+                <a:t>subHR per 0.1 ratio decline: 1.31 (1.16-1.48)  |  per IQR decline (Δ = 0.29): 2.21 (1.55-3.15)  |  IQR: [0.85, 1.15]</a:t>
+              </a:r>
+            </a:p>
+          </p:txBody>
+        </p:sp>
+        <p:sp>
+          <p:nvSpPr>
+            <p:cNvPr id="39" name="tx39"/>
             <p:cNvSpPr/>
             <p:nvPr/>
           </p:nvSpPr>

--- a/docs/pptx/whole/jx-linsubhr-ratio-throm2.pptx
+++ b/docs/pptx/whole/jx-linsubhr-ratio-throm2.pptx
@@ -5192,7 +5192,7 @@
           <p:spPr>
             <a:xfrm>
               <a:off x="817517" y="1896563"/>
-              <a:ext cx="5626211" cy="82021"/>
+              <a:ext cx="6236116" cy="82021"/>
             </a:xfrm>
             <a:prstGeom prst="rect">
               <a:avLst/>
@@ -5224,7 +5224,7 @@
                   <a:latin typeface="Helvetica"/>
                   <a:cs typeface="Helvetica"/>
                 </a:rPr>
-                <a:t>subHR per 0.1 ratio decline: 1.31 (1.16-1.48)  |  per IQR decline (Δ = 0.29): 2.21 (1.55-3.15)  |  IQR: [0.85, 1.15]</a:t>
+                <a:t>subHR per 0.1 ratio decline: 1.31 (1.16-1.48), p = &lt;0.001  |  per IQR decline (Δ = 0.29): 2.21 (1.55-3.15)  |  IQR: [0.85, 1.15]</a:t>
               </a:r>
             </a:p>
           </p:txBody>

--- a/docs/pptx/whole/jx-linsubhr-ratio-throm2.pptx
+++ b/docs/pptx/whole/jx-linsubhr-ratio-throm2.pptx
@@ -5192,7 +5192,7 @@
           <p:spPr>
             <a:xfrm>
               <a:off x="817517" y="1896563"/>
-              <a:ext cx="6236116" cy="82021"/>
+              <a:ext cx="6899879" cy="82021"/>
             </a:xfrm>
             <a:prstGeom prst="rect">
               <a:avLst/>
@@ -5224,7 +5224,7 @@
                   <a:latin typeface="Helvetica"/>
                   <a:cs typeface="Helvetica"/>
                 </a:rPr>
-                <a:t>subHR per 0.1 ratio decline: 1.31 (1.16-1.48), p = &lt;0.001  |  per IQR decline (Δ = 0.29): 2.21 (1.55-3.15)  |  IQR: [0.85, 1.15]</a:t>
+                <a:t>subHR per 0.1 ratio decline: 1.31 (1.16-1.48), p_Bonf = &lt;0.001 (n = 6)  |  per IQR decline (Δ = 0.29): 2.21 (1.55-3.15)  |  IQR: [0.85, 1.15]</a:t>
               </a:r>
             </a:p>
           </p:txBody>

--- a/docs/pptx/whole/jx-linsubhr-ratio-throm2.pptx
+++ b/docs/pptx/whole/jx-linsubhr-ratio-throm2.pptx
@@ -2443,7 +2443,7 @@
           </p:nvSpPr>
           <p:spPr>
             <a:xfrm>
-              <a:off x="1615213" y="2073503"/>
+              <a:off x="1365633" y="2073503"/>
               <a:ext cx="0" cy="3649639"/>
             </a:xfrm>
             <a:custGeom>
@@ -2486,7 +2486,7 @@
           </p:nvSpPr>
           <p:spPr>
             <a:xfrm>
-              <a:off x="3387871" y="2073503"/>
+              <a:off x="3517243" y="2073503"/>
               <a:ext cx="0" cy="3649639"/>
             </a:xfrm>
             <a:custGeom>
@@ -2529,7 +2529,7 @@
           </p:nvSpPr>
           <p:spPr>
             <a:xfrm>
-              <a:off x="5160528" y="2073503"/>
+              <a:off x="5668852" y="2073503"/>
               <a:ext cx="0" cy="3649639"/>
             </a:xfrm>
             <a:custGeom>
@@ -2572,7 +2572,7 @@
           </p:nvSpPr>
           <p:spPr>
             <a:xfrm>
-              <a:off x="6933186" y="2073503"/>
+              <a:off x="7820461" y="2073503"/>
               <a:ext cx="0" cy="3649639"/>
             </a:xfrm>
             <a:custGeom>
@@ -2830,7 +2830,7 @@
           </p:nvSpPr>
           <p:spPr>
             <a:xfrm>
-              <a:off x="2501542" y="2073503"/>
+              <a:off x="2441438" y="2073503"/>
               <a:ext cx="0" cy="3649639"/>
             </a:xfrm>
             <a:custGeom>
@@ -2873,7 +2873,7 @@
           </p:nvSpPr>
           <p:spPr>
             <a:xfrm>
-              <a:off x="4274200" y="2073503"/>
+              <a:off x="4593047" y="2073503"/>
               <a:ext cx="0" cy="3649639"/>
             </a:xfrm>
             <a:custGeom>
@@ -2916,7 +2916,7 @@
           </p:nvSpPr>
           <p:spPr>
             <a:xfrm>
-              <a:off x="6046857" y="2073503"/>
+              <a:off x="6744657" y="2073503"/>
               <a:ext cx="0" cy="3649639"/>
             </a:xfrm>
             <a:custGeom>
@@ -2953,652 +2953,609 @@
         </p:sp>
         <p:sp>
           <p:nvSpPr>
-            <p:cNvPr id="20" name="pl20"/>
+            <p:cNvPr id="20" name="pg20"/>
             <p:cNvSpPr/>
             <p:nvPr/>
           </p:nvSpPr>
           <p:spPr>
             <a:xfrm>
-              <a:off x="7819515" y="2073503"/>
-              <a:ext cx="0" cy="3649639"/>
+              <a:off x="1172049" y="2073503"/>
+              <a:ext cx="7090630" cy="3328201"/>
             </a:xfrm>
             <a:custGeom>
               <a:avLst/>
               <a:pathLst>
-                <a:path w="0" h="3649639">
+                <a:path w="7090630" h="3328201">
                   <a:moveTo>
-                    <a:pt x="0" y="3649639"/>
+                    <a:pt x="265953" y="0"/>
                   </a:moveTo>
                   <a:lnTo>
-                    <a:pt x="0" y="0"/>
-                  </a:lnTo>
-                  <a:lnTo>
-                    <a:pt x="0" y="0"/>
-                  </a:lnTo>
-                </a:path>
-              </a:pathLst>
-            </a:custGeom>
-            <a:ln w="13550" cap="flat">
-              <a:solidFill>
-                <a:srgbClr val="EBEBEB">
-                  <a:alpha val="100000"/>
-                </a:srgbClr>
-              </a:solidFill>
-              <a:prstDash val="solid"/>
-              <a:round/>
-            </a:ln>
-          </p:spPr>
-          <p:txBody>
-            <a:bodyPr/>
-            <a:lstStyle/>
-            <a:p/>
-          </p:txBody>
-        </p:sp>
-        <p:sp>
-          <p:nvSpPr>
-            <p:cNvPr id="21" name="pg21"/>
-            <p:cNvSpPr/>
-            <p:nvPr/>
-          </p:nvSpPr>
-          <p:spPr>
-            <a:xfrm>
-              <a:off x="817517" y="2073503"/>
-              <a:ext cx="7235830" cy="3328201"/>
-            </a:xfrm>
-            <a:custGeom>
-              <a:avLst/>
-              <a:pathLst>
-                <a:path w="7235830" h="3328201">
-                  <a:moveTo>
-                    <a:pt x="207477" y="0"/>
-                  </a:moveTo>
-                  <a:lnTo>
-                    <a:pt x="228627" y="32816"/>
-                  </a:lnTo>
-                  <a:lnTo>
-                    <a:pt x="302387" y="143589"/>
-                  </a:lnTo>
-                  <a:lnTo>
-                    <a:pt x="376147" y="250806"/>
-                  </a:lnTo>
-                  <a:lnTo>
-                    <a:pt x="449907" y="354582"/>
-                  </a:lnTo>
-                  <a:lnTo>
-                    <a:pt x="523667" y="455026"/>
-                  </a:lnTo>
-                  <a:lnTo>
-                    <a:pt x="597427" y="552246"/>
-                  </a:lnTo>
-                  <a:lnTo>
-                    <a:pt x="671187" y="646346"/>
-                  </a:lnTo>
-                  <a:lnTo>
-                    <a:pt x="744947" y="737425"/>
-                  </a:lnTo>
-                  <a:lnTo>
-                    <a:pt x="818707" y="825580"/>
-                  </a:lnTo>
-                  <a:lnTo>
-                    <a:pt x="892467" y="910906"/>
-                  </a:lnTo>
-                  <a:lnTo>
-                    <a:pt x="966227" y="993493"/>
-                  </a:lnTo>
-                  <a:lnTo>
-                    <a:pt x="1039987" y="1073428"/>
-                  </a:lnTo>
-                  <a:lnTo>
-                    <a:pt x="1113747" y="1150798"/>
-                  </a:lnTo>
-                  <a:lnTo>
-                    <a:pt x="1187508" y="1225685"/>
-                  </a:lnTo>
-                  <a:lnTo>
-                    <a:pt x="1261268" y="1298167"/>
-                  </a:lnTo>
-                  <a:lnTo>
-                    <a:pt x="1335028" y="1368323"/>
-                  </a:lnTo>
-                  <a:lnTo>
-                    <a:pt x="1408788" y="1436227"/>
-                  </a:lnTo>
-                  <a:lnTo>
-                    <a:pt x="1482548" y="1501951"/>
-                  </a:lnTo>
-                  <a:lnTo>
-                    <a:pt x="1556308" y="1565566"/>
-                  </a:lnTo>
-                  <a:lnTo>
-                    <a:pt x="1630068" y="1627138"/>
-                  </a:lnTo>
-                  <a:lnTo>
-                    <a:pt x="1703828" y="1686734"/>
-                  </a:lnTo>
-                  <a:lnTo>
-                    <a:pt x="1777588" y="1744417"/>
-                  </a:lnTo>
-                  <a:lnTo>
-                    <a:pt x="1851348" y="1800249"/>
-                  </a:lnTo>
-                  <a:lnTo>
-                    <a:pt x="1925108" y="1854288"/>
-                  </a:lnTo>
-                  <a:lnTo>
-                    <a:pt x="1998868" y="1906593"/>
-                  </a:lnTo>
-                  <a:lnTo>
-                    <a:pt x="2072628" y="1957219"/>
-                  </a:lnTo>
-                  <a:lnTo>
-                    <a:pt x="2146388" y="2006219"/>
-                  </a:lnTo>
-                  <a:lnTo>
-                    <a:pt x="2220148" y="2053647"/>
-                  </a:lnTo>
-                  <a:lnTo>
-                    <a:pt x="2293908" y="2099553"/>
-                  </a:lnTo>
-                  <a:lnTo>
-                    <a:pt x="2367668" y="2143984"/>
-                  </a:lnTo>
-                  <a:lnTo>
-                    <a:pt x="2441428" y="2186990"/>
-                  </a:lnTo>
-                  <a:lnTo>
-                    <a:pt x="2515188" y="2228615"/>
-                  </a:lnTo>
-                  <a:lnTo>
-                    <a:pt x="2588948" y="2268904"/>
-                  </a:lnTo>
-                  <a:lnTo>
-                    <a:pt x="2662708" y="2307900"/>
-                  </a:lnTo>
-                  <a:lnTo>
-                    <a:pt x="2736468" y="2345644"/>
-                  </a:lnTo>
-                  <a:lnTo>
-                    <a:pt x="2810228" y="2382176"/>
-                  </a:lnTo>
-                  <a:lnTo>
-                    <a:pt x="2883988" y="2417536"/>
-                  </a:lnTo>
-                  <a:lnTo>
-                    <a:pt x="2957748" y="2451761"/>
-                  </a:lnTo>
-                  <a:lnTo>
-                    <a:pt x="3031508" y="2484887"/>
-                  </a:lnTo>
-                  <a:lnTo>
-                    <a:pt x="3105268" y="2516950"/>
-                  </a:lnTo>
-                  <a:lnTo>
-                    <a:pt x="3179028" y="2547984"/>
-                  </a:lnTo>
-                  <a:lnTo>
-                    <a:pt x="3252788" y="2578021"/>
-                  </a:lnTo>
-                  <a:lnTo>
-                    <a:pt x="3326548" y="2607094"/>
-                  </a:lnTo>
-                  <a:lnTo>
-                    <a:pt x="3400308" y="2635234"/>
-                  </a:lnTo>
-                  <a:lnTo>
-                    <a:pt x="3474068" y="2657415"/>
-                  </a:lnTo>
-                  <a:lnTo>
-                    <a:pt x="3547828" y="2667630"/>
-                  </a:lnTo>
-                  <a:lnTo>
-                    <a:pt x="3621588" y="2677720"/>
-                  </a:lnTo>
-                  <a:lnTo>
-                    <a:pt x="3695348" y="2687685"/>
-                  </a:lnTo>
-                  <a:lnTo>
-                    <a:pt x="3769108" y="2697526"/>
-                  </a:lnTo>
-                  <a:lnTo>
-                    <a:pt x="3842868" y="2707246"/>
-                  </a:lnTo>
-                  <a:lnTo>
-                    <a:pt x="3916628" y="2716846"/>
-                  </a:lnTo>
-                  <a:lnTo>
-                    <a:pt x="3990388" y="2726327"/>
-                  </a:lnTo>
-                  <a:lnTo>
-                    <a:pt x="4064149" y="2735691"/>
-                  </a:lnTo>
-                  <a:lnTo>
-                    <a:pt x="4137909" y="2744939"/>
-                  </a:lnTo>
-                  <a:lnTo>
-                    <a:pt x="4211669" y="2754073"/>
-                  </a:lnTo>
-                  <a:lnTo>
-                    <a:pt x="4285429" y="2763094"/>
-                  </a:lnTo>
-                  <a:lnTo>
-                    <a:pt x="4359189" y="2772003"/>
-                  </a:lnTo>
-                  <a:lnTo>
-                    <a:pt x="4432949" y="2780802"/>
-                  </a:lnTo>
-                  <a:lnTo>
-                    <a:pt x="4506709" y="2789493"/>
-                  </a:lnTo>
-                  <a:lnTo>
-                    <a:pt x="4580469" y="2798076"/>
-                  </a:lnTo>
-                  <a:lnTo>
-                    <a:pt x="4654229" y="2806553"/>
-                  </a:lnTo>
-                  <a:lnTo>
-                    <a:pt x="4727989" y="2814925"/>
-                  </a:lnTo>
-                  <a:lnTo>
-                    <a:pt x="4801749" y="2823193"/>
-                  </a:lnTo>
-                  <a:lnTo>
-                    <a:pt x="4875509" y="2831360"/>
-                  </a:lnTo>
-                  <a:lnTo>
-                    <a:pt x="4949269" y="2839425"/>
-                  </a:lnTo>
-                  <a:lnTo>
-                    <a:pt x="5023029" y="2847391"/>
-                  </a:lnTo>
-                  <a:lnTo>
-                    <a:pt x="5096789" y="2855258"/>
-                  </a:lnTo>
-                  <a:lnTo>
-                    <a:pt x="5170549" y="2863028"/>
-                  </a:lnTo>
-                  <a:lnTo>
-                    <a:pt x="5244309" y="2870702"/>
-                  </a:lnTo>
-                  <a:lnTo>
-                    <a:pt x="5318069" y="2878281"/>
-                  </a:lnTo>
-                  <a:lnTo>
-                    <a:pt x="5391829" y="2885766"/>
-                  </a:lnTo>
-                  <a:lnTo>
-                    <a:pt x="5465589" y="2893159"/>
-                  </a:lnTo>
-                  <a:lnTo>
-                    <a:pt x="5539349" y="2900460"/>
-                  </a:lnTo>
-                  <a:lnTo>
-                    <a:pt x="5613109" y="2907671"/>
-                  </a:lnTo>
-                  <a:lnTo>
-                    <a:pt x="5686869" y="2914793"/>
-                  </a:lnTo>
-                  <a:lnTo>
-                    <a:pt x="5760629" y="2921827"/>
-                  </a:lnTo>
-                  <a:lnTo>
-                    <a:pt x="5834389" y="2928774"/>
-                  </a:lnTo>
-                  <a:lnTo>
-                    <a:pt x="5908149" y="2935635"/>
-                  </a:lnTo>
-                  <a:lnTo>
-                    <a:pt x="5981909" y="2942411"/>
-                  </a:lnTo>
-                  <a:lnTo>
-                    <a:pt x="6055669" y="2949104"/>
-                  </a:lnTo>
-                  <a:lnTo>
-                    <a:pt x="6129429" y="2955713"/>
-                  </a:lnTo>
-                  <a:lnTo>
-                    <a:pt x="6203189" y="2962241"/>
-                  </a:lnTo>
-                  <a:lnTo>
-                    <a:pt x="6276949" y="2968689"/>
-                  </a:lnTo>
-                  <a:lnTo>
-                    <a:pt x="6350709" y="2975056"/>
-                  </a:lnTo>
-                  <a:lnTo>
-                    <a:pt x="6424469" y="2981345"/>
-                  </a:lnTo>
-                  <a:lnTo>
-                    <a:pt x="6498229" y="2987556"/>
-                  </a:lnTo>
-                  <a:lnTo>
-                    <a:pt x="6571989" y="2993691"/>
-                  </a:lnTo>
-                  <a:lnTo>
-                    <a:pt x="6645749" y="2999749"/>
-                  </a:lnTo>
-                  <a:lnTo>
-                    <a:pt x="6719509" y="3005733"/>
-                  </a:lnTo>
-                  <a:lnTo>
-                    <a:pt x="6793269" y="3011642"/>
-                  </a:lnTo>
-                  <a:lnTo>
-                    <a:pt x="6867029" y="3017479"/>
-                  </a:lnTo>
-                  <a:lnTo>
-                    <a:pt x="6940789" y="3023243"/>
-                  </a:lnTo>
-                  <a:lnTo>
-                    <a:pt x="7014550" y="3028937"/>
-                  </a:lnTo>
-                  <a:lnTo>
-                    <a:pt x="7088310" y="3034559"/>
-                  </a:lnTo>
-                  <a:lnTo>
-                    <a:pt x="7162070" y="3040113"/>
-                  </a:lnTo>
-                  <a:lnTo>
-                    <a:pt x="7235830" y="3045597"/>
-                  </a:lnTo>
-                  <a:lnTo>
-                    <a:pt x="7235830" y="3328201"/>
-                  </a:lnTo>
-                  <a:lnTo>
-                    <a:pt x="7162070" y="3323043"/>
-                  </a:lnTo>
-                  <a:lnTo>
-                    <a:pt x="7088310" y="3317713"/>
-                  </a:lnTo>
-                  <a:lnTo>
-                    <a:pt x="7014550" y="3312207"/>
-                  </a:lnTo>
-                  <a:lnTo>
-                    <a:pt x="6940789" y="3306518"/>
-                  </a:lnTo>
-                  <a:lnTo>
-                    <a:pt x="6867029" y="3300640"/>
-                  </a:lnTo>
-                  <a:lnTo>
-                    <a:pt x="6793269" y="3294568"/>
-                  </a:lnTo>
-                  <a:lnTo>
-                    <a:pt x="6719509" y="3288294"/>
-                  </a:lnTo>
-                  <a:lnTo>
-                    <a:pt x="6645749" y="3281812"/>
-                  </a:lnTo>
-                  <a:lnTo>
-                    <a:pt x="6571989" y="3275115"/>
-                  </a:lnTo>
-                  <a:lnTo>
-                    <a:pt x="6498229" y="3268196"/>
-                  </a:lnTo>
-                  <a:lnTo>
-                    <a:pt x="6424469" y="3261047"/>
-                  </a:lnTo>
-                  <a:lnTo>
-                    <a:pt x="6350709" y="3253662"/>
-                  </a:lnTo>
-                  <a:lnTo>
-                    <a:pt x="6276949" y="3246031"/>
-                  </a:lnTo>
-                  <a:lnTo>
-                    <a:pt x="6203189" y="3238148"/>
-                  </a:lnTo>
-                  <a:lnTo>
-                    <a:pt x="6129429" y="3230003"/>
-                  </a:lnTo>
-                  <a:lnTo>
-                    <a:pt x="6055669" y="3221588"/>
-                  </a:lnTo>
-                  <a:lnTo>
-                    <a:pt x="5981909" y="3212893"/>
-                  </a:lnTo>
-                  <a:lnTo>
-                    <a:pt x="5908149" y="3203911"/>
-                  </a:lnTo>
-                  <a:lnTo>
-                    <a:pt x="5834389" y="3194630"/>
-                  </a:lnTo>
-                  <a:lnTo>
-                    <a:pt x="5760629" y="3185042"/>
-                  </a:lnTo>
-                  <a:lnTo>
-                    <a:pt x="5686869" y="3175136"/>
-                  </a:lnTo>
-                  <a:lnTo>
-                    <a:pt x="5613109" y="3164901"/>
-                  </a:lnTo>
-                  <a:lnTo>
-                    <a:pt x="5539349" y="3154327"/>
-                  </a:lnTo>
-                  <a:lnTo>
-                    <a:pt x="5465589" y="3143402"/>
-                  </a:lnTo>
-                  <a:lnTo>
-                    <a:pt x="5391829" y="3132115"/>
-                  </a:lnTo>
-                  <a:lnTo>
-                    <a:pt x="5318069" y="3120453"/>
-                  </a:lnTo>
-                  <a:lnTo>
-                    <a:pt x="5244309" y="3108405"/>
-                  </a:lnTo>
-                  <a:lnTo>
-                    <a:pt x="5170549" y="3095957"/>
-                  </a:lnTo>
-                  <a:lnTo>
-                    <a:pt x="5096789" y="3083097"/>
-                  </a:lnTo>
-                  <a:lnTo>
-                    <a:pt x="5023029" y="3069809"/>
-                  </a:lnTo>
-                  <a:lnTo>
-                    <a:pt x="4949269" y="3056082"/>
-                  </a:lnTo>
-                  <a:lnTo>
-                    <a:pt x="4875509" y="3041899"/>
-                  </a:lnTo>
-                  <a:lnTo>
-                    <a:pt x="4801749" y="3027245"/>
-                  </a:lnTo>
-                  <a:lnTo>
-                    <a:pt x="4727989" y="3012106"/>
-                  </a:lnTo>
-                  <a:lnTo>
-                    <a:pt x="4654229" y="2996464"/>
-                  </a:lnTo>
-                  <a:lnTo>
-                    <a:pt x="4580469" y="2980304"/>
-                  </a:lnTo>
-                  <a:lnTo>
-                    <a:pt x="4506709" y="2963608"/>
-                  </a:lnTo>
-                  <a:lnTo>
-                    <a:pt x="4432949" y="2946358"/>
-                  </a:lnTo>
-                  <a:lnTo>
-                    <a:pt x="4359189" y="2928536"/>
-                  </a:lnTo>
-                  <a:lnTo>
-                    <a:pt x="4285429" y="2910123"/>
-                  </a:lnTo>
-                  <a:lnTo>
-                    <a:pt x="4211669" y="2891099"/>
-                  </a:lnTo>
-                  <a:lnTo>
-                    <a:pt x="4137909" y="2871445"/>
-                  </a:lnTo>
-                  <a:lnTo>
-                    <a:pt x="4064149" y="2851138"/>
-                  </a:lnTo>
-                  <a:lnTo>
-                    <a:pt x="3990388" y="2830159"/>
-                  </a:lnTo>
-                  <a:lnTo>
-                    <a:pt x="3916628" y="2808483"/>
-                  </a:lnTo>
-                  <a:lnTo>
-                    <a:pt x="3842868" y="2786089"/>
-                  </a:lnTo>
-                  <a:lnTo>
-                    <a:pt x="3769108" y="2762952"/>
-                  </a:lnTo>
-                  <a:lnTo>
-                    <a:pt x="3695348" y="2739047"/>
-                  </a:lnTo>
-                  <a:lnTo>
-                    <a:pt x="3621588" y="2714350"/>
-                  </a:lnTo>
-                  <a:lnTo>
-                    <a:pt x="3547828" y="2688834"/>
-                  </a:lnTo>
-                  <a:lnTo>
-                    <a:pt x="3474068" y="2662471"/>
-                  </a:lnTo>
-                  <a:lnTo>
-                    <a:pt x="3400308" y="2647071"/>
-                  </a:lnTo>
-                  <a:lnTo>
-                    <a:pt x="3326548" y="2636598"/>
-                  </a:lnTo>
-                  <a:lnTo>
-                    <a:pt x="3252788" y="2625993"/>
-                  </a:lnTo>
-                  <a:lnTo>
-                    <a:pt x="3179028" y="2615256"/>
-                  </a:lnTo>
-                  <a:lnTo>
-                    <a:pt x="3105268" y="2604385"/>
-                  </a:lnTo>
-                  <a:lnTo>
-                    <a:pt x="3031508" y="2593377"/>
-                  </a:lnTo>
-                  <a:lnTo>
-                    <a:pt x="2957748" y="2582232"/>
-                  </a:lnTo>
-                  <a:lnTo>
-                    <a:pt x="2883988" y="2570947"/>
-                  </a:lnTo>
-                  <a:lnTo>
-                    <a:pt x="2810228" y="2559521"/>
-                  </a:lnTo>
-                  <a:lnTo>
-                    <a:pt x="2736468" y="2547952"/>
-                  </a:lnTo>
-                  <a:lnTo>
-                    <a:pt x="2662708" y="2536238"/>
-                  </a:lnTo>
-                  <a:lnTo>
-                    <a:pt x="2588948" y="2524377"/>
-                  </a:lnTo>
-                  <a:lnTo>
-                    <a:pt x="2515188" y="2512368"/>
-                  </a:lnTo>
-                  <a:lnTo>
-                    <a:pt x="2441428" y="2500209"/>
-                  </a:lnTo>
-                  <a:lnTo>
-                    <a:pt x="2367668" y="2487898"/>
-                  </a:lnTo>
-                  <a:lnTo>
-                    <a:pt x="2293908" y="2475432"/>
-                  </a:lnTo>
-                  <a:lnTo>
-                    <a:pt x="2220148" y="2462810"/>
-                  </a:lnTo>
-                  <a:lnTo>
-                    <a:pt x="2146388" y="2450030"/>
-                  </a:lnTo>
-                  <a:lnTo>
-                    <a:pt x="2072628" y="2437091"/>
-                  </a:lnTo>
-                  <a:lnTo>
-                    <a:pt x="1998868" y="2423989"/>
-                  </a:lnTo>
-                  <a:lnTo>
-                    <a:pt x="1925108" y="2410723"/>
-                  </a:lnTo>
-                  <a:lnTo>
-                    <a:pt x="1851348" y="2397292"/>
-                  </a:lnTo>
-                  <a:lnTo>
-                    <a:pt x="1777588" y="2383692"/>
-                  </a:lnTo>
-                  <a:lnTo>
-                    <a:pt x="1703828" y="2369922"/>
-                  </a:lnTo>
-                  <a:lnTo>
-                    <a:pt x="1630068" y="2355979"/>
-                  </a:lnTo>
-                  <a:lnTo>
-                    <a:pt x="1556308" y="2341862"/>
-                  </a:lnTo>
-                  <a:lnTo>
-                    <a:pt x="1482548" y="2327569"/>
-                  </a:lnTo>
-                  <a:lnTo>
-                    <a:pt x="1408788" y="2313096"/>
-                  </a:lnTo>
-                  <a:lnTo>
-                    <a:pt x="1335028" y="2298442"/>
-                  </a:lnTo>
-                  <a:lnTo>
-                    <a:pt x="1261268" y="2283605"/>
-                  </a:lnTo>
-                  <a:lnTo>
-                    <a:pt x="1187508" y="2268582"/>
-                  </a:lnTo>
-                  <a:lnTo>
-                    <a:pt x="1113747" y="2253371"/>
-                  </a:lnTo>
-                  <a:lnTo>
-                    <a:pt x="1039987" y="2237970"/>
-                  </a:lnTo>
-                  <a:lnTo>
-                    <a:pt x="966227" y="2222376"/>
-                  </a:lnTo>
-                  <a:lnTo>
-                    <a:pt x="892467" y="2206586"/>
-                  </a:lnTo>
-                  <a:lnTo>
-                    <a:pt x="818707" y="2190599"/>
-                  </a:lnTo>
-                  <a:lnTo>
-                    <a:pt x="744947" y="2174412"/>
-                  </a:lnTo>
-                  <a:lnTo>
-                    <a:pt x="671187" y="2158022"/>
-                  </a:lnTo>
-                  <a:lnTo>
-                    <a:pt x="597427" y="2141427"/>
-                  </a:lnTo>
-                  <a:lnTo>
-                    <a:pt x="523667" y="2124625"/>
-                  </a:lnTo>
-                  <a:lnTo>
-                    <a:pt x="449907" y="2107612"/>
-                  </a:lnTo>
-                  <a:lnTo>
-                    <a:pt x="376147" y="2090386"/>
-                  </a:lnTo>
-                  <a:lnTo>
-                    <a:pt x="302387" y="2072944"/>
-                  </a:lnTo>
-                  <a:lnTo>
-                    <a:pt x="228627" y="2055284"/>
-                  </a:lnTo>
-                  <a:lnTo>
-                    <a:pt x="154867" y="2037403"/>
-                  </a:lnTo>
-                  <a:lnTo>
-                    <a:pt x="81107" y="2019299"/>
-                  </a:lnTo>
-                  <a:lnTo>
-                    <a:pt x="7347" y="2000967"/>
-                  </a:lnTo>
-                  <a:lnTo>
-                    <a:pt x="0" y="1999118"/>
+                    <a:pt x="286490" y="32816"/>
+                  </a:lnTo>
+                  <a:lnTo>
+                    <a:pt x="358112" y="143589"/>
+                  </a:lnTo>
+                  <a:lnTo>
+                    <a:pt x="429735" y="250806"/>
+                  </a:lnTo>
+                  <a:lnTo>
+                    <a:pt x="501357" y="354582"/>
+                  </a:lnTo>
+                  <a:lnTo>
+                    <a:pt x="572980" y="455026"/>
+                  </a:lnTo>
+                  <a:lnTo>
+                    <a:pt x="644602" y="552246"/>
+                  </a:lnTo>
+                  <a:lnTo>
+                    <a:pt x="716225" y="646346"/>
+                  </a:lnTo>
+                  <a:lnTo>
+                    <a:pt x="787847" y="737425"/>
+                  </a:lnTo>
+                  <a:lnTo>
+                    <a:pt x="859470" y="825580"/>
+                  </a:lnTo>
+                  <a:lnTo>
+                    <a:pt x="931092" y="910906"/>
+                  </a:lnTo>
+                  <a:lnTo>
+                    <a:pt x="1002715" y="993493"/>
+                  </a:lnTo>
+                  <a:lnTo>
+                    <a:pt x="1074337" y="1073428"/>
+                  </a:lnTo>
+                  <a:lnTo>
+                    <a:pt x="1145960" y="1150798"/>
+                  </a:lnTo>
+                  <a:lnTo>
+                    <a:pt x="1217582" y="1225685"/>
+                  </a:lnTo>
+                  <a:lnTo>
+                    <a:pt x="1289205" y="1298167"/>
+                  </a:lnTo>
+                  <a:lnTo>
+                    <a:pt x="1360827" y="1368323"/>
+                  </a:lnTo>
+                  <a:lnTo>
+                    <a:pt x="1432450" y="1436227"/>
+                  </a:lnTo>
+                  <a:lnTo>
+                    <a:pt x="1504073" y="1501951"/>
+                  </a:lnTo>
+                  <a:lnTo>
+                    <a:pt x="1575695" y="1565566"/>
+                  </a:lnTo>
+                  <a:lnTo>
+                    <a:pt x="1647318" y="1627138"/>
+                  </a:lnTo>
+                  <a:lnTo>
+                    <a:pt x="1718940" y="1686734"/>
+                  </a:lnTo>
+                  <a:lnTo>
+                    <a:pt x="1790563" y="1744417"/>
+                  </a:lnTo>
+                  <a:lnTo>
+                    <a:pt x="1862185" y="1800249"/>
+                  </a:lnTo>
+                  <a:lnTo>
+                    <a:pt x="1933808" y="1854288"/>
+                  </a:lnTo>
+                  <a:lnTo>
+                    <a:pt x="2005430" y="1906593"/>
+                  </a:lnTo>
+                  <a:lnTo>
+                    <a:pt x="2077053" y="1957219"/>
+                  </a:lnTo>
+                  <a:lnTo>
+                    <a:pt x="2148675" y="2006219"/>
+                  </a:lnTo>
+                  <a:lnTo>
+                    <a:pt x="2220298" y="2053647"/>
+                  </a:lnTo>
+                  <a:lnTo>
+                    <a:pt x="2291920" y="2099553"/>
+                  </a:lnTo>
+                  <a:lnTo>
+                    <a:pt x="2363543" y="2143984"/>
+                  </a:lnTo>
+                  <a:lnTo>
+                    <a:pt x="2435165" y="2186990"/>
+                  </a:lnTo>
+                  <a:lnTo>
+                    <a:pt x="2506788" y="2228615"/>
+                  </a:lnTo>
+                  <a:lnTo>
+                    <a:pt x="2578410" y="2268904"/>
+                  </a:lnTo>
+                  <a:lnTo>
+                    <a:pt x="2650033" y="2307900"/>
+                  </a:lnTo>
+                  <a:lnTo>
+                    <a:pt x="2721655" y="2345644"/>
+                  </a:lnTo>
+                  <a:lnTo>
+                    <a:pt x="2793278" y="2382176"/>
+                  </a:lnTo>
+                  <a:lnTo>
+                    <a:pt x="2864901" y="2417536"/>
+                  </a:lnTo>
+                  <a:lnTo>
+                    <a:pt x="2936523" y="2451761"/>
+                  </a:lnTo>
+                  <a:lnTo>
+                    <a:pt x="3008146" y="2484887"/>
+                  </a:lnTo>
+                  <a:lnTo>
+                    <a:pt x="3079768" y="2516950"/>
+                  </a:lnTo>
+                  <a:lnTo>
+                    <a:pt x="3151391" y="2547984"/>
+                  </a:lnTo>
+                  <a:lnTo>
+                    <a:pt x="3223013" y="2578021"/>
+                  </a:lnTo>
+                  <a:lnTo>
+                    <a:pt x="3294636" y="2607094"/>
+                  </a:lnTo>
+                  <a:lnTo>
+                    <a:pt x="3366258" y="2635234"/>
+                  </a:lnTo>
+                  <a:lnTo>
+                    <a:pt x="3437881" y="2657415"/>
+                  </a:lnTo>
+                  <a:lnTo>
+                    <a:pt x="3509503" y="2667630"/>
+                  </a:lnTo>
+                  <a:lnTo>
+                    <a:pt x="3581126" y="2677720"/>
+                  </a:lnTo>
+                  <a:lnTo>
+                    <a:pt x="3652748" y="2687685"/>
+                  </a:lnTo>
+                  <a:lnTo>
+                    <a:pt x="3724371" y="2697526"/>
+                  </a:lnTo>
+                  <a:lnTo>
+                    <a:pt x="3795993" y="2707246"/>
+                  </a:lnTo>
+                  <a:lnTo>
+                    <a:pt x="3867616" y="2716846"/>
+                  </a:lnTo>
+                  <a:lnTo>
+                    <a:pt x="3939238" y="2726327"/>
+                  </a:lnTo>
+                  <a:lnTo>
+                    <a:pt x="4010861" y="2735691"/>
+                  </a:lnTo>
+                  <a:lnTo>
+                    <a:pt x="4082483" y="2744939"/>
+                  </a:lnTo>
+                  <a:lnTo>
+                    <a:pt x="4154106" y="2754073"/>
+                  </a:lnTo>
+                  <a:lnTo>
+                    <a:pt x="4225729" y="2763094"/>
+                  </a:lnTo>
+                  <a:lnTo>
+                    <a:pt x="4297351" y="2772003"/>
+                  </a:lnTo>
+                  <a:lnTo>
+                    <a:pt x="4368974" y="2780802"/>
+                  </a:lnTo>
+                  <a:lnTo>
+                    <a:pt x="4440596" y="2789493"/>
+                  </a:lnTo>
+                  <a:lnTo>
+                    <a:pt x="4512219" y="2798076"/>
+                  </a:lnTo>
+                  <a:lnTo>
+                    <a:pt x="4583841" y="2806553"/>
+                  </a:lnTo>
+                  <a:lnTo>
+                    <a:pt x="4655464" y="2814925"/>
+                  </a:lnTo>
+                  <a:lnTo>
+                    <a:pt x="4727086" y="2823193"/>
+                  </a:lnTo>
+                  <a:lnTo>
+                    <a:pt x="4798709" y="2831360"/>
+                  </a:lnTo>
+                  <a:lnTo>
+                    <a:pt x="4870331" y="2839425"/>
+                  </a:lnTo>
+                  <a:lnTo>
+                    <a:pt x="4941954" y="2847391"/>
+                  </a:lnTo>
+                  <a:lnTo>
+                    <a:pt x="5013576" y="2855258"/>
+                  </a:lnTo>
+                  <a:lnTo>
+                    <a:pt x="5085199" y="2863028"/>
+                  </a:lnTo>
+                  <a:lnTo>
+                    <a:pt x="5156821" y="2870702"/>
+                  </a:lnTo>
+                  <a:lnTo>
+                    <a:pt x="5228444" y="2878281"/>
+                  </a:lnTo>
+                  <a:lnTo>
+                    <a:pt x="5300066" y="2885766"/>
+                  </a:lnTo>
+                  <a:lnTo>
+                    <a:pt x="5371689" y="2893159"/>
+                  </a:lnTo>
+                  <a:lnTo>
+                    <a:pt x="5443311" y="2900460"/>
+                  </a:lnTo>
+                  <a:lnTo>
+                    <a:pt x="5514934" y="2907671"/>
+                  </a:lnTo>
+                  <a:lnTo>
+                    <a:pt x="5586557" y="2914793"/>
+                  </a:lnTo>
+                  <a:lnTo>
+                    <a:pt x="5658179" y="2921827"/>
+                  </a:lnTo>
+                  <a:lnTo>
+                    <a:pt x="5729802" y="2928774"/>
+                  </a:lnTo>
+                  <a:lnTo>
+                    <a:pt x="5801424" y="2935635"/>
+                  </a:lnTo>
+                  <a:lnTo>
+                    <a:pt x="5873047" y="2942411"/>
+                  </a:lnTo>
+                  <a:lnTo>
+                    <a:pt x="5944669" y="2949104"/>
+                  </a:lnTo>
+                  <a:lnTo>
+                    <a:pt x="6016292" y="2955713"/>
+                  </a:lnTo>
+                  <a:lnTo>
+                    <a:pt x="6087914" y="2962241"/>
+                  </a:lnTo>
+                  <a:lnTo>
+                    <a:pt x="6159537" y="2968689"/>
+                  </a:lnTo>
+                  <a:lnTo>
+                    <a:pt x="6231159" y="2975056"/>
+                  </a:lnTo>
+                  <a:lnTo>
+                    <a:pt x="6302782" y="2981345"/>
+                  </a:lnTo>
+                  <a:lnTo>
+                    <a:pt x="6374404" y="2987556"/>
+                  </a:lnTo>
+                  <a:lnTo>
+                    <a:pt x="6446027" y="2993691"/>
+                  </a:lnTo>
+                  <a:lnTo>
+                    <a:pt x="6517649" y="2999749"/>
+                  </a:lnTo>
+                  <a:lnTo>
+                    <a:pt x="6589272" y="3005733"/>
+                  </a:lnTo>
+                  <a:lnTo>
+                    <a:pt x="6660894" y="3011642"/>
+                  </a:lnTo>
+                  <a:lnTo>
+                    <a:pt x="6732517" y="3017479"/>
+                  </a:lnTo>
+                  <a:lnTo>
+                    <a:pt x="6804139" y="3023243"/>
+                  </a:lnTo>
+                  <a:lnTo>
+                    <a:pt x="6875762" y="3028937"/>
+                  </a:lnTo>
+                  <a:lnTo>
+                    <a:pt x="6947385" y="3034559"/>
+                  </a:lnTo>
+                  <a:lnTo>
+                    <a:pt x="7019007" y="3040113"/>
+                  </a:lnTo>
+                  <a:lnTo>
+                    <a:pt x="7090630" y="3045597"/>
+                  </a:lnTo>
+                  <a:lnTo>
+                    <a:pt x="7090630" y="3328201"/>
+                  </a:lnTo>
+                  <a:lnTo>
+                    <a:pt x="7019007" y="3323043"/>
+                  </a:lnTo>
+                  <a:lnTo>
+                    <a:pt x="6947385" y="3317713"/>
+                  </a:lnTo>
+                  <a:lnTo>
+                    <a:pt x="6875762" y="3312207"/>
+                  </a:lnTo>
+                  <a:lnTo>
+                    <a:pt x="6804139" y="3306518"/>
+                  </a:lnTo>
+                  <a:lnTo>
+                    <a:pt x="6732517" y="3300640"/>
+                  </a:lnTo>
+                  <a:lnTo>
+                    <a:pt x="6660894" y="3294568"/>
+                  </a:lnTo>
+                  <a:lnTo>
+                    <a:pt x="6589272" y="3288294"/>
+                  </a:lnTo>
+                  <a:lnTo>
+                    <a:pt x="6517649" y="3281812"/>
+                  </a:lnTo>
+                  <a:lnTo>
+                    <a:pt x="6446027" y="3275115"/>
+                  </a:lnTo>
+                  <a:lnTo>
+                    <a:pt x="6374404" y="3268196"/>
+                  </a:lnTo>
+                  <a:lnTo>
+                    <a:pt x="6302782" y="3261047"/>
+                  </a:lnTo>
+                  <a:lnTo>
+                    <a:pt x="6231159" y="3253662"/>
+                  </a:lnTo>
+                  <a:lnTo>
+                    <a:pt x="6159537" y="3246031"/>
+                  </a:lnTo>
+                  <a:lnTo>
+                    <a:pt x="6087914" y="3238148"/>
+                  </a:lnTo>
+                  <a:lnTo>
+                    <a:pt x="6016292" y="3230003"/>
+                  </a:lnTo>
+                  <a:lnTo>
+                    <a:pt x="5944669" y="3221588"/>
+                  </a:lnTo>
+                  <a:lnTo>
+                    <a:pt x="5873047" y="3212893"/>
+                  </a:lnTo>
+                  <a:lnTo>
+                    <a:pt x="5801424" y="3203911"/>
+                  </a:lnTo>
+                  <a:lnTo>
+                    <a:pt x="5729802" y="3194630"/>
+                  </a:lnTo>
+                  <a:lnTo>
+                    <a:pt x="5658179" y="3185042"/>
+                  </a:lnTo>
+                  <a:lnTo>
+                    <a:pt x="5586557" y="3175136"/>
+                  </a:lnTo>
+                  <a:lnTo>
+                    <a:pt x="5514934" y="3164901"/>
+                  </a:lnTo>
+                  <a:lnTo>
+                    <a:pt x="5443311" y="3154327"/>
+                  </a:lnTo>
+                  <a:lnTo>
+                    <a:pt x="5371689" y="3143402"/>
+                  </a:lnTo>
+                  <a:lnTo>
+                    <a:pt x="5300066" y="3132115"/>
+                  </a:lnTo>
+                  <a:lnTo>
+                    <a:pt x="5228444" y="3120453"/>
+                  </a:lnTo>
+                  <a:lnTo>
+                    <a:pt x="5156821" y="3108405"/>
+                  </a:lnTo>
+                  <a:lnTo>
+                    <a:pt x="5085199" y="3095957"/>
+                  </a:lnTo>
+                  <a:lnTo>
+                    <a:pt x="5013576" y="3083097"/>
+                  </a:lnTo>
+                  <a:lnTo>
+                    <a:pt x="4941954" y="3069809"/>
+                  </a:lnTo>
+                  <a:lnTo>
+                    <a:pt x="4870331" y="3056082"/>
+                  </a:lnTo>
+                  <a:lnTo>
+                    <a:pt x="4798709" y="3041899"/>
+                  </a:lnTo>
+                  <a:lnTo>
+                    <a:pt x="4727086" y="3027245"/>
+                  </a:lnTo>
+                  <a:lnTo>
+                    <a:pt x="4655464" y="3012106"/>
+                  </a:lnTo>
+                  <a:lnTo>
+                    <a:pt x="4583841" y="2996464"/>
+                  </a:lnTo>
+                  <a:lnTo>
+                    <a:pt x="4512219" y="2980304"/>
+                  </a:lnTo>
+                  <a:lnTo>
+                    <a:pt x="4440596" y="2963608"/>
+                  </a:lnTo>
+                  <a:lnTo>
+                    <a:pt x="4368974" y="2946358"/>
+                  </a:lnTo>
+                  <a:lnTo>
+                    <a:pt x="4297351" y="2928536"/>
+                  </a:lnTo>
+                  <a:lnTo>
+                    <a:pt x="4225729" y="2910123"/>
+                  </a:lnTo>
+                  <a:lnTo>
+                    <a:pt x="4154106" y="2891099"/>
+                  </a:lnTo>
+                  <a:lnTo>
+                    <a:pt x="4082483" y="2871445"/>
+                  </a:lnTo>
+                  <a:lnTo>
+                    <a:pt x="4010861" y="2851138"/>
+                  </a:lnTo>
+                  <a:lnTo>
+                    <a:pt x="3939238" y="2830159"/>
+                  </a:lnTo>
+                  <a:lnTo>
+                    <a:pt x="3867616" y="2808483"/>
+                  </a:lnTo>
+                  <a:lnTo>
+                    <a:pt x="3795993" y="2786089"/>
+                  </a:lnTo>
+                  <a:lnTo>
+                    <a:pt x="3724371" y="2762952"/>
+                  </a:lnTo>
+                  <a:lnTo>
+                    <a:pt x="3652748" y="2739047"/>
+                  </a:lnTo>
+                  <a:lnTo>
+                    <a:pt x="3581126" y="2714350"/>
+                  </a:lnTo>
+                  <a:lnTo>
+                    <a:pt x="3509503" y="2688834"/>
+                  </a:lnTo>
+                  <a:lnTo>
+                    <a:pt x="3437881" y="2662471"/>
+                  </a:lnTo>
+                  <a:lnTo>
+                    <a:pt x="3366258" y="2647071"/>
+                  </a:lnTo>
+                  <a:lnTo>
+                    <a:pt x="3294636" y="2636598"/>
+                  </a:lnTo>
+                  <a:lnTo>
+                    <a:pt x="3223013" y="2625993"/>
+                  </a:lnTo>
+                  <a:lnTo>
+                    <a:pt x="3151391" y="2615256"/>
+                  </a:lnTo>
+                  <a:lnTo>
+                    <a:pt x="3079768" y="2604385"/>
+                  </a:lnTo>
+                  <a:lnTo>
+                    <a:pt x="3008146" y="2593377"/>
+                  </a:lnTo>
+                  <a:lnTo>
+                    <a:pt x="2936523" y="2582232"/>
+                  </a:lnTo>
+                  <a:lnTo>
+                    <a:pt x="2864901" y="2570947"/>
+                  </a:lnTo>
+                  <a:lnTo>
+                    <a:pt x="2793278" y="2559521"/>
+                  </a:lnTo>
+                  <a:lnTo>
+                    <a:pt x="2721655" y="2547952"/>
+                  </a:lnTo>
+                  <a:lnTo>
+                    <a:pt x="2650033" y="2536238"/>
+                  </a:lnTo>
+                  <a:lnTo>
+                    <a:pt x="2578410" y="2524377"/>
+                  </a:lnTo>
+                  <a:lnTo>
+                    <a:pt x="2506788" y="2512368"/>
+                  </a:lnTo>
+                  <a:lnTo>
+                    <a:pt x="2435165" y="2500209"/>
+                  </a:lnTo>
+                  <a:lnTo>
+                    <a:pt x="2363543" y="2487898"/>
+                  </a:lnTo>
+                  <a:lnTo>
+                    <a:pt x="2291920" y="2475432"/>
+                  </a:lnTo>
+                  <a:lnTo>
+                    <a:pt x="2220298" y="2462810"/>
+                  </a:lnTo>
+                  <a:lnTo>
+                    <a:pt x="2148675" y="2450030"/>
+                  </a:lnTo>
+                  <a:lnTo>
+                    <a:pt x="2077053" y="2437091"/>
+                  </a:lnTo>
+                  <a:lnTo>
+                    <a:pt x="2005430" y="2423989"/>
+                  </a:lnTo>
+                  <a:lnTo>
+                    <a:pt x="1933808" y="2410723"/>
+                  </a:lnTo>
+                  <a:lnTo>
+                    <a:pt x="1862185" y="2397292"/>
+                  </a:lnTo>
+                  <a:lnTo>
+                    <a:pt x="1790563" y="2383692"/>
+                  </a:lnTo>
+                  <a:lnTo>
+                    <a:pt x="1718940" y="2369922"/>
+                  </a:lnTo>
+                  <a:lnTo>
+                    <a:pt x="1647318" y="2355979"/>
+                  </a:lnTo>
+                  <a:lnTo>
+                    <a:pt x="1575695" y="2341862"/>
+                  </a:lnTo>
+                  <a:lnTo>
+                    <a:pt x="1504073" y="2327569"/>
+                  </a:lnTo>
+                  <a:lnTo>
+                    <a:pt x="1432450" y="2313096"/>
+                  </a:lnTo>
+                  <a:lnTo>
+                    <a:pt x="1360827" y="2298442"/>
+                  </a:lnTo>
+                  <a:lnTo>
+                    <a:pt x="1289205" y="2283605"/>
+                  </a:lnTo>
+                  <a:lnTo>
+                    <a:pt x="1217582" y="2268582"/>
+                  </a:lnTo>
+                  <a:lnTo>
+                    <a:pt x="1145960" y="2253371"/>
+                  </a:lnTo>
+                  <a:lnTo>
+                    <a:pt x="1074337" y="2237970"/>
+                  </a:lnTo>
+                  <a:lnTo>
+                    <a:pt x="1002715" y="2222376"/>
+                  </a:lnTo>
+                  <a:lnTo>
+                    <a:pt x="931092" y="2206586"/>
+                  </a:lnTo>
+                  <a:lnTo>
+                    <a:pt x="859470" y="2190599"/>
+                  </a:lnTo>
+                  <a:lnTo>
+                    <a:pt x="787847" y="2174412"/>
+                  </a:lnTo>
+                  <a:lnTo>
+                    <a:pt x="716225" y="2158022"/>
+                  </a:lnTo>
+                  <a:lnTo>
+                    <a:pt x="644602" y="2141427"/>
+                  </a:lnTo>
+                  <a:lnTo>
+                    <a:pt x="572980" y="2124625"/>
+                  </a:lnTo>
+                  <a:lnTo>
+                    <a:pt x="501357" y="2107612"/>
+                  </a:lnTo>
+                  <a:lnTo>
+                    <a:pt x="429735" y="2090386"/>
+                  </a:lnTo>
+                  <a:lnTo>
+                    <a:pt x="358112" y="2072944"/>
+                  </a:lnTo>
+                  <a:lnTo>
+                    <a:pt x="286490" y="2055284"/>
+                  </a:lnTo>
+                  <a:lnTo>
+                    <a:pt x="214867" y="2037403"/>
+                  </a:lnTo>
+                  <a:lnTo>
+                    <a:pt x="143245" y="2019299"/>
+                  </a:lnTo>
+                  <a:lnTo>
+                    <a:pt x="71622" y="2000967"/>
+                  </a:lnTo>
+                  <a:lnTo>
+                    <a:pt x="0" y="1982406"/>
                   </a:lnTo>
                   <a:close/>
                 </a:path>
@@ -3618,309 +3575,634 @@
         </p:sp>
         <p:sp>
           <p:nvSpPr>
+            <p:cNvPr id="21" name="pl21"/>
+            <p:cNvSpPr/>
+            <p:nvPr/>
+          </p:nvSpPr>
+          <p:spPr>
+            <a:xfrm>
+              <a:off x="1438002" y="2073503"/>
+              <a:ext cx="6824677" cy="3045597"/>
+            </a:xfrm>
+            <a:custGeom>
+              <a:avLst/>
+              <a:pathLst>
+                <a:path w="6824677" h="3045597">
+                  <a:moveTo>
+                    <a:pt x="0" y="0"/>
+                  </a:moveTo>
+                  <a:lnTo>
+                    <a:pt x="20537" y="32816"/>
+                  </a:lnTo>
+                  <a:lnTo>
+                    <a:pt x="92159" y="143589"/>
+                  </a:lnTo>
+                  <a:lnTo>
+                    <a:pt x="163782" y="250806"/>
+                  </a:lnTo>
+                  <a:lnTo>
+                    <a:pt x="235404" y="354582"/>
+                  </a:lnTo>
+                  <a:lnTo>
+                    <a:pt x="307027" y="455026"/>
+                  </a:lnTo>
+                  <a:lnTo>
+                    <a:pt x="378649" y="552246"/>
+                  </a:lnTo>
+                  <a:lnTo>
+                    <a:pt x="450272" y="646346"/>
+                  </a:lnTo>
+                  <a:lnTo>
+                    <a:pt x="521894" y="737425"/>
+                  </a:lnTo>
+                  <a:lnTo>
+                    <a:pt x="593517" y="825580"/>
+                  </a:lnTo>
+                  <a:lnTo>
+                    <a:pt x="665139" y="910906"/>
+                  </a:lnTo>
+                  <a:lnTo>
+                    <a:pt x="736762" y="993493"/>
+                  </a:lnTo>
+                  <a:lnTo>
+                    <a:pt x="808384" y="1073428"/>
+                  </a:lnTo>
+                  <a:lnTo>
+                    <a:pt x="880007" y="1150798"/>
+                  </a:lnTo>
+                  <a:lnTo>
+                    <a:pt x="951629" y="1225685"/>
+                  </a:lnTo>
+                  <a:lnTo>
+                    <a:pt x="1023252" y="1298167"/>
+                  </a:lnTo>
+                  <a:lnTo>
+                    <a:pt x="1094874" y="1368323"/>
+                  </a:lnTo>
+                  <a:lnTo>
+                    <a:pt x="1166497" y="1436227"/>
+                  </a:lnTo>
+                  <a:lnTo>
+                    <a:pt x="1238119" y="1501951"/>
+                  </a:lnTo>
+                  <a:lnTo>
+                    <a:pt x="1309742" y="1565566"/>
+                  </a:lnTo>
+                  <a:lnTo>
+                    <a:pt x="1381365" y="1627138"/>
+                  </a:lnTo>
+                  <a:lnTo>
+                    <a:pt x="1452987" y="1686734"/>
+                  </a:lnTo>
+                  <a:lnTo>
+                    <a:pt x="1524610" y="1744417"/>
+                  </a:lnTo>
+                  <a:lnTo>
+                    <a:pt x="1596232" y="1800249"/>
+                  </a:lnTo>
+                  <a:lnTo>
+                    <a:pt x="1667855" y="1854288"/>
+                  </a:lnTo>
+                  <a:lnTo>
+                    <a:pt x="1739477" y="1906593"/>
+                  </a:lnTo>
+                  <a:lnTo>
+                    <a:pt x="1811100" y="1957219"/>
+                  </a:lnTo>
+                  <a:lnTo>
+                    <a:pt x="1882722" y="2006219"/>
+                  </a:lnTo>
+                  <a:lnTo>
+                    <a:pt x="1954345" y="2053647"/>
+                  </a:lnTo>
+                  <a:lnTo>
+                    <a:pt x="2025967" y="2099553"/>
+                  </a:lnTo>
+                  <a:lnTo>
+                    <a:pt x="2097590" y="2143984"/>
+                  </a:lnTo>
+                  <a:lnTo>
+                    <a:pt x="2169212" y="2186990"/>
+                  </a:lnTo>
+                  <a:lnTo>
+                    <a:pt x="2240835" y="2228615"/>
+                  </a:lnTo>
+                  <a:lnTo>
+                    <a:pt x="2312457" y="2268904"/>
+                  </a:lnTo>
+                  <a:lnTo>
+                    <a:pt x="2384080" y="2307900"/>
+                  </a:lnTo>
+                  <a:lnTo>
+                    <a:pt x="2455702" y="2345644"/>
+                  </a:lnTo>
+                  <a:lnTo>
+                    <a:pt x="2527325" y="2382176"/>
+                  </a:lnTo>
+                  <a:lnTo>
+                    <a:pt x="2598947" y="2417536"/>
+                  </a:lnTo>
+                  <a:lnTo>
+                    <a:pt x="2670570" y="2451761"/>
+                  </a:lnTo>
+                  <a:lnTo>
+                    <a:pt x="2742193" y="2484887"/>
+                  </a:lnTo>
+                  <a:lnTo>
+                    <a:pt x="2813815" y="2516950"/>
+                  </a:lnTo>
+                  <a:lnTo>
+                    <a:pt x="2885438" y="2547984"/>
+                  </a:lnTo>
+                  <a:lnTo>
+                    <a:pt x="2957060" y="2578021"/>
+                  </a:lnTo>
+                  <a:lnTo>
+                    <a:pt x="3028683" y="2607094"/>
+                  </a:lnTo>
+                  <a:lnTo>
+                    <a:pt x="3100305" y="2635234"/>
+                  </a:lnTo>
+                  <a:lnTo>
+                    <a:pt x="3171928" y="2657415"/>
+                  </a:lnTo>
+                  <a:lnTo>
+                    <a:pt x="3243550" y="2667630"/>
+                  </a:lnTo>
+                  <a:lnTo>
+                    <a:pt x="3315173" y="2677720"/>
+                  </a:lnTo>
+                  <a:lnTo>
+                    <a:pt x="3386795" y="2687685"/>
+                  </a:lnTo>
+                  <a:lnTo>
+                    <a:pt x="3458418" y="2697526"/>
+                  </a:lnTo>
+                  <a:lnTo>
+                    <a:pt x="3530040" y="2707246"/>
+                  </a:lnTo>
+                  <a:lnTo>
+                    <a:pt x="3601663" y="2716846"/>
+                  </a:lnTo>
+                  <a:lnTo>
+                    <a:pt x="3673285" y="2726327"/>
+                  </a:lnTo>
+                  <a:lnTo>
+                    <a:pt x="3744908" y="2735691"/>
+                  </a:lnTo>
+                  <a:lnTo>
+                    <a:pt x="3816530" y="2744939"/>
+                  </a:lnTo>
+                  <a:lnTo>
+                    <a:pt x="3888153" y="2754073"/>
+                  </a:lnTo>
+                  <a:lnTo>
+                    <a:pt x="3959775" y="2763094"/>
+                  </a:lnTo>
+                  <a:lnTo>
+                    <a:pt x="4031398" y="2772003"/>
+                  </a:lnTo>
+                  <a:lnTo>
+                    <a:pt x="4103021" y="2780802"/>
+                  </a:lnTo>
+                  <a:lnTo>
+                    <a:pt x="4174643" y="2789493"/>
+                  </a:lnTo>
+                  <a:lnTo>
+                    <a:pt x="4246266" y="2798076"/>
+                  </a:lnTo>
+                  <a:lnTo>
+                    <a:pt x="4317888" y="2806553"/>
+                  </a:lnTo>
+                  <a:lnTo>
+                    <a:pt x="4389511" y="2814925"/>
+                  </a:lnTo>
+                  <a:lnTo>
+                    <a:pt x="4461133" y="2823193"/>
+                  </a:lnTo>
+                  <a:lnTo>
+                    <a:pt x="4532756" y="2831360"/>
+                  </a:lnTo>
+                  <a:lnTo>
+                    <a:pt x="4604378" y="2839425"/>
+                  </a:lnTo>
+                  <a:lnTo>
+                    <a:pt x="4676001" y="2847391"/>
+                  </a:lnTo>
+                  <a:lnTo>
+                    <a:pt x="4747623" y="2855258"/>
+                  </a:lnTo>
+                  <a:lnTo>
+                    <a:pt x="4819246" y="2863028"/>
+                  </a:lnTo>
+                  <a:lnTo>
+                    <a:pt x="4890868" y="2870702"/>
+                  </a:lnTo>
+                  <a:lnTo>
+                    <a:pt x="4962491" y="2878281"/>
+                  </a:lnTo>
+                  <a:lnTo>
+                    <a:pt x="5034113" y="2885766"/>
+                  </a:lnTo>
+                  <a:lnTo>
+                    <a:pt x="5105736" y="2893159"/>
+                  </a:lnTo>
+                  <a:lnTo>
+                    <a:pt x="5177358" y="2900460"/>
+                  </a:lnTo>
+                  <a:lnTo>
+                    <a:pt x="5248981" y="2907671"/>
+                  </a:lnTo>
+                  <a:lnTo>
+                    <a:pt x="5320603" y="2914793"/>
+                  </a:lnTo>
+                  <a:lnTo>
+                    <a:pt x="5392226" y="2921827"/>
+                  </a:lnTo>
+                  <a:lnTo>
+                    <a:pt x="5463849" y="2928774"/>
+                  </a:lnTo>
+                  <a:lnTo>
+                    <a:pt x="5535471" y="2935635"/>
+                  </a:lnTo>
+                  <a:lnTo>
+                    <a:pt x="5607094" y="2942411"/>
+                  </a:lnTo>
+                  <a:lnTo>
+                    <a:pt x="5678716" y="2949104"/>
+                  </a:lnTo>
+                  <a:lnTo>
+                    <a:pt x="5750339" y="2955713"/>
+                  </a:lnTo>
+                  <a:lnTo>
+                    <a:pt x="5821961" y="2962241"/>
+                  </a:lnTo>
+                  <a:lnTo>
+                    <a:pt x="5893584" y="2968689"/>
+                  </a:lnTo>
+                  <a:lnTo>
+                    <a:pt x="5965206" y="2975056"/>
+                  </a:lnTo>
+                  <a:lnTo>
+                    <a:pt x="6036829" y="2981345"/>
+                  </a:lnTo>
+                  <a:lnTo>
+                    <a:pt x="6108451" y="2987556"/>
+                  </a:lnTo>
+                  <a:lnTo>
+                    <a:pt x="6180074" y="2993691"/>
+                  </a:lnTo>
+                  <a:lnTo>
+                    <a:pt x="6251696" y="2999749"/>
+                  </a:lnTo>
+                  <a:lnTo>
+                    <a:pt x="6323319" y="3005733"/>
+                  </a:lnTo>
+                  <a:lnTo>
+                    <a:pt x="6394941" y="3011642"/>
+                  </a:lnTo>
+                  <a:lnTo>
+                    <a:pt x="6466564" y="3017479"/>
+                  </a:lnTo>
+                  <a:lnTo>
+                    <a:pt x="6538186" y="3023243"/>
+                  </a:lnTo>
+                  <a:lnTo>
+                    <a:pt x="6609809" y="3028937"/>
+                  </a:lnTo>
+                  <a:lnTo>
+                    <a:pt x="6681431" y="3034559"/>
+                  </a:lnTo>
+                  <a:lnTo>
+                    <a:pt x="6753054" y="3040113"/>
+                  </a:lnTo>
+                  <a:lnTo>
+                    <a:pt x="6824677" y="3045597"/>
+                  </a:lnTo>
+                </a:path>
+              </a:pathLst>
+            </a:custGeom>
+          </p:spPr>
+          <p:txBody>
+            <a:bodyPr/>
+            <a:lstStyle/>
+            <a:p/>
+          </p:txBody>
+        </p:sp>
+        <p:sp>
+          <p:nvSpPr>
             <p:cNvPr id="22" name="pl22"/>
             <p:cNvSpPr/>
             <p:nvPr/>
           </p:nvSpPr>
           <p:spPr>
             <a:xfrm>
-              <a:off x="1024995" y="2073503"/>
-              <a:ext cx="7028352" cy="3045597"/>
+              <a:off x="1172049" y="4055909"/>
+              <a:ext cx="7090630" cy="1345795"/>
             </a:xfrm>
             <a:custGeom>
               <a:avLst/>
               <a:pathLst>
-                <a:path w="7028352" h="3045597">
+                <a:path w="7090630" h="1345795">
                   <a:moveTo>
+                    <a:pt x="7090630" y="1345795"/>
+                  </a:moveTo>
+                  <a:lnTo>
+                    <a:pt x="7019007" y="1340636"/>
+                  </a:lnTo>
+                  <a:lnTo>
+                    <a:pt x="6947385" y="1335307"/>
+                  </a:lnTo>
+                  <a:lnTo>
+                    <a:pt x="6875762" y="1329800"/>
+                  </a:lnTo>
+                  <a:lnTo>
+                    <a:pt x="6804139" y="1324111"/>
+                  </a:lnTo>
+                  <a:lnTo>
+                    <a:pt x="6732517" y="1318234"/>
+                  </a:lnTo>
+                  <a:lnTo>
+                    <a:pt x="6660894" y="1312161"/>
+                  </a:lnTo>
+                  <a:lnTo>
+                    <a:pt x="6589272" y="1305887"/>
+                  </a:lnTo>
+                  <a:lnTo>
+                    <a:pt x="6517649" y="1299405"/>
+                  </a:lnTo>
+                  <a:lnTo>
+                    <a:pt x="6446027" y="1292708"/>
+                  </a:lnTo>
+                  <a:lnTo>
+                    <a:pt x="6374404" y="1285789"/>
+                  </a:lnTo>
+                  <a:lnTo>
+                    <a:pt x="6302782" y="1278641"/>
+                  </a:lnTo>
+                  <a:lnTo>
+                    <a:pt x="6231159" y="1271255"/>
+                  </a:lnTo>
+                  <a:lnTo>
+                    <a:pt x="6159537" y="1263625"/>
+                  </a:lnTo>
+                  <a:lnTo>
+                    <a:pt x="6087914" y="1255741"/>
+                  </a:lnTo>
+                  <a:lnTo>
+                    <a:pt x="6016292" y="1247596"/>
+                  </a:lnTo>
+                  <a:lnTo>
+                    <a:pt x="5944669" y="1239181"/>
+                  </a:lnTo>
+                  <a:lnTo>
+                    <a:pt x="5873047" y="1230487"/>
+                  </a:lnTo>
+                  <a:lnTo>
+                    <a:pt x="5801424" y="1221504"/>
+                  </a:lnTo>
+                  <a:lnTo>
+                    <a:pt x="5729802" y="1212224"/>
+                  </a:lnTo>
+                  <a:lnTo>
+                    <a:pt x="5658179" y="1202635"/>
+                  </a:lnTo>
+                  <a:lnTo>
+                    <a:pt x="5586557" y="1192729"/>
+                  </a:lnTo>
+                  <a:lnTo>
+                    <a:pt x="5514934" y="1182494"/>
+                  </a:lnTo>
+                  <a:lnTo>
+                    <a:pt x="5443311" y="1171920"/>
+                  </a:lnTo>
+                  <a:lnTo>
+                    <a:pt x="5371689" y="1160995"/>
+                  </a:lnTo>
+                  <a:lnTo>
+                    <a:pt x="5300066" y="1149708"/>
+                  </a:lnTo>
+                  <a:lnTo>
+                    <a:pt x="5228444" y="1138047"/>
+                  </a:lnTo>
+                  <a:lnTo>
+                    <a:pt x="5156821" y="1125998"/>
+                  </a:lnTo>
+                  <a:lnTo>
+                    <a:pt x="5085199" y="1113551"/>
+                  </a:lnTo>
+                  <a:lnTo>
+                    <a:pt x="5013576" y="1100690"/>
+                  </a:lnTo>
+                  <a:lnTo>
+                    <a:pt x="4941954" y="1087403"/>
+                  </a:lnTo>
+                  <a:lnTo>
+                    <a:pt x="4870331" y="1073675"/>
+                  </a:lnTo>
+                  <a:lnTo>
+                    <a:pt x="4798709" y="1059492"/>
+                  </a:lnTo>
+                  <a:lnTo>
+                    <a:pt x="4727086" y="1044838"/>
+                  </a:lnTo>
+                  <a:lnTo>
+                    <a:pt x="4655464" y="1029699"/>
+                  </a:lnTo>
+                  <a:lnTo>
+                    <a:pt x="4583841" y="1014058"/>
+                  </a:lnTo>
+                  <a:lnTo>
+                    <a:pt x="4512219" y="997897"/>
+                  </a:lnTo>
+                  <a:lnTo>
+                    <a:pt x="4440596" y="981201"/>
+                  </a:lnTo>
+                  <a:lnTo>
+                    <a:pt x="4368974" y="963951"/>
+                  </a:lnTo>
+                  <a:lnTo>
+                    <a:pt x="4297351" y="946129"/>
+                  </a:lnTo>
+                  <a:lnTo>
+                    <a:pt x="4225729" y="927716"/>
+                  </a:lnTo>
+                  <a:lnTo>
+                    <a:pt x="4154106" y="908693"/>
+                  </a:lnTo>
+                  <a:lnTo>
+                    <a:pt x="4082483" y="889038"/>
+                  </a:lnTo>
+                  <a:lnTo>
+                    <a:pt x="4010861" y="868732"/>
+                  </a:lnTo>
+                  <a:lnTo>
+                    <a:pt x="3939238" y="847752"/>
+                  </a:lnTo>
+                  <a:lnTo>
+                    <a:pt x="3867616" y="826076"/>
+                  </a:lnTo>
+                  <a:lnTo>
+                    <a:pt x="3795993" y="803682"/>
+                  </a:lnTo>
+                  <a:lnTo>
+                    <a:pt x="3724371" y="780545"/>
+                  </a:lnTo>
+                  <a:lnTo>
+                    <a:pt x="3652748" y="756640"/>
+                  </a:lnTo>
+                  <a:lnTo>
+                    <a:pt x="3581126" y="731943"/>
+                  </a:lnTo>
+                  <a:lnTo>
+                    <a:pt x="3509503" y="706427"/>
+                  </a:lnTo>
+                  <a:lnTo>
+                    <a:pt x="3437881" y="680065"/>
+                  </a:lnTo>
+                  <a:lnTo>
+                    <a:pt x="3366258" y="664664"/>
+                  </a:lnTo>
+                  <a:lnTo>
+                    <a:pt x="3294636" y="654191"/>
+                  </a:lnTo>
+                  <a:lnTo>
+                    <a:pt x="3223013" y="643587"/>
+                  </a:lnTo>
+                  <a:lnTo>
+                    <a:pt x="3151391" y="632850"/>
+                  </a:lnTo>
+                  <a:lnTo>
+                    <a:pt x="3079768" y="621978"/>
+                  </a:lnTo>
+                  <a:lnTo>
+                    <a:pt x="3008146" y="610971"/>
+                  </a:lnTo>
+                  <a:lnTo>
+                    <a:pt x="2936523" y="599825"/>
+                  </a:lnTo>
+                  <a:lnTo>
+                    <a:pt x="2864901" y="588541"/>
+                  </a:lnTo>
+                  <a:lnTo>
+                    <a:pt x="2793278" y="577114"/>
+                  </a:lnTo>
+                  <a:lnTo>
+                    <a:pt x="2721655" y="565545"/>
+                  </a:lnTo>
+                  <a:lnTo>
+                    <a:pt x="2650033" y="553831"/>
+                  </a:lnTo>
+                  <a:lnTo>
+                    <a:pt x="2578410" y="541971"/>
+                  </a:lnTo>
+                  <a:lnTo>
+                    <a:pt x="2506788" y="529962"/>
+                  </a:lnTo>
+                  <a:lnTo>
+                    <a:pt x="2435165" y="517802"/>
+                  </a:lnTo>
+                  <a:lnTo>
+                    <a:pt x="2363543" y="505491"/>
+                  </a:lnTo>
+                  <a:lnTo>
+                    <a:pt x="2291920" y="493025"/>
+                  </a:lnTo>
+                  <a:lnTo>
+                    <a:pt x="2220298" y="480403"/>
+                  </a:lnTo>
+                  <a:lnTo>
+                    <a:pt x="2148675" y="467624"/>
+                  </a:lnTo>
+                  <a:lnTo>
+                    <a:pt x="2077053" y="454684"/>
+                  </a:lnTo>
+                  <a:lnTo>
+                    <a:pt x="2005430" y="441582"/>
+                  </a:lnTo>
+                  <a:lnTo>
+                    <a:pt x="1933808" y="428317"/>
+                  </a:lnTo>
+                  <a:lnTo>
+                    <a:pt x="1862185" y="414885"/>
+                  </a:lnTo>
+                  <a:lnTo>
+                    <a:pt x="1790563" y="401285"/>
+                  </a:lnTo>
+                  <a:lnTo>
+                    <a:pt x="1718940" y="387515"/>
+                  </a:lnTo>
+                  <a:lnTo>
+                    <a:pt x="1647318" y="373573"/>
+                  </a:lnTo>
+                  <a:lnTo>
+                    <a:pt x="1575695" y="359456"/>
+                  </a:lnTo>
+                  <a:lnTo>
+                    <a:pt x="1504073" y="345162"/>
+                  </a:lnTo>
+                  <a:lnTo>
+                    <a:pt x="1432450" y="330689"/>
+                  </a:lnTo>
+                  <a:lnTo>
+                    <a:pt x="1360827" y="316036"/>
+                  </a:lnTo>
+                  <a:lnTo>
+                    <a:pt x="1289205" y="301198"/>
+                  </a:lnTo>
+                  <a:lnTo>
+                    <a:pt x="1217582" y="286175"/>
+                  </a:lnTo>
+                  <a:lnTo>
+                    <a:pt x="1145960" y="270965"/>
+                  </a:lnTo>
+                  <a:lnTo>
+                    <a:pt x="1074337" y="255563"/>
+                  </a:lnTo>
+                  <a:lnTo>
+                    <a:pt x="1002715" y="239969"/>
+                  </a:lnTo>
+                  <a:lnTo>
+                    <a:pt x="931092" y="224180"/>
+                  </a:lnTo>
+                  <a:lnTo>
+                    <a:pt x="859470" y="208193"/>
+                  </a:lnTo>
+                  <a:lnTo>
+                    <a:pt x="787847" y="192005"/>
+                  </a:lnTo>
+                  <a:lnTo>
+                    <a:pt x="716225" y="175616"/>
+                  </a:lnTo>
+                  <a:lnTo>
+                    <a:pt x="644602" y="159021"/>
+                  </a:lnTo>
+                  <a:lnTo>
+                    <a:pt x="572980" y="142218"/>
+                  </a:lnTo>
+                  <a:lnTo>
+                    <a:pt x="501357" y="125205"/>
+                  </a:lnTo>
+                  <a:lnTo>
+                    <a:pt x="429735" y="107979"/>
+                  </a:lnTo>
+                  <a:lnTo>
+                    <a:pt x="358112" y="90537"/>
+                  </a:lnTo>
+                  <a:lnTo>
+                    <a:pt x="286490" y="72878"/>
+                  </a:lnTo>
+                  <a:lnTo>
+                    <a:pt x="214867" y="54997"/>
+                  </a:lnTo>
+                  <a:lnTo>
+                    <a:pt x="143245" y="36892"/>
+                  </a:lnTo>
+                  <a:lnTo>
+                    <a:pt x="71622" y="18560"/>
+                  </a:lnTo>
+                  <a:lnTo>
                     <a:pt x="0" y="0"/>
-                  </a:moveTo>
-                  <a:lnTo>
-                    <a:pt x="21149" y="32816"/>
-                  </a:lnTo>
-                  <a:lnTo>
-                    <a:pt x="94909" y="143589"/>
-                  </a:lnTo>
-                  <a:lnTo>
-                    <a:pt x="168669" y="250806"/>
-                  </a:lnTo>
-                  <a:lnTo>
-                    <a:pt x="242429" y="354582"/>
-                  </a:lnTo>
-                  <a:lnTo>
-                    <a:pt x="316190" y="455026"/>
-                  </a:lnTo>
-                  <a:lnTo>
-                    <a:pt x="389950" y="552246"/>
-                  </a:lnTo>
-                  <a:lnTo>
-                    <a:pt x="463710" y="646346"/>
-                  </a:lnTo>
-                  <a:lnTo>
-                    <a:pt x="537470" y="737425"/>
-                  </a:lnTo>
-                  <a:lnTo>
-                    <a:pt x="611230" y="825580"/>
-                  </a:lnTo>
-                  <a:lnTo>
-                    <a:pt x="684990" y="910906"/>
-                  </a:lnTo>
-                  <a:lnTo>
-                    <a:pt x="758750" y="993493"/>
-                  </a:lnTo>
-                  <a:lnTo>
-                    <a:pt x="832510" y="1073428"/>
-                  </a:lnTo>
-                  <a:lnTo>
-                    <a:pt x="906270" y="1150798"/>
-                  </a:lnTo>
-                  <a:lnTo>
-                    <a:pt x="980030" y="1225685"/>
-                  </a:lnTo>
-                  <a:lnTo>
-                    <a:pt x="1053790" y="1298167"/>
-                  </a:lnTo>
-                  <a:lnTo>
-                    <a:pt x="1127550" y="1368323"/>
-                  </a:lnTo>
-                  <a:lnTo>
-                    <a:pt x="1201310" y="1436227"/>
-                  </a:lnTo>
-                  <a:lnTo>
-                    <a:pt x="1275070" y="1501951"/>
-                  </a:lnTo>
-                  <a:lnTo>
-                    <a:pt x="1348830" y="1565566"/>
-                  </a:lnTo>
-                  <a:lnTo>
-                    <a:pt x="1422590" y="1627138"/>
-                  </a:lnTo>
-                  <a:lnTo>
-                    <a:pt x="1496350" y="1686734"/>
-                  </a:lnTo>
-                  <a:lnTo>
-                    <a:pt x="1570110" y="1744417"/>
-                  </a:lnTo>
-                  <a:lnTo>
-                    <a:pt x="1643870" y="1800249"/>
-                  </a:lnTo>
-                  <a:lnTo>
-                    <a:pt x="1717630" y="1854288"/>
-                  </a:lnTo>
-                  <a:lnTo>
-                    <a:pt x="1791390" y="1906593"/>
-                  </a:lnTo>
-                  <a:lnTo>
-                    <a:pt x="1865150" y="1957219"/>
-                  </a:lnTo>
-                  <a:lnTo>
-                    <a:pt x="1938910" y="2006219"/>
-                  </a:lnTo>
-                  <a:lnTo>
-                    <a:pt x="2012670" y="2053647"/>
-                  </a:lnTo>
-                  <a:lnTo>
-                    <a:pt x="2086430" y="2099553"/>
-                  </a:lnTo>
-                  <a:lnTo>
-                    <a:pt x="2160190" y="2143984"/>
-                  </a:lnTo>
-                  <a:lnTo>
-                    <a:pt x="2233950" y="2186990"/>
-                  </a:lnTo>
-                  <a:lnTo>
-                    <a:pt x="2307710" y="2228615"/>
-                  </a:lnTo>
-                  <a:lnTo>
-                    <a:pt x="2381470" y="2268904"/>
-                  </a:lnTo>
-                  <a:lnTo>
-                    <a:pt x="2455230" y="2307900"/>
-                  </a:lnTo>
-                  <a:lnTo>
-                    <a:pt x="2528990" y="2345644"/>
-                  </a:lnTo>
-                  <a:lnTo>
-                    <a:pt x="2602750" y="2382176"/>
-                  </a:lnTo>
-                  <a:lnTo>
-                    <a:pt x="2676510" y="2417536"/>
-                  </a:lnTo>
-                  <a:lnTo>
-                    <a:pt x="2750270" y="2451761"/>
-                  </a:lnTo>
-                  <a:lnTo>
-                    <a:pt x="2824030" y="2484887"/>
-                  </a:lnTo>
-                  <a:lnTo>
-                    <a:pt x="2897790" y="2516950"/>
-                  </a:lnTo>
-                  <a:lnTo>
-                    <a:pt x="2971550" y="2547984"/>
-                  </a:lnTo>
-                  <a:lnTo>
-                    <a:pt x="3045310" y="2578021"/>
-                  </a:lnTo>
-                  <a:lnTo>
-                    <a:pt x="3119070" y="2607094"/>
-                  </a:lnTo>
-                  <a:lnTo>
-                    <a:pt x="3192831" y="2635234"/>
-                  </a:lnTo>
-                  <a:lnTo>
-                    <a:pt x="3266591" y="2657415"/>
-                  </a:lnTo>
-                  <a:lnTo>
-                    <a:pt x="3340351" y="2667630"/>
-                  </a:lnTo>
-                  <a:lnTo>
-                    <a:pt x="3414111" y="2677720"/>
-                  </a:lnTo>
-                  <a:lnTo>
-                    <a:pt x="3487871" y="2687685"/>
-                  </a:lnTo>
-                  <a:lnTo>
-                    <a:pt x="3561631" y="2697526"/>
-                  </a:lnTo>
-                  <a:lnTo>
-                    <a:pt x="3635391" y="2707246"/>
-                  </a:lnTo>
-                  <a:lnTo>
-                    <a:pt x="3709151" y="2716846"/>
-                  </a:lnTo>
-                  <a:lnTo>
-                    <a:pt x="3782911" y="2726327"/>
-                  </a:lnTo>
-                  <a:lnTo>
-                    <a:pt x="3856671" y="2735691"/>
-                  </a:lnTo>
-                  <a:lnTo>
-                    <a:pt x="3930431" y="2744939"/>
-                  </a:lnTo>
-                  <a:lnTo>
-                    <a:pt x="4004191" y="2754073"/>
-                  </a:lnTo>
-                  <a:lnTo>
-                    <a:pt x="4077951" y="2763094"/>
-                  </a:lnTo>
-                  <a:lnTo>
-                    <a:pt x="4151711" y="2772003"/>
-                  </a:lnTo>
-                  <a:lnTo>
-                    <a:pt x="4225471" y="2780802"/>
-                  </a:lnTo>
-                  <a:lnTo>
-                    <a:pt x="4299231" y="2789493"/>
-                  </a:lnTo>
-                  <a:lnTo>
-                    <a:pt x="4372991" y="2798076"/>
-                  </a:lnTo>
-                  <a:lnTo>
-                    <a:pt x="4446751" y="2806553"/>
-                  </a:lnTo>
-                  <a:lnTo>
-                    <a:pt x="4520511" y="2814925"/>
-                  </a:lnTo>
-                  <a:lnTo>
-                    <a:pt x="4594271" y="2823193"/>
-                  </a:lnTo>
-                  <a:lnTo>
-                    <a:pt x="4668031" y="2831360"/>
-                  </a:lnTo>
-                  <a:lnTo>
-                    <a:pt x="4741791" y="2839425"/>
-                  </a:lnTo>
-                  <a:lnTo>
-                    <a:pt x="4815551" y="2847391"/>
-                  </a:lnTo>
-                  <a:lnTo>
-                    <a:pt x="4889311" y="2855258"/>
-                  </a:lnTo>
-                  <a:lnTo>
-                    <a:pt x="4963071" y="2863028"/>
-                  </a:lnTo>
-                  <a:lnTo>
-                    <a:pt x="5036831" y="2870702"/>
-                  </a:lnTo>
-                  <a:lnTo>
-                    <a:pt x="5110591" y="2878281"/>
-                  </a:lnTo>
-                  <a:lnTo>
-                    <a:pt x="5184351" y="2885766"/>
-                  </a:lnTo>
-                  <a:lnTo>
-                    <a:pt x="5258111" y="2893159"/>
-                  </a:lnTo>
-                  <a:lnTo>
-                    <a:pt x="5331871" y="2900460"/>
-                  </a:lnTo>
-                  <a:lnTo>
-                    <a:pt x="5405631" y="2907671"/>
-                  </a:lnTo>
-                  <a:lnTo>
-                    <a:pt x="5479391" y="2914793"/>
-                  </a:lnTo>
-                  <a:lnTo>
-                    <a:pt x="5553151" y="2921827"/>
-                  </a:lnTo>
-                  <a:lnTo>
-                    <a:pt x="5626911" y="2928774"/>
-                  </a:lnTo>
-                  <a:lnTo>
-                    <a:pt x="5700671" y="2935635"/>
-                  </a:lnTo>
-                  <a:lnTo>
-                    <a:pt x="5774431" y="2942411"/>
-                  </a:lnTo>
-                  <a:lnTo>
-                    <a:pt x="5848191" y="2949104"/>
-                  </a:lnTo>
-                  <a:lnTo>
-                    <a:pt x="5921951" y="2955713"/>
-                  </a:lnTo>
-                  <a:lnTo>
-                    <a:pt x="5995711" y="2962241"/>
-                  </a:lnTo>
-                  <a:lnTo>
-                    <a:pt x="6069471" y="2968689"/>
-                  </a:lnTo>
-                  <a:lnTo>
-                    <a:pt x="6143232" y="2975056"/>
-                  </a:lnTo>
-                  <a:lnTo>
-                    <a:pt x="6216992" y="2981345"/>
-                  </a:lnTo>
-                  <a:lnTo>
-                    <a:pt x="6290752" y="2987556"/>
-                  </a:lnTo>
-                  <a:lnTo>
-                    <a:pt x="6364512" y="2993691"/>
-                  </a:lnTo>
-                  <a:lnTo>
-                    <a:pt x="6438272" y="2999749"/>
-                  </a:lnTo>
-                  <a:lnTo>
-                    <a:pt x="6512032" y="3005733"/>
-                  </a:lnTo>
-                  <a:lnTo>
-                    <a:pt x="6585792" y="3011642"/>
-                  </a:lnTo>
-                  <a:lnTo>
-                    <a:pt x="6659552" y="3017479"/>
-                  </a:lnTo>
-                  <a:lnTo>
-                    <a:pt x="6733312" y="3023243"/>
-                  </a:lnTo>
-                  <a:lnTo>
-                    <a:pt x="6807072" y="3028937"/>
-                  </a:lnTo>
-                  <a:lnTo>
-                    <a:pt x="6880832" y="3034559"/>
-                  </a:lnTo>
-                  <a:lnTo>
-                    <a:pt x="6954592" y="3040113"/>
-                  </a:lnTo>
-                  <a:lnTo>
-                    <a:pt x="7028352" y="3045597"/>
                   </a:lnTo>
                 </a:path>
               </a:pathLst>
@@ -3940,637 +4222,312 @@
           </p:nvSpPr>
           <p:spPr>
             <a:xfrm>
-              <a:off x="817517" y="4072621"/>
-              <a:ext cx="7235830" cy="1329083"/>
+              <a:off x="1172049" y="3127586"/>
+              <a:ext cx="7090630" cy="2168604"/>
             </a:xfrm>
             <a:custGeom>
               <a:avLst/>
               <a:pathLst>
-                <a:path w="7235830" h="1329083">
-                  <a:moveTo>
-                    <a:pt x="7235830" y="1329083"/>
-                  </a:moveTo>
-                  <a:lnTo>
-                    <a:pt x="7162070" y="1323924"/>
-                  </a:lnTo>
-                  <a:lnTo>
-                    <a:pt x="7088310" y="1318595"/>
-                  </a:lnTo>
-                  <a:lnTo>
-                    <a:pt x="7014550" y="1313088"/>
-                  </a:lnTo>
-                  <a:lnTo>
-                    <a:pt x="6940789" y="1307399"/>
-                  </a:lnTo>
-                  <a:lnTo>
-                    <a:pt x="6867029" y="1301522"/>
-                  </a:lnTo>
-                  <a:lnTo>
-                    <a:pt x="6793269" y="1295449"/>
-                  </a:lnTo>
-                  <a:lnTo>
-                    <a:pt x="6719509" y="1289175"/>
-                  </a:lnTo>
-                  <a:lnTo>
-                    <a:pt x="6645749" y="1282693"/>
-                  </a:lnTo>
-                  <a:lnTo>
-                    <a:pt x="6571989" y="1275996"/>
-                  </a:lnTo>
-                  <a:lnTo>
-                    <a:pt x="6498229" y="1269077"/>
-                  </a:lnTo>
-                  <a:lnTo>
-                    <a:pt x="6424469" y="1261929"/>
-                  </a:lnTo>
-                  <a:lnTo>
-                    <a:pt x="6350709" y="1254543"/>
-                  </a:lnTo>
-                  <a:lnTo>
-                    <a:pt x="6276949" y="1246913"/>
-                  </a:lnTo>
-                  <a:lnTo>
-                    <a:pt x="6203189" y="1239029"/>
-                  </a:lnTo>
-                  <a:lnTo>
-                    <a:pt x="6129429" y="1230884"/>
-                  </a:lnTo>
-                  <a:lnTo>
-                    <a:pt x="6055669" y="1222469"/>
-                  </a:lnTo>
-                  <a:lnTo>
-                    <a:pt x="5981909" y="1213775"/>
-                  </a:lnTo>
-                  <a:lnTo>
-                    <a:pt x="5908149" y="1204792"/>
-                  </a:lnTo>
-                  <a:lnTo>
-                    <a:pt x="5834389" y="1195512"/>
-                  </a:lnTo>
-                  <a:lnTo>
-                    <a:pt x="5760629" y="1185923"/>
-                  </a:lnTo>
-                  <a:lnTo>
-                    <a:pt x="5686869" y="1176017"/>
-                  </a:lnTo>
-                  <a:lnTo>
-                    <a:pt x="5613109" y="1165782"/>
-                  </a:lnTo>
-                  <a:lnTo>
-                    <a:pt x="5539349" y="1155208"/>
-                  </a:lnTo>
-                  <a:lnTo>
-                    <a:pt x="5465589" y="1144283"/>
-                  </a:lnTo>
-                  <a:lnTo>
-                    <a:pt x="5391829" y="1132996"/>
-                  </a:lnTo>
-                  <a:lnTo>
-                    <a:pt x="5318069" y="1121335"/>
-                  </a:lnTo>
-                  <a:lnTo>
-                    <a:pt x="5244309" y="1109286"/>
-                  </a:lnTo>
-                  <a:lnTo>
-                    <a:pt x="5170549" y="1096839"/>
-                  </a:lnTo>
-                  <a:lnTo>
-                    <a:pt x="5096789" y="1083978"/>
-                  </a:lnTo>
-                  <a:lnTo>
-                    <a:pt x="5023029" y="1070691"/>
-                  </a:lnTo>
-                  <a:lnTo>
-                    <a:pt x="4949269" y="1056963"/>
-                  </a:lnTo>
-                  <a:lnTo>
-                    <a:pt x="4875509" y="1042780"/>
-                  </a:lnTo>
-                  <a:lnTo>
-                    <a:pt x="4801749" y="1028126"/>
-                  </a:lnTo>
-                  <a:lnTo>
-                    <a:pt x="4727989" y="1012987"/>
-                  </a:lnTo>
-                  <a:lnTo>
-                    <a:pt x="4654229" y="997346"/>
-                  </a:lnTo>
-                  <a:lnTo>
-                    <a:pt x="4580469" y="981185"/>
-                  </a:lnTo>
-                  <a:lnTo>
-                    <a:pt x="4506709" y="964489"/>
-                  </a:lnTo>
-                  <a:lnTo>
-                    <a:pt x="4432949" y="947239"/>
-                  </a:lnTo>
-                  <a:lnTo>
-                    <a:pt x="4359189" y="929417"/>
-                  </a:lnTo>
-                  <a:lnTo>
-                    <a:pt x="4285429" y="911004"/>
-                  </a:lnTo>
-                  <a:lnTo>
-                    <a:pt x="4211669" y="891981"/>
-                  </a:lnTo>
-                  <a:lnTo>
-                    <a:pt x="4137909" y="872326"/>
-                  </a:lnTo>
-                  <a:lnTo>
-                    <a:pt x="4064149" y="852020"/>
-                  </a:lnTo>
-                  <a:lnTo>
-                    <a:pt x="3990388" y="831040"/>
-                  </a:lnTo>
-                  <a:lnTo>
-                    <a:pt x="3916628" y="809364"/>
-                  </a:lnTo>
-                  <a:lnTo>
-                    <a:pt x="3842868" y="786970"/>
-                  </a:lnTo>
-                  <a:lnTo>
-                    <a:pt x="3769108" y="763833"/>
-                  </a:lnTo>
-                  <a:lnTo>
-                    <a:pt x="3695348" y="739929"/>
-                  </a:lnTo>
-                  <a:lnTo>
-                    <a:pt x="3621588" y="715231"/>
-                  </a:lnTo>
-                  <a:lnTo>
-                    <a:pt x="3547828" y="689715"/>
-                  </a:lnTo>
-                  <a:lnTo>
-                    <a:pt x="3474068" y="663353"/>
-                  </a:lnTo>
-                  <a:lnTo>
-                    <a:pt x="3400308" y="647952"/>
-                  </a:lnTo>
-                  <a:lnTo>
-                    <a:pt x="3326548" y="637479"/>
-                  </a:lnTo>
-                  <a:lnTo>
-                    <a:pt x="3252788" y="626875"/>
-                  </a:lnTo>
-                  <a:lnTo>
-                    <a:pt x="3179028" y="616138"/>
-                  </a:lnTo>
-                  <a:lnTo>
-                    <a:pt x="3105268" y="605266"/>
-                  </a:lnTo>
-                  <a:lnTo>
-                    <a:pt x="3031508" y="594259"/>
-                  </a:lnTo>
-                  <a:lnTo>
-                    <a:pt x="2957748" y="583113"/>
-                  </a:lnTo>
-                  <a:lnTo>
-                    <a:pt x="2883988" y="571829"/>
-                  </a:lnTo>
-                  <a:lnTo>
-                    <a:pt x="2810228" y="560402"/>
-                  </a:lnTo>
-                  <a:lnTo>
-                    <a:pt x="2736468" y="548833"/>
-                  </a:lnTo>
-                  <a:lnTo>
-                    <a:pt x="2662708" y="537119"/>
-                  </a:lnTo>
-                  <a:lnTo>
-                    <a:pt x="2588948" y="525259"/>
-                  </a:lnTo>
-                  <a:lnTo>
-                    <a:pt x="2515188" y="513250"/>
-                  </a:lnTo>
-                  <a:lnTo>
-                    <a:pt x="2441428" y="501090"/>
-                  </a:lnTo>
-                  <a:lnTo>
-                    <a:pt x="2367668" y="488779"/>
-                  </a:lnTo>
-                  <a:lnTo>
-                    <a:pt x="2293908" y="476313"/>
-                  </a:lnTo>
-                  <a:lnTo>
-                    <a:pt x="2220148" y="463692"/>
-                  </a:lnTo>
-                  <a:lnTo>
-                    <a:pt x="2146388" y="450912"/>
-                  </a:lnTo>
-                  <a:lnTo>
-                    <a:pt x="2072628" y="437972"/>
-                  </a:lnTo>
-                  <a:lnTo>
-                    <a:pt x="1998868" y="424870"/>
-                  </a:lnTo>
-                  <a:lnTo>
-                    <a:pt x="1925108" y="411605"/>
-                  </a:lnTo>
-                  <a:lnTo>
-                    <a:pt x="1851348" y="398173"/>
-                  </a:lnTo>
-                  <a:lnTo>
-                    <a:pt x="1777588" y="384573"/>
-                  </a:lnTo>
-                  <a:lnTo>
-                    <a:pt x="1703828" y="370803"/>
-                  </a:lnTo>
-                  <a:lnTo>
-                    <a:pt x="1630068" y="356861"/>
-                  </a:lnTo>
-                  <a:lnTo>
-                    <a:pt x="1556308" y="342744"/>
-                  </a:lnTo>
-                  <a:lnTo>
-                    <a:pt x="1482548" y="328450"/>
-                  </a:lnTo>
-                  <a:lnTo>
-                    <a:pt x="1408788" y="313977"/>
-                  </a:lnTo>
-                  <a:lnTo>
-                    <a:pt x="1335028" y="299324"/>
-                  </a:lnTo>
-                  <a:lnTo>
-                    <a:pt x="1261268" y="284486"/>
-                  </a:lnTo>
-                  <a:lnTo>
-                    <a:pt x="1187508" y="269464"/>
-                  </a:lnTo>
-                  <a:lnTo>
-                    <a:pt x="1113747" y="254253"/>
-                  </a:lnTo>
-                  <a:lnTo>
-                    <a:pt x="1039987" y="238851"/>
-                  </a:lnTo>
-                  <a:lnTo>
-                    <a:pt x="966227" y="223257"/>
-                  </a:lnTo>
-                  <a:lnTo>
-                    <a:pt x="892467" y="207468"/>
-                  </a:lnTo>
-                  <a:lnTo>
-                    <a:pt x="818707" y="191481"/>
-                  </a:lnTo>
-                  <a:lnTo>
-                    <a:pt x="744947" y="175293"/>
-                  </a:lnTo>
-                  <a:lnTo>
-                    <a:pt x="671187" y="158904"/>
-                  </a:lnTo>
-                  <a:lnTo>
-                    <a:pt x="597427" y="142309"/>
-                  </a:lnTo>
-                  <a:lnTo>
-                    <a:pt x="523667" y="125506"/>
-                  </a:lnTo>
-                  <a:lnTo>
-                    <a:pt x="449907" y="108493"/>
-                  </a:lnTo>
-                  <a:lnTo>
-                    <a:pt x="376147" y="91267"/>
-                  </a:lnTo>
-                  <a:lnTo>
-                    <a:pt x="302387" y="73826"/>
-                  </a:lnTo>
-                  <a:lnTo>
-                    <a:pt x="228627" y="56166"/>
-                  </a:lnTo>
-                  <a:lnTo>
-                    <a:pt x="154867" y="38285"/>
-                  </a:lnTo>
-                  <a:lnTo>
-                    <a:pt x="81107" y="20180"/>
-                  </a:lnTo>
-                  <a:lnTo>
-                    <a:pt x="7347" y="1848"/>
-                  </a:lnTo>
-                  <a:lnTo>
-                    <a:pt x="0" y="0"/>
-                  </a:lnTo>
-                </a:path>
-              </a:pathLst>
-            </a:custGeom>
-          </p:spPr>
-          <p:txBody>
-            <a:bodyPr/>
-            <a:lstStyle/>
-            <a:p/>
-          </p:txBody>
-        </p:sp>
-        <p:sp>
-          <p:nvSpPr>
-            <p:cNvPr id="24" name="pl24"/>
-            <p:cNvSpPr/>
-            <p:nvPr/>
-          </p:nvSpPr>
-          <p:spPr>
-            <a:xfrm>
-              <a:off x="817517" y="3176328"/>
-              <a:ext cx="7235830" cy="2119861"/>
-            </a:xfrm>
-            <a:custGeom>
-              <a:avLst/>
-              <a:pathLst>
-                <a:path w="7235830" h="2119861">
+                <a:path w="7090630" h="2168604">
                   <a:moveTo>
                     <a:pt x="0" y="0"/>
                   </a:moveTo>
                   <a:lnTo>
-                    <a:pt x="7347" y="5392"/>
-                  </a:lnTo>
-                  <a:lnTo>
-                    <a:pt x="81107" y="58321"/>
-                  </a:lnTo>
-                  <a:lnTo>
-                    <a:pt x="154867" y="110071"/>
-                  </a:lnTo>
-                  <a:lnTo>
-                    <a:pt x="228627" y="160668"/>
-                  </a:lnTo>
-                  <a:lnTo>
-                    <a:pt x="302387" y="210137"/>
-                  </a:lnTo>
-                  <a:lnTo>
-                    <a:pt x="376147" y="258504"/>
-                  </a:lnTo>
-                  <a:lnTo>
-                    <a:pt x="449907" y="305794"/>
-                  </a:lnTo>
-                  <a:lnTo>
-                    <a:pt x="523667" y="352030"/>
-                  </a:lnTo>
-                  <a:lnTo>
-                    <a:pt x="597427" y="397235"/>
-                  </a:lnTo>
-                  <a:lnTo>
-                    <a:pt x="671187" y="441434"/>
-                  </a:lnTo>
-                  <a:lnTo>
-                    <a:pt x="744947" y="484647"/>
-                  </a:lnTo>
-                  <a:lnTo>
-                    <a:pt x="818707" y="526898"/>
-                  </a:lnTo>
-                  <a:lnTo>
-                    <a:pt x="892467" y="568208"/>
-                  </a:lnTo>
-                  <a:lnTo>
-                    <a:pt x="966227" y="608597"/>
-                  </a:lnTo>
-                  <a:lnTo>
-                    <a:pt x="1039987" y="648086"/>
-                  </a:lnTo>
-                  <a:lnTo>
-                    <a:pt x="1113747" y="686695"/>
-                  </a:lnTo>
-                  <a:lnTo>
-                    <a:pt x="1187508" y="724444"/>
-                  </a:lnTo>
-                  <a:lnTo>
-                    <a:pt x="1261268" y="761352"/>
-                  </a:lnTo>
-                  <a:lnTo>
-                    <a:pt x="1335028" y="797437"/>
-                  </a:lnTo>
-                  <a:lnTo>
-                    <a:pt x="1408788" y="832719"/>
-                  </a:lnTo>
-                  <a:lnTo>
-                    <a:pt x="1482548" y="867214"/>
-                  </a:lnTo>
-                  <a:lnTo>
-                    <a:pt x="1556308" y="900941"/>
-                  </a:lnTo>
-                  <a:lnTo>
-                    <a:pt x="1630068" y="933916"/>
-                  </a:lnTo>
-                  <a:lnTo>
-                    <a:pt x="1703828" y="966157"/>
-                  </a:lnTo>
-                  <a:lnTo>
-                    <a:pt x="1777588" y="997679"/>
-                  </a:lnTo>
-                  <a:lnTo>
-                    <a:pt x="1851348" y="1028499"/>
-                  </a:lnTo>
-                  <a:lnTo>
-                    <a:pt x="1925108" y="1058633"/>
-                  </a:lnTo>
-                  <a:lnTo>
-                    <a:pt x="1998868" y="1088094"/>
-                  </a:lnTo>
-                  <a:lnTo>
-                    <a:pt x="2072628" y="1116900"/>
-                  </a:lnTo>
-                  <a:lnTo>
-                    <a:pt x="2146388" y="1145063"/>
-                  </a:lnTo>
-                  <a:lnTo>
-                    <a:pt x="2220148" y="1172600"/>
-                  </a:lnTo>
-                  <a:lnTo>
-                    <a:pt x="2293908" y="1199522"/>
-                  </a:lnTo>
-                  <a:lnTo>
-                    <a:pt x="2367668" y="1225845"/>
-                  </a:lnTo>
-                  <a:lnTo>
-                    <a:pt x="2441428" y="1251581"/>
-                  </a:lnTo>
-                  <a:lnTo>
-                    <a:pt x="2515188" y="1276744"/>
-                  </a:lnTo>
-                  <a:lnTo>
-                    <a:pt x="2588948" y="1301346"/>
-                  </a:lnTo>
-                  <a:lnTo>
-                    <a:pt x="2662708" y="1325400"/>
-                  </a:lnTo>
-                  <a:lnTo>
-                    <a:pt x="2736468" y="1348918"/>
-                  </a:lnTo>
-                  <a:lnTo>
-                    <a:pt x="2810228" y="1371912"/>
-                  </a:lnTo>
-                  <a:lnTo>
-                    <a:pt x="2883988" y="1394394"/>
-                  </a:lnTo>
-                  <a:lnTo>
-                    <a:pt x="2957748" y="1416374"/>
-                  </a:lnTo>
-                  <a:lnTo>
-                    <a:pt x="3031508" y="1437865"/>
-                  </a:lnTo>
-                  <a:lnTo>
-                    <a:pt x="3105268" y="1458878"/>
-                  </a:lnTo>
-                  <a:lnTo>
-                    <a:pt x="3179028" y="1479422"/>
-                  </a:lnTo>
-                  <a:lnTo>
-                    <a:pt x="3252788" y="1499508"/>
-                  </a:lnTo>
-                  <a:lnTo>
-                    <a:pt x="3326548" y="1519147"/>
-                  </a:lnTo>
-                  <a:lnTo>
-                    <a:pt x="3400308" y="1538348"/>
-                  </a:lnTo>
-                  <a:lnTo>
-                    <a:pt x="3474068" y="1557121"/>
-                  </a:lnTo>
-                  <a:lnTo>
-                    <a:pt x="3547828" y="1575476"/>
-                  </a:lnTo>
-                  <a:lnTo>
-                    <a:pt x="3621588" y="1593422"/>
-                  </a:lnTo>
-                  <a:lnTo>
-                    <a:pt x="3695348" y="1610968"/>
-                  </a:lnTo>
-                  <a:lnTo>
-                    <a:pt x="3769108" y="1628124"/>
-                  </a:lnTo>
-                  <a:lnTo>
-                    <a:pt x="3842868" y="1644897"/>
-                  </a:lnTo>
-                  <a:lnTo>
-                    <a:pt x="3916628" y="1661296"/>
-                  </a:lnTo>
-                  <a:lnTo>
-                    <a:pt x="3990388" y="1677330"/>
-                  </a:lnTo>
-                  <a:lnTo>
-                    <a:pt x="4064149" y="1693007"/>
-                  </a:lnTo>
-                  <a:lnTo>
-                    <a:pt x="4137909" y="1708334"/>
-                  </a:lnTo>
-                  <a:lnTo>
-                    <a:pt x="4211669" y="1723320"/>
-                  </a:lnTo>
-                  <a:lnTo>
-                    <a:pt x="4285429" y="1737972"/>
-                  </a:lnTo>
-                  <a:lnTo>
-                    <a:pt x="4359189" y="1752298"/>
-                  </a:lnTo>
-                  <a:lnTo>
-                    <a:pt x="4432949" y="1766304"/>
-                  </a:lnTo>
-                  <a:lnTo>
-                    <a:pt x="4506709" y="1779998"/>
-                  </a:lnTo>
-                  <a:lnTo>
-                    <a:pt x="4580469" y="1793387"/>
-                  </a:lnTo>
-                  <a:lnTo>
-                    <a:pt x="4654229" y="1806478"/>
-                  </a:lnTo>
-                  <a:lnTo>
-                    <a:pt x="4727989" y="1819277"/>
-                  </a:lnTo>
-                  <a:lnTo>
-                    <a:pt x="4801749" y="1831791"/>
-                  </a:lnTo>
-                  <a:lnTo>
-                    <a:pt x="4875509" y="1844026"/>
-                  </a:lnTo>
-                  <a:lnTo>
-                    <a:pt x="4949269" y="1855989"/>
-                  </a:lnTo>
-                  <a:lnTo>
-                    <a:pt x="5023029" y="1867685"/>
-                  </a:lnTo>
-                  <a:lnTo>
-                    <a:pt x="5096789" y="1879120"/>
-                  </a:lnTo>
-                  <a:lnTo>
-                    <a:pt x="5170549" y="1890301"/>
-                  </a:lnTo>
-                  <a:lnTo>
-                    <a:pt x="5244309" y="1901232"/>
-                  </a:lnTo>
-                  <a:lnTo>
-                    <a:pt x="5318069" y="1911920"/>
-                  </a:lnTo>
-                  <a:lnTo>
-                    <a:pt x="5391829" y="1922370"/>
-                  </a:lnTo>
-                  <a:lnTo>
-                    <a:pt x="5465589" y="1932587"/>
-                  </a:lnTo>
-                  <a:lnTo>
-                    <a:pt x="5539349" y="1942576"/>
-                  </a:lnTo>
-                  <a:lnTo>
-                    <a:pt x="5613109" y="1952343"/>
-                  </a:lnTo>
-                  <a:lnTo>
-                    <a:pt x="5686869" y="1961892"/>
-                  </a:lnTo>
-                  <a:lnTo>
-                    <a:pt x="5760629" y="1971228"/>
-                  </a:lnTo>
-                  <a:lnTo>
-                    <a:pt x="5834389" y="1980357"/>
-                  </a:lnTo>
-                  <a:lnTo>
-                    <a:pt x="5908149" y="1989282"/>
-                  </a:lnTo>
-                  <a:lnTo>
-                    <a:pt x="5981909" y="1998008"/>
-                  </a:lnTo>
-                  <a:lnTo>
-                    <a:pt x="6055669" y="2006540"/>
-                  </a:lnTo>
-                  <a:lnTo>
-                    <a:pt x="6129429" y="2014881"/>
-                  </a:lnTo>
-                  <a:lnTo>
-                    <a:pt x="6203189" y="2023037"/>
-                  </a:lnTo>
-                  <a:lnTo>
-                    <a:pt x="6276949" y="2031011"/>
-                  </a:lnTo>
-                  <a:lnTo>
-                    <a:pt x="6350709" y="2038807"/>
-                  </a:lnTo>
-                  <a:lnTo>
-                    <a:pt x="6424469" y="2046430"/>
-                  </a:lnTo>
-                  <a:lnTo>
-                    <a:pt x="6498229" y="2053883"/>
-                  </a:lnTo>
-                  <a:lnTo>
-                    <a:pt x="6571989" y="2061169"/>
-                  </a:lnTo>
-                  <a:lnTo>
-                    <a:pt x="6645749" y="2068294"/>
-                  </a:lnTo>
-                  <a:lnTo>
-                    <a:pt x="6719509" y="2075259"/>
-                  </a:lnTo>
-                  <a:lnTo>
-                    <a:pt x="6793269" y="2082070"/>
-                  </a:lnTo>
-                  <a:lnTo>
-                    <a:pt x="6867029" y="2088728"/>
-                  </a:lnTo>
-                  <a:lnTo>
-                    <a:pt x="6940789" y="2095239"/>
-                  </a:lnTo>
-                  <a:lnTo>
-                    <a:pt x="7014550" y="2101604"/>
-                  </a:lnTo>
-                  <a:lnTo>
-                    <a:pt x="7088310" y="2107827"/>
-                  </a:lnTo>
-                  <a:lnTo>
-                    <a:pt x="7162070" y="2113912"/>
-                  </a:lnTo>
-                  <a:lnTo>
-                    <a:pt x="7235830" y="2119861"/>
+                    <a:pt x="71622" y="54135"/>
+                  </a:lnTo>
+                  <a:lnTo>
+                    <a:pt x="143245" y="107064"/>
+                  </a:lnTo>
+                  <a:lnTo>
+                    <a:pt x="214867" y="158814"/>
+                  </a:lnTo>
+                  <a:lnTo>
+                    <a:pt x="286490" y="209410"/>
+                  </a:lnTo>
+                  <a:lnTo>
+                    <a:pt x="358112" y="258880"/>
+                  </a:lnTo>
+                  <a:lnTo>
+                    <a:pt x="429735" y="307247"/>
+                  </a:lnTo>
+                  <a:lnTo>
+                    <a:pt x="501357" y="354536"/>
+                  </a:lnTo>
+                  <a:lnTo>
+                    <a:pt x="572980" y="400772"/>
+                  </a:lnTo>
+                  <a:lnTo>
+                    <a:pt x="644602" y="445978"/>
+                  </a:lnTo>
+                  <a:lnTo>
+                    <a:pt x="716225" y="490176"/>
+                  </a:lnTo>
+                  <a:lnTo>
+                    <a:pt x="787847" y="533390"/>
+                  </a:lnTo>
+                  <a:lnTo>
+                    <a:pt x="859470" y="575641"/>
+                  </a:lnTo>
+                  <a:lnTo>
+                    <a:pt x="931092" y="616950"/>
+                  </a:lnTo>
+                  <a:lnTo>
+                    <a:pt x="1002715" y="657339"/>
+                  </a:lnTo>
+                  <a:lnTo>
+                    <a:pt x="1074337" y="696828"/>
+                  </a:lnTo>
+                  <a:lnTo>
+                    <a:pt x="1145960" y="735437"/>
+                  </a:lnTo>
+                  <a:lnTo>
+                    <a:pt x="1217582" y="773186"/>
+                  </a:lnTo>
+                  <a:lnTo>
+                    <a:pt x="1289205" y="810094"/>
+                  </a:lnTo>
+                  <a:lnTo>
+                    <a:pt x="1360827" y="846180"/>
+                  </a:lnTo>
+                  <a:lnTo>
+                    <a:pt x="1432450" y="881461"/>
+                  </a:lnTo>
+                  <a:lnTo>
+                    <a:pt x="1504073" y="915957"/>
+                  </a:lnTo>
+                  <a:lnTo>
+                    <a:pt x="1575695" y="949684"/>
+                  </a:lnTo>
+                  <a:lnTo>
+                    <a:pt x="1647318" y="982659"/>
+                  </a:lnTo>
+                  <a:lnTo>
+                    <a:pt x="1718940" y="1014900"/>
+                  </a:lnTo>
+                  <a:lnTo>
+                    <a:pt x="1790563" y="1046422"/>
+                  </a:lnTo>
+                  <a:lnTo>
+                    <a:pt x="1862185" y="1077242"/>
+                  </a:lnTo>
+                  <a:lnTo>
+                    <a:pt x="1933808" y="1107375"/>
+                  </a:lnTo>
+                  <a:lnTo>
+                    <a:pt x="2005430" y="1136837"/>
+                  </a:lnTo>
+                  <a:lnTo>
+                    <a:pt x="2077053" y="1165642"/>
+                  </a:lnTo>
+                  <a:lnTo>
+                    <a:pt x="2148675" y="1193806"/>
+                  </a:lnTo>
+                  <a:lnTo>
+                    <a:pt x="2220298" y="1221342"/>
+                  </a:lnTo>
+                  <a:lnTo>
+                    <a:pt x="2291920" y="1248265"/>
+                  </a:lnTo>
+                  <a:lnTo>
+                    <a:pt x="2363543" y="1274587"/>
+                  </a:lnTo>
+                  <a:lnTo>
+                    <a:pt x="2435165" y="1300324"/>
+                  </a:lnTo>
+                  <a:lnTo>
+                    <a:pt x="2506788" y="1325486"/>
+                  </a:lnTo>
+                  <a:lnTo>
+                    <a:pt x="2578410" y="1350089"/>
+                  </a:lnTo>
+                  <a:lnTo>
+                    <a:pt x="2650033" y="1374142"/>
+                  </a:lnTo>
+                  <a:lnTo>
+                    <a:pt x="2721655" y="1397661"/>
+                  </a:lnTo>
+                  <a:lnTo>
+                    <a:pt x="2793278" y="1420655"/>
+                  </a:lnTo>
+                  <a:lnTo>
+                    <a:pt x="2864901" y="1443136"/>
+                  </a:lnTo>
+                  <a:lnTo>
+                    <a:pt x="2936523" y="1465117"/>
+                  </a:lnTo>
+                  <a:lnTo>
+                    <a:pt x="3008146" y="1486608"/>
+                  </a:lnTo>
+                  <a:lnTo>
+                    <a:pt x="3079768" y="1507620"/>
+                  </a:lnTo>
+                  <a:lnTo>
+                    <a:pt x="3151391" y="1528164"/>
+                  </a:lnTo>
+                  <a:lnTo>
+                    <a:pt x="3223013" y="1548250"/>
+                  </a:lnTo>
+                  <a:lnTo>
+                    <a:pt x="3294636" y="1567889"/>
+                  </a:lnTo>
+                  <a:lnTo>
+                    <a:pt x="3366258" y="1587090"/>
+                  </a:lnTo>
+                  <a:lnTo>
+                    <a:pt x="3437881" y="1605864"/>
+                  </a:lnTo>
+                  <a:lnTo>
+                    <a:pt x="3509503" y="1624219"/>
+                  </a:lnTo>
+                  <a:lnTo>
+                    <a:pt x="3581126" y="1642165"/>
+                  </a:lnTo>
+                  <a:lnTo>
+                    <a:pt x="3652748" y="1659711"/>
+                  </a:lnTo>
+                  <a:lnTo>
+                    <a:pt x="3724371" y="1676866"/>
+                  </a:lnTo>
+                  <a:lnTo>
+                    <a:pt x="3795993" y="1693639"/>
+                  </a:lnTo>
+                  <a:lnTo>
+                    <a:pt x="3867616" y="1710039"/>
+                  </a:lnTo>
+                  <a:lnTo>
+                    <a:pt x="3939238" y="1726073"/>
+                  </a:lnTo>
+                  <a:lnTo>
+                    <a:pt x="4010861" y="1741749"/>
+                  </a:lnTo>
+                  <a:lnTo>
+                    <a:pt x="4082483" y="1757077"/>
+                  </a:lnTo>
+                  <a:lnTo>
+                    <a:pt x="4154106" y="1772063"/>
+                  </a:lnTo>
+                  <a:lnTo>
+                    <a:pt x="4225729" y="1786715"/>
+                  </a:lnTo>
+                  <a:lnTo>
+                    <a:pt x="4297351" y="1801040"/>
+                  </a:lnTo>
+                  <a:lnTo>
+                    <a:pt x="4368974" y="1815046"/>
+                  </a:lnTo>
+                  <a:lnTo>
+                    <a:pt x="4440596" y="1828741"/>
+                  </a:lnTo>
+                  <a:lnTo>
+                    <a:pt x="4512219" y="1842130"/>
+                  </a:lnTo>
+                  <a:lnTo>
+                    <a:pt x="4583841" y="1855221"/>
+                  </a:lnTo>
+                  <a:lnTo>
+                    <a:pt x="4655464" y="1868020"/>
+                  </a:lnTo>
+                  <a:lnTo>
+                    <a:pt x="4727086" y="1880534"/>
+                  </a:lnTo>
+                  <a:lnTo>
+                    <a:pt x="4798709" y="1892769"/>
+                  </a:lnTo>
+                  <a:lnTo>
+                    <a:pt x="4870331" y="1904731"/>
+                  </a:lnTo>
+                  <a:lnTo>
+                    <a:pt x="4941954" y="1916427"/>
+                  </a:lnTo>
+                  <a:lnTo>
+                    <a:pt x="5013576" y="1927863"/>
+                  </a:lnTo>
+                  <a:lnTo>
+                    <a:pt x="5085199" y="1939043"/>
+                  </a:lnTo>
+                  <a:lnTo>
+                    <a:pt x="5156821" y="1949975"/>
+                  </a:lnTo>
+                  <a:lnTo>
+                    <a:pt x="5228444" y="1960663"/>
+                  </a:lnTo>
+                  <a:lnTo>
+                    <a:pt x="5300066" y="1971113"/>
+                  </a:lnTo>
+                  <a:lnTo>
+                    <a:pt x="5371689" y="1981330"/>
+                  </a:lnTo>
+                  <a:lnTo>
+                    <a:pt x="5443311" y="1991319"/>
+                  </a:lnTo>
+                  <a:lnTo>
+                    <a:pt x="5514934" y="2001086"/>
+                  </a:lnTo>
+                  <a:lnTo>
+                    <a:pt x="5586557" y="2010635"/>
+                  </a:lnTo>
+                  <a:lnTo>
+                    <a:pt x="5658179" y="2019971"/>
+                  </a:lnTo>
+                  <a:lnTo>
+                    <a:pt x="5729802" y="2029099"/>
+                  </a:lnTo>
+                  <a:lnTo>
+                    <a:pt x="5801424" y="2038024"/>
+                  </a:lnTo>
+                  <a:lnTo>
+                    <a:pt x="5873047" y="2046750"/>
+                  </a:lnTo>
+                  <a:lnTo>
+                    <a:pt x="5944669" y="2055282"/>
+                  </a:lnTo>
+                  <a:lnTo>
+                    <a:pt x="6016292" y="2063624"/>
+                  </a:lnTo>
+                  <a:lnTo>
+                    <a:pt x="6087914" y="2071779"/>
+                  </a:lnTo>
+                  <a:lnTo>
+                    <a:pt x="6159537" y="2079753"/>
+                  </a:lnTo>
+                  <a:lnTo>
+                    <a:pt x="6231159" y="2087550"/>
+                  </a:lnTo>
+                  <a:lnTo>
+                    <a:pt x="6302782" y="2095172"/>
+                  </a:lnTo>
+                  <a:lnTo>
+                    <a:pt x="6374404" y="2102625"/>
+                  </a:lnTo>
+                  <a:lnTo>
+                    <a:pt x="6446027" y="2109912"/>
+                  </a:lnTo>
+                  <a:lnTo>
+                    <a:pt x="6517649" y="2117036"/>
+                  </a:lnTo>
+                  <a:lnTo>
+                    <a:pt x="6589272" y="2124002"/>
+                  </a:lnTo>
+                  <a:lnTo>
+                    <a:pt x="6660894" y="2130812"/>
+                  </a:lnTo>
+                  <a:lnTo>
+                    <a:pt x="6732517" y="2137471"/>
+                  </a:lnTo>
+                  <a:lnTo>
+                    <a:pt x="6804139" y="2143981"/>
+                  </a:lnTo>
+                  <a:lnTo>
+                    <a:pt x="6875762" y="2150347"/>
+                  </a:lnTo>
+                  <a:lnTo>
+                    <a:pt x="6947385" y="2156570"/>
+                  </a:lnTo>
+                  <a:lnTo>
+                    <a:pt x="7019007" y="2162655"/>
+                  </a:lnTo>
+                  <a:lnTo>
+                    <a:pt x="7090630" y="2168604"/>
                   </a:lnTo>
                 </a:path>
               </a:pathLst>
@@ -4593,7 +4550,7 @@
         </p:sp>
         <p:sp>
           <p:nvSpPr>
-            <p:cNvPr id="25" name="pl25"/>
+            <p:cNvPr id="24" name="pl24"/>
             <p:cNvSpPr/>
             <p:nvPr/>
           </p:nvSpPr>
@@ -4636,13 +4593,13 @@
         </p:sp>
         <p:sp>
           <p:nvSpPr>
-            <p:cNvPr id="26" name="pl26"/>
+            <p:cNvPr id="25" name="pl25"/>
             <p:cNvSpPr/>
             <p:nvPr/>
           </p:nvSpPr>
           <p:spPr>
             <a:xfrm>
-              <a:off x="4269157" y="2073503"/>
+              <a:off x="4588151" y="2073503"/>
               <a:ext cx="0" cy="3649639"/>
             </a:xfrm>
             <a:custGeom>
@@ -4679,7 +4636,7 @@
         </p:sp>
         <p:sp>
           <p:nvSpPr>
-            <p:cNvPr id="27" name="tx27"/>
+            <p:cNvPr id="26" name="tx26"/>
             <p:cNvSpPr/>
             <p:nvPr/>
           </p:nvSpPr>
@@ -4725,7 +4682,7 @@
         </p:sp>
         <p:sp>
           <p:nvSpPr>
-            <p:cNvPr id="28" name="tx28"/>
+            <p:cNvPr id="27" name="tx27"/>
             <p:cNvSpPr/>
             <p:nvPr/>
           </p:nvSpPr>
@@ -4771,7 +4728,7 @@
         </p:sp>
         <p:sp>
           <p:nvSpPr>
-            <p:cNvPr id="29" name="tx29"/>
+            <p:cNvPr id="28" name="tx28"/>
             <p:cNvSpPr/>
             <p:nvPr/>
           </p:nvSpPr>
@@ -4817,7 +4774,7 @@
         </p:sp>
         <p:sp>
           <p:nvSpPr>
-            <p:cNvPr id="30" name="tx30"/>
+            <p:cNvPr id="29" name="tx29"/>
             <p:cNvSpPr/>
             <p:nvPr/>
           </p:nvSpPr>
@@ -4863,7 +4820,7 @@
         </p:sp>
         <p:sp>
           <p:nvSpPr>
-            <p:cNvPr id="31" name="tx31"/>
+            <p:cNvPr id="30" name="tx30"/>
             <p:cNvSpPr/>
             <p:nvPr/>
           </p:nvSpPr>
@@ -4909,14 +4866,14 @@
         </p:sp>
         <p:sp>
           <p:nvSpPr>
-            <p:cNvPr id="32" name="tx32"/>
+            <p:cNvPr id="31" name="tx31"/>
             <p:cNvSpPr/>
             <p:nvPr/>
           </p:nvSpPr>
           <p:spPr>
             <a:xfrm>
-              <a:off x="2423864" y="5785772"/>
-              <a:ext cx="155356" cy="80101"/>
+              <a:off x="2360651" y="5785772"/>
+              <a:ext cx="161574" cy="80101"/>
             </a:xfrm>
             <a:prstGeom prst="rect">
               <a:avLst/>
@@ -4948,21 +4905,21 @@
                   <a:latin typeface="Helvetica"/>
                   <a:cs typeface="Helvetica"/>
                 </a:rPr>
-                <a:t>0.8</a:t>
+                <a:t>-25</a:t>
               </a:r>
             </a:p>
           </p:txBody>
         </p:sp>
         <p:sp>
           <p:nvSpPr>
-            <p:cNvPr id="33" name="tx33"/>
+            <p:cNvPr id="32" name="tx32"/>
             <p:cNvSpPr/>
             <p:nvPr/>
           </p:nvSpPr>
           <p:spPr>
             <a:xfrm>
-              <a:off x="4196521" y="5785772"/>
-              <a:ext cx="155356" cy="80101"/>
+              <a:off x="4561958" y="5785772"/>
+              <a:ext cx="62179" cy="80101"/>
             </a:xfrm>
             <a:prstGeom prst="rect">
               <a:avLst/>
@@ -4994,21 +4951,21 @@
                   <a:latin typeface="Helvetica"/>
                   <a:cs typeface="Helvetica"/>
                 </a:rPr>
-                <a:t>1.0</a:t>
+                <a:t>0</a:t>
               </a:r>
             </a:p>
           </p:txBody>
         </p:sp>
         <p:sp>
           <p:nvSpPr>
-            <p:cNvPr id="34" name="tx34"/>
+            <p:cNvPr id="33" name="tx33"/>
             <p:cNvSpPr/>
             <p:nvPr/>
           </p:nvSpPr>
           <p:spPr>
             <a:xfrm>
-              <a:off x="5969179" y="5785772"/>
-              <a:ext cx="155356" cy="80101"/>
+              <a:off x="6682478" y="5785772"/>
+              <a:ext cx="124358" cy="80101"/>
             </a:xfrm>
             <a:prstGeom prst="rect">
               <a:avLst/>
@@ -5040,67 +4997,21 @@
                   <a:latin typeface="Helvetica"/>
                   <a:cs typeface="Helvetica"/>
                 </a:rPr>
-                <a:t>1.2</a:t>
+                <a:t>25</a:t>
               </a:r>
             </a:p>
           </p:txBody>
         </p:sp>
         <p:sp>
           <p:nvSpPr>
-            <p:cNvPr id="35" name="tx35"/>
+            <p:cNvPr id="34" name="tx34"/>
             <p:cNvSpPr/>
             <p:nvPr/>
           </p:nvSpPr>
           <p:spPr>
             <a:xfrm>
-              <a:off x="7741836" y="5785772"/>
-              <a:ext cx="155356" cy="80101"/>
-            </a:xfrm>
-            <a:prstGeom prst="rect">
-              <a:avLst/>
-            </a:prstGeom>
-            <a:noFill/>
-          </p:spPr>
-          <p:txBody>
-            <a:bodyPr lIns="0" rIns="0" tIns="0" bIns="0" anchorCtr="1" anchor="ctr" wrap="none"/>
-            <a:lstStyle/>
-            <a:p>
-              <a:pPr algn="l" marL="0" marR="0" indent="0">
-                <a:lnSpc>
-                  <a:spcPts val="880"/>
-                </a:lnSpc>
-                <a:spcBef>
-                  <a:spcPts val="0"/>
-                </a:spcBef>
-                <a:spcAft>
-                  <a:spcPts val="0"/>
-                </a:spcAft>
-              </a:pPr>
-              <a:r>
-                <a:rPr sz="880">
-                  <a:solidFill>
-                    <a:srgbClr val="4D4D4D">
-                      <a:alpha val="100000"/>
-                    </a:srgbClr>
-                  </a:solidFill>
-                  <a:latin typeface="Helvetica"/>
-                  <a:cs typeface="Helvetica"/>
-                </a:rPr>
-                <a:t>1.4</a:t>
-              </a:r>
-            </a:p>
-          </p:txBody>
-        </p:sp>
-        <p:sp>
-          <p:nvSpPr>
-            <p:cNvPr id="36" name="tx36"/>
-            <p:cNvSpPr/>
-            <p:nvPr/>
-          </p:nvSpPr>
-          <p:spPr>
-            <a:xfrm>
-              <a:off x="3879271" y="5925448"/>
-              <a:ext cx="1676186" cy="100218"/>
+              <a:off x="2928340" y="5925448"/>
+              <a:ext cx="3578047" cy="100218"/>
             </a:xfrm>
             <a:prstGeom prst="rect">
               <a:avLst/>
@@ -5132,14 +5043,14 @@
                   <a:latin typeface="Helvetica"/>
                   <a:cs typeface="Helvetica"/>
                 </a:rPr>
-                <a:t>CKD-EPI Cr-Cys / CG ratio</a:t>
+                <a:t>eGFR difference (%): 100 × (CKD-EPI Cr-Cys − CG) / CG</a:t>
               </a:r>
             </a:p>
           </p:txBody>
         </p:sp>
         <p:sp>
           <p:nvSpPr>
-            <p:cNvPr id="37" name="tx37"/>
+            <p:cNvPr id="35" name="tx35"/>
             <p:cNvSpPr/>
             <p:nvPr/>
           </p:nvSpPr>
@@ -5185,14 +5096,14 @@
         </p:sp>
         <p:sp>
           <p:nvSpPr>
-            <p:cNvPr id="38" name="tx38"/>
+            <p:cNvPr id="36" name="tx36"/>
             <p:cNvSpPr/>
             <p:nvPr/>
           </p:nvSpPr>
           <p:spPr>
             <a:xfrm>
               <a:off x="817517" y="1896563"/>
-              <a:ext cx="6899879" cy="82021"/>
+              <a:ext cx="7052127" cy="82021"/>
             </a:xfrm>
             <a:prstGeom prst="rect">
               <a:avLst/>
@@ -5224,14 +5135,14 @@
                   <a:latin typeface="Helvetica"/>
                   <a:cs typeface="Helvetica"/>
                 </a:rPr>
-                <a:t>subHR per 0.1 ratio decline: 1.31 (1.16-1.48), p_Bonf = &lt;0.001 (n = 6)  |  per IQR decline (Δ = 0.29): 2.21 (1.55-3.15)  |  IQR: [0.85, 1.15]</a:t>
+                <a:t>subHR per 10 % decline: 1.31 (1.16-1.48), p_Bonf = &lt;0.001 (n = 6)  |  per IQR decline (Δ = 29.3 %): 2.21 (1.55-3.15)  |  IQR: [-14.6, 14.7] %</a:t>
               </a:r>
             </a:p>
           </p:txBody>
         </p:sp>
         <p:sp>
           <p:nvSpPr>
-            <p:cNvPr id="39" name="tx39"/>
+            <p:cNvPr id="37" name="tx37"/>
             <p:cNvSpPr/>
             <p:nvPr/>
           </p:nvSpPr>

--- a/docs/pptx/whole/jx-linsubhr-ratio-throm2.pptx
+++ b/docs/pptx/whole/jx-linsubhr-ratio-throm2.pptx
@@ -2265,34 +2265,26 @@
         </p:sp>
         <p:sp>
           <p:nvSpPr>
-            <p:cNvPr id="4" name="pl4"/>
+            <p:cNvPr id="4" name="rc4"/>
             <p:cNvSpPr/>
             <p:nvPr/>
           </p:nvSpPr>
           <p:spPr>
             <a:xfrm>
-              <a:off x="817517" y="5142518"/>
-              <a:ext cx="7799693" cy="0"/>
+              <a:off x="457200" y="1600200"/>
+              <a:ext cx="8229600" cy="4525962"/>
             </a:xfrm>
-            <a:custGeom>
+            <a:prstGeom prst="rect">
               <a:avLst/>
-              <a:pathLst>
-                <a:path w="7799693" h="0">
-                  <a:moveTo>
-                    <a:pt x="0" y="0"/>
-                  </a:moveTo>
-                  <a:lnTo>
-                    <a:pt x="7799693" y="0"/>
-                  </a:lnTo>
-                  <a:lnTo>
-                    <a:pt x="7799693" y="0"/>
-                  </a:lnTo>
-                </a:path>
-              </a:pathLst>
-            </a:custGeom>
-            <a:ln w="6775" cap="flat">
+            </a:prstGeom>
+            <a:solidFill>
+              <a:srgbClr val="FFFFFF">
+                <a:alpha val="100000"/>
+              </a:srgbClr>
+            </a:solidFill>
+            <a:ln w="13550" cap="rnd">
               <a:solidFill>
-                <a:srgbClr val="EBEBEB">
+                <a:srgbClr val="FFFFFF">
                   <a:alpha val="100000"/>
                 </a:srgbClr>
               </a:solidFill>
@@ -2314,21 +2306,21 @@
           </p:nvSpPr>
           <p:spPr>
             <a:xfrm>
-              <a:off x="817517" y="4313054"/>
-              <a:ext cx="7799693" cy="0"/>
+              <a:off x="887106" y="3250627"/>
+              <a:ext cx="7660515" cy="0"/>
             </a:xfrm>
             <a:custGeom>
               <a:avLst/>
               <a:pathLst>
-                <a:path w="7799693" h="0">
+                <a:path w="7660515" h="0">
                   <a:moveTo>
                     <a:pt x="0" y="0"/>
                   </a:moveTo>
                   <a:lnTo>
-                    <a:pt x="7799693" y="0"/>
-                  </a:lnTo>
-                  <a:lnTo>
-                    <a:pt x="7799693" y="0"/>
+                    <a:pt x="7660515" y="0"/>
+                  </a:lnTo>
+                  <a:lnTo>
+                    <a:pt x="7660515" y="0"/>
                   </a:lnTo>
                 </a:path>
               </a:pathLst>
@@ -2357,21 +2349,21 @@
           </p:nvSpPr>
           <p:spPr>
             <a:xfrm>
-              <a:off x="817517" y="3483591"/>
-              <a:ext cx="7799693" cy="0"/>
+              <a:off x="887106" y="2951293"/>
+              <a:ext cx="7660515" cy="0"/>
             </a:xfrm>
             <a:custGeom>
               <a:avLst/>
               <a:pathLst>
-                <a:path w="7799693" h="0">
+                <a:path w="7660515" h="0">
                   <a:moveTo>
                     <a:pt x="0" y="0"/>
                   </a:moveTo>
                   <a:lnTo>
-                    <a:pt x="7799693" y="0"/>
-                  </a:lnTo>
-                  <a:lnTo>
-                    <a:pt x="7799693" y="0"/>
+                    <a:pt x="7660515" y="0"/>
+                  </a:lnTo>
+                  <a:lnTo>
+                    <a:pt x="7660515" y="0"/>
                   </a:lnTo>
                 </a:path>
               </a:pathLst>
@@ -2400,21 +2392,21 @@
           </p:nvSpPr>
           <p:spPr>
             <a:xfrm>
-              <a:off x="817517" y="2654127"/>
-              <a:ext cx="7799693" cy="0"/>
+              <a:off x="887106" y="2651959"/>
+              <a:ext cx="7660515" cy="0"/>
             </a:xfrm>
             <a:custGeom>
               <a:avLst/>
               <a:pathLst>
-                <a:path w="7799693" h="0">
+                <a:path w="7660515" h="0">
                   <a:moveTo>
                     <a:pt x="0" y="0"/>
                   </a:moveTo>
                   <a:lnTo>
-                    <a:pt x="7799693" y="0"/>
-                  </a:lnTo>
-                  <a:lnTo>
-                    <a:pt x="7799693" y="0"/>
+                    <a:pt x="7660515" y="0"/>
+                  </a:lnTo>
+                  <a:lnTo>
+                    <a:pt x="7660515" y="0"/>
                   </a:lnTo>
                 </a:path>
               </a:pathLst>
@@ -2443,21 +2435,21 @@
           </p:nvSpPr>
           <p:spPr>
             <a:xfrm>
-              <a:off x="1365633" y="2073503"/>
-              <a:ext cx="0" cy="3649639"/>
+              <a:off x="887106" y="2352625"/>
+              <a:ext cx="7660515" cy="0"/>
             </a:xfrm>
             <a:custGeom>
               <a:avLst/>
               <a:pathLst>
-                <a:path w="0" h="3649639">
+                <a:path w="7660515" h="0">
                   <a:moveTo>
-                    <a:pt x="0" y="3649639"/>
+                    <a:pt x="0" y="0"/>
                   </a:moveTo>
                   <a:lnTo>
-                    <a:pt x="0" y="0"/>
-                  </a:lnTo>
-                  <a:lnTo>
-                    <a:pt x="0" y="0"/>
+                    <a:pt x="7660515" y="0"/>
+                  </a:lnTo>
+                  <a:lnTo>
+                    <a:pt x="7660515" y="0"/>
                   </a:lnTo>
                 </a:path>
               </a:pathLst>
@@ -2486,15 +2478,15 @@
           </p:nvSpPr>
           <p:spPr>
             <a:xfrm>
-              <a:off x="3517243" y="2073503"/>
-              <a:ext cx="0" cy="3649639"/>
+              <a:off x="1425442" y="2143092"/>
+              <a:ext cx="0" cy="1317069"/>
             </a:xfrm>
             <a:custGeom>
               <a:avLst/>
               <a:pathLst>
-                <a:path w="0" h="3649639">
+                <a:path w="0" h="1317069">
                   <a:moveTo>
-                    <a:pt x="0" y="3649639"/>
+                    <a:pt x="0" y="1317069"/>
                   </a:moveTo>
                   <a:lnTo>
                     <a:pt x="0" y="0"/>
@@ -2529,15 +2521,15 @@
           </p:nvSpPr>
           <p:spPr>
             <a:xfrm>
-              <a:off x="5668852" y="2073503"/>
-              <a:ext cx="0" cy="3649639"/>
+              <a:off x="3538658" y="2143092"/>
+              <a:ext cx="0" cy="1317069"/>
             </a:xfrm>
             <a:custGeom>
               <a:avLst/>
               <a:pathLst>
-                <a:path w="0" h="3649639">
+                <a:path w="0" h="1317069">
                   <a:moveTo>
-                    <a:pt x="0" y="3649639"/>
+                    <a:pt x="0" y="1317069"/>
                   </a:moveTo>
                   <a:lnTo>
                     <a:pt x="0" y="0"/>
@@ -2572,15 +2564,15 @@
           </p:nvSpPr>
           <p:spPr>
             <a:xfrm>
-              <a:off x="7820461" y="2073503"/>
-              <a:ext cx="0" cy="3649639"/>
+              <a:off x="5651874" y="2143092"/>
+              <a:ext cx="0" cy="1317069"/>
             </a:xfrm>
             <a:custGeom>
               <a:avLst/>
               <a:pathLst>
-                <a:path w="0" h="3649639">
+                <a:path w="0" h="1317069">
                   <a:moveTo>
-                    <a:pt x="0" y="3649639"/>
+                    <a:pt x="0" y="1317069"/>
                   </a:moveTo>
                   <a:lnTo>
                     <a:pt x="0" y="0"/>
@@ -2615,26 +2607,26 @@
           </p:nvSpPr>
           <p:spPr>
             <a:xfrm>
-              <a:off x="817517" y="5557249"/>
-              <a:ext cx="7799693" cy="0"/>
+              <a:off x="7765090" y="2143092"/>
+              <a:ext cx="0" cy="1317069"/>
             </a:xfrm>
             <a:custGeom>
               <a:avLst/>
               <a:pathLst>
-                <a:path w="7799693" h="0">
+                <a:path w="0" h="1317069">
                   <a:moveTo>
+                    <a:pt x="0" y="1317069"/>
+                  </a:moveTo>
+                  <a:lnTo>
                     <a:pt x="0" y="0"/>
-                  </a:moveTo>
-                  <a:lnTo>
-                    <a:pt x="7799693" y="0"/>
-                  </a:lnTo>
-                  <a:lnTo>
-                    <a:pt x="7799693" y="0"/>
+                  </a:lnTo>
+                  <a:lnTo>
+                    <a:pt x="0" y="0"/>
                   </a:lnTo>
                 </a:path>
               </a:pathLst>
             </a:custGeom>
-            <a:ln w="13550" cap="flat">
+            <a:ln w="6775" cap="flat">
               <a:solidFill>
                 <a:srgbClr val="EBEBEB">
                   <a:alpha val="100000"/>
@@ -2658,21 +2650,21 @@
           </p:nvSpPr>
           <p:spPr>
             <a:xfrm>
-              <a:off x="817517" y="4727786"/>
-              <a:ext cx="7799693" cy="0"/>
+              <a:off x="887106" y="3400294"/>
+              <a:ext cx="7660515" cy="0"/>
             </a:xfrm>
             <a:custGeom>
               <a:avLst/>
               <a:pathLst>
-                <a:path w="7799693" h="0">
+                <a:path w="7660515" h="0">
                   <a:moveTo>
                     <a:pt x="0" y="0"/>
                   </a:moveTo>
                   <a:lnTo>
-                    <a:pt x="7799693" y="0"/>
-                  </a:lnTo>
-                  <a:lnTo>
-                    <a:pt x="7799693" y="0"/>
+                    <a:pt x="7660515" y="0"/>
+                  </a:lnTo>
+                  <a:lnTo>
+                    <a:pt x="7660515" y="0"/>
                   </a:lnTo>
                 </a:path>
               </a:pathLst>
@@ -2701,21 +2693,21 @@
           </p:nvSpPr>
           <p:spPr>
             <a:xfrm>
-              <a:off x="817517" y="3898322"/>
-              <a:ext cx="7799693" cy="0"/>
+              <a:off x="887106" y="3100960"/>
+              <a:ext cx="7660515" cy="0"/>
             </a:xfrm>
             <a:custGeom>
               <a:avLst/>
               <a:pathLst>
-                <a:path w="7799693" h="0">
+                <a:path w="7660515" h="0">
                   <a:moveTo>
                     <a:pt x="0" y="0"/>
                   </a:moveTo>
                   <a:lnTo>
-                    <a:pt x="7799693" y="0"/>
-                  </a:lnTo>
-                  <a:lnTo>
-                    <a:pt x="7799693" y="0"/>
+                    <a:pt x="7660515" y="0"/>
+                  </a:lnTo>
+                  <a:lnTo>
+                    <a:pt x="7660515" y="0"/>
                   </a:lnTo>
                 </a:path>
               </a:pathLst>
@@ -2744,21 +2736,21 @@
           </p:nvSpPr>
           <p:spPr>
             <a:xfrm>
-              <a:off x="817517" y="3068859"/>
-              <a:ext cx="7799693" cy="0"/>
+              <a:off x="887106" y="2801626"/>
+              <a:ext cx="7660515" cy="0"/>
             </a:xfrm>
             <a:custGeom>
               <a:avLst/>
               <a:pathLst>
-                <a:path w="7799693" h="0">
+                <a:path w="7660515" h="0">
                   <a:moveTo>
                     <a:pt x="0" y="0"/>
                   </a:moveTo>
                   <a:lnTo>
-                    <a:pt x="7799693" y="0"/>
-                  </a:lnTo>
-                  <a:lnTo>
-                    <a:pt x="7799693" y="0"/>
+                    <a:pt x="7660515" y="0"/>
+                  </a:lnTo>
+                  <a:lnTo>
+                    <a:pt x="7660515" y="0"/>
                   </a:lnTo>
                 </a:path>
               </a:pathLst>
@@ -2787,21 +2779,21 @@
           </p:nvSpPr>
           <p:spPr>
             <a:xfrm>
-              <a:off x="817517" y="2239395"/>
-              <a:ext cx="7799693" cy="0"/>
+              <a:off x="887106" y="2502292"/>
+              <a:ext cx="7660515" cy="0"/>
             </a:xfrm>
             <a:custGeom>
               <a:avLst/>
               <a:pathLst>
-                <a:path w="7799693" h="0">
+                <a:path w="7660515" h="0">
                   <a:moveTo>
                     <a:pt x="0" y="0"/>
                   </a:moveTo>
                   <a:lnTo>
-                    <a:pt x="7799693" y="0"/>
-                  </a:lnTo>
-                  <a:lnTo>
-                    <a:pt x="7799693" y="0"/>
+                    <a:pt x="7660515" y="0"/>
+                  </a:lnTo>
+                  <a:lnTo>
+                    <a:pt x="7660515" y="0"/>
                   </a:lnTo>
                 </a:path>
               </a:pathLst>
@@ -2830,21 +2822,21 @@
           </p:nvSpPr>
           <p:spPr>
             <a:xfrm>
-              <a:off x="2441438" y="2073503"/>
-              <a:ext cx="0" cy="3649639"/>
+              <a:off x="887106" y="2202958"/>
+              <a:ext cx="7660515" cy="0"/>
             </a:xfrm>
             <a:custGeom>
               <a:avLst/>
               <a:pathLst>
-                <a:path w="0" h="3649639">
+                <a:path w="7660515" h="0">
                   <a:moveTo>
-                    <a:pt x="0" y="3649639"/>
+                    <a:pt x="0" y="0"/>
                   </a:moveTo>
                   <a:lnTo>
-                    <a:pt x="0" y="0"/>
-                  </a:lnTo>
-                  <a:lnTo>
-                    <a:pt x="0" y="0"/>
+                    <a:pt x="7660515" y="0"/>
+                  </a:lnTo>
+                  <a:lnTo>
+                    <a:pt x="7660515" y="0"/>
                   </a:lnTo>
                 </a:path>
               </a:pathLst>
@@ -2873,15 +2865,15 @@
           </p:nvSpPr>
           <p:spPr>
             <a:xfrm>
-              <a:off x="4593047" y="2073503"/>
-              <a:ext cx="0" cy="3649639"/>
+              <a:off x="2482050" y="2143092"/>
+              <a:ext cx="0" cy="1317069"/>
             </a:xfrm>
             <a:custGeom>
               <a:avLst/>
               <a:pathLst>
-                <a:path w="0" h="3649639">
+                <a:path w="0" h="1317069">
                   <a:moveTo>
-                    <a:pt x="0" y="3649639"/>
+                    <a:pt x="0" y="1317069"/>
                   </a:moveTo>
                   <a:lnTo>
                     <a:pt x="0" y="0"/>
@@ -2916,15 +2908,15 @@
           </p:nvSpPr>
           <p:spPr>
             <a:xfrm>
-              <a:off x="6744657" y="2073503"/>
-              <a:ext cx="0" cy="3649639"/>
+              <a:off x="4595266" y="2143092"/>
+              <a:ext cx="0" cy="1317069"/>
             </a:xfrm>
             <a:custGeom>
               <a:avLst/>
               <a:pathLst>
-                <a:path w="0" h="3649639">
+                <a:path w="0" h="1317069">
                   <a:moveTo>
-                    <a:pt x="0" y="3649639"/>
+                    <a:pt x="0" y="1317069"/>
                   </a:moveTo>
                   <a:lnTo>
                     <a:pt x="0" y="0"/>
@@ -2953,609 +2945,652 @@
         </p:sp>
         <p:sp>
           <p:nvSpPr>
-            <p:cNvPr id="20" name="pg20"/>
+            <p:cNvPr id="20" name="pl20"/>
             <p:cNvSpPr/>
             <p:nvPr/>
           </p:nvSpPr>
           <p:spPr>
             <a:xfrm>
-              <a:off x="1172049" y="2073503"/>
-              <a:ext cx="7090630" cy="3328201"/>
+              <a:off x="6708482" y="2143092"/>
+              <a:ext cx="0" cy="1317069"/>
             </a:xfrm>
             <a:custGeom>
               <a:avLst/>
               <a:pathLst>
-                <a:path w="7090630" h="3328201">
+                <a:path w="0" h="1317069">
                   <a:moveTo>
-                    <a:pt x="265953" y="0"/>
+                    <a:pt x="0" y="1317069"/>
                   </a:moveTo>
                   <a:lnTo>
-                    <a:pt x="286490" y="32816"/>
-                  </a:lnTo>
-                  <a:lnTo>
-                    <a:pt x="358112" y="143589"/>
-                  </a:lnTo>
-                  <a:lnTo>
-                    <a:pt x="429735" y="250806"/>
-                  </a:lnTo>
-                  <a:lnTo>
-                    <a:pt x="501357" y="354582"/>
-                  </a:lnTo>
-                  <a:lnTo>
-                    <a:pt x="572980" y="455026"/>
-                  </a:lnTo>
-                  <a:lnTo>
-                    <a:pt x="644602" y="552246"/>
-                  </a:lnTo>
-                  <a:lnTo>
-                    <a:pt x="716225" y="646346"/>
-                  </a:lnTo>
-                  <a:lnTo>
-                    <a:pt x="787847" y="737425"/>
-                  </a:lnTo>
-                  <a:lnTo>
-                    <a:pt x="859470" y="825580"/>
-                  </a:lnTo>
-                  <a:lnTo>
-                    <a:pt x="931092" y="910906"/>
-                  </a:lnTo>
-                  <a:lnTo>
-                    <a:pt x="1002715" y="993493"/>
-                  </a:lnTo>
-                  <a:lnTo>
-                    <a:pt x="1074337" y="1073428"/>
-                  </a:lnTo>
-                  <a:lnTo>
-                    <a:pt x="1145960" y="1150798"/>
-                  </a:lnTo>
-                  <a:lnTo>
-                    <a:pt x="1217582" y="1225685"/>
-                  </a:lnTo>
-                  <a:lnTo>
-                    <a:pt x="1289205" y="1298167"/>
-                  </a:lnTo>
-                  <a:lnTo>
-                    <a:pt x="1360827" y="1368323"/>
-                  </a:lnTo>
-                  <a:lnTo>
-                    <a:pt x="1432450" y="1436227"/>
-                  </a:lnTo>
-                  <a:lnTo>
-                    <a:pt x="1504073" y="1501951"/>
-                  </a:lnTo>
-                  <a:lnTo>
-                    <a:pt x="1575695" y="1565566"/>
-                  </a:lnTo>
-                  <a:lnTo>
-                    <a:pt x="1647318" y="1627138"/>
-                  </a:lnTo>
-                  <a:lnTo>
-                    <a:pt x="1718940" y="1686734"/>
-                  </a:lnTo>
-                  <a:lnTo>
-                    <a:pt x="1790563" y="1744417"/>
-                  </a:lnTo>
-                  <a:lnTo>
-                    <a:pt x="1862185" y="1800249"/>
-                  </a:lnTo>
-                  <a:lnTo>
-                    <a:pt x="1933808" y="1854288"/>
-                  </a:lnTo>
-                  <a:lnTo>
-                    <a:pt x="2005430" y="1906593"/>
-                  </a:lnTo>
-                  <a:lnTo>
-                    <a:pt x="2077053" y="1957219"/>
-                  </a:lnTo>
-                  <a:lnTo>
-                    <a:pt x="2148675" y="2006219"/>
-                  </a:lnTo>
-                  <a:lnTo>
-                    <a:pt x="2220298" y="2053647"/>
-                  </a:lnTo>
-                  <a:lnTo>
-                    <a:pt x="2291920" y="2099553"/>
-                  </a:lnTo>
-                  <a:lnTo>
-                    <a:pt x="2363543" y="2143984"/>
-                  </a:lnTo>
-                  <a:lnTo>
-                    <a:pt x="2435165" y="2186990"/>
-                  </a:lnTo>
-                  <a:lnTo>
-                    <a:pt x="2506788" y="2228615"/>
-                  </a:lnTo>
-                  <a:lnTo>
-                    <a:pt x="2578410" y="2268904"/>
-                  </a:lnTo>
-                  <a:lnTo>
-                    <a:pt x="2650033" y="2307900"/>
-                  </a:lnTo>
-                  <a:lnTo>
-                    <a:pt x="2721655" y="2345644"/>
-                  </a:lnTo>
-                  <a:lnTo>
-                    <a:pt x="2793278" y="2382176"/>
-                  </a:lnTo>
-                  <a:lnTo>
-                    <a:pt x="2864901" y="2417536"/>
-                  </a:lnTo>
-                  <a:lnTo>
-                    <a:pt x="2936523" y="2451761"/>
-                  </a:lnTo>
-                  <a:lnTo>
-                    <a:pt x="3008146" y="2484887"/>
-                  </a:lnTo>
-                  <a:lnTo>
-                    <a:pt x="3079768" y="2516950"/>
-                  </a:lnTo>
-                  <a:lnTo>
-                    <a:pt x="3151391" y="2547984"/>
-                  </a:lnTo>
-                  <a:lnTo>
-                    <a:pt x="3223013" y="2578021"/>
-                  </a:lnTo>
-                  <a:lnTo>
-                    <a:pt x="3294636" y="2607094"/>
-                  </a:lnTo>
-                  <a:lnTo>
-                    <a:pt x="3366258" y="2635234"/>
-                  </a:lnTo>
-                  <a:lnTo>
-                    <a:pt x="3437881" y="2657415"/>
-                  </a:lnTo>
-                  <a:lnTo>
-                    <a:pt x="3509503" y="2667630"/>
-                  </a:lnTo>
-                  <a:lnTo>
-                    <a:pt x="3581126" y="2677720"/>
-                  </a:lnTo>
-                  <a:lnTo>
-                    <a:pt x="3652748" y="2687685"/>
-                  </a:lnTo>
-                  <a:lnTo>
-                    <a:pt x="3724371" y="2697526"/>
-                  </a:lnTo>
-                  <a:lnTo>
-                    <a:pt x="3795993" y="2707246"/>
-                  </a:lnTo>
-                  <a:lnTo>
-                    <a:pt x="3867616" y="2716846"/>
-                  </a:lnTo>
-                  <a:lnTo>
-                    <a:pt x="3939238" y="2726327"/>
-                  </a:lnTo>
-                  <a:lnTo>
-                    <a:pt x="4010861" y="2735691"/>
-                  </a:lnTo>
-                  <a:lnTo>
-                    <a:pt x="4082483" y="2744939"/>
-                  </a:lnTo>
-                  <a:lnTo>
-                    <a:pt x="4154106" y="2754073"/>
-                  </a:lnTo>
-                  <a:lnTo>
-                    <a:pt x="4225729" y="2763094"/>
-                  </a:lnTo>
-                  <a:lnTo>
-                    <a:pt x="4297351" y="2772003"/>
-                  </a:lnTo>
-                  <a:lnTo>
-                    <a:pt x="4368974" y="2780802"/>
-                  </a:lnTo>
-                  <a:lnTo>
-                    <a:pt x="4440596" y="2789493"/>
-                  </a:lnTo>
-                  <a:lnTo>
-                    <a:pt x="4512219" y="2798076"/>
-                  </a:lnTo>
-                  <a:lnTo>
-                    <a:pt x="4583841" y="2806553"/>
-                  </a:lnTo>
-                  <a:lnTo>
-                    <a:pt x="4655464" y="2814925"/>
-                  </a:lnTo>
-                  <a:lnTo>
-                    <a:pt x="4727086" y="2823193"/>
-                  </a:lnTo>
-                  <a:lnTo>
-                    <a:pt x="4798709" y="2831360"/>
-                  </a:lnTo>
-                  <a:lnTo>
-                    <a:pt x="4870331" y="2839425"/>
-                  </a:lnTo>
-                  <a:lnTo>
-                    <a:pt x="4941954" y="2847391"/>
-                  </a:lnTo>
-                  <a:lnTo>
-                    <a:pt x="5013576" y="2855258"/>
-                  </a:lnTo>
-                  <a:lnTo>
-                    <a:pt x="5085199" y="2863028"/>
-                  </a:lnTo>
-                  <a:lnTo>
-                    <a:pt x="5156821" y="2870702"/>
-                  </a:lnTo>
-                  <a:lnTo>
-                    <a:pt x="5228444" y="2878281"/>
-                  </a:lnTo>
-                  <a:lnTo>
-                    <a:pt x="5300066" y="2885766"/>
-                  </a:lnTo>
-                  <a:lnTo>
-                    <a:pt x="5371689" y="2893159"/>
-                  </a:lnTo>
-                  <a:lnTo>
-                    <a:pt x="5443311" y="2900460"/>
-                  </a:lnTo>
-                  <a:lnTo>
-                    <a:pt x="5514934" y="2907671"/>
-                  </a:lnTo>
-                  <a:lnTo>
-                    <a:pt x="5586557" y="2914793"/>
-                  </a:lnTo>
-                  <a:lnTo>
-                    <a:pt x="5658179" y="2921827"/>
-                  </a:lnTo>
-                  <a:lnTo>
-                    <a:pt x="5729802" y="2928774"/>
-                  </a:lnTo>
-                  <a:lnTo>
-                    <a:pt x="5801424" y="2935635"/>
-                  </a:lnTo>
-                  <a:lnTo>
-                    <a:pt x="5873047" y="2942411"/>
-                  </a:lnTo>
-                  <a:lnTo>
-                    <a:pt x="5944669" y="2949104"/>
-                  </a:lnTo>
-                  <a:lnTo>
-                    <a:pt x="6016292" y="2955713"/>
-                  </a:lnTo>
-                  <a:lnTo>
-                    <a:pt x="6087914" y="2962241"/>
-                  </a:lnTo>
-                  <a:lnTo>
-                    <a:pt x="6159537" y="2968689"/>
-                  </a:lnTo>
-                  <a:lnTo>
-                    <a:pt x="6231159" y="2975056"/>
-                  </a:lnTo>
-                  <a:lnTo>
-                    <a:pt x="6302782" y="2981345"/>
-                  </a:lnTo>
-                  <a:lnTo>
-                    <a:pt x="6374404" y="2987556"/>
-                  </a:lnTo>
-                  <a:lnTo>
-                    <a:pt x="6446027" y="2993691"/>
-                  </a:lnTo>
-                  <a:lnTo>
-                    <a:pt x="6517649" y="2999749"/>
-                  </a:lnTo>
-                  <a:lnTo>
-                    <a:pt x="6589272" y="3005733"/>
-                  </a:lnTo>
-                  <a:lnTo>
-                    <a:pt x="6660894" y="3011642"/>
-                  </a:lnTo>
-                  <a:lnTo>
-                    <a:pt x="6732517" y="3017479"/>
-                  </a:lnTo>
-                  <a:lnTo>
-                    <a:pt x="6804139" y="3023243"/>
-                  </a:lnTo>
-                  <a:lnTo>
-                    <a:pt x="6875762" y="3028937"/>
-                  </a:lnTo>
-                  <a:lnTo>
-                    <a:pt x="6947385" y="3034559"/>
-                  </a:lnTo>
-                  <a:lnTo>
-                    <a:pt x="7019007" y="3040113"/>
-                  </a:lnTo>
-                  <a:lnTo>
-                    <a:pt x="7090630" y="3045597"/>
-                  </a:lnTo>
-                  <a:lnTo>
-                    <a:pt x="7090630" y="3328201"/>
-                  </a:lnTo>
-                  <a:lnTo>
-                    <a:pt x="7019007" y="3323043"/>
-                  </a:lnTo>
-                  <a:lnTo>
-                    <a:pt x="6947385" y="3317713"/>
-                  </a:lnTo>
-                  <a:lnTo>
-                    <a:pt x="6875762" y="3312207"/>
-                  </a:lnTo>
-                  <a:lnTo>
-                    <a:pt x="6804139" y="3306518"/>
-                  </a:lnTo>
-                  <a:lnTo>
-                    <a:pt x="6732517" y="3300640"/>
-                  </a:lnTo>
-                  <a:lnTo>
-                    <a:pt x="6660894" y="3294568"/>
-                  </a:lnTo>
-                  <a:lnTo>
-                    <a:pt x="6589272" y="3288294"/>
-                  </a:lnTo>
-                  <a:lnTo>
-                    <a:pt x="6517649" y="3281812"/>
-                  </a:lnTo>
-                  <a:lnTo>
-                    <a:pt x="6446027" y="3275115"/>
-                  </a:lnTo>
-                  <a:lnTo>
-                    <a:pt x="6374404" y="3268196"/>
-                  </a:lnTo>
-                  <a:lnTo>
-                    <a:pt x="6302782" y="3261047"/>
-                  </a:lnTo>
-                  <a:lnTo>
-                    <a:pt x="6231159" y="3253662"/>
-                  </a:lnTo>
-                  <a:lnTo>
-                    <a:pt x="6159537" y="3246031"/>
-                  </a:lnTo>
-                  <a:lnTo>
-                    <a:pt x="6087914" y="3238148"/>
-                  </a:lnTo>
-                  <a:lnTo>
-                    <a:pt x="6016292" y="3230003"/>
-                  </a:lnTo>
-                  <a:lnTo>
-                    <a:pt x="5944669" y="3221588"/>
-                  </a:lnTo>
-                  <a:lnTo>
-                    <a:pt x="5873047" y="3212893"/>
-                  </a:lnTo>
-                  <a:lnTo>
-                    <a:pt x="5801424" y="3203911"/>
-                  </a:lnTo>
-                  <a:lnTo>
-                    <a:pt x="5729802" y="3194630"/>
-                  </a:lnTo>
-                  <a:lnTo>
-                    <a:pt x="5658179" y="3185042"/>
-                  </a:lnTo>
-                  <a:lnTo>
-                    <a:pt x="5586557" y="3175136"/>
-                  </a:lnTo>
-                  <a:lnTo>
-                    <a:pt x="5514934" y="3164901"/>
-                  </a:lnTo>
-                  <a:lnTo>
-                    <a:pt x="5443311" y="3154327"/>
-                  </a:lnTo>
-                  <a:lnTo>
-                    <a:pt x="5371689" y="3143402"/>
-                  </a:lnTo>
-                  <a:lnTo>
-                    <a:pt x="5300066" y="3132115"/>
-                  </a:lnTo>
-                  <a:lnTo>
-                    <a:pt x="5228444" y="3120453"/>
-                  </a:lnTo>
-                  <a:lnTo>
-                    <a:pt x="5156821" y="3108405"/>
-                  </a:lnTo>
-                  <a:lnTo>
-                    <a:pt x="5085199" y="3095957"/>
-                  </a:lnTo>
-                  <a:lnTo>
-                    <a:pt x="5013576" y="3083097"/>
-                  </a:lnTo>
-                  <a:lnTo>
-                    <a:pt x="4941954" y="3069809"/>
-                  </a:lnTo>
-                  <a:lnTo>
-                    <a:pt x="4870331" y="3056082"/>
-                  </a:lnTo>
-                  <a:lnTo>
-                    <a:pt x="4798709" y="3041899"/>
-                  </a:lnTo>
-                  <a:lnTo>
-                    <a:pt x="4727086" y="3027245"/>
-                  </a:lnTo>
-                  <a:lnTo>
-                    <a:pt x="4655464" y="3012106"/>
-                  </a:lnTo>
-                  <a:lnTo>
-                    <a:pt x="4583841" y="2996464"/>
-                  </a:lnTo>
-                  <a:lnTo>
-                    <a:pt x="4512219" y="2980304"/>
-                  </a:lnTo>
-                  <a:lnTo>
-                    <a:pt x="4440596" y="2963608"/>
-                  </a:lnTo>
-                  <a:lnTo>
-                    <a:pt x="4368974" y="2946358"/>
-                  </a:lnTo>
-                  <a:lnTo>
-                    <a:pt x="4297351" y="2928536"/>
-                  </a:lnTo>
-                  <a:lnTo>
-                    <a:pt x="4225729" y="2910123"/>
-                  </a:lnTo>
-                  <a:lnTo>
-                    <a:pt x="4154106" y="2891099"/>
-                  </a:lnTo>
-                  <a:lnTo>
-                    <a:pt x="4082483" y="2871445"/>
-                  </a:lnTo>
-                  <a:lnTo>
-                    <a:pt x="4010861" y="2851138"/>
-                  </a:lnTo>
-                  <a:lnTo>
-                    <a:pt x="3939238" y="2830159"/>
-                  </a:lnTo>
-                  <a:lnTo>
-                    <a:pt x="3867616" y="2808483"/>
-                  </a:lnTo>
-                  <a:lnTo>
-                    <a:pt x="3795993" y="2786089"/>
-                  </a:lnTo>
-                  <a:lnTo>
-                    <a:pt x="3724371" y="2762952"/>
-                  </a:lnTo>
-                  <a:lnTo>
-                    <a:pt x="3652748" y="2739047"/>
-                  </a:lnTo>
-                  <a:lnTo>
-                    <a:pt x="3581126" y="2714350"/>
-                  </a:lnTo>
-                  <a:lnTo>
-                    <a:pt x="3509503" y="2688834"/>
-                  </a:lnTo>
-                  <a:lnTo>
-                    <a:pt x="3437881" y="2662471"/>
-                  </a:lnTo>
-                  <a:lnTo>
-                    <a:pt x="3366258" y="2647071"/>
-                  </a:lnTo>
-                  <a:lnTo>
-                    <a:pt x="3294636" y="2636598"/>
-                  </a:lnTo>
-                  <a:lnTo>
-                    <a:pt x="3223013" y="2625993"/>
-                  </a:lnTo>
-                  <a:lnTo>
-                    <a:pt x="3151391" y="2615256"/>
-                  </a:lnTo>
-                  <a:lnTo>
-                    <a:pt x="3079768" y="2604385"/>
-                  </a:lnTo>
-                  <a:lnTo>
-                    <a:pt x="3008146" y="2593377"/>
-                  </a:lnTo>
-                  <a:lnTo>
-                    <a:pt x="2936523" y="2582232"/>
-                  </a:lnTo>
-                  <a:lnTo>
-                    <a:pt x="2864901" y="2570947"/>
-                  </a:lnTo>
-                  <a:lnTo>
-                    <a:pt x="2793278" y="2559521"/>
-                  </a:lnTo>
-                  <a:lnTo>
-                    <a:pt x="2721655" y="2547952"/>
-                  </a:lnTo>
-                  <a:lnTo>
-                    <a:pt x="2650033" y="2536238"/>
-                  </a:lnTo>
-                  <a:lnTo>
-                    <a:pt x="2578410" y="2524377"/>
-                  </a:lnTo>
-                  <a:lnTo>
-                    <a:pt x="2506788" y="2512368"/>
-                  </a:lnTo>
-                  <a:lnTo>
-                    <a:pt x="2435165" y="2500209"/>
-                  </a:lnTo>
-                  <a:lnTo>
-                    <a:pt x="2363543" y="2487898"/>
-                  </a:lnTo>
-                  <a:lnTo>
-                    <a:pt x="2291920" y="2475432"/>
-                  </a:lnTo>
-                  <a:lnTo>
-                    <a:pt x="2220298" y="2462810"/>
-                  </a:lnTo>
-                  <a:lnTo>
-                    <a:pt x="2148675" y="2450030"/>
-                  </a:lnTo>
-                  <a:lnTo>
-                    <a:pt x="2077053" y="2437091"/>
-                  </a:lnTo>
-                  <a:lnTo>
-                    <a:pt x="2005430" y="2423989"/>
-                  </a:lnTo>
-                  <a:lnTo>
-                    <a:pt x="1933808" y="2410723"/>
-                  </a:lnTo>
-                  <a:lnTo>
-                    <a:pt x="1862185" y="2397292"/>
-                  </a:lnTo>
-                  <a:lnTo>
-                    <a:pt x="1790563" y="2383692"/>
-                  </a:lnTo>
-                  <a:lnTo>
-                    <a:pt x="1718940" y="2369922"/>
-                  </a:lnTo>
-                  <a:lnTo>
-                    <a:pt x="1647318" y="2355979"/>
-                  </a:lnTo>
-                  <a:lnTo>
-                    <a:pt x="1575695" y="2341862"/>
-                  </a:lnTo>
-                  <a:lnTo>
-                    <a:pt x="1504073" y="2327569"/>
-                  </a:lnTo>
-                  <a:lnTo>
-                    <a:pt x="1432450" y="2313096"/>
-                  </a:lnTo>
-                  <a:lnTo>
-                    <a:pt x="1360827" y="2298442"/>
-                  </a:lnTo>
-                  <a:lnTo>
-                    <a:pt x="1289205" y="2283605"/>
-                  </a:lnTo>
-                  <a:lnTo>
-                    <a:pt x="1217582" y="2268582"/>
-                  </a:lnTo>
-                  <a:lnTo>
-                    <a:pt x="1145960" y="2253371"/>
-                  </a:lnTo>
-                  <a:lnTo>
-                    <a:pt x="1074337" y="2237970"/>
-                  </a:lnTo>
-                  <a:lnTo>
-                    <a:pt x="1002715" y="2222376"/>
-                  </a:lnTo>
-                  <a:lnTo>
-                    <a:pt x="931092" y="2206586"/>
-                  </a:lnTo>
-                  <a:lnTo>
-                    <a:pt x="859470" y="2190599"/>
-                  </a:lnTo>
-                  <a:lnTo>
-                    <a:pt x="787847" y="2174412"/>
-                  </a:lnTo>
-                  <a:lnTo>
-                    <a:pt x="716225" y="2158022"/>
-                  </a:lnTo>
-                  <a:lnTo>
-                    <a:pt x="644602" y="2141427"/>
-                  </a:lnTo>
-                  <a:lnTo>
-                    <a:pt x="572980" y="2124625"/>
-                  </a:lnTo>
-                  <a:lnTo>
-                    <a:pt x="501357" y="2107612"/>
-                  </a:lnTo>
-                  <a:lnTo>
-                    <a:pt x="429735" y="2090386"/>
-                  </a:lnTo>
-                  <a:lnTo>
-                    <a:pt x="358112" y="2072944"/>
-                  </a:lnTo>
-                  <a:lnTo>
-                    <a:pt x="286490" y="2055284"/>
-                  </a:lnTo>
-                  <a:lnTo>
-                    <a:pt x="214867" y="2037403"/>
-                  </a:lnTo>
-                  <a:lnTo>
-                    <a:pt x="143245" y="2019299"/>
-                  </a:lnTo>
-                  <a:lnTo>
-                    <a:pt x="71622" y="2000967"/>
-                  </a:lnTo>
-                  <a:lnTo>
-                    <a:pt x="0" y="1982406"/>
+                    <a:pt x="0" y="0"/>
+                  </a:lnTo>
+                  <a:lnTo>
+                    <a:pt x="0" y="0"/>
+                  </a:lnTo>
+                </a:path>
+              </a:pathLst>
+            </a:custGeom>
+            <a:ln w="13550" cap="flat">
+              <a:solidFill>
+                <a:srgbClr val="EBEBEB">
+                  <a:alpha val="100000"/>
+                </a:srgbClr>
+              </a:solidFill>
+              <a:prstDash val="solid"/>
+              <a:round/>
+            </a:ln>
+          </p:spPr>
+          <p:txBody>
+            <a:bodyPr/>
+            <a:lstStyle/>
+            <a:p/>
+          </p:txBody>
+        </p:sp>
+        <p:sp>
+          <p:nvSpPr>
+            <p:cNvPr id="21" name="pg21"/>
+            <p:cNvSpPr/>
+            <p:nvPr/>
+          </p:nvSpPr>
+          <p:spPr>
+            <a:xfrm>
+              <a:off x="1235312" y="2143092"/>
+              <a:ext cx="6964104" cy="1201069"/>
+            </a:xfrm>
+            <a:custGeom>
+              <a:avLst/>
+              <a:pathLst>
+                <a:path w="6964104" h="1201069">
+                  <a:moveTo>
+                    <a:pt x="261207" y="0"/>
+                  </a:moveTo>
+                  <a:lnTo>
+                    <a:pt x="281377" y="11842"/>
+                  </a:lnTo>
+                  <a:lnTo>
+                    <a:pt x="351722" y="51818"/>
+                  </a:lnTo>
+                  <a:lnTo>
+                    <a:pt x="422066" y="90510"/>
+                  </a:lnTo>
+                  <a:lnTo>
+                    <a:pt x="492411" y="127960"/>
+                  </a:lnTo>
+                  <a:lnTo>
+                    <a:pt x="562755" y="164208"/>
+                  </a:lnTo>
+                  <a:lnTo>
+                    <a:pt x="633100" y="199292"/>
+                  </a:lnTo>
+                  <a:lnTo>
+                    <a:pt x="703444" y="233251"/>
+                  </a:lnTo>
+                  <a:lnTo>
+                    <a:pt x="773789" y="266119"/>
+                  </a:lnTo>
+                  <a:lnTo>
+                    <a:pt x="844133" y="297932"/>
+                  </a:lnTo>
+                  <a:lnTo>
+                    <a:pt x="914478" y="328724"/>
+                  </a:lnTo>
+                  <a:lnTo>
+                    <a:pt x="984822" y="358528"/>
+                  </a:lnTo>
+                  <a:lnTo>
+                    <a:pt x="1055167" y="387375"/>
+                  </a:lnTo>
+                  <a:lnTo>
+                    <a:pt x="1125511" y="415296"/>
+                  </a:lnTo>
+                  <a:lnTo>
+                    <a:pt x="1195856" y="442320"/>
+                  </a:lnTo>
+                  <a:lnTo>
+                    <a:pt x="1266200" y="468478"/>
+                  </a:lnTo>
+                  <a:lnTo>
+                    <a:pt x="1336545" y="493795"/>
+                  </a:lnTo>
+                  <a:lnTo>
+                    <a:pt x="1406889" y="518300"/>
+                  </a:lnTo>
+                  <a:lnTo>
+                    <a:pt x="1477234" y="542019"/>
+                  </a:lnTo>
+                  <a:lnTo>
+                    <a:pt x="1547578" y="564976"/>
+                  </a:lnTo>
+                  <a:lnTo>
+                    <a:pt x="1617923" y="587196"/>
+                  </a:lnTo>
+                  <a:lnTo>
+                    <a:pt x="1688267" y="608702"/>
+                  </a:lnTo>
+                  <a:lnTo>
+                    <a:pt x="1758612" y="629519"/>
+                  </a:lnTo>
+                  <a:lnTo>
+                    <a:pt x="1828956" y="649667"/>
+                  </a:lnTo>
+                  <a:lnTo>
+                    <a:pt x="1899301" y="669169"/>
+                  </a:lnTo>
+                  <a:lnTo>
+                    <a:pt x="1969645" y="688044"/>
+                  </a:lnTo>
+                  <a:lnTo>
+                    <a:pt x="2039990" y="706314"/>
+                  </a:lnTo>
+                  <a:lnTo>
+                    <a:pt x="2110334" y="723997"/>
+                  </a:lnTo>
+                  <a:lnTo>
+                    <a:pt x="2180679" y="741113"/>
+                  </a:lnTo>
+                  <a:lnTo>
+                    <a:pt x="2251023" y="757679"/>
+                  </a:lnTo>
+                  <a:lnTo>
+                    <a:pt x="2321368" y="773713"/>
+                  </a:lnTo>
+                  <a:lnTo>
+                    <a:pt x="2391712" y="789233"/>
+                  </a:lnTo>
+                  <a:lnTo>
+                    <a:pt x="2462057" y="804254"/>
+                  </a:lnTo>
+                  <a:lnTo>
+                    <a:pt x="2532401" y="818794"/>
+                  </a:lnTo>
+                  <a:lnTo>
+                    <a:pt x="2602746" y="832867"/>
+                  </a:lnTo>
+                  <a:lnTo>
+                    <a:pt x="2673090" y="846487"/>
+                  </a:lnTo>
+                  <a:lnTo>
+                    <a:pt x="2743435" y="859671"/>
+                  </a:lnTo>
+                  <a:lnTo>
+                    <a:pt x="2813779" y="872432"/>
+                  </a:lnTo>
+                  <a:lnTo>
+                    <a:pt x="2884124" y="884783"/>
+                  </a:lnTo>
+                  <a:lnTo>
+                    <a:pt x="2954468" y="896737"/>
+                  </a:lnTo>
+                  <a:lnTo>
+                    <a:pt x="3024813" y="908308"/>
+                  </a:lnTo>
+                  <a:lnTo>
+                    <a:pt x="3095157" y="919507"/>
+                  </a:lnTo>
+                  <a:lnTo>
+                    <a:pt x="3165502" y="930347"/>
+                  </a:lnTo>
+                  <a:lnTo>
+                    <a:pt x="3235846" y="940839"/>
+                  </a:lnTo>
+                  <a:lnTo>
+                    <a:pt x="3306191" y="950994"/>
+                  </a:lnTo>
+                  <a:lnTo>
+                    <a:pt x="3376535" y="958998"/>
+                  </a:lnTo>
+                  <a:lnTo>
+                    <a:pt x="3446880" y="962685"/>
+                  </a:lnTo>
+                  <a:lnTo>
+                    <a:pt x="3517224" y="966326"/>
+                  </a:lnTo>
+                  <a:lnTo>
+                    <a:pt x="3587569" y="969922"/>
+                  </a:lnTo>
+                  <a:lnTo>
+                    <a:pt x="3657913" y="973473"/>
+                  </a:lnTo>
+                  <a:lnTo>
+                    <a:pt x="3728257" y="976981"/>
+                  </a:lnTo>
+                  <a:lnTo>
+                    <a:pt x="3798602" y="980446"/>
+                  </a:lnTo>
+                  <a:lnTo>
+                    <a:pt x="3868946" y="983867"/>
+                  </a:lnTo>
+                  <a:lnTo>
+                    <a:pt x="3939291" y="987246"/>
+                  </a:lnTo>
+                  <a:lnTo>
+                    <a:pt x="4009635" y="990584"/>
+                  </a:lnTo>
+                  <a:lnTo>
+                    <a:pt x="4079980" y="993880"/>
+                  </a:lnTo>
+                  <a:lnTo>
+                    <a:pt x="4150324" y="997135"/>
+                  </a:lnTo>
+                  <a:lnTo>
+                    <a:pt x="4220669" y="1000350"/>
+                  </a:lnTo>
+                  <a:lnTo>
+                    <a:pt x="4291013" y="1003526"/>
+                  </a:lnTo>
+                  <a:lnTo>
+                    <a:pt x="4361358" y="1006662"/>
+                  </a:lnTo>
+                  <a:lnTo>
+                    <a:pt x="4431702" y="1009759"/>
+                  </a:lnTo>
+                  <a:lnTo>
+                    <a:pt x="4502047" y="1012819"/>
+                  </a:lnTo>
+                  <a:lnTo>
+                    <a:pt x="4572391" y="1015840"/>
+                  </a:lnTo>
+                  <a:lnTo>
+                    <a:pt x="4642736" y="1018824"/>
+                  </a:lnTo>
+                  <a:lnTo>
+                    <a:pt x="4713080" y="1021771"/>
+                  </a:lnTo>
+                  <a:lnTo>
+                    <a:pt x="4783425" y="1024681"/>
+                  </a:lnTo>
+                  <a:lnTo>
+                    <a:pt x="4853769" y="1027556"/>
+                  </a:lnTo>
+                  <a:lnTo>
+                    <a:pt x="4924114" y="1030395"/>
+                  </a:lnTo>
+                  <a:lnTo>
+                    <a:pt x="4994458" y="1033199"/>
+                  </a:lnTo>
+                  <a:lnTo>
+                    <a:pt x="5064803" y="1035968"/>
+                  </a:lnTo>
+                  <a:lnTo>
+                    <a:pt x="5135147" y="1038703"/>
+                  </a:lnTo>
+                  <a:lnTo>
+                    <a:pt x="5205492" y="1041405"/>
+                  </a:lnTo>
+                  <a:lnTo>
+                    <a:pt x="5275836" y="1044073"/>
+                  </a:lnTo>
+                  <a:lnTo>
+                    <a:pt x="5346181" y="1046707"/>
+                  </a:lnTo>
+                  <a:lnTo>
+                    <a:pt x="5416525" y="1049310"/>
+                  </a:lnTo>
+                  <a:lnTo>
+                    <a:pt x="5486870" y="1051880"/>
+                  </a:lnTo>
+                  <a:lnTo>
+                    <a:pt x="5557214" y="1054418"/>
+                  </a:lnTo>
+                  <a:lnTo>
+                    <a:pt x="5627559" y="1056925"/>
+                  </a:lnTo>
+                  <a:lnTo>
+                    <a:pt x="5697903" y="1059401"/>
+                  </a:lnTo>
+                  <a:lnTo>
+                    <a:pt x="5768248" y="1061847"/>
+                  </a:lnTo>
+                  <a:lnTo>
+                    <a:pt x="5838592" y="1064262"/>
+                  </a:lnTo>
+                  <a:lnTo>
+                    <a:pt x="5908937" y="1066647"/>
+                  </a:lnTo>
+                  <a:lnTo>
+                    <a:pt x="5979281" y="1069003"/>
+                  </a:lnTo>
+                  <a:lnTo>
+                    <a:pt x="6049626" y="1071330"/>
+                  </a:lnTo>
+                  <a:lnTo>
+                    <a:pt x="6119970" y="1073628"/>
+                  </a:lnTo>
+                  <a:lnTo>
+                    <a:pt x="6190315" y="1075897"/>
+                  </a:lnTo>
+                  <a:lnTo>
+                    <a:pt x="6260659" y="1078138"/>
+                  </a:lnTo>
+                  <a:lnTo>
+                    <a:pt x="6331004" y="1080352"/>
+                  </a:lnTo>
+                  <a:lnTo>
+                    <a:pt x="6401348" y="1082539"/>
+                  </a:lnTo>
+                  <a:lnTo>
+                    <a:pt x="6471693" y="1084698"/>
+                  </a:lnTo>
+                  <a:lnTo>
+                    <a:pt x="6542037" y="1086831"/>
+                  </a:lnTo>
+                  <a:lnTo>
+                    <a:pt x="6612382" y="1088937"/>
+                  </a:lnTo>
+                  <a:lnTo>
+                    <a:pt x="6682726" y="1091017"/>
+                  </a:lnTo>
+                  <a:lnTo>
+                    <a:pt x="6753071" y="1093072"/>
+                  </a:lnTo>
+                  <a:lnTo>
+                    <a:pt x="6823415" y="1095101"/>
+                  </a:lnTo>
+                  <a:lnTo>
+                    <a:pt x="6893760" y="1097105"/>
+                  </a:lnTo>
+                  <a:lnTo>
+                    <a:pt x="6964104" y="1099084"/>
+                  </a:lnTo>
+                  <a:lnTo>
+                    <a:pt x="6964104" y="1201069"/>
+                  </a:lnTo>
+                  <a:lnTo>
+                    <a:pt x="6893760" y="1199208"/>
+                  </a:lnTo>
+                  <a:lnTo>
+                    <a:pt x="6823415" y="1197284"/>
+                  </a:lnTo>
+                  <a:lnTo>
+                    <a:pt x="6753071" y="1195297"/>
+                  </a:lnTo>
+                  <a:lnTo>
+                    <a:pt x="6682726" y="1193244"/>
+                  </a:lnTo>
+                  <a:lnTo>
+                    <a:pt x="6612382" y="1191123"/>
+                  </a:lnTo>
+                  <a:lnTo>
+                    <a:pt x="6542037" y="1188932"/>
+                  </a:lnTo>
+                  <a:lnTo>
+                    <a:pt x="6471693" y="1186668"/>
+                  </a:lnTo>
+                  <a:lnTo>
+                    <a:pt x="6401348" y="1184328"/>
+                  </a:lnTo>
+                  <a:lnTo>
+                    <a:pt x="6331004" y="1181912"/>
+                  </a:lnTo>
+                  <a:lnTo>
+                    <a:pt x="6260659" y="1179415"/>
+                  </a:lnTo>
+                  <a:lnTo>
+                    <a:pt x="6190315" y="1176835"/>
+                  </a:lnTo>
+                  <a:lnTo>
+                    <a:pt x="6119970" y="1174170"/>
+                  </a:lnTo>
+                  <a:lnTo>
+                    <a:pt x="6049626" y="1171416"/>
+                  </a:lnTo>
+                  <a:lnTo>
+                    <a:pt x="5979281" y="1168571"/>
+                  </a:lnTo>
+                  <a:lnTo>
+                    <a:pt x="5908937" y="1165632"/>
+                  </a:lnTo>
+                  <a:lnTo>
+                    <a:pt x="5838592" y="1162595"/>
+                  </a:lnTo>
+                  <a:lnTo>
+                    <a:pt x="5768248" y="1159457"/>
+                  </a:lnTo>
+                  <a:lnTo>
+                    <a:pt x="5697903" y="1156216"/>
+                  </a:lnTo>
+                  <a:lnTo>
+                    <a:pt x="5627559" y="1152867"/>
+                  </a:lnTo>
+                  <a:lnTo>
+                    <a:pt x="5557214" y="1149406"/>
+                  </a:lnTo>
+                  <a:lnTo>
+                    <a:pt x="5486870" y="1145831"/>
+                  </a:lnTo>
+                  <a:lnTo>
+                    <a:pt x="5416525" y="1142138"/>
+                  </a:lnTo>
+                  <a:lnTo>
+                    <a:pt x="5346181" y="1138322"/>
+                  </a:lnTo>
+                  <a:lnTo>
+                    <a:pt x="5275836" y="1134380"/>
+                  </a:lnTo>
+                  <a:lnTo>
+                    <a:pt x="5205492" y="1130306"/>
+                  </a:lnTo>
+                  <a:lnTo>
+                    <a:pt x="5135147" y="1126098"/>
+                  </a:lnTo>
+                  <a:lnTo>
+                    <a:pt x="5064803" y="1121750"/>
+                  </a:lnTo>
+                  <a:lnTo>
+                    <a:pt x="4994458" y="1117258"/>
+                  </a:lnTo>
+                  <a:lnTo>
+                    <a:pt x="4924114" y="1112617"/>
+                  </a:lnTo>
+                  <a:lnTo>
+                    <a:pt x="4853769" y="1107822"/>
+                  </a:lnTo>
+                  <a:lnTo>
+                    <a:pt x="4783425" y="1102868"/>
+                  </a:lnTo>
+                  <a:lnTo>
+                    <a:pt x="4713080" y="1097749"/>
+                  </a:lnTo>
+                  <a:lnTo>
+                    <a:pt x="4642736" y="1092461"/>
+                  </a:lnTo>
+                  <a:lnTo>
+                    <a:pt x="4572391" y="1086998"/>
+                  </a:lnTo>
+                  <a:lnTo>
+                    <a:pt x="4502047" y="1081353"/>
+                  </a:lnTo>
+                  <a:lnTo>
+                    <a:pt x="4431702" y="1075521"/>
+                  </a:lnTo>
+                  <a:lnTo>
+                    <a:pt x="4361358" y="1069496"/>
+                  </a:lnTo>
+                  <a:lnTo>
+                    <a:pt x="4291013" y="1063271"/>
+                  </a:lnTo>
+                  <a:lnTo>
+                    <a:pt x="4220669" y="1056839"/>
+                  </a:lnTo>
+                  <a:lnTo>
+                    <a:pt x="4150324" y="1050195"/>
+                  </a:lnTo>
+                  <a:lnTo>
+                    <a:pt x="4079980" y="1043329"/>
+                  </a:lnTo>
+                  <a:lnTo>
+                    <a:pt x="4009635" y="1036237"/>
+                  </a:lnTo>
+                  <a:lnTo>
+                    <a:pt x="3939291" y="1028908"/>
+                  </a:lnTo>
+                  <a:lnTo>
+                    <a:pt x="3868946" y="1021337"/>
+                  </a:lnTo>
+                  <a:lnTo>
+                    <a:pt x="3798602" y="1013515"/>
+                  </a:lnTo>
+                  <a:lnTo>
+                    <a:pt x="3728257" y="1005434"/>
+                  </a:lnTo>
+                  <a:lnTo>
+                    <a:pt x="3657913" y="997084"/>
+                  </a:lnTo>
+                  <a:lnTo>
+                    <a:pt x="3587569" y="988457"/>
+                  </a:lnTo>
+                  <a:lnTo>
+                    <a:pt x="3517224" y="979545"/>
+                  </a:lnTo>
+                  <a:lnTo>
+                    <a:pt x="3446880" y="970336"/>
+                  </a:lnTo>
+                  <a:lnTo>
+                    <a:pt x="3376535" y="960823"/>
+                  </a:lnTo>
+                  <a:lnTo>
+                    <a:pt x="3306191" y="955265"/>
+                  </a:lnTo>
+                  <a:lnTo>
+                    <a:pt x="3235846" y="951486"/>
+                  </a:lnTo>
+                  <a:lnTo>
+                    <a:pt x="3165502" y="947659"/>
+                  </a:lnTo>
+                  <a:lnTo>
+                    <a:pt x="3095157" y="943784"/>
+                  </a:lnTo>
+                  <a:lnTo>
+                    <a:pt x="3024813" y="939861"/>
+                  </a:lnTo>
+                  <a:lnTo>
+                    <a:pt x="2954468" y="935889"/>
+                  </a:lnTo>
+                  <a:lnTo>
+                    <a:pt x="2884124" y="931866"/>
+                  </a:lnTo>
+                  <a:lnTo>
+                    <a:pt x="2813779" y="927794"/>
+                  </a:lnTo>
+                  <a:lnTo>
+                    <a:pt x="2743435" y="923671"/>
+                  </a:lnTo>
+                  <a:lnTo>
+                    <a:pt x="2673090" y="919496"/>
+                  </a:lnTo>
+                  <a:lnTo>
+                    <a:pt x="2602746" y="915268"/>
+                  </a:lnTo>
+                  <a:lnTo>
+                    <a:pt x="2532401" y="910988"/>
+                  </a:lnTo>
+                  <a:lnTo>
+                    <a:pt x="2462057" y="906654"/>
+                  </a:lnTo>
+                  <a:lnTo>
+                    <a:pt x="2391712" y="902266"/>
+                  </a:lnTo>
+                  <a:lnTo>
+                    <a:pt x="2321368" y="897823"/>
+                  </a:lnTo>
+                  <a:lnTo>
+                    <a:pt x="2251023" y="893325"/>
+                  </a:lnTo>
+                  <a:lnTo>
+                    <a:pt x="2180679" y="888770"/>
+                  </a:lnTo>
+                  <a:lnTo>
+                    <a:pt x="2110334" y="884158"/>
+                  </a:lnTo>
+                  <a:lnTo>
+                    <a:pt x="2039990" y="879488"/>
+                  </a:lnTo>
+                  <a:lnTo>
+                    <a:pt x="1969645" y="874760"/>
+                  </a:lnTo>
+                  <a:lnTo>
+                    <a:pt x="1899301" y="869973"/>
+                  </a:lnTo>
+                  <a:lnTo>
+                    <a:pt x="1828956" y="865126"/>
+                  </a:lnTo>
+                  <a:lnTo>
+                    <a:pt x="1758612" y="860218"/>
+                  </a:lnTo>
+                  <a:lnTo>
+                    <a:pt x="1688267" y="855249"/>
+                  </a:lnTo>
+                  <a:lnTo>
+                    <a:pt x="1617923" y="850217"/>
+                  </a:lnTo>
+                  <a:lnTo>
+                    <a:pt x="1547578" y="845123"/>
+                  </a:lnTo>
+                  <a:lnTo>
+                    <a:pt x="1477234" y="839964"/>
+                  </a:lnTo>
+                  <a:lnTo>
+                    <a:pt x="1406889" y="834742"/>
+                  </a:lnTo>
+                  <a:lnTo>
+                    <a:pt x="1336545" y="829453"/>
+                  </a:lnTo>
+                  <a:lnTo>
+                    <a:pt x="1266200" y="824099"/>
+                  </a:lnTo>
+                  <a:lnTo>
+                    <a:pt x="1195856" y="818678"/>
+                  </a:lnTo>
+                  <a:lnTo>
+                    <a:pt x="1125511" y="813188"/>
+                  </a:lnTo>
+                  <a:lnTo>
+                    <a:pt x="1055167" y="807630"/>
+                  </a:lnTo>
+                  <a:lnTo>
+                    <a:pt x="984822" y="802003"/>
+                  </a:lnTo>
+                  <a:lnTo>
+                    <a:pt x="914478" y="796305"/>
+                  </a:lnTo>
+                  <a:lnTo>
+                    <a:pt x="844133" y="790535"/>
+                  </a:lnTo>
+                  <a:lnTo>
+                    <a:pt x="773789" y="784694"/>
+                  </a:lnTo>
+                  <a:lnTo>
+                    <a:pt x="703444" y="778779"/>
+                  </a:lnTo>
+                  <a:lnTo>
+                    <a:pt x="633100" y="772790"/>
+                  </a:lnTo>
+                  <a:lnTo>
+                    <a:pt x="562755" y="766727"/>
+                  </a:lnTo>
+                  <a:lnTo>
+                    <a:pt x="492411" y="760587"/>
+                  </a:lnTo>
+                  <a:lnTo>
+                    <a:pt x="422066" y="754371"/>
+                  </a:lnTo>
+                  <a:lnTo>
+                    <a:pt x="351722" y="748076"/>
+                  </a:lnTo>
+                  <a:lnTo>
+                    <a:pt x="281377" y="741703"/>
+                  </a:lnTo>
+                  <a:lnTo>
+                    <a:pt x="211033" y="735251"/>
+                  </a:lnTo>
+                  <a:lnTo>
+                    <a:pt x="140688" y="728717"/>
+                  </a:lnTo>
+                  <a:lnTo>
+                    <a:pt x="70344" y="722102"/>
+                  </a:lnTo>
+                  <a:lnTo>
+                    <a:pt x="0" y="715403"/>
                   </a:lnTo>
                   <a:close/>
                 </a:path>
@@ -3575,634 +3610,309 @@
         </p:sp>
         <p:sp>
           <p:nvSpPr>
-            <p:cNvPr id="21" name="pl21"/>
-            <p:cNvSpPr/>
-            <p:nvPr/>
-          </p:nvSpPr>
-          <p:spPr>
-            <a:xfrm>
-              <a:off x="1438002" y="2073503"/>
-              <a:ext cx="6824677" cy="3045597"/>
-            </a:xfrm>
-            <a:custGeom>
-              <a:avLst/>
-              <a:pathLst>
-                <a:path w="6824677" h="3045597">
-                  <a:moveTo>
-                    <a:pt x="0" y="0"/>
-                  </a:moveTo>
-                  <a:lnTo>
-                    <a:pt x="20537" y="32816"/>
-                  </a:lnTo>
-                  <a:lnTo>
-                    <a:pt x="92159" y="143589"/>
-                  </a:lnTo>
-                  <a:lnTo>
-                    <a:pt x="163782" y="250806"/>
-                  </a:lnTo>
-                  <a:lnTo>
-                    <a:pt x="235404" y="354582"/>
-                  </a:lnTo>
-                  <a:lnTo>
-                    <a:pt x="307027" y="455026"/>
-                  </a:lnTo>
-                  <a:lnTo>
-                    <a:pt x="378649" y="552246"/>
-                  </a:lnTo>
-                  <a:lnTo>
-                    <a:pt x="450272" y="646346"/>
-                  </a:lnTo>
-                  <a:lnTo>
-                    <a:pt x="521894" y="737425"/>
-                  </a:lnTo>
-                  <a:lnTo>
-                    <a:pt x="593517" y="825580"/>
-                  </a:lnTo>
-                  <a:lnTo>
-                    <a:pt x="665139" y="910906"/>
-                  </a:lnTo>
-                  <a:lnTo>
-                    <a:pt x="736762" y="993493"/>
-                  </a:lnTo>
-                  <a:lnTo>
-                    <a:pt x="808384" y="1073428"/>
-                  </a:lnTo>
-                  <a:lnTo>
-                    <a:pt x="880007" y="1150798"/>
-                  </a:lnTo>
-                  <a:lnTo>
-                    <a:pt x="951629" y="1225685"/>
-                  </a:lnTo>
-                  <a:lnTo>
-                    <a:pt x="1023252" y="1298167"/>
-                  </a:lnTo>
-                  <a:lnTo>
-                    <a:pt x="1094874" y="1368323"/>
-                  </a:lnTo>
-                  <a:lnTo>
-                    <a:pt x="1166497" y="1436227"/>
-                  </a:lnTo>
-                  <a:lnTo>
-                    <a:pt x="1238119" y="1501951"/>
-                  </a:lnTo>
-                  <a:lnTo>
-                    <a:pt x="1309742" y="1565566"/>
-                  </a:lnTo>
-                  <a:lnTo>
-                    <a:pt x="1381365" y="1627138"/>
-                  </a:lnTo>
-                  <a:lnTo>
-                    <a:pt x="1452987" y="1686734"/>
-                  </a:lnTo>
-                  <a:lnTo>
-                    <a:pt x="1524610" y="1744417"/>
-                  </a:lnTo>
-                  <a:lnTo>
-                    <a:pt x="1596232" y="1800249"/>
-                  </a:lnTo>
-                  <a:lnTo>
-                    <a:pt x="1667855" y="1854288"/>
-                  </a:lnTo>
-                  <a:lnTo>
-                    <a:pt x="1739477" y="1906593"/>
-                  </a:lnTo>
-                  <a:lnTo>
-                    <a:pt x="1811100" y="1957219"/>
-                  </a:lnTo>
-                  <a:lnTo>
-                    <a:pt x="1882722" y="2006219"/>
-                  </a:lnTo>
-                  <a:lnTo>
-                    <a:pt x="1954345" y="2053647"/>
-                  </a:lnTo>
-                  <a:lnTo>
-                    <a:pt x="2025967" y="2099553"/>
-                  </a:lnTo>
-                  <a:lnTo>
-                    <a:pt x="2097590" y="2143984"/>
-                  </a:lnTo>
-                  <a:lnTo>
-                    <a:pt x="2169212" y="2186990"/>
-                  </a:lnTo>
-                  <a:lnTo>
-                    <a:pt x="2240835" y="2228615"/>
-                  </a:lnTo>
-                  <a:lnTo>
-                    <a:pt x="2312457" y="2268904"/>
-                  </a:lnTo>
-                  <a:lnTo>
-                    <a:pt x="2384080" y="2307900"/>
-                  </a:lnTo>
-                  <a:lnTo>
-                    <a:pt x="2455702" y="2345644"/>
-                  </a:lnTo>
-                  <a:lnTo>
-                    <a:pt x="2527325" y="2382176"/>
-                  </a:lnTo>
-                  <a:lnTo>
-                    <a:pt x="2598947" y="2417536"/>
-                  </a:lnTo>
-                  <a:lnTo>
-                    <a:pt x="2670570" y="2451761"/>
-                  </a:lnTo>
-                  <a:lnTo>
-                    <a:pt x="2742193" y="2484887"/>
-                  </a:lnTo>
-                  <a:lnTo>
-                    <a:pt x="2813815" y="2516950"/>
-                  </a:lnTo>
-                  <a:lnTo>
-                    <a:pt x="2885438" y="2547984"/>
-                  </a:lnTo>
-                  <a:lnTo>
-                    <a:pt x="2957060" y="2578021"/>
-                  </a:lnTo>
-                  <a:lnTo>
-                    <a:pt x="3028683" y="2607094"/>
-                  </a:lnTo>
-                  <a:lnTo>
-                    <a:pt x="3100305" y="2635234"/>
-                  </a:lnTo>
-                  <a:lnTo>
-                    <a:pt x="3171928" y="2657415"/>
-                  </a:lnTo>
-                  <a:lnTo>
-                    <a:pt x="3243550" y="2667630"/>
-                  </a:lnTo>
-                  <a:lnTo>
-                    <a:pt x="3315173" y="2677720"/>
-                  </a:lnTo>
-                  <a:lnTo>
-                    <a:pt x="3386795" y="2687685"/>
-                  </a:lnTo>
-                  <a:lnTo>
-                    <a:pt x="3458418" y="2697526"/>
-                  </a:lnTo>
-                  <a:lnTo>
-                    <a:pt x="3530040" y="2707246"/>
-                  </a:lnTo>
-                  <a:lnTo>
-                    <a:pt x="3601663" y="2716846"/>
-                  </a:lnTo>
-                  <a:lnTo>
-                    <a:pt x="3673285" y="2726327"/>
-                  </a:lnTo>
-                  <a:lnTo>
-                    <a:pt x="3744908" y="2735691"/>
-                  </a:lnTo>
-                  <a:lnTo>
-                    <a:pt x="3816530" y="2744939"/>
-                  </a:lnTo>
-                  <a:lnTo>
-                    <a:pt x="3888153" y="2754073"/>
-                  </a:lnTo>
-                  <a:lnTo>
-                    <a:pt x="3959775" y="2763094"/>
-                  </a:lnTo>
-                  <a:lnTo>
-                    <a:pt x="4031398" y="2772003"/>
-                  </a:lnTo>
-                  <a:lnTo>
-                    <a:pt x="4103021" y="2780802"/>
-                  </a:lnTo>
-                  <a:lnTo>
-                    <a:pt x="4174643" y="2789493"/>
-                  </a:lnTo>
-                  <a:lnTo>
-                    <a:pt x="4246266" y="2798076"/>
-                  </a:lnTo>
-                  <a:lnTo>
-                    <a:pt x="4317888" y="2806553"/>
-                  </a:lnTo>
-                  <a:lnTo>
-                    <a:pt x="4389511" y="2814925"/>
-                  </a:lnTo>
-                  <a:lnTo>
-                    <a:pt x="4461133" y="2823193"/>
-                  </a:lnTo>
-                  <a:lnTo>
-                    <a:pt x="4532756" y="2831360"/>
-                  </a:lnTo>
-                  <a:lnTo>
-                    <a:pt x="4604378" y="2839425"/>
-                  </a:lnTo>
-                  <a:lnTo>
-                    <a:pt x="4676001" y="2847391"/>
-                  </a:lnTo>
-                  <a:lnTo>
-                    <a:pt x="4747623" y="2855258"/>
-                  </a:lnTo>
-                  <a:lnTo>
-                    <a:pt x="4819246" y="2863028"/>
-                  </a:lnTo>
-                  <a:lnTo>
-                    <a:pt x="4890868" y="2870702"/>
-                  </a:lnTo>
-                  <a:lnTo>
-                    <a:pt x="4962491" y="2878281"/>
-                  </a:lnTo>
-                  <a:lnTo>
-                    <a:pt x="5034113" y="2885766"/>
-                  </a:lnTo>
-                  <a:lnTo>
-                    <a:pt x="5105736" y="2893159"/>
-                  </a:lnTo>
-                  <a:lnTo>
-                    <a:pt x="5177358" y="2900460"/>
-                  </a:lnTo>
-                  <a:lnTo>
-                    <a:pt x="5248981" y="2907671"/>
-                  </a:lnTo>
-                  <a:lnTo>
-                    <a:pt x="5320603" y="2914793"/>
-                  </a:lnTo>
-                  <a:lnTo>
-                    <a:pt x="5392226" y="2921827"/>
-                  </a:lnTo>
-                  <a:lnTo>
-                    <a:pt x="5463849" y="2928774"/>
-                  </a:lnTo>
-                  <a:lnTo>
-                    <a:pt x="5535471" y="2935635"/>
-                  </a:lnTo>
-                  <a:lnTo>
-                    <a:pt x="5607094" y="2942411"/>
-                  </a:lnTo>
-                  <a:lnTo>
-                    <a:pt x="5678716" y="2949104"/>
-                  </a:lnTo>
-                  <a:lnTo>
-                    <a:pt x="5750339" y="2955713"/>
-                  </a:lnTo>
-                  <a:lnTo>
-                    <a:pt x="5821961" y="2962241"/>
-                  </a:lnTo>
-                  <a:lnTo>
-                    <a:pt x="5893584" y="2968689"/>
-                  </a:lnTo>
-                  <a:lnTo>
-                    <a:pt x="5965206" y="2975056"/>
-                  </a:lnTo>
-                  <a:lnTo>
-                    <a:pt x="6036829" y="2981345"/>
-                  </a:lnTo>
-                  <a:lnTo>
-                    <a:pt x="6108451" y="2987556"/>
-                  </a:lnTo>
-                  <a:lnTo>
-                    <a:pt x="6180074" y="2993691"/>
-                  </a:lnTo>
-                  <a:lnTo>
-                    <a:pt x="6251696" y="2999749"/>
-                  </a:lnTo>
-                  <a:lnTo>
-                    <a:pt x="6323319" y="3005733"/>
-                  </a:lnTo>
-                  <a:lnTo>
-                    <a:pt x="6394941" y="3011642"/>
-                  </a:lnTo>
-                  <a:lnTo>
-                    <a:pt x="6466564" y="3017479"/>
-                  </a:lnTo>
-                  <a:lnTo>
-                    <a:pt x="6538186" y="3023243"/>
-                  </a:lnTo>
-                  <a:lnTo>
-                    <a:pt x="6609809" y="3028937"/>
-                  </a:lnTo>
-                  <a:lnTo>
-                    <a:pt x="6681431" y="3034559"/>
-                  </a:lnTo>
-                  <a:lnTo>
-                    <a:pt x="6753054" y="3040113"/>
-                  </a:lnTo>
-                  <a:lnTo>
-                    <a:pt x="6824677" y="3045597"/>
-                  </a:lnTo>
-                </a:path>
-              </a:pathLst>
-            </a:custGeom>
-          </p:spPr>
-          <p:txBody>
-            <a:bodyPr/>
-            <a:lstStyle/>
-            <a:p/>
-          </p:txBody>
-        </p:sp>
-        <p:sp>
-          <p:nvSpPr>
             <p:cNvPr id="22" name="pl22"/>
             <p:cNvSpPr/>
             <p:nvPr/>
           </p:nvSpPr>
           <p:spPr>
             <a:xfrm>
-              <a:off x="1172049" y="4055909"/>
-              <a:ext cx="7090630" cy="1345795"/>
+              <a:off x="1496519" y="2143092"/>
+              <a:ext cx="6702897" cy="1099084"/>
             </a:xfrm>
             <a:custGeom>
               <a:avLst/>
               <a:pathLst>
-                <a:path w="7090630" h="1345795">
+                <a:path w="6702897" h="1099084">
                   <a:moveTo>
-                    <a:pt x="7090630" y="1345795"/>
+                    <a:pt x="0" y="0"/>
                   </a:moveTo>
                   <a:lnTo>
-                    <a:pt x="7019007" y="1340636"/>
-                  </a:lnTo>
-                  <a:lnTo>
-                    <a:pt x="6947385" y="1335307"/>
-                  </a:lnTo>
-                  <a:lnTo>
-                    <a:pt x="6875762" y="1329800"/>
-                  </a:lnTo>
-                  <a:lnTo>
-                    <a:pt x="6804139" y="1324111"/>
-                  </a:lnTo>
-                  <a:lnTo>
-                    <a:pt x="6732517" y="1318234"/>
-                  </a:lnTo>
-                  <a:lnTo>
-                    <a:pt x="6660894" y="1312161"/>
-                  </a:lnTo>
-                  <a:lnTo>
-                    <a:pt x="6589272" y="1305887"/>
-                  </a:lnTo>
-                  <a:lnTo>
-                    <a:pt x="6517649" y="1299405"/>
-                  </a:lnTo>
-                  <a:lnTo>
-                    <a:pt x="6446027" y="1292708"/>
-                  </a:lnTo>
-                  <a:lnTo>
-                    <a:pt x="6374404" y="1285789"/>
-                  </a:lnTo>
-                  <a:lnTo>
-                    <a:pt x="6302782" y="1278641"/>
-                  </a:lnTo>
-                  <a:lnTo>
-                    <a:pt x="6231159" y="1271255"/>
-                  </a:lnTo>
-                  <a:lnTo>
-                    <a:pt x="6159537" y="1263625"/>
-                  </a:lnTo>
-                  <a:lnTo>
-                    <a:pt x="6087914" y="1255741"/>
-                  </a:lnTo>
-                  <a:lnTo>
-                    <a:pt x="6016292" y="1247596"/>
-                  </a:lnTo>
-                  <a:lnTo>
-                    <a:pt x="5944669" y="1239181"/>
-                  </a:lnTo>
-                  <a:lnTo>
-                    <a:pt x="5873047" y="1230487"/>
-                  </a:lnTo>
-                  <a:lnTo>
-                    <a:pt x="5801424" y="1221504"/>
-                  </a:lnTo>
-                  <a:lnTo>
-                    <a:pt x="5729802" y="1212224"/>
-                  </a:lnTo>
-                  <a:lnTo>
-                    <a:pt x="5658179" y="1202635"/>
-                  </a:lnTo>
-                  <a:lnTo>
-                    <a:pt x="5586557" y="1192729"/>
-                  </a:lnTo>
-                  <a:lnTo>
-                    <a:pt x="5514934" y="1182494"/>
-                  </a:lnTo>
-                  <a:lnTo>
-                    <a:pt x="5443311" y="1171920"/>
-                  </a:lnTo>
-                  <a:lnTo>
-                    <a:pt x="5371689" y="1160995"/>
-                  </a:lnTo>
-                  <a:lnTo>
-                    <a:pt x="5300066" y="1149708"/>
-                  </a:lnTo>
-                  <a:lnTo>
-                    <a:pt x="5228444" y="1138047"/>
-                  </a:lnTo>
-                  <a:lnTo>
-                    <a:pt x="5156821" y="1125998"/>
-                  </a:lnTo>
-                  <a:lnTo>
-                    <a:pt x="5085199" y="1113551"/>
-                  </a:lnTo>
-                  <a:lnTo>
-                    <a:pt x="5013576" y="1100690"/>
-                  </a:lnTo>
-                  <a:lnTo>
-                    <a:pt x="4941954" y="1087403"/>
-                  </a:lnTo>
-                  <a:lnTo>
-                    <a:pt x="4870331" y="1073675"/>
-                  </a:lnTo>
-                  <a:lnTo>
-                    <a:pt x="4798709" y="1059492"/>
-                  </a:lnTo>
-                  <a:lnTo>
-                    <a:pt x="4727086" y="1044838"/>
-                  </a:lnTo>
-                  <a:lnTo>
-                    <a:pt x="4655464" y="1029699"/>
-                  </a:lnTo>
-                  <a:lnTo>
-                    <a:pt x="4583841" y="1014058"/>
-                  </a:lnTo>
-                  <a:lnTo>
-                    <a:pt x="4512219" y="997897"/>
-                  </a:lnTo>
-                  <a:lnTo>
-                    <a:pt x="4440596" y="981201"/>
-                  </a:lnTo>
-                  <a:lnTo>
-                    <a:pt x="4368974" y="963951"/>
-                  </a:lnTo>
-                  <a:lnTo>
-                    <a:pt x="4297351" y="946129"/>
-                  </a:lnTo>
-                  <a:lnTo>
-                    <a:pt x="4225729" y="927716"/>
-                  </a:lnTo>
-                  <a:lnTo>
-                    <a:pt x="4154106" y="908693"/>
-                  </a:lnTo>
-                  <a:lnTo>
-                    <a:pt x="4082483" y="889038"/>
-                  </a:lnTo>
-                  <a:lnTo>
-                    <a:pt x="4010861" y="868732"/>
-                  </a:lnTo>
-                  <a:lnTo>
-                    <a:pt x="3939238" y="847752"/>
-                  </a:lnTo>
-                  <a:lnTo>
-                    <a:pt x="3867616" y="826076"/>
-                  </a:lnTo>
-                  <a:lnTo>
-                    <a:pt x="3795993" y="803682"/>
-                  </a:lnTo>
-                  <a:lnTo>
-                    <a:pt x="3724371" y="780545"/>
-                  </a:lnTo>
-                  <a:lnTo>
-                    <a:pt x="3652748" y="756640"/>
-                  </a:lnTo>
-                  <a:lnTo>
-                    <a:pt x="3581126" y="731943"/>
-                  </a:lnTo>
-                  <a:lnTo>
-                    <a:pt x="3509503" y="706427"/>
-                  </a:lnTo>
-                  <a:lnTo>
-                    <a:pt x="3437881" y="680065"/>
-                  </a:lnTo>
-                  <a:lnTo>
-                    <a:pt x="3366258" y="664664"/>
-                  </a:lnTo>
-                  <a:lnTo>
-                    <a:pt x="3294636" y="654191"/>
-                  </a:lnTo>
-                  <a:lnTo>
-                    <a:pt x="3223013" y="643587"/>
-                  </a:lnTo>
-                  <a:lnTo>
-                    <a:pt x="3151391" y="632850"/>
-                  </a:lnTo>
-                  <a:lnTo>
-                    <a:pt x="3079768" y="621978"/>
-                  </a:lnTo>
-                  <a:lnTo>
-                    <a:pt x="3008146" y="610971"/>
-                  </a:lnTo>
-                  <a:lnTo>
-                    <a:pt x="2936523" y="599825"/>
-                  </a:lnTo>
-                  <a:lnTo>
-                    <a:pt x="2864901" y="588541"/>
-                  </a:lnTo>
-                  <a:lnTo>
-                    <a:pt x="2793278" y="577114"/>
-                  </a:lnTo>
-                  <a:lnTo>
-                    <a:pt x="2721655" y="565545"/>
-                  </a:lnTo>
-                  <a:lnTo>
-                    <a:pt x="2650033" y="553831"/>
-                  </a:lnTo>
-                  <a:lnTo>
-                    <a:pt x="2578410" y="541971"/>
-                  </a:lnTo>
-                  <a:lnTo>
-                    <a:pt x="2506788" y="529962"/>
-                  </a:lnTo>
-                  <a:lnTo>
-                    <a:pt x="2435165" y="517802"/>
-                  </a:lnTo>
-                  <a:lnTo>
-                    <a:pt x="2363543" y="505491"/>
-                  </a:lnTo>
-                  <a:lnTo>
-                    <a:pt x="2291920" y="493025"/>
-                  </a:lnTo>
-                  <a:lnTo>
-                    <a:pt x="2220298" y="480403"/>
-                  </a:lnTo>
-                  <a:lnTo>
-                    <a:pt x="2148675" y="467624"/>
-                  </a:lnTo>
-                  <a:lnTo>
-                    <a:pt x="2077053" y="454684"/>
-                  </a:lnTo>
-                  <a:lnTo>
-                    <a:pt x="2005430" y="441582"/>
-                  </a:lnTo>
-                  <a:lnTo>
-                    <a:pt x="1933808" y="428317"/>
-                  </a:lnTo>
-                  <a:lnTo>
-                    <a:pt x="1862185" y="414885"/>
-                  </a:lnTo>
-                  <a:lnTo>
-                    <a:pt x="1790563" y="401285"/>
-                  </a:lnTo>
-                  <a:lnTo>
-                    <a:pt x="1718940" y="387515"/>
-                  </a:lnTo>
-                  <a:lnTo>
-                    <a:pt x="1647318" y="373573"/>
-                  </a:lnTo>
-                  <a:lnTo>
-                    <a:pt x="1575695" y="359456"/>
-                  </a:lnTo>
-                  <a:lnTo>
-                    <a:pt x="1504073" y="345162"/>
-                  </a:lnTo>
-                  <a:lnTo>
-                    <a:pt x="1432450" y="330689"/>
-                  </a:lnTo>
-                  <a:lnTo>
-                    <a:pt x="1360827" y="316036"/>
-                  </a:lnTo>
-                  <a:lnTo>
-                    <a:pt x="1289205" y="301198"/>
-                  </a:lnTo>
-                  <a:lnTo>
-                    <a:pt x="1217582" y="286175"/>
-                  </a:lnTo>
-                  <a:lnTo>
-                    <a:pt x="1145960" y="270965"/>
-                  </a:lnTo>
-                  <a:lnTo>
-                    <a:pt x="1074337" y="255563"/>
-                  </a:lnTo>
-                  <a:lnTo>
-                    <a:pt x="1002715" y="239969"/>
-                  </a:lnTo>
-                  <a:lnTo>
-                    <a:pt x="931092" y="224180"/>
-                  </a:lnTo>
-                  <a:lnTo>
-                    <a:pt x="859470" y="208193"/>
-                  </a:lnTo>
-                  <a:lnTo>
-                    <a:pt x="787847" y="192005"/>
-                  </a:lnTo>
-                  <a:lnTo>
-                    <a:pt x="716225" y="175616"/>
-                  </a:lnTo>
-                  <a:lnTo>
-                    <a:pt x="644602" y="159021"/>
-                  </a:lnTo>
-                  <a:lnTo>
-                    <a:pt x="572980" y="142218"/>
-                  </a:lnTo>
-                  <a:lnTo>
-                    <a:pt x="501357" y="125205"/>
-                  </a:lnTo>
-                  <a:lnTo>
-                    <a:pt x="429735" y="107979"/>
-                  </a:lnTo>
-                  <a:lnTo>
-                    <a:pt x="358112" y="90537"/>
-                  </a:lnTo>
-                  <a:lnTo>
-                    <a:pt x="286490" y="72878"/>
-                  </a:lnTo>
-                  <a:lnTo>
-                    <a:pt x="214867" y="54997"/>
-                  </a:lnTo>
-                  <a:lnTo>
-                    <a:pt x="143245" y="36892"/>
-                  </a:lnTo>
-                  <a:lnTo>
-                    <a:pt x="71622" y="18560"/>
-                  </a:lnTo>
-                  <a:lnTo>
-                    <a:pt x="0" y="0"/>
+                    <a:pt x="20170" y="11842"/>
+                  </a:lnTo>
+                  <a:lnTo>
+                    <a:pt x="90515" y="51818"/>
+                  </a:lnTo>
+                  <a:lnTo>
+                    <a:pt x="160859" y="90510"/>
+                  </a:lnTo>
+                  <a:lnTo>
+                    <a:pt x="231204" y="127960"/>
+                  </a:lnTo>
+                  <a:lnTo>
+                    <a:pt x="301548" y="164208"/>
+                  </a:lnTo>
+                  <a:lnTo>
+                    <a:pt x="371893" y="199292"/>
+                  </a:lnTo>
+                  <a:lnTo>
+                    <a:pt x="442237" y="233251"/>
+                  </a:lnTo>
+                  <a:lnTo>
+                    <a:pt x="512581" y="266119"/>
+                  </a:lnTo>
+                  <a:lnTo>
+                    <a:pt x="582926" y="297932"/>
+                  </a:lnTo>
+                  <a:lnTo>
+                    <a:pt x="653270" y="328724"/>
+                  </a:lnTo>
+                  <a:lnTo>
+                    <a:pt x="723615" y="358528"/>
+                  </a:lnTo>
+                  <a:lnTo>
+                    <a:pt x="793959" y="387375"/>
+                  </a:lnTo>
+                  <a:lnTo>
+                    <a:pt x="864304" y="415296"/>
+                  </a:lnTo>
+                  <a:lnTo>
+                    <a:pt x="934648" y="442320"/>
+                  </a:lnTo>
+                  <a:lnTo>
+                    <a:pt x="1004993" y="468478"/>
+                  </a:lnTo>
+                  <a:lnTo>
+                    <a:pt x="1075337" y="493795"/>
+                  </a:lnTo>
+                  <a:lnTo>
+                    <a:pt x="1145682" y="518300"/>
+                  </a:lnTo>
+                  <a:lnTo>
+                    <a:pt x="1216026" y="542019"/>
+                  </a:lnTo>
+                  <a:lnTo>
+                    <a:pt x="1286371" y="564976"/>
+                  </a:lnTo>
+                  <a:lnTo>
+                    <a:pt x="1356715" y="587196"/>
+                  </a:lnTo>
+                  <a:lnTo>
+                    <a:pt x="1427060" y="608702"/>
+                  </a:lnTo>
+                  <a:lnTo>
+                    <a:pt x="1497404" y="629519"/>
+                  </a:lnTo>
+                  <a:lnTo>
+                    <a:pt x="1567749" y="649667"/>
+                  </a:lnTo>
+                  <a:lnTo>
+                    <a:pt x="1638093" y="669169"/>
+                  </a:lnTo>
+                  <a:lnTo>
+                    <a:pt x="1708438" y="688044"/>
+                  </a:lnTo>
+                  <a:lnTo>
+                    <a:pt x="1778782" y="706314"/>
+                  </a:lnTo>
+                  <a:lnTo>
+                    <a:pt x="1849127" y="723997"/>
+                  </a:lnTo>
+                  <a:lnTo>
+                    <a:pt x="1919471" y="741113"/>
+                  </a:lnTo>
+                  <a:lnTo>
+                    <a:pt x="1989816" y="757679"/>
+                  </a:lnTo>
+                  <a:lnTo>
+                    <a:pt x="2060160" y="773713"/>
+                  </a:lnTo>
+                  <a:lnTo>
+                    <a:pt x="2130505" y="789233"/>
+                  </a:lnTo>
+                  <a:lnTo>
+                    <a:pt x="2200849" y="804254"/>
+                  </a:lnTo>
+                  <a:lnTo>
+                    <a:pt x="2271194" y="818794"/>
+                  </a:lnTo>
+                  <a:lnTo>
+                    <a:pt x="2341538" y="832867"/>
+                  </a:lnTo>
+                  <a:lnTo>
+                    <a:pt x="2411883" y="846487"/>
+                  </a:lnTo>
+                  <a:lnTo>
+                    <a:pt x="2482227" y="859671"/>
+                  </a:lnTo>
+                  <a:lnTo>
+                    <a:pt x="2552572" y="872432"/>
+                  </a:lnTo>
+                  <a:lnTo>
+                    <a:pt x="2622916" y="884783"/>
+                  </a:lnTo>
+                  <a:lnTo>
+                    <a:pt x="2693261" y="896737"/>
+                  </a:lnTo>
+                  <a:lnTo>
+                    <a:pt x="2763605" y="908308"/>
+                  </a:lnTo>
+                  <a:lnTo>
+                    <a:pt x="2833950" y="919507"/>
+                  </a:lnTo>
+                  <a:lnTo>
+                    <a:pt x="2904294" y="930347"/>
+                  </a:lnTo>
+                  <a:lnTo>
+                    <a:pt x="2974639" y="940839"/>
+                  </a:lnTo>
+                  <a:lnTo>
+                    <a:pt x="3044983" y="950994"/>
+                  </a:lnTo>
+                  <a:lnTo>
+                    <a:pt x="3115328" y="958998"/>
+                  </a:lnTo>
+                  <a:lnTo>
+                    <a:pt x="3185672" y="962685"/>
+                  </a:lnTo>
+                  <a:lnTo>
+                    <a:pt x="3256017" y="966326"/>
+                  </a:lnTo>
+                  <a:lnTo>
+                    <a:pt x="3326361" y="969922"/>
+                  </a:lnTo>
+                  <a:lnTo>
+                    <a:pt x="3396706" y="973473"/>
+                  </a:lnTo>
+                  <a:lnTo>
+                    <a:pt x="3467050" y="976981"/>
+                  </a:lnTo>
+                  <a:lnTo>
+                    <a:pt x="3537395" y="980446"/>
+                  </a:lnTo>
+                  <a:lnTo>
+                    <a:pt x="3607739" y="983867"/>
+                  </a:lnTo>
+                  <a:lnTo>
+                    <a:pt x="3678084" y="987246"/>
+                  </a:lnTo>
+                  <a:lnTo>
+                    <a:pt x="3748428" y="990584"/>
+                  </a:lnTo>
+                  <a:lnTo>
+                    <a:pt x="3818773" y="993880"/>
+                  </a:lnTo>
+                  <a:lnTo>
+                    <a:pt x="3889117" y="997135"/>
+                  </a:lnTo>
+                  <a:lnTo>
+                    <a:pt x="3959462" y="1000350"/>
+                  </a:lnTo>
+                  <a:lnTo>
+                    <a:pt x="4029806" y="1003526"/>
+                  </a:lnTo>
+                  <a:lnTo>
+                    <a:pt x="4100151" y="1006662"/>
+                  </a:lnTo>
+                  <a:lnTo>
+                    <a:pt x="4170495" y="1009759"/>
+                  </a:lnTo>
+                  <a:lnTo>
+                    <a:pt x="4240839" y="1012819"/>
+                  </a:lnTo>
+                  <a:lnTo>
+                    <a:pt x="4311184" y="1015840"/>
+                  </a:lnTo>
+                  <a:lnTo>
+                    <a:pt x="4381528" y="1018824"/>
+                  </a:lnTo>
+                  <a:lnTo>
+                    <a:pt x="4451873" y="1021771"/>
+                  </a:lnTo>
+                  <a:lnTo>
+                    <a:pt x="4522217" y="1024681"/>
+                  </a:lnTo>
+                  <a:lnTo>
+                    <a:pt x="4592562" y="1027556"/>
+                  </a:lnTo>
+                  <a:lnTo>
+                    <a:pt x="4662906" y="1030395"/>
+                  </a:lnTo>
+                  <a:lnTo>
+                    <a:pt x="4733251" y="1033199"/>
+                  </a:lnTo>
+                  <a:lnTo>
+                    <a:pt x="4803595" y="1035968"/>
+                  </a:lnTo>
+                  <a:lnTo>
+                    <a:pt x="4873940" y="1038703"/>
+                  </a:lnTo>
+                  <a:lnTo>
+                    <a:pt x="4944284" y="1041405"/>
+                  </a:lnTo>
+                  <a:lnTo>
+                    <a:pt x="5014629" y="1044073"/>
+                  </a:lnTo>
+                  <a:lnTo>
+                    <a:pt x="5084973" y="1046707"/>
+                  </a:lnTo>
+                  <a:lnTo>
+                    <a:pt x="5155318" y="1049310"/>
+                  </a:lnTo>
+                  <a:lnTo>
+                    <a:pt x="5225662" y="1051880"/>
+                  </a:lnTo>
+                  <a:lnTo>
+                    <a:pt x="5296007" y="1054418"/>
+                  </a:lnTo>
+                  <a:lnTo>
+                    <a:pt x="5366351" y="1056925"/>
+                  </a:lnTo>
+                  <a:lnTo>
+                    <a:pt x="5436696" y="1059401"/>
+                  </a:lnTo>
+                  <a:lnTo>
+                    <a:pt x="5507040" y="1061847"/>
+                  </a:lnTo>
+                  <a:lnTo>
+                    <a:pt x="5577385" y="1064262"/>
+                  </a:lnTo>
+                  <a:lnTo>
+                    <a:pt x="5647729" y="1066647"/>
+                  </a:lnTo>
+                  <a:lnTo>
+                    <a:pt x="5718074" y="1069003"/>
+                  </a:lnTo>
+                  <a:lnTo>
+                    <a:pt x="5788418" y="1071330"/>
+                  </a:lnTo>
+                  <a:lnTo>
+                    <a:pt x="5858763" y="1073628"/>
+                  </a:lnTo>
+                  <a:lnTo>
+                    <a:pt x="5929107" y="1075897"/>
+                  </a:lnTo>
+                  <a:lnTo>
+                    <a:pt x="5999452" y="1078138"/>
+                  </a:lnTo>
+                  <a:lnTo>
+                    <a:pt x="6069796" y="1080352"/>
+                  </a:lnTo>
+                  <a:lnTo>
+                    <a:pt x="6140141" y="1082539"/>
+                  </a:lnTo>
+                  <a:lnTo>
+                    <a:pt x="6210485" y="1084698"/>
+                  </a:lnTo>
+                  <a:lnTo>
+                    <a:pt x="6280830" y="1086831"/>
+                  </a:lnTo>
+                  <a:lnTo>
+                    <a:pt x="6351174" y="1088937"/>
+                  </a:lnTo>
+                  <a:lnTo>
+                    <a:pt x="6421519" y="1091017"/>
+                  </a:lnTo>
+                  <a:lnTo>
+                    <a:pt x="6491863" y="1093072"/>
+                  </a:lnTo>
+                  <a:lnTo>
+                    <a:pt x="6562208" y="1095101"/>
+                  </a:lnTo>
+                  <a:lnTo>
+                    <a:pt x="6632552" y="1097105"/>
+                  </a:lnTo>
+                  <a:lnTo>
+                    <a:pt x="6702897" y="1099084"/>
                   </a:lnTo>
                 </a:path>
               </a:pathLst>
@@ -4222,312 +3932,637 @@
           </p:nvSpPr>
           <p:spPr>
             <a:xfrm>
-              <a:off x="1172049" y="3127586"/>
-              <a:ext cx="7090630" cy="2168604"/>
+              <a:off x="1235312" y="2858496"/>
+              <a:ext cx="6964104" cy="485665"/>
             </a:xfrm>
             <a:custGeom>
               <a:avLst/>
               <a:pathLst>
-                <a:path w="7090630" h="2168604">
+                <a:path w="6964104" h="485665">
+                  <a:moveTo>
+                    <a:pt x="6964104" y="485665"/>
+                  </a:moveTo>
+                  <a:lnTo>
+                    <a:pt x="6893760" y="483804"/>
+                  </a:lnTo>
+                  <a:lnTo>
+                    <a:pt x="6823415" y="481880"/>
+                  </a:lnTo>
+                  <a:lnTo>
+                    <a:pt x="6753071" y="479893"/>
+                  </a:lnTo>
+                  <a:lnTo>
+                    <a:pt x="6682726" y="477840"/>
+                  </a:lnTo>
+                  <a:lnTo>
+                    <a:pt x="6612382" y="475719"/>
+                  </a:lnTo>
+                  <a:lnTo>
+                    <a:pt x="6542037" y="473528"/>
+                  </a:lnTo>
+                  <a:lnTo>
+                    <a:pt x="6471693" y="471264"/>
+                  </a:lnTo>
+                  <a:lnTo>
+                    <a:pt x="6401348" y="468924"/>
+                  </a:lnTo>
+                  <a:lnTo>
+                    <a:pt x="6331004" y="466508"/>
+                  </a:lnTo>
+                  <a:lnTo>
+                    <a:pt x="6260659" y="464011"/>
+                  </a:lnTo>
+                  <a:lnTo>
+                    <a:pt x="6190315" y="461431"/>
+                  </a:lnTo>
+                  <a:lnTo>
+                    <a:pt x="6119970" y="458766"/>
+                  </a:lnTo>
+                  <a:lnTo>
+                    <a:pt x="6049626" y="456012"/>
+                  </a:lnTo>
+                  <a:lnTo>
+                    <a:pt x="5979281" y="453167"/>
+                  </a:lnTo>
+                  <a:lnTo>
+                    <a:pt x="5908937" y="450228"/>
+                  </a:lnTo>
+                  <a:lnTo>
+                    <a:pt x="5838592" y="447191"/>
+                  </a:lnTo>
+                  <a:lnTo>
+                    <a:pt x="5768248" y="444053"/>
+                  </a:lnTo>
+                  <a:lnTo>
+                    <a:pt x="5697903" y="440812"/>
+                  </a:lnTo>
+                  <a:lnTo>
+                    <a:pt x="5627559" y="437463"/>
+                  </a:lnTo>
+                  <a:lnTo>
+                    <a:pt x="5557214" y="434002"/>
+                  </a:lnTo>
+                  <a:lnTo>
+                    <a:pt x="5486870" y="430428"/>
+                  </a:lnTo>
+                  <a:lnTo>
+                    <a:pt x="5416525" y="426734"/>
+                  </a:lnTo>
+                  <a:lnTo>
+                    <a:pt x="5346181" y="422918"/>
+                  </a:lnTo>
+                  <a:lnTo>
+                    <a:pt x="5275836" y="418976"/>
+                  </a:lnTo>
+                  <a:lnTo>
+                    <a:pt x="5205492" y="414902"/>
+                  </a:lnTo>
+                  <a:lnTo>
+                    <a:pt x="5135147" y="410694"/>
+                  </a:lnTo>
+                  <a:lnTo>
+                    <a:pt x="5064803" y="406346"/>
+                  </a:lnTo>
+                  <a:lnTo>
+                    <a:pt x="4994458" y="401854"/>
+                  </a:lnTo>
+                  <a:lnTo>
+                    <a:pt x="4924114" y="397213"/>
+                  </a:lnTo>
+                  <a:lnTo>
+                    <a:pt x="4853769" y="392418"/>
+                  </a:lnTo>
+                  <a:lnTo>
+                    <a:pt x="4783425" y="387464"/>
+                  </a:lnTo>
+                  <a:lnTo>
+                    <a:pt x="4713080" y="382345"/>
+                  </a:lnTo>
+                  <a:lnTo>
+                    <a:pt x="4642736" y="377057"/>
+                  </a:lnTo>
+                  <a:lnTo>
+                    <a:pt x="4572391" y="371594"/>
+                  </a:lnTo>
+                  <a:lnTo>
+                    <a:pt x="4502047" y="365949"/>
+                  </a:lnTo>
+                  <a:lnTo>
+                    <a:pt x="4431702" y="360117"/>
+                  </a:lnTo>
+                  <a:lnTo>
+                    <a:pt x="4361358" y="354092"/>
+                  </a:lnTo>
+                  <a:lnTo>
+                    <a:pt x="4291013" y="347867"/>
+                  </a:lnTo>
+                  <a:lnTo>
+                    <a:pt x="4220669" y="341436"/>
+                  </a:lnTo>
+                  <a:lnTo>
+                    <a:pt x="4150324" y="334791"/>
+                  </a:lnTo>
+                  <a:lnTo>
+                    <a:pt x="4079980" y="327926"/>
+                  </a:lnTo>
+                  <a:lnTo>
+                    <a:pt x="4009635" y="320833"/>
+                  </a:lnTo>
+                  <a:lnTo>
+                    <a:pt x="3939291" y="313505"/>
+                  </a:lnTo>
+                  <a:lnTo>
+                    <a:pt x="3868946" y="305933"/>
+                  </a:lnTo>
+                  <a:lnTo>
+                    <a:pt x="3798602" y="298111"/>
+                  </a:lnTo>
+                  <a:lnTo>
+                    <a:pt x="3728257" y="290030"/>
+                  </a:lnTo>
+                  <a:lnTo>
+                    <a:pt x="3657913" y="281680"/>
+                  </a:lnTo>
+                  <a:lnTo>
+                    <a:pt x="3587569" y="273053"/>
+                  </a:lnTo>
+                  <a:lnTo>
+                    <a:pt x="3517224" y="264141"/>
+                  </a:lnTo>
+                  <a:lnTo>
+                    <a:pt x="3446880" y="254933"/>
+                  </a:lnTo>
+                  <a:lnTo>
+                    <a:pt x="3376535" y="245419"/>
+                  </a:lnTo>
+                  <a:lnTo>
+                    <a:pt x="3306191" y="239861"/>
+                  </a:lnTo>
+                  <a:lnTo>
+                    <a:pt x="3235846" y="236082"/>
+                  </a:lnTo>
+                  <a:lnTo>
+                    <a:pt x="3165502" y="232255"/>
+                  </a:lnTo>
+                  <a:lnTo>
+                    <a:pt x="3095157" y="228380"/>
+                  </a:lnTo>
+                  <a:lnTo>
+                    <a:pt x="3024813" y="224457"/>
+                  </a:lnTo>
+                  <a:lnTo>
+                    <a:pt x="2954468" y="220485"/>
+                  </a:lnTo>
+                  <a:lnTo>
+                    <a:pt x="2884124" y="216463"/>
+                  </a:lnTo>
+                  <a:lnTo>
+                    <a:pt x="2813779" y="212390"/>
+                  </a:lnTo>
+                  <a:lnTo>
+                    <a:pt x="2743435" y="208267"/>
+                  </a:lnTo>
+                  <a:lnTo>
+                    <a:pt x="2673090" y="204092"/>
+                  </a:lnTo>
+                  <a:lnTo>
+                    <a:pt x="2602746" y="199864"/>
+                  </a:lnTo>
+                  <a:lnTo>
+                    <a:pt x="2532401" y="195584"/>
+                  </a:lnTo>
+                  <a:lnTo>
+                    <a:pt x="2462057" y="191250"/>
+                  </a:lnTo>
+                  <a:lnTo>
+                    <a:pt x="2391712" y="186862"/>
+                  </a:lnTo>
+                  <a:lnTo>
+                    <a:pt x="2321368" y="182419"/>
+                  </a:lnTo>
+                  <a:lnTo>
+                    <a:pt x="2251023" y="177921"/>
+                  </a:lnTo>
+                  <a:lnTo>
+                    <a:pt x="2180679" y="173366"/>
+                  </a:lnTo>
+                  <a:lnTo>
+                    <a:pt x="2110334" y="168754"/>
+                  </a:lnTo>
+                  <a:lnTo>
+                    <a:pt x="2039990" y="164084"/>
+                  </a:lnTo>
+                  <a:lnTo>
+                    <a:pt x="1969645" y="159356"/>
+                  </a:lnTo>
+                  <a:lnTo>
+                    <a:pt x="1899301" y="154569"/>
+                  </a:lnTo>
+                  <a:lnTo>
+                    <a:pt x="1828956" y="149722"/>
+                  </a:lnTo>
+                  <a:lnTo>
+                    <a:pt x="1758612" y="144814"/>
+                  </a:lnTo>
+                  <a:lnTo>
+                    <a:pt x="1688267" y="139845"/>
+                  </a:lnTo>
+                  <a:lnTo>
+                    <a:pt x="1617923" y="134813"/>
+                  </a:lnTo>
+                  <a:lnTo>
+                    <a:pt x="1547578" y="129719"/>
+                  </a:lnTo>
+                  <a:lnTo>
+                    <a:pt x="1477234" y="124561"/>
+                  </a:lnTo>
+                  <a:lnTo>
+                    <a:pt x="1406889" y="119338"/>
+                  </a:lnTo>
+                  <a:lnTo>
+                    <a:pt x="1336545" y="114050"/>
+                  </a:lnTo>
+                  <a:lnTo>
+                    <a:pt x="1266200" y="108695"/>
+                  </a:lnTo>
+                  <a:lnTo>
+                    <a:pt x="1195856" y="103274"/>
+                  </a:lnTo>
+                  <a:lnTo>
+                    <a:pt x="1125511" y="97784"/>
+                  </a:lnTo>
+                  <a:lnTo>
+                    <a:pt x="1055167" y="92226"/>
+                  </a:lnTo>
+                  <a:lnTo>
+                    <a:pt x="984822" y="86599"/>
+                  </a:lnTo>
+                  <a:lnTo>
+                    <a:pt x="914478" y="80901"/>
+                  </a:lnTo>
+                  <a:lnTo>
+                    <a:pt x="844133" y="75131"/>
+                  </a:lnTo>
+                  <a:lnTo>
+                    <a:pt x="773789" y="69290"/>
+                  </a:lnTo>
+                  <a:lnTo>
+                    <a:pt x="703444" y="63375"/>
+                  </a:lnTo>
+                  <a:lnTo>
+                    <a:pt x="633100" y="57387"/>
+                  </a:lnTo>
+                  <a:lnTo>
+                    <a:pt x="562755" y="51323"/>
+                  </a:lnTo>
+                  <a:lnTo>
+                    <a:pt x="492411" y="45183"/>
+                  </a:lnTo>
+                  <a:lnTo>
+                    <a:pt x="422066" y="38967"/>
+                  </a:lnTo>
+                  <a:lnTo>
+                    <a:pt x="351722" y="32673"/>
+                  </a:lnTo>
+                  <a:lnTo>
+                    <a:pt x="281377" y="26299"/>
+                  </a:lnTo>
+                  <a:lnTo>
+                    <a:pt x="211033" y="19847"/>
+                  </a:lnTo>
+                  <a:lnTo>
+                    <a:pt x="140688" y="13313"/>
+                  </a:lnTo>
+                  <a:lnTo>
+                    <a:pt x="70344" y="6698"/>
+                  </a:lnTo>
+                  <a:lnTo>
+                    <a:pt x="0" y="0"/>
+                  </a:lnTo>
+                </a:path>
+              </a:pathLst>
+            </a:custGeom>
+          </p:spPr>
+          <p:txBody>
+            <a:bodyPr/>
+            <a:lstStyle/>
+            <a:p/>
+          </p:txBody>
+        </p:sp>
+        <p:sp>
+          <p:nvSpPr>
+            <p:cNvPr id="24" name="pl24"/>
+            <p:cNvSpPr/>
+            <p:nvPr/>
+          </p:nvSpPr>
+          <p:spPr>
+            <a:xfrm>
+              <a:off x="1235312" y="2523485"/>
+              <a:ext cx="6964104" cy="782598"/>
+            </a:xfrm>
+            <a:custGeom>
+              <a:avLst/>
+              <a:pathLst>
+                <a:path w="6964104" h="782598">
                   <a:moveTo>
                     <a:pt x="0" y="0"/>
                   </a:moveTo>
                   <a:lnTo>
-                    <a:pt x="71622" y="54135"/>
-                  </a:lnTo>
-                  <a:lnTo>
-                    <a:pt x="143245" y="107064"/>
-                  </a:lnTo>
-                  <a:lnTo>
-                    <a:pt x="214867" y="158814"/>
-                  </a:lnTo>
-                  <a:lnTo>
-                    <a:pt x="286490" y="209410"/>
-                  </a:lnTo>
-                  <a:lnTo>
-                    <a:pt x="358112" y="258880"/>
-                  </a:lnTo>
-                  <a:lnTo>
-                    <a:pt x="429735" y="307247"/>
-                  </a:lnTo>
-                  <a:lnTo>
-                    <a:pt x="501357" y="354536"/>
-                  </a:lnTo>
-                  <a:lnTo>
-                    <a:pt x="572980" y="400772"/>
-                  </a:lnTo>
-                  <a:lnTo>
-                    <a:pt x="644602" y="445978"/>
-                  </a:lnTo>
-                  <a:lnTo>
-                    <a:pt x="716225" y="490176"/>
-                  </a:lnTo>
-                  <a:lnTo>
-                    <a:pt x="787847" y="533390"/>
-                  </a:lnTo>
-                  <a:lnTo>
-                    <a:pt x="859470" y="575641"/>
-                  </a:lnTo>
-                  <a:lnTo>
-                    <a:pt x="931092" y="616950"/>
-                  </a:lnTo>
-                  <a:lnTo>
-                    <a:pt x="1002715" y="657339"/>
-                  </a:lnTo>
-                  <a:lnTo>
-                    <a:pt x="1074337" y="696828"/>
-                  </a:lnTo>
-                  <a:lnTo>
-                    <a:pt x="1145960" y="735437"/>
-                  </a:lnTo>
-                  <a:lnTo>
-                    <a:pt x="1217582" y="773186"/>
-                  </a:lnTo>
-                  <a:lnTo>
-                    <a:pt x="1289205" y="810094"/>
-                  </a:lnTo>
-                  <a:lnTo>
-                    <a:pt x="1360827" y="846180"/>
-                  </a:lnTo>
-                  <a:lnTo>
-                    <a:pt x="1432450" y="881461"/>
-                  </a:lnTo>
-                  <a:lnTo>
-                    <a:pt x="1504073" y="915957"/>
-                  </a:lnTo>
-                  <a:lnTo>
-                    <a:pt x="1575695" y="949684"/>
-                  </a:lnTo>
-                  <a:lnTo>
-                    <a:pt x="1647318" y="982659"/>
-                  </a:lnTo>
-                  <a:lnTo>
-                    <a:pt x="1718940" y="1014900"/>
-                  </a:lnTo>
-                  <a:lnTo>
-                    <a:pt x="1790563" y="1046422"/>
-                  </a:lnTo>
-                  <a:lnTo>
-                    <a:pt x="1862185" y="1077242"/>
-                  </a:lnTo>
-                  <a:lnTo>
-                    <a:pt x="1933808" y="1107375"/>
-                  </a:lnTo>
-                  <a:lnTo>
-                    <a:pt x="2005430" y="1136837"/>
-                  </a:lnTo>
-                  <a:lnTo>
-                    <a:pt x="2077053" y="1165642"/>
-                  </a:lnTo>
-                  <a:lnTo>
-                    <a:pt x="2148675" y="1193806"/>
-                  </a:lnTo>
-                  <a:lnTo>
-                    <a:pt x="2220298" y="1221342"/>
-                  </a:lnTo>
-                  <a:lnTo>
-                    <a:pt x="2291920" y="1248265"/>
-                  </a:lnTo>
-                  <a:lnTo>
-                    <a:pt x="2363543" y="1274587"/>
-                  </a:lnTo>
-                  <a:lnTo>
-                    <a:pt x="2435165" y="1300324"/>
-                  </a:lnTo>
-                  <a:lnTo>
-                    <a:pt x="2506788" y="1325486"/>
-                  </a:lnTo>
-                  <a:lnTo>
-                    <a:pt x="2578410" y="1350089"/>
-                  </a:lnTo>
-                  <a:lnTo>
-                    <a:pt x="2650033" y="1374142"/>
-                  </a:lnTo>
-                  <a:lnTo>
-                    <a:pt x="2721655" y="1397661"/>
-                  </a:lnTo>
-                  <a:lnTo>
-                    <a:pt x="2793278" y="1420655"/>
-                  </a:lnTo>
-                  <a:lnTo>
-                    <a:pt x="2864901" y="1443136"/>
-                  </a:lnTo>
-                  <a:lnTo>
-                    <a:pt x="2936523" y="1465117"/>
-                  </a:lnTo>
-                  <a:lnTo>
-                    <a:pt x="3008146" y="1486608"/>
-                  </a:lnTo>
-                  <a:lnTo>
-                    <a:pt x="3079768" y="1507620"/>
-                  </a:lnTo>
-                  <a:lnTo>
-                    <a:pt x="3151391" y="1528164"/>
-                  </a:lnTo>
-                  <a:lnTo>
-                    <a:pt x="3223013" y="1548250"/>
-                  </a:lnTo>
-                  <a:lnTo>
-                    <a:pt x="3294636" y="1567889"/>
-                  </a:lnTo>
-                  <a:lnTo>
-                    <a:pt x="3366258" y="1587090"/>
-                  </a:lnTo>
-                  <a:lnTo>
-                    <a:pt x="3437881" y="1605864"/>
-                  </a:lnTo>
-                  <a:lnTo>
-                    <a:pt x="3509503" y="1624219"/>
-                  </a:lnTo>
-                  <a:lnTo>
-                    <a:pt x="3581126" y="1642165"/>
-                  </a:lnTo>
-                  <a:lnTo>
-                    <a:pt x="3652748" y="1659711"/>
-                  </a:lnTo>
-                  <a:lnTo>
-                    <a:pt x="3724371" y="1676866"/>
-                  </a:lnTo>
-                  <a:lnTo>
-                    <a:pt x="3795993" y="1693639"/>
-                  </a:lnTo>
-                  <a:lnTo>
-                    <a:pt x="3867616" y="1710039"/>
-                  </a:lnTo>
-                  <a:lnTo>
-                    <a:pt x="3939238" y="1726073"/>
-                  </a:lnTo>
-                  <a:lnTo>
-                    <a:pt x="4010861" y="1741749"/>
-                  </a:lnTo>
-                  <a:lnTo>
-                    <a:pt x="4082483" y="1757077"/>
-                  </a:lnTo>
-                  <a:lnTo>
-                    <a:pt x="4154106" y="1772063"/>
-                  </a:lnTo>
-                  <a:lnTo>
-                    <a:pt x="4225729" y="1786715"/>
-                  </a:lnTo>
-                  <a:lnTo>
-                    <a:pt x="4297351" y="1801040"/>
-                  </a:lnTo>
-                  <a:lnTo>
-                    <a:pt x="4368974" y="1815046"/>
-                  </a:lnTo>
-                  <a:lnTo>
-                    <a:pt x="4440596" y="1828741"/>
-                  </a:lnTo>
-                  <a:lnTo>
-                    <a:pt x="4512219" y="1842130"/>
-                  </a:lnTo>
-                  <a:lnTo>
-                    <a:pt x="4583841" y="1855221"/>
-                  </a:lnTo>
-                  <a:lnTo>
-                    <a:pt x="4655464" y="1868020"/>
-                  </a:lnTo>
-                  <a:lnTo>
-                    <a:pt x="4727086" y="1880534"/>
-                  </a:lnTo>
-                  <a:lnTo>
-                    <a:pt x="4798709" y="1892769"/>
-                  </a:lnTo>
-                  <a:lnTo>
-                    <a:pt x="4870331" y="1904731"/>
-                  </a:lnTo>
-                  <a:lnTo>
-                    <a:pt x="4941954" y="1916427"/>
-                  </a:lnTo>
-                  <a:lnTo>
-                    <a:pt x="5013576" y="1927863"/>
-                  </a:lnTo>
-                  <a:lnTo>
-                    <a:pt x="5085199" y="1939043"/>
-                  </a:lnTo>
-                  <a:lnTo>
-                    <a:pt x="5156821" y="1949975"/>
-                  </a:lnTo>
-                  <a:lnTo>
-                    <a:pt x="5228444" y="1960663"/>
-                  </a:lnTo>
-                  <a:lnTo>
-                    <a:pt x="5300066" y="1971113"/>
-                  </a:lnTo>
-                  <a:lnTo>
-                    <a:pt x="5371689" y="1981330"/>
-                  </a:lnTo>
-                  <a:lnTo>
-                    <a:pt x="5443311" y="1991319"/>
-                  </a:lnTo>
-                  <a:lnTo>
-                    <a:pt x="5514934" y="2001086"/>
-                  </a:lnTo>
-                  <a:lnTo>
-                    <a:pt x="5586557" y="2010635"/>
-                  </a:lnTo>
-                  <a:lnTo>
-                    <a:pt x="5658179" y="2019971"/>
-                  </a:lnTo>
-                  <a:lnTo>
-                    <a:pt x="5729802" y="2029099"/>
-                  </a:lnTo>
-                  <a:lnTo>
-                    <a:pt x="5801424" y="2038024"/>
-                  </a:lnTo>
-                  <a:lnTo>
-                    <a:pt x="5873047" y="2046750"/>
-                  </a:lnTo>
-                  <a:lnTo>
-                    <a:pt x="5944669" y="2055282"/>
-                  </a:lnTo>
-                  <a:lnTo>
-                    <a:pt x="6016292" y="2063624"/>
-                  </a:lnTo>
-                  <a:lnTo>
-                    <a:pt x="6087914" y="2071779"/>
-                  </a:lnTo>
-                  <a:lnTo>
-                    <a:pt x="6159537" y="2079753"/>
-                  </a:lnTo>
-                  <a:lnTo>
-                    <a:pt x="6231159" y="2087550"/>
-                  </a:lnTo>
-                  <a:lnTo>
-                    <a:pt x="6302782" y="2095172"/>
-                  </a:lnTo>
-                  <a:lnTo>
-                    <a:pt x="6374404" y="2102625"/>
-                  </a:lnTo>
-                  <a:lnTo>
-                    <a:pt x="6446027" y="2109912"/>
-                  </a:lnTo>
-                  <a:lnTo>
-                    <a:pt x="6517649" y="2117036"/>
-                  </a:lnTo>
-                  <a:lnTo>
-                    <a:pt x="6589272" y="2124002"/>
-                  </a:lnTo>
-                  <a:lnTo>
-                    <a:pt x="6660894" y="2130812"/>
-                  </a:lnTo>
-                  <a:lnTo>
-                    <a:pt x="6732517" y="2137471"/>
-                  </a:lnTo>
-                  <a:lnTo>
-                    <a:pt x="6804139" y="2143981"/>
-                  </a:lnTo>
-                  <a:lnTo>
-                    <a:pt x="6875762" y="2150347"/>
-                  </a:lnTo>
-                  <a:lnTo>
-                    <a:pt x="6947385" y="2156570"/>
-                  </a:lnTo>
-                  <a:lnTo>
-                    <a:pt x="7019007" y="2162655"/>
-                  </a:lnTo>
-                  <a:lnTo>
-                    <a:pt x="7090630" y="2168604"/>
+                    <a:pt x="70344" y="19536"/>
+                  </a:lnTo>
+                  <a:lnTo>
+                    <a:pt x="140688" y="38636"/>
+                  </a:lnTo>
+                  <a:lnTo>
+                    <a:pt x="211033" y="57312"/>
+                  </a:lnTo>
+                  <a:lnTo>
+                    <a:pt x="281377" y="75571"/>
+                  </a:lnTo>
+                  <a:lnTo>
+                    <a:pt x="351722" y="93423"/>
+                  </a:lnTo>
+                  <a:lnTo>
+                    <a:pt x="422066" y="110878"/>
+                  </a:lnTo>
+                  <a:lnTo>
+                    <a:pt x="492411" y="127943"/>
+                  </a:lnTo>
+                  <a:lnTo>
+                    <a:pt x="562755" y="144629"/>
+                  </a:lnTo>
+                  <a:lnTo>
+                    <a:pt x="633100" y="160943"/>
+                  </a:lnTo>
+                  <a:lnTo>
+                    <a:pt x="703444" y="176893"/>
+                  </a:lnTo>
+                  <a:lnTo>
+                    <a:pt x="773789" y="192488"/>
+                  </a:lnTo>
+                  <a:lnTo>
+                    <a:pt x="844133" y="207735"/>
+                  </a:lnTo>
+                  <a:lnTo>
+                    <a:pt x="914478" y="222642"/>
+                  </a:lnTo>
+                  <a:lnTo>
+                    <a:pt x="984822" y="237218"/>
+                  </a:lnTo>
+                  <a:lnTo>
+                    <a:pt x="1055167" y="251469"/>
+                  </a:lnTo>
+                  <a:lnTo>
+                    <a:pt x="1125511" y="265402"/>
+                  </a:lnTo>
+                  <a:lnTo>
+                    <a:pt x="1195856" y="279024"/>
+                  </a:lnTo>
+                  <a:lnTo>
+                    <a:pt x="1266200" y="292344"/>
+                  </a:lnTo>
+                  <a:lnTo>
+                    <a:pt x="1336545" y="305366"/>
+                  </a:lnTo>
+                  <a:lnTo>
+                    <a:pt x="1406889" y="318098"/>
+                  </a:lnTo>
+                  <a:lnTo>
+                    <a:pt x="1477234" y="330547"/>
+                  </a:lnTo>
+                  <a:lnTo>
+                    <a:pt x="1547578" y="342718"/>
+                  </a:lnTo>
+                  <a:lnTo>
+                    <a:pt x="1617923" y="354618"/>
+                  </a:lnTo>
+                  <a:lnTo>
+                    <a:pt x="1688267" y="366253"/>
+                  </a:lnTo>
+                  <a:lnTo>
+                    <a:pt x="1758612" y="377629"/>
+                  </a:lnTo>
+                  <a:lnTo>
+                    <a:pt x="1828956" y="388751"/>
+                  </a:lnTo>
+                  <a:lnTo>
+                    <a:pt x="1899301" y="399625"/>
+                  </a:lnTo>
+                  <a:lnTo>
+                    <a:pt x="1969645" y="410257"/>
+                  </a:lnTo>
+                  <a:lnTo>
+                    <a:pt x="2039990" y="420653"/>
+                  </a:lnTo>
+                  <a:lnTo>
+                    <a:pt x="2110334" y="430816"/>
+                  </a:lnTo>
+                  <a:lnTo>
+                    <a:pt x="2180679" y="440753"/>
+                  </a:lnTo>
+                  <a:lnTo>
+                    <a:pt x="2251023" y="450469"/>
+                  </a:lnTo>
+                  <a:lnTo>
+                    <a:pt x="2321368" y="459968"/>
+                  </a:lnTo>
+                  <a:lnTo>
+                    <a:pt x="2391712" y="469256"/>
+                  </a:lnTo>
+                  <a:lnTo>
+                    <a:pt x="2462057" y="478337"/>
+                  </a:lnTo>
+                  <a:lnTo>
+                    <a:pt x="2532401" y="487215"/>
+                  </a:lnTo>
+                  <a:lnTo>
+                    <a:pt x="2602746" y="495895"/>
+                  </a:lnTo>
+                  <a:lnTo>
+                    <a:pt x="2673090" y="504382"/>
+                  </a:lnTo>
+                  <a:lnTo>
+                    <a:pt x="2743435" y="512680"/>
+                  </a:lnTo>
+                  <a:lnTo>
+                    <a:pt x="2813779" y="520794"/>
+                  </a:lnTo>
+                  <a:lnTo>
+                    <a:pt x="2884124" y="528726"/>
+                  </a:lnTo>
+                  <a:lnTo>
+                    <a:pt x="2954468" y="536482"/>
+                  </a:lnTo>
+                  <a:lnTo>
+                    <a:pt x="3024813" y="544064"/>
+                  </a:lnTo>
+                  <a:lnTo>
+                    <a:pt x="3095157" y="551478"/>
+                  </a:lnTo>
+                  <a:lnTo>
+                    <a:pt x="3165502" y="558727"/>
+                  </a:lnTo>
+                  <a:lnTo>
+                    <a:pt x="3235846" y="565814"/>
+                  </a:lnTo>
+                  <a:lnTo>
+                    <a:pt x="3306191" y="572743"/>
+                  </a:lnTo>
+                  <a:lnTo>
+                    <a:pt x="3376535" y="579518"/>
+                  </a:lnTo>
+                  <a:lnTo>
+                    <a:pt x="3446880" y="586142"/>
+                  </a:lnTo>
+                  <a:lnTo>
+                    <a:pt x="3517224" y="592618"/>
+                  </a:lnTo>
+                  <a:lnTo>
+                    <a:pt x="3587569" y="598950"/>
+                  </a:lnTo>
+                  <a:lnTo>
+                    <a:pt x="3657913" y="605141"/>
+                  </a:lnTo>
+                  <a:lnTo>
+                    <a:pt x="3728257" y="611194"/>
+                  </a:lnTo>
+                  <a:lnTo>
+                    <a:pt x="3798602" y="617112"/>
+                  </a:lnTo>
+                  <a:lnTo>
+                    <a:pt x="3868946" y="622899"/>
+                  </a:lnTo>
+                  <a:lnTo>
+                    <a:pt x="3939291" y="628556"/>
+                  </a:lnTo>
+                  <a:lnTo>
+                    <a:pt x="4009635" y="634087"/>
+                  </a:lnTo>
+                  <a:lnTo>
+                    <a:pt x="4079980" y="639495"/>
+                  </a:lnTo>
+                  <a:lnTo>
+                    <a:pt x="4150324" y="644783"/>
+                  </a:lnTo>
+                  <a:lnTo>
+                    <a:pt x="4220669" y="649953"/>
+                  </a:lnTo>
+                  <a:lnTo>
+                    <a:pt x="4291013" y="655007"/>
+                  </a:lnTo>
+                  <a:lnTo>
+                    <a:pt x="4361358" y="659949"/>
+                  </a:lnTo>
+                  <a:lnTo>
+                    <a:pt x="4431702" y="664781"/>
+                  </a:lnTo>
+                  <a:lnTo>
+                    <a:pt x="4502047" y="669505"/>
+                  </a:lnTo>
+                  <a:lnTo>
+                    <a:pt x="4572391" y="674124"/>
+                  </a:lnTo>
+                  <a:lnTo>
+                    <a:pt x="4642736" y="678640"/>
+                  </a:lnTo>
+                  <a:lnTo>
+                    <a:pt x="4713080" y="683055"/>
+                  </a:lnTo>
+                  <a:lnTo>
+                    <a:pt x="4783425" y="687372"/>
+                  </a:lnTo>
+                  <a:lnTo>
+                    <a:pt x="4853769" y="691593"/>
+                  </a:lnTo>
+                  <a:lnTo>
+                    <a:pt x="4924114" y="695720"/>
+                  </a:lnTo>
+                  <a:lnTo>
+                    <a:pt x="4994458" y="699755"/>
+                  </a:lnTo>
+                  <a:lnTo>
+                    <a:pt x="5064803" y="703700"/>
+                  </a:lnTo>
+                  <a:lnTo>
+                    <a:pt x="5135147" y="707557"/>
+                  </a:lnTo>
+                  <a:lnTo>
+                    <a:pt x="5205492" y="711328"/>
+                  </a:lnTo>
+                  <a:lnTo>
+                    <a:pt x="5275836" y="715015"/>
+                  </a:lnTo>
+                  <a:lnTo>
+                    <a:pt x="5346181" y="718620"/>
+                  </a:lnTo>
+                  <a:lnTo>
+                    <a:pt x="5416525" y="722144"/>
+                  </a:lnTo>
+                  <a:lnTo>
+                    <a:pt x="5486870" y="725590"/>
+                  </a:lnTo>
+                  <a:lnTo>
+                    <a:pt x="5557214" y="728960"/>
+                  </a:lnTo>
+                  <a:lnTo>
+                    <a:pt x="5627559" y="732254"/>
+                  </a:lnTo>
+                  <a:lnTo>
+                    <a:pt x="5697903" y="735475"/>
+                  </a:lnTo>
+                  <a:lnTo>
+                    <a:pt x="5768248" y="738624"/>
+                  </a:lnTo>
+                  <a:lnTo>
+                    <a:pt x="5838592" y="741703"/>
+                  </a:lnTo>
+                  <a:lnTo>
+                    <a:pt x="5908937" y="744713"/>
+                  </a:lnTo>
+                  <a:lnTo>
+                    <a:pt x="5979281" y="747656"/>
+                  </a:lnTo>
+                  <a:lnTo>
+                    <a:pt x="6049626" y="750534"/>
+                  </a:lnTo>
+                  <a:lnTo>
+                    <a:pt x="6119970" y="753347"/>
+                  </a:lnTo>
+                  <a:lnTo>
+                    <a:pt x="6190315" y="756098"/>
+                  </a:lnTo>
+                  <a:lnTo>
+                    <a:pt x="6260659" y="758788"/>
+                  </a:lnTo>
+                  <a:lnTo>
+                    <a:pt x="6331004" y="761417"/>
+                  </a:lnTo>
+                  <a:lnTo>
+                    <a:pt x="6401348" y="763988"/>
+                  </a:lnTo>
+                  <a:lnTo>
+                    <a:pt x="6471693" y="766502"/>
+                  </a:lnTo>
+                  <a:lnTo>
+                    <a:pt x="6542037" y="768960"/>
+                  </a:lnTo>
+                  <a:lnTo>
+                    <a:pt x="6612382" y="771363"/>
+                  </a:lnTo>
+                  <a:lnTo>
+                    <a:pt x="6682726" y="773712"/>
+                  </a:lnTo>
+                  <a:lnTo>
+                    <a:pt x="6753071" y="776009"/>
+                  </a:lnTo>
+                  <a:lnTo>
+                    <a:pt x="6823415" y="778255"/>
+                  </a:lnTo>
+                  <a:lnTo>
+                    <a:pt x="6893760" y="780451"/>
+                  </a:lnTo>
+                  <a:lnTo>
+                    <a:pt x="6964104" y="782598"/>
                   </a:lnTo>
                 </a:path>
               </a:pathLst>
@@ -4550,27 +4585,27 @@
         </p:sp>
         <p:sp>
           <p:nvSpPr>
-            <p:cNvPr id="24" name="pl24"/>
+            <p:cNvPr id="25" name="pl25"/>
             <p:cNvSpPr/>
             <p:nvPr/>
           </p:nvSpPr>
           <p:spPr>
             <a:xfrm>
-              <a:off x="817517" y="4727786"/>
-              <a:ext cx="7799693" cy="0"/>
+              <a:off x="887106" y="3100960"/>
+              <a:ext cx="7660515" cy="0"/>
             </a:xfrm>
             <a:custGeom>
               <a:avLst/>
               <a:pathLst>
-                <a:path w="7799693" h="0">
+                <a:path w="7660515" h="0">
                   <a:moveTo>
                     <a:pt x="0" y="0"/>
                   </a:moveTo>
                   <a:lnTo>
-                    <a:pt x="7799693" y="0"/>
-                  </a:lnTo>
-                  <a:lnTo>
-                    <a:pt x="7799693" y="0"/>
+                    <a:pt x="7660515" y="0"/>
+                  </a:lnTo>
+                  <a:lnTo>
+                    <a:pt x="7660515" y="0"/>
                   </a:lnTo>
                 </a:path>
               </a:pathLst>
@@ -4593,21 +4628,21 @@
         </p:sp>
         <p:sp>
           <p:nvSpPr>
-            <p:cNvPr id="25" name="pl25"/>
+            <p:cNvPr id="26" name="pl26"/>
             <p:cNvSpPr/>
             <p:nvPr/>
           </p:nvSpPr>
           <p:spPr>
             <a:xfrm>
-              <a:off x="4588151" y="2073503"/>
-              <a:ext cx="0" cy="3649639"/>
+              <a:off x="4590457" y="2143092"/>
+              <a:ext cx="0" cy="1317069"/>
             </a:xfrm>
             <a:custGeom>
               <a:avLst/>
               <a:pathLst>
-                <a:path w="0" h="3649639">
+                <a:path w="0" h="1317069">
                   <a:moveTo>
-                    <a:pt x="0" y="3649639"/>
+                    <a:pt x="0" y="1317069"/>
                   </a:moveTo>
                   <a:lnTo>
                     <a:pt x="0" y="0"/>
@@ -4636,13 +4671,13 @@
         </p:sp>
         <p:sp>
           <p:nvSpPr>
-            <p:cNvPr id="26" name="tx26"/>
+            <p:cNvPr id="27" name="tx27"/>
             <p:cNvSpPr/>
             <p:nvPr/>
           </p:nvSpPr>
           <p:spPr>
             <a:xfrm>
-              <a:off x="692708" y="5517199"/>
+              <a:off x="762297" y="3360243"/>
               <a:ext cx="62179" cy="80101"/>
             </a:xfrm>
             <a:prstGeom prst="rect">
@@ -4682,13 +4717,13 @@
         </p:sp>
         <p:sp>
           <p:nvSpPr>
-            <p:cNvPr id="27" name="tx27"/>
+            <p:cNvPr id="28" name="tx28"/>
             <p:cNvSpPr/>
             <p:nvPr/>
           </p:nvSpPr>
           <p:spPr>
             <a:xfrm>
-              <a:off x="692708" y="4687735"/>
+              <a:off x="762297" y="3060909"/>
               <a:ext cx="62179" cy="80101"/>
             </a:xfrm>
             <a:prstGeom prst="rect">
@@ -4728,13 +4763,13 @@
         </p:sp>
         <p:sp>
           <p:nvSpPr>
-            <p:cNvPr id="28" name="tx28"/>
+            <p:cNvPr id="29" name="tx29"/>
             <p:cNvSpPr/>
             <p:nvPr/>
           </p:nvSpPr>
           <p:spPr>
             <a:xfrm>
-              <a:off x="692708" y="3858272"/>
+              <a:off x="762297" y="2761575"/>
               <a:ext cx="62179" cy="80101"/>
             </a:xfrm>
             <a:prstGeom prst="rect">
@@ -4774,13 +4809,13 @@
         </p:sp>
         <p:sp>
           <p:nvSpPr>
-            <p:cNvPr id="29" name="tx29"/>
+            <p:cNvPr id="30" name="tx30"/>
             <p:cNvSpPr/>
             <p:nvPr/>
           </p:nvSpPr>
           <p:spPr>
             <a:xfrm>
-              <a:off x="692708" y="3028808"/>
+              <a:off x="762297" y="2462242"/>
               <a:ext cx="62179" cy="80101"/>
             </a:xfrm>
             <a:prstGeom prst="rect">
@@ -4820,13 +4855,13 @@
         </p:sp>
         <p:sp>
           <p:nvSpPr>
-            <p:cNvPr id="30" name="tx30"/>
+            <p:cNvPr id="31" name="tx31"/>
             <p:cNvSpPr/>
             <p:nvPr/>
           </p:nvSpPr>
           <p:spPr>
             <a:xfrm>
-              <a:off x="692708" y="2199345"/>
+              <a:off x="762297" y="2162908"/>
               <a:ext cx="62179" cy="80101"/>
             </a:xfrm>
             <a:prstGeom prst="rect">
@@ -4866,13 +4901,13 @@
         </p:sp>
         <p:sp>
           <p:nvSpPr>
-            <p:cNvPr id="31" name="tx31"/>
+            <p:cNvPr id="32" name="tx32"/>
             <p:cNvSpPr/>
             <p:nvPr/>
           </p:nvSpPr>
           <p:spPr>
             <a:xfrm>
-              <a:off x="2360651" y="5785772"/>
+              <a:off x="2401262" y="3522791"/>
               <a:ext cx="161574" cy="80101"/>
             </a:xfrm>
             <a:prstGeom prst="rect">
@@ -4912,13 +4947,13 @@
         </p:sp>
         <p:sp>
           <p:nvSpPr>
-            <p:cNvPr id="32" name="tx32"/>
+            <p:cNvPr id="33" name="tx33"/>
             <p:cNvSpPr/>
             <p:nvPr/>
           </p:nvSpPr>
           <p:spPr>
             <a:xfrm>
-              <a:off x="4561958" y="5785772"/>
+              <a:off x="4564176" y="3522791"/>
               <a:ext cx="62179" cy="80101"/>
             </a:xfrm>
             <a:prstGeom prst="rect">
@@ -4958,13 +4993,13 @@
         </p:sp>
         <p:sp>
           <p:nvSpPr>
-            <p:cNvPr id="33" name="tx33"/>
+            <p:cNvPr id="34" name="tx34"/>
             <p:cNvSpPr/>
             <p:nvPr/>
           </p:nvSpPr>
           <p:spPr>
             <a:xfrm>
-              <a:off x="6682478" y="5785772"/>
+              <a:off x="6646302" y="3522791"/>
               <a:ext cx="124358" cy="80101"/>
             </a:xfrm>
             <a:prstGeom prst="rect">
@@ -5004,13 +5039,13 @@
         </p:sp>
         <p:sp>
           <p:nvSpPr>
-            <p:cNvPr id="34" name="tx34"/>
+            <p:cNvPr id="35" name="tx35"/>
             <p:cNvSpPr/>
             <p:nvPr/>
           </p:nvSpPr>
           <p:spPr>
             <a:xfrm>
-              <a:off x="2928340" y="5925448"/>
+              <a:off x="2928340" y="3662467"/>
               <a:ext cx="3578047" cy="100218"/>
             </a:xfrm>
             <a:prstGeom prst="rect">
@@ -5050,13 +5085,13 @@
         </p:sp>
         <p:sp>
           <p:nvSpPr>
-            <p:cNvPr id="35" name="tx35"/>
+            <p:cNvPr id="36" name="tx36"/>
             <p:cNvSpPr/>
             <p:nvPr/>
           </p:nvSpPr>
           <p:spPr>
             <a:xfrm rot="-5400000">
-              <a:off x="68446" y="3848213"/>
+              <a:off x="138035" y="2751517"/>
               <a:ext cx="1016904" cy="100218"/>
             </a:xfrm>
             <a:prstGeom prst="rect">
@@ -5096,13 +5131,13 @@
         </p:sp>
         <p:sp>
           <p:nvSpPr>
-            <p:cNvPr id="36" name="tx36"/>
+            <p:cNvPr id="37" name="tx37"/>
             <p:cNvSpPr/>
             <p:nvPr/>
           </p:nvSpPr>
           <p:spPr>
             <a:xfrm>
-              <a:off x="817517" y="1896563"/>
+              <a:off x="887106" y="1966152"/>
               <a:ext cx="7052127" cy="82021"/>
             </a:xfrm>
             <a:prstGeom prst="rect">
@@ -5142,13 +5177,3685 @@
         </p:sp>
         <p:sp>
           <p:nvSpPr>
-            <p:cNvPr id="37" name="tx37"/>
+            <p:cNvPr id="38" name="tx38"/>
             <p:cNvSpPr/>
             <p:nvPr/>
           </p:nvSpPr>
           <p:spPr>
             <a:xfrm>
-              <a:off x="817517" y="1669789"/>
+              <a:off x="887106" y="1739378"/>
+              <a:ext cx="2039386" cy="120152"/>
+            </a:xfrm>
+            <a:prstGeom prst="rect">
+              <a:avLst/>
+            </a:prstGeom>
+            <a:noFill/>
+          </p:spPr>
+          <p:txBody>
+            <a:bodyPr lIns="0" rIns="0" tIns="0" bIns="0" anchorCtr="1" anchor="ctr" wrap="none"/>
+            <a:lstStyle/>
+            <a:p>
+              <a:pPr algn="l" marL="0" marR="0" indent="0">
+                <a:lnSpc>
+                  <a:spcPts val="1320"/>
+                </a:lnSpc>
+                <a:spcBef>
+                  <a:spcPts val="0"/>
+                </a:spcBef>
+                <a:spcAft>
+                  <a:spcPts val="0"/>
+                </a:spcAft>
+              </a:pPr>
+              <a:r>
+                <a:rPr sz="1320">
+                  <a:solidFill>
+                    <a:srgbClr val="000000">
+                      <a:alpha val="100000"/>
+                    </a:srgbClr>
+                  </a:solidFill>
+                  <a:latin typeface="Helvetica"/>
+                  <a:cs typeface="Helvetica"/>
+                </a:rPr>
+                <a:t>Thrombocytopenia Grade 2</a:t>
+              </a:r>
+            </a:p>
+          </p:txBody>
+        </p:sp>
+        <p:sp>
+          <p:nvSpPr>
+            <p:cNvPr id="39" name="pl39"/>
+            <p:cNvSpPr/>
+            <p:nvPr/>
+          </p:nvSpPr>
+          <p:spPr>
+            <a:xfrm>
+              <a:off x="887106" y="5444019"/>
+              <a:ext cx="7660515" cy="0"/>
+            </a:xfrm>
+            <a:custGeom>
+              <a:avLst/>
+              <a:pathLst>
+                <a:path w="7660515" h="0">
+                  <a:moveTo>
+                    <a:pt x="0" y="0"/>
+                  </a:moveTo>
+                  <a:lnTo>
+                    <a:pt x="7660515" y="0"/>
+                  </a:lnTo>
+                  <a:lnTo>
+                    <a:pt x="7660515" y="0"/>
+                  </a:lnTo>
+                </a:path>
+              </a:pathLst>
+            </a:custGeom>
+            <a:ln w="6775" cap="flat">
+              <a:solidFill>
+                <a:srgbClr val="EBEBEB">
+                  <a:alpha val="100000"/>
+                </a:srgbClr>
+              </a:solidFill>
+              <a:prstDash val="solid"/>
+              <a:round/>
+            </a:ln>
+          </p:spPr>
+          <p:txBody>
+            <a:bodyPr/>
+            <a:lstStyle/>
+            <a:p/>
+          </p:txBody>
+        </p:sp>
+        <p:sp>
+          <p:nvSpPr>
+            <p:cNvPr id="40" name="pl40"/>
+            <p:cNvSpPr/>
+            <p:nvPr/>
+          </p:nvSpPr>
+          <p:spPr>
+            <a:xfrm>
+              <a:off x="887106" y="5144686"/>
+              <a:ext cx="7660515" cy="0"/>
+            </a:xfrm>
+            <a:custGeom>
+              <a:avLst/>
+              <a:pathLst>
+                <a:path w="7660515" h="0">
+                  <a:moveTo>
+                    <a:pt x="0" y="0"/>
+                  </a:moveTo>
+                  <a:lnTo>
+                    <a:pt x="7660515" y="0"/>
+                  </a:lnTo>
+                  <a:lnTo>
+                    <a:pt x="7660515" y="0"/>
+                  </a:lnTo>
+                </a:path>
+              </a:pathLst>
+            </a:custGeom>
+            <a:ln w="6775" cap="flat">
+              <a:solidFill>
+                <a:srgbClr val="EBEBEB">
+                  <a:alpha val="100000"/>
+                </a:srgbClr>
+              </a:solidFill>
+              <a:prstDash val="solid"/>
+              <a:round/>
+            </a:ln>
+          </p:spPr>
+          <p:txBody>
+            <a:bodyPr/>
+            <a:lstStyle/>
+            <a:p/>
+          </p:txBody>
+        </p:sp>
+        <p:sp>
+          <p:nvSpPr>
+            <p:cNvPr id="41" name="pl41"/>
+            <p:cNvSpPr/>
+            <p:nvPr/>
+          </p:nvSpPr>
+          <p:spPr>
+            <a:xfrm>
+              <a:off x="887106" y="4845352"/>
+              <a:ext cx="7660515" cy="0"/>
+            </a:xfrm>
+            <a:custGeom>
+              <a:avLst/>
+              <a:pathLst>
+                <a:path w="7660515" h="0">
+                  <a:moveTo>
+                    <a:pt x="0" y="0"/>
+                  </a:moveTo>
+                  <a:lnTo>
+                    <a:pt x="7660515" y="0"/>
+                  </a:lnTo>
+                  <a:lnTo>
+                    <a:pt x="7660515" y="0"/>
+                  </a:lnTo>
+                </a:path>
+              </a:pathLst>
+            </a:custGeom>
+            <a:ln w="6775" cap="flat">
+              <a:solidFill>
+                <a:srgbClr val="EBEBEB">
+                  <a:alpha val="100000"/>
+                </a:srgbClr>
+              </a:solidFill>
+              <a:prstDash val="solid"/>
+              <a:round/>
+            </a:ln>
+          </p:spPr>
+          <p:txBody>
+            <a:bodyPr/>
+            <a:lstStyle/>
+            <a:p/>
+          </p:txBody>
+        </p:sp>
+        <p:sp>
+          <p:nvSpPr>
+            <p:cNvPr id="42" name="pl42"/>
+            <p:cNvSpPr/>
+            <p:nvPr/>
+          </p:nvSpPr>
+          <p:spPr>
+            <a:xfrm>
+              <a:off x="887106" y="4546018"/>
+              <a:ext cx="7660515" cy="0"/>
+            </a:xfrm>
+            <a:custGeom>
+              <a:avLst/>
+              <a:pathLst>
+                <a:path w="7660515" h="0">
+                  <a:moveTo>
+                    <a:pt x="0" y="0"/>
+                  </a:moveTo>
+                  <a:lnTo>
+                    <a:pt x="7660515" y="0"/>
+                  </a:lnTo>
+                  <a:lnTo>
+                    <a:pt x="7660515" y="0"/>
+                  </a:lnTo>
+                </a:path>
+              </a:pathLst>
+            </a:custGeom>
+            <a:ln w="6775" cap="flat">
+              <a:solidFill>
+                <a:srgbClr val="EBEBEB">
+                  <a:alpha val="100000"/>
+                </a:srgbClr>
+              </a:solidFill>
+              <a:prstDash val="solid"/>
+              <a:round/>
+            </a:ln>
+          </p:spPr>
+          <p:txBody>
+            <a:bodyPr/>
+            <a:lstStyle/>
+            <a:p/>
+          </p:txBody>
+        </p:sp>
+        <p:sp>
+          <p:nvSpPr>
+            <p:cNvPr id="43" name="pl43"/>
+            <p:cNvSpPr/>
+            <p:nvPr/>
+          </p:nvSpPr>
+          <p:spPr>
+            <a:xfrm>
+              <a:off x="1636763" y="4336484"/>
+              <a:ext cx="0" cy="1317069"/>
+            </a:xfrm>
+            <a:custGeom>
+              <a:avLst/>
+              <a:pathLst>
+                <a:path w="0" h="1317069">
+                  <a:moveTo>
+                    <a:pt x="0" y="1317069"/>
+                  </a:moveTo>
+                  <a:lnTo>
+                    <a:pt x="0" y="0"/>
+                  </a:lnTo>
+                  <a:lnTo>
+                    <a:pt x="0" y="0"/>
+                  </a:lnTo>
+                </a:path>
+              </a:pathLst>
+            </a:custGeom>
+            <a:ln w="6775" cap="flat">
+              <a:solidFill>
+                <a:srgbClr val="EBEBEB">
+                  <a:alpha val="100000"/>
+                </a:srgbClr>
+              </a:solidFill>
+              <a:prstDash val="solid"/>
+              <a:round/>
+            </a:ln>
+          </p:spPr>
+          <p:txBody>
+            <a:bodyPr/>
+            <a:lstStyle/>
+            <a:p/>
+          </p:txBody>
+        </p:sp>
+        <p:sp>
+          <p:nvSpPr>
+            <p:cNvPr id="44" name="pl44"/>
+            <p:cNvSpPr/>
+            <p:nvPr/>
+          </p:nvSpPr>
+          <p:spPr>
+            <a:xfrm>
+              <a:off x="2482050" y="4336484"/>
+              <a:ext cx="0" cy="1317069"/>
+            </a:xfrm>
+            <a:custGeom>
+              <a:avLst/>
+              <a:pathLst>
+                <a:path w="0" h="1317069">
+                  <a:moveTo>
+                    <a:pt x="0" y="1317069"/>
+                  </a:moveTo>
+                  <a:lnTo>
+                    <a:pt x="0" y="0"/>
+                  </a:lnTo>
+                  <a:lnTo>
+                    <a:pt x="0" y="0"/>
+                  </a:lnTo>
+                </a:path>
+              </a:pathLst>
+            </a:custGeom>
+            <a:ln w="6775" cap="flat">
+              <a:solidFill>
+                <a:srgbClr val="EBEBEB">
+                  <a:alpha val="100000"/>
+                </a:srgbClr>
+              </a:solidFill>
+              <a:prstDash val="solid"/>
+              <a:round/>
+            </a:ln>
+          </p:spPr>
+          <p:txBody>
+            <a:bodyPr/>
+            <a:lstStyle/>
+            <a:p/>
+          </p:txBody>
+        </p:sp>
+        <p:sp>
+          <p:nvSpPr>
+            <p:cNvPr id="45" name="pl45"/>
+            <p:cNvSpPr/>
+            <p:nvPr/>
+          </p:nvSpPr>
+          <p:spPr>
+            <a:xfrm>
+              <a:off x="3327336" y="4336484"/>
+              <a:ext cx="0" cy="1317069"/>
+            </a:xfrm>
+            <a:custGeom>
+              <a:avLst/>
+              <a:pathLst>
+                <a:path w="0" h="1317069">
+                  <a:moveTo>
+                    <a:pt x="0" y="1317069"/>
+                  </a:moveTo>
+                  <a:lnTo>
+                    <a:pt x="0" y="0"/>
+                  </a:lnTo>
+                  <a:lnTo>
+                    <a:pt x="0" y="0"/>
+                  </a:lnTo>
+                </a:path>
+              </a:pathLst>
+            </a:custGeom>
+            <a:ln w="6775" cap="flat">
+              <a:solidFill>
+                <a:srgbClr val="EBEBEB">
+                  <a:alpha val="100000"/>
+                </a:srgbClr>
+              </a:solidFill>
+              <a:prstDash val="solid"/>
+              <a:round/>
+            </a:ln>
+          </p:spPr>
+          <p:txBody>
+            <a:bodyPr/>
+            <a:lstStyle/>
+            <a:p/>
+          </p:txBody>
+        </p:sp>
+        <p:sp>
+          <p:nvSpPr>
+            <p:cNvPr id="46" name="pl46"/>
+            <p:cNvSpPr/>
+            <p:nvPr/>
+          </p:nvSpPr>
+          <p:spPr>
+            <a:xfrm>
+              <a:off x="4172622" y="4336484"/>
+              <a:ext cx="0" cy="1317069"/>
+            </a:xfrm>
+            <a:custGeom>
+              <a:avLst/>
+              <a:pathLst>
+                <a:path w="0" h="1317069">
+                  <a:moveTo>
+                    <a:pt x="0" y="1317069"/>
+                  </a:moveTo>
+                  <a:lnTo>
+                    <a:pt x="0" y="0"/>
+                  </a:lnTo>
+                  <a:lnTo>
+                    <a:pt x="0" y="0"/>
+                  </a:lnTo>
+                </a:path>
+              </a:pathLst>
+            </a:custGeom>
+            <a:ln w="6775" cap="flat">
+              <a:solidFill>
+                <a:srgbClr val="EBEBEB">
+                  <a:alpha val="100000"/>
+                </a:srgbClr>
+              </a:solidFill>
+              <a:prstDash val="solid"/>
+              <a:round/>
+            </a:ln>
+          </p:spPr>
+          <p:txBody>
+            <a:bodyPr/>
+            <a:lstStyle/>
+            <a:p/>
+          </p:txBody>
+        </p:sp>
+        <p:sp>
+          <p:nvSpPr>
+            <p:cNvPr id="47" name="pl47"/>
+            <p:cNvSpPr/>
+            <p:nvPr/>
+          </p:nvSpPr>
+          <p:spPr>
+            <a:xfrm>
+              <a:off x="5017909" y="4336484"/>
+              <a:ext cx="0" cy="1317069"/>
+            </a:xfrm>
+            <a:custGeom>
+              <a:avLst/>
+              <a:pathLst>
+                <a:path w="0" h="1317069">
+                  <a:moveTo>
+                    <a:pt x="0" y="1317069"/>
+                  </a:moveTo>
+                  <a:lnTo>
+                    <a:pt x="0" y="0"/>
+                  </a:lnTo>
+                  <a:lnTo>
+                    <a:pt x="0" y="0"/>
+                  </a:lnTo>
+                </a:path>
+              </a:pathLst>
+            </a:custGeom>
+            <a:ln w="6775" cap="flat">
+              <a:solidFill>
+                <a:srgbClr val="EBEBEB">
+                  <a:alpha val="100000"/>
+                </a:srgbClr>
+              </a:solidFill>
+              <a:prstDash val="solid"/>
+              <a:round/>
+            </a:ln>
+          </p:spPr>
+          <p:txBody>
+            <a:bodyPr/>
+            <a:lstStyle/>
+            <a:p/>
+          </p:txBody>
+        </p:sp>
+        <p:sp>
+          <p:nvSpPr>
+            <p:cNvPr id="48" name="pl48"/>
+            <p:cNvSpPr/>
+            <p:nvPr/>
+          </p:nvSpPr>
+          <p:spPr>
+            <a:xfrm>
+              <a:off x="5863195" y="4336484"/>
+              <a:ext cx="0" cy="1317069"/>
+            </a:xfrm>
+            <a:custGeom>
+              <a:avLst/>
+              <a:pathLst>
+                <a:path w="0" h="1317069">
+                  <a:moveTo>
+                    <a:pt x="0" y="1317069"/>
+                  </a:moveTo>
+                  <a:lnTo>
+                    <a:pt x="0" y="0"/>
+                  </a:lnTo>
+                  <a:lnTo>
+                    <a:pt x="0" y="0"/>
+                  </a:lnTo>
+                </a:path>
+              </a:pathLst>
+            </a:custGeom>
+            <a:ln w="6775" cap="flat">
+              <a:solidFill>
+                <a:srgbClr val="EBEBEB">
+                  <a:alpha val="100000"/>
+                </a:srgbClr>
+              </a:solidFill>
+              <a:prstDash val="solid"/>
+              <a:round/>
+            </a:ln>
+          </p:spPr>
+          <p:txBody>
+            <a:bodyPr/>
+            <a:lstStyle/>
+            <a:p/>
+          </p:txBody>
+        </p:sp>
+        <p:sp>
+          <p:nvSpPr>
+            <p:cNvPr id="49" name="pl49"/>
+            <p:cNvSpPr/>
+            <p:nvPr/>
+          </p:nvSpPr>
+          <p:spPr>
+            <a:xfrm>
+              <a:off x="6708482" y="4336484"/>
+              <a:ext cx="0" cy="1317069"/>
+            </a:xfrm>
+            <a:custGeom>
+              <a:avLst/>
+              <a:pathLst>
+                <a:path w="0" h="1317069">
+                  <a:moveTo>
+                    <a:pt x="0" y="1317069"/>
+                  </a:moveTo>
+                  <a:lnTo>
+                    <a:pt x="0" y="0"/>
+                  </a:lnTo>
+                  <a:lnTo>
+                    <a:pt x="0" y="0"/>
+                  </a:lnTo>
+                </a:path>
+              </a:pathLst>
+            </a:custGeom>
+            <a:ln w="6775" cap="flat">
+              <a:solidFill>
+                <a:srgbClr val="EBEBEB">
+                  <a:alpha val="100000"/>
+                </a:srgbClr>
+              </a:solidFill>
+              <a:prstDash val="solid"/>
+              <a:round/>
+            </a:ln>
+          </p:spPr>
+          <p:txBody>
+            <a:bodyPr/>
+            <a:lstStyle/>
+            <a:p/>
+          </p:txBody>
+        </p:sp>
+        <p:sp>
+          <p:nvSpPr>
+            <p:cNvPr id="50" name="pl50"/>
+            <p:cNvSpPr/>
+            <p:nvPr/>
+          </p:nvSpPr>
+          <p:spPr>
+            <a:xfrm>
+              <a:off x="7553768" y="4336484"/>
+              <a:ext cx="0" cy="1317069"/>
+            </a:xfrm>
+            <a:custGeom>
+              <a:avLst/>
+              <a:pathLst>
+                <a:path w="0" h="1317069">
+                  <a:moveTo>
+                    <a:pt x="0" y="1317069"/>
+                  </a:moveTo>
+                  <a:lnTo>
+                    <a:pt x="0" y="0"/>
+                  </a:lnTo>
+                  <a:lnTo>
+                    <a:pt x="0" y="0"/>
+                  </a:lnTo>
+                </a:path>
+              </a:pathLst>
+            </a:custGeom>
+            <a:ln w="6775" cap="flat">
+              <a:solidFill>
+                <a:srgbClr val="EBEBEB">
+                  <a:alpha val="100000"/>
+                </a:srgbClr>
+              </a:solidFill>
+              <a:prstDash val="solid"/>
+              <a:round/>
+            </a:ln>
+          </p:spPr>
+          <p:txBody>
+            <a:bodyPr/>
+            <a:lstStyle/>
+            <a:p/>
+          </p:txBody>
+        </p:sp>
+        <p:sp>
+          <p:nvSpPr>
+            <p:cNvPr id="51" name="pl51"/>
+            <p:cNvSpPr/>
+            <p:nvPr/>
+          </p:nvSpPr>
+          <p:spPr>
+            <a:xfrm>
+              <a:off x="8399054" y="4336484"/>
+              <a:ext cx="0" cy="1317069"/>
+            </a:xfrm>
+            <a:custGeom>
+              <a:avLst/>
+              <a:pathLst>
+                <a:path w="0" h="1317069">
+                  <a:moveTo>
+                    <a:pt x="0" y="1317069"/>
+                  </a:moveTo>
+                  <a:lnTo>
+                    <a:pt x="0" y="0"/>
+                  </a:lnTo>
+                  <a:lnTo>
+                    <a:pt x="0" y="0"/>
+                  </a:lnTo>
+                </a:path>
+              </a:pathLst>
+            </a:custGeom>
+            <a:ln w="6775" cap="flat">
+              <a:solidFill>
+                <a:srgbClr val="EBEBEB">
+                  <a:alpha val="100000"/>
+                </a:srgbClr>
+              </a:solidFill>
+              <a:prstDash val="solid"/>
+              <a:round/>
+            </a:ln>
+          </p:spPr>
+          <p:txBody>
+            <a:bodyPr/>
+            <a:lstStyle/>
+            <a:p/>
+          </p:txBody>
+        </p:sp>
+        <p:sp>
+          <p:nvSpPr>
+            <p:cNvPr id="52" name="pl52"/>
+            <p:cNvSpPr/>
+            <p:nvPr/>
+          </p:nvSpPr>
+          <p:spPr>
+            <a:xfrm>
+              <a:off x="887106" y="5593686"/>
+              <a:ext cx="7660515" cy="0"/>
+            </a:xfrm>
+            <a:custGeom>
+              <a:avLst/>
+              <a:pathLst>
+                <a:path w="7660515" h="0">
+                  <a:moveTo>
+                    <a:pt x="0" y="0"/>
+                  </a:moveTo>
+                  <a:lnTo>
+                    <a:pt x="7660515" y="0"/>
+                  </a:lnTo>
+                  <a:lnTo>
+                    <a:pt x="7660515" y="0"/>
+                  </a:lnTo>
+                </a:path>
+              </a:pathLst>
+            </a:custGeom>
+            <a:ln w="13550" cap="flat">
+              <a:solidFill>
+                <a:srgbClr val="EBEBEB">
+                  <a:alpha val="100000"/>
+                </a:srgbClr>
+              </a:solidFill>
+              <a:prstDash val="solid"/>
+              <a:round/>
+            </a:ln>
+          </p:spPr>
+          <p:txBody>
+            <a:bodyPr/>
+            <a:lstStyle/>
+            <a:p/>
+          </p:txBody>
+        </p:sp>
+        <p:sp>
+          <p:nvSpPr>
+            <p:cNvPr id="53" name="pl53"/>
+            <p:cNvSpPr/>
+            <p:nvPr/>
+          </p:nvSpPr>
+          <p:spPr>
+            <a:xfrm>
+              <a:off x="887106" y="5294352"/>
+              <a:ext cx="7660515" cy="0"/>
+            </a:xfrm>
+            <a:custGeom>
+              <a:avLst/>
+              <a:pathLst>
+                <a:path w="7660515" h="0">
+                  <a:moveTo>
+                    <a:pt x="0" y="0"/>
+                  </a:moveTo>
+                  <a:lnTo>
+                    <a:pt x="7660515" y="0"/>
+                  </a:lnTo>
+                  <a:lnTo>
+                    <a:pt x="7660515" y="0"/>
+                  </a:lnTo>
+                </a:path>
+              </a:pathLst>
+            </a:custGeom>
+            <a:ln w="13550" cap="flat">
+              <a:solidFill>
+                <a:srgbClr val="EBEBEB">
+                  <a:alpha val="100000"/>
+                </a:srgbClr>
+              </a:solidFill>
+              <a:prstDash val="solid"/>
+              <a:round/>
+            </a:ln>
+          </p:spPr>
+          <p:txBody>
+            <a:bodyPr/>
+            <a:lstStyle/>
+            <a:p/>
+          </p:txBody>
+        </p:sp>
+        <p:sp>
+          <p:nvSpPr>
+            <p:cNvPr id="54" name="pl54"/>
+            <p:cNvSpPr/>
+            <p:nvPr/>
+          </p:nvSpPr>
+          <p:spPr>
+            <a:xfrm>
+              <a:off x="887106" y="4995019"/>
+              <a:ext cx="7660515" cy="0"/>
+            </a:xfrm>
+            <a:custGeom>
+              <a:avLst/>
+              <a:pathLst>
+                <a:path w="7660515" h="0">
+                  <a:moveTo>
+                    <a:pt x="0" y="0"/>
+                  </a:moveTo>
+                  <a:lnTo>
+                    <a:pt x="7660515" y="0"/>
+                  </a:lnTo>
+                  <a:lnTo>
+                    <a:pt x="7660515" y="0"/>
+                  </a:lnTo>
+                </a:path>
+              </a:pathLst>
+            </a:custGeom>
+            <a:ln w="13550" cap="flat">
+              <a:solidFill>
+                <a:srgbClr val="EBEBEB">
+                  <a:alpha val="100000"/>
+                </a:srgbClr>
+              </a:solidFill>
+              <a:prstDash val="solid"/>
+              <a:round/>
+            </a:ln>
+          </p:spPr>
+          <p:txBody>
+            <a:bodyPr/>
+            <a:lstStyle/>
+            <a:p/>
+          </p:txBody>
+        </p:sp>
+        <p:sp>
+          <p:nvSpPr>
+            <p:cNvPr id="55" name="pl55"/>
+            <p:cNvSpPr/>
+            <p:nvPr/>
+          </p:nvSpPr>
+          <p:spPr>
+            <a:xfrm>
+              <a:off x="887106" y="4695685"/>
+              <a:ext cx="7660515" cy="0"/>
+            </a:xfrm>
+            <a:custGeom>
+              <a:avLst/>
+              <a:pathLst>
+                <a:path w="7660515" h="0">
+                  <a:moveTo>
+                    <a:pt x="0" y="0"/>
+                  </a:moveTo>
+                  <a:lnTo>
+                    <a:pt x="7660515" y="0"/>
+                  </a:lnTo>
+                  <a:lnTo>
+                    <a:pt x="7660515" y="0"/>
+                  </a:lnTo>
+                </a:path>
+              </a:pathLst>
+            </a:custGeom>
+            <a:ln w="13550" cap="flat">
+              <a:solidFill>
+                <a:srgbClr val="EBEBEB">
+                  <a:alpha val="100000"/>
+                </a:srgbClr>
+              </a:solidFill>
+              <a:prstDash val="solid"/>
+              <a:round/>
+            </a:ln>
+          </p:spPr>
+          <p:txBody>
+            <a:bodyPr/>
+            <a:lstStyle/>
+            <a:p/>
+          </p:txBody>
+        </p:sp>
+        <p:sp>
+          <p:nvSpPr>
+            <p:cNvPr id="56" name="pl56"/>
+            <p:cNvSpPr/>
+            <p:nvPr/>
+          </p:nvSpPr>
+          <p:spPr>
+            <a:xfrm>
+              <a:off x="887106" y="4396351"/>
+              <a:ext cx="7660515" cy="0"/>
+            </a:xfrm>
+            <a:custGeom>
+              <a:avLst/>
+              <a:pathLst>
+                <a:path w="7660515" h="0">
+                  <a:moveTo>
+                    <a:pt x="0" y="0"/>
+                  </a:moveTo>
+                  <a:lnTo>
+                    <a:pt x="7660515" y="0"/>
+                  </a:lnTo>
+                  <a:lnTo>
+                    <a:pt x="7660515" y="0"/>
+                  </a:lnTo>
+                </a:path>
+              </a:pathLst>
+            </a:custGeom>
+            <a:ln w="13550" cap="flat">
+              <a:solidFill>
+                <a:srgbClr val="EBEBEB">
+                  <a:alpha val="100000"/>
+                </a:srgbClr>
+              </a:solidFill>
+              <a:prstDash val="solid"/>
+              <a:round/>
+            </a:ln>
+          </p:spPr>
+          <p:txBody>
+            <a:bodyPr/>
+            <a:lstStyle/>
+            <a:p/>
+          </p:txBody>
+        </p:sp>
+        <p:sp>
+          <p:nvSpPr>
+            <p:cNvPr id="57" name="pl57"/>
+            <p:cNvSpPr/>
+            <p:nvPr/>
+          </p:nvSpPr>
+          <p:spPr>
+            <a:xfrm>
+              <a:off x="1214120" y="4336484"/>
+              <a:ext cx="0" cy="1317069"/>
+            </a:xfrm>
+            <a:custGeom>
+              <a:avLst/>
+              <a:pathLst>
+                <a:path w="0" h="1317069">
+                  <a:moveTo>
+                    <a:pt x="0" y="1317069"/>
+                  </a:moveTo>
+                  <a:lnTo>
+                    <a:pt x="0" y="0"/>
+                  </a:lnTo>
+                  <a:lnTo>
+                    <a:pt x="0" y="0"/>
+                  </a:lnTo>
+                </a:path>
+              </a:pathLst>
+            </a:custGeom>
+            <a:ln w="13550" cap="flat">
+              <a:solidFill>
+                <a:srgbClr val="EBEBEB">
+                  <a:alpha val="100000"/>
+                </a:srgbClr>
+              </a:solidFill>
+              <a:prstDash val="solid"/>
+              <a:round/>
+            </a:ln>
+          </p:spPr>
+          <p:txBody>
+            <a:bodyPr/>
+            <a:lstStyle/>
+            <a:p/>
+          </p:txBody>
+        </p:sp>
+        <p:sp>
+          <p:nvSpPr>
+            <p:cNvPr id="58" name="pl58"/>
+            <p:cNvSpPr/>
+            <p:nvPr/>
+          </p:nvSpPr>
+          <p:spPr>
+            <a:xfrm>
+              <a:off x="2059406" y="4336484"/>
+              <a:ext cx="0" cy="1317069"/>
+            </a:xfrm>
+            <a:custGeom>
+              <a:avLst/>
+              <a:pathLst>
+                <a:path w="0" h="1317069">
+                  <a:moveTo>
+                    <a:pt x="0" y="1317069"/>
+                  </a:moveTo>
+                  <a:lnTo>
+                    <a:pt x="0" y="0"/>
+                  </a:lnTo>
+                  <a:lnTo>
+                    <a:pt x="0" y="0"/>
+                  </a:lnTo>
+                </a:path>
+              </a:pathLst>
+            </a:custGeom>
+            <a:ln w="13550" cap="flat">
+              <a:solidFill>
+                <a:srgbClr val="EBEBEB">
+                  <a:alpha val="100000"/>
+                </a:srgbClr>
+              </a:solidFill>
+              <a:prstDash val="solid"/>
+              <a:round/>
+            </a:ln>
+          </p:spPr>
+          <p:txBody>
+            <a:bodyPr/>
+            <a:lstStyle/>
+            <a:p/>
+          </p:txBody>
+        </p:sp>
+        <p:sp>
+          <p:nvSpPr>
+            <p:cNvPr id="59" name="pl59"/>
+            <p:cNvSpPr/>
+            <p:nvPr/>
+          </p:nvSpPr>
+          <p:spPr>
+            <a:xfrm>
+              <a:off x="2904693" y="4336484"/>
+              <a:ext cx="0" cy="1317069"/>
+            </a:xfrm>
+            <a:custGeom>
+              <a:avLst/>
+              <a:pathLst>
+                <a:path w="0" h="1317069">
+                  <a:moveTo>
+                    <a:pt x="0" y="1317069"/>
+                  </a:moveTo>
+                  <a:lnTo>
+                    <a:pt x="0" y="0"/>
+                  </a:lnTo>
+                  <a:lnTo>
+                    <a:pt x="0" y="0"/>
+                  </a:lnTo>
+                </a:path>
+              </a:pathLst>
+            </a:custGeom>
+            <a:ln w="13550" cap="flat">
+              <a:solidFill>
+                <a:srgbClr val="EBEBEB">
+                  <a:alpha val="100000"/>
+                </a:srgbClr>
+              </a:solidFill>
+              <a:prstDash val="solid"/>
+              <a:round/>
+            </a:ln>
+          </p:spPr>
+          <p:txBody>
+            <a:bodyPr/>
+            <a:lstStyle/>
+            <a:p/>
+          </p:txBody>
+        </p:sp>
+        <p:sp>
+          <p:nvSpPr>
+            <p:cNvPr id="60" name="pl60"/>
+            <p:cNvSpPr/>
+            <p:nvPr/>
+          </p:nvSpPr>
+          <p:spPr>
+            <a:xfrm>
+              <a:off x="3749979" y="4336484"/>
+              <a:ext cx="0" cy="1317069"/>
+            </a:xfrm>
+            <a:custGeom>
+              <a:avLst/>
+              <a:pathLst>
+                <a:path w="0" h="1317069">
+                  <a:moveTo>
+                    <a:pt x="0" y="1317069"/>
+                  </a:moveTo>
+                  <a:lnTo>
+                    <a:pt x="0" y="0"/>
+                  </a:lnTo>
+                  <a:lnTo>
+                    <a:pt x="0" y="0"/>
+                  </a:lnTo>
+                </a:path>
+              </a:pathLst>
+            </a:custGeom>
+            <a:ln w="13550" cap="flat">
+              <a:solidFill>
+                <a:srgbClr val="EBEBEB">
+                  <a:alpha val="100000"/>
+                </a:srgbClr>
+              </a:solidFill>
+              <a:prstDash val="solid"/>
+              <a:round/>
+            </a:ln>
+          </p:spPr>
+          <p:txBody>
+            <a:bodyPr/>
+            <a:lstStyle/>
+            <a:p/>
+          </p:txBody>
+        </p:sp>
+        <p:sp>
+          <p:nvSpPr>
+            <p:cNvPr id="61" name="pl61"/>
+            <p:cNvSpPr/>
+            <p:nvPr/>
+          </p:nvSpPr>
+          <p:spPr>
+            <a:xfrm>
+              <a:off x="4595266" y="4336484"/>
+              <a:ext cx="0" cy="1317069"/>
+            </a:xfrm>
+            <a:custGeom>
+              <a:avLst/>
+              <a:pathLst>
+                <a:path w="0" h="1317069">
+                  <a:moveTo>
+                    <a:pt x="0" y="1317069"/>
+                  </a:moveTo>
+                  <a:lnTo>
+                    <a:pt x="0" y="0"/>
+                  </a:lnTo>
+                  <a:lnTo>
+                    <a:pt x="0" y="0"/>
+                  </a:lnTo>
+                </a:path>
+              </a:pathLst>
+            </a:custGeom>
+            <a:ln w="13550" cap="flat">
+              <a:solidFill>
+                <a:srgbClr val="EBEBEB">
+                  <a:alpha val="100000"/>
+                </a:srgbClr>
+              </a:solidFill>
+              <a:prstDash val="solid"/>
+              <a:round/>
+            </a:ln>
+          </p:spPr>
+          <p:txBody>
+            <a:bodyPr/>
+            <a:lstStyle/>
+            <a:p/>
+          </p:txBody>
+        </p:sp>
+        <p:sp>
+          <p:nvSpPr>
+            <p:cNvPr id="62" name="pl62"/>
+            <p:cNvSpPr/>
+            <p:nvPr/>
+          </p:nvSpPr>
+          <p:spPr>
+            <a:xfrm>
+              <a:off x="5440552" y="4336484"/>
+              <a:ext cx="0" cy="1317069"/>
+            </a:xfrm>
+            <a:custGeom>
+              <a:avLst/>
+              <a:pathLst>
+                <a:path w="0" h="1317069">
+                  <a:moveTo>
+                    <a:pt x="0" y="1317069"/>
+                  </a:moveTo>
+                  <a:lnTo>
+                    <a:pt x="0" y="0"/>
+                  </a:lnTo>
+                  <a:lnTo>
+                    <a:pt x="0" y="0"/>
+                  </a:lnTo>
+                </a:path>
+              </a:pathLst>
+            </a:custGeom>
+            <a:ln w="13550" cap="flat">
+              <a:solidFill>
+                <a:srgbClr val="EBEBEB">
+                  <a:alpha val="100000"/>
+                </a:srgbClr>
+              </a:solidFill>
+              <a:prstDash val="solid"/>
+              <a:round/>
+            </a:ln>
+          </p:spPr>
+          <p:txBody>
+            <a:bodyPr/>
+            <a:lstStyle/>
+            <a:p/>
+          </p:txBody>
+        </p:sp>
+        <p:sp>
+          <p:nvSpPr>
+            <p:cNvPr id="63" name="pl63"/>
+            <p:cNvSpPr/>
+            <p:nvPr/>
+          </p:nvSpPr>
+          <p:spPr>
+            <a:xfrm>
+              <a:off x="6285838" y="4336484"/>
+              <a:ext cx="0" cy="1317069"/>
+            </a:xfrm>
+            <a:custGeom>
+              <a:avLst/>
+              <a:pathLst>
+                <a:path w="0" h="1317069">
+                  <a:moveTo>
+                    <a:pt x="0" y="1317069"/>
+                  </a:moveTo>
+                  <a:lnTo>
+                    <a:pt x="0" y="0"/>
+                  </a:lnTo>
+                  <a:lnTo>
+                    <a:pt x="0" y="0"/>
+                  </a:lnTo>
+                </a:path>
+              </a:pathLst>
+            </a:custGeom>
+            <a:ln w="13550" cap="flat">
+              <a:solidFill>
+                <a:srgbClr val="EBEBEB">
+                  <a:alpha val="100000"/>
+                </a:srgbClr>
+              </a:solidFill>
+              <a:prstDash val="solid"/>
+              <a:round/>
+            </a:ln>
+          </p:spPr>
+          <p:txBody>
+            <a:bodyPr/>
+            <a:lstStyle/>
+            <a:p/>
+          </p:txBody>
+        </p:sp>
+        <p:sp>
+          <p:nvSpPr>
+            <p:cNvPr id="64" name="pl64"/>
+            <p:cNvSpPr/>
+            <p:nvPr/>
+          </p:nvSpPr>
+          <p:spPr>
+            <a:xfrm>
+              <a:off x="7131125" y="4336484"/>
+              <a:ext cx="0" cy="1317069"/>
+            </a:xfrm>
+            <a:custGeom>
+              <a:avLst/>
+              <a:pathLst>
+                <a:path w="0" h="1317069">
+                  <a:moveTo>
+                    <a:pt x="0" y="1317069"/>
+                  </a:moveTo>
+                  <a:lnTo>
+                    <a:pt x="0" y="0"/>
+                  </a:lnTo>
+                  <a:lnTo>
+                    <a:pt x="0" y="0"/>
+                  </a:lnTo>
+                </a:path>
+              </a:pathLst>
+            </a:custGeom>
+            <a:ln w="13550" cap="flat">
+              <a:solidFill>
+                <a:srgbClr val="EBEBEB">
+                  <a:alpha val="100000"/>
+                </a:srgbClr>
+              </a:solidFill>
+              <a:prstDash val="solid"/>
+              <a:round/>
+            </a:ln>
+          </p:spPr>
+          <p:txBody>
+            <a:bodyPr/>
+            <a:lstStyle/>
+            <a:p/>
+          </p:txBody>
+        </p:sp>
+        <p:sp>
+          <p:nvSpPr>
+            <p:cNvPr id="65" name="pl65"/>
+            <p:cNvSpPr/>
+            <p:nvPr/>
+          </p:nvSpPr>
+          <p:spPr>
+            <a:xfrm>
+              <a:off x="7976411" y="4336484"/>
+              <a:ext cx="0" cy="1317069"/>
+            </a:xfrm>
+            <a:custGeom>
+              <a:avLst/>
+              <a:pathLst>
+                <a:path w="0" h="1317069">
+                  <a:moveTo>
+                    <a:pt x="0" y="1317069"/>
+                  </a:moveTo>
+                  <a:lnTo>
+                    <a:pt x="0" y="0"/>
+                  </a:lnTo>
+                  <a:lnTo>
+                    <a:pt x="0" y="0"/>
+                  </a:lnTo>
+                </a:path>
+              </a:pathLst>
+            </a:custGeom>
+            <a:ln w="13550" cap="flat">
+              <a:solidFill>
+                <a:srgbClr val="EBEBEB">
+                  <a:alpha val="100000"/>
+                </a:srgbClr>
+              </a:solidFill>
+              <a:prstDash val="solid"/>
+              <a:round/>
+            </a:ln>
+          </p:spPr>
+          <p:txBody>
+            <a:bodyPr/>
+            <a:lstStyle/>
+            <a:p/>
+          </p:txBody>
+        </p:sp>
+        <p:sp>
+          <p:nvSpPr>
+            <p:cNvPr id="66" name="pg66"/>
+            <p:cNvSpPr/>
+            <p:nvPr/>
+          </p:nvSpPr>
+          <p:spPr>
+            <a:xfrm>
+              <a:off x="1235312" y="4336484"/>
+              <a:ext cx="6964104" cy="1201069"/>
+            </a:xfrm>
+            <a:custGeom>
+              <a:avLst/>
+              <a:pathLst>
+                <a:path w="6964104" h="1201069">
+                  <a:moveTo>
+                    <a:pt x="261207" y="0"/>
+                  </a:moveTo>
+                  <a:lnTo>
+                    <a:pt x="281377" y="11842"/>
+                  </a:lnTo>
+                  <a:lnTo>
+                    <a:pt x="351722" y="51818"/>
+                  </a:lnTo>
+                  <a:lnTo>
+                    <a:pt x="422066" y="90510"/>
+                  </a:lnTo>
+                  <a:lnTo>
+                    <a:pt x="492411" y="127960"/>
+                  </a:lnTo>
+                  <a:lnTo>
+                    <a:pt x="562755" y="164208"/>
+                  </a:lnTo>
+                  <a:lnTo>
+                    <a:pt x="633100" y="199292"/>
+                  </a:lnTo>
+                  <a:lnTo>
+                    <a:pt x="703444" y="233251"/>
+                  </a:lnTo>
+                  <a:lnTo>
+                    <a:pt x="773789" y="266119"/>
+                  </a:lnTo>
+                  <a:lnTo>
+                    <a:pt x="844133" y="297932"/>
+                  </a:lnTo>
+                  <a:lnTo>
+                    <a:pt x="914478" y="328724"/>
+                  </a:lnTo>
+                  <a:lnTo>
+                    <a:pt x="984822" y="358528"/>
+                  </a:lnTo>
+                  <a:lnTo>
+                    <a:pt x="1055167" y="387375"/>
+                  </a:lnTo>
+                  <a:lnTo>
+                    <a:pt x="1125511" y="415296"/>
+                  </a:lnTo>
+                  <a:lnTo>
+                    <a:pt x="1195856" y="442320"/>
+                  </a:lnTo>
+                  <a:lnTo>
+                    <a:pt x="1266200" y="468478"/>
+                  </a:lnTo>
+                  <a:lnTo>
+                    <a:pt x="1336545" y="493795"/>
+                  </a:lnTo>
+                  <a:lnTo>
+                    <a:pt x="1406889" y="518300"/>
+                  </a:lnTo>
+                  <a:lnTo>
+                    <a:pt x="1477234" y="542019"/>
+                  </a:lnTo>
+                  <a:lnTo>
+                    <a:pt x="1547578" y="564976"/>
+                  </a:lnTo>
+                  <a:lnTo>
+                    <a:pt x="1617923" y="587196"/>
+                  </a:lnTo>
+                  <a:lnTo>
+                    <a:pt x="1688267" y="608702"/>
+                  </a:lnTo>
+                  <a:lnTo>
+                    <a:pt x="1758612" y="629519"/>
+                  </a:lnTo>
+                  <a:lnTo>
+                    <a:pt x="1828956" y="649667"/>
+                  </a:lnTo>
+                  <a:lnTo>
+                    <a:pt x="1899301" y="669169"/>
+                  </a:lnTo>
+                  <a:lnTo>
+                    <a:pt x="1969645" y="688044"/>
+                  </a:lnTo>
+                  <a:lnTo>
+                    <a:pt x="2039990" y="706314"/>
+                  </a:lnTo>
+                  <a:lnTo>
+                    <a:pt x="2110334" y="723997"/>
+                  </a:lnTo>
+                  <a:lnTo>
+                    <a:pt x="2180679" y="741113"/>
+                  </a:lnTo>
+                  <a:lnTo>
+                    <a:pt x="2251023" y="757679"/>
+                  </a:lnTo>
+                  <a:lnTo>
+                    <a:pt x="2321368" y="773713"/>
+                  </a:lnTo>
+                  <a:lnTo>
+                    <a:pt x="2391712" y="789233"/>
+                  </a:lnTo>
+                  <a:lnTo>
+                    <a:pt x="2462057" y="804254"/>
+                  </a:lnTo>
+                  <a:lnTo>
+                    <a:pt x="2532401" y="818794"/>
+                  </a:lnTo>
+                  <a:lnTo>
+                    <a:pt x="2602746" y="832867"/>
+                  </a:lnTo>
+                  <a:lnTo>
+                    <a:pt x="2673090" y="846487"/>
+                  </a:lnTo>
+                  <a:lnTo>
+                    <a:pt x="2743435" y="859671"/>
+                  </a:lnTo>
+                  <a:lnTo>
+                    <a:pt x="2813779" y="872432"/>
+                  </a:lnTo>
+                  <a:lnTo>
+                    <a:pt x="2884124" y="884783"/>
+                  </a:lnTo>
+                  <a:lnTo>
+                    <a:pt x="2954468" y="896737"/>
+                  </a:lnTo>
+                  <a:lnTo>
+                    <a:pt x="3024813" y="908308"/>
+                  </a:lnTo>
+                  <a:lnTo>
+                    <a:pt x="3095157" y="919507"/>
+                  </a:lnTo>
+                  <a:lnTo>
+                    <a:pt x="3165502" y="930347"/>
+                  </a:lnTo>
+                  <a:lnTo>
+                    <a:pt x="3235846" y="940839"/>
+                  </a:lnTo>
+                  <a:lnTo>
+                    <a:pt x="3306191" y="950994"/>
+                  </a:lnTo>
+                  <a:lnTo>
+                    <a:pt x="3376535" y="958998"/>
+                  </a:lnTo>
+                  <a:lnTo>
+                    <a:pt x="3446880" y="962685"/>
+                  </a:lnTo>
+                  <a:lnTo>
+                    <a:pt x="3517224" y="966326"/>
+                  </a:lnTo>
+                  <a:lnTo>
+                    <a:pt x="3587569" y="969922"/>
+                  </a:lnTo>
+                  <a:lnTo>
+                    <a:pt x="3657913" y="973473"/>
+                  </a:lnTo>
+                  <a:lnTo>
+                    <a:pt x="3728257" y="976981"/>
+                  </a:lnTo>
+                  <a:lnTo>
+                    <a:pt x="3798602" y="980446"/>
+                  </a:lnTo>
+                  <a:lnTo>
+                    <a:pt x="3868946" y="983867"/>
+                  </a:lnTo>
+                  <a:lnTo>
+                    <a:pt x="3939291" y="987246"/>
+                  </a:lnTo>
+                  <a:lnTo>
+                    <a:pt x="4009635" y="990584"/>
+                  </a:lnTo>
+                  <a:lnTo>
+                    <a:pt x="4079980" y="993880"/>
+                  </a:lnTo>
+                  <a:lnTo>
+                    <a:pt x="4150324" y="997135"/>
+                  </a:lnTo>
+                  <a:lnTo>
+                    <a:pt x="4220669" y="1000350"/>
+                  </a:lnTo>
+                  <a:lnTo>
+                    <a:pt x="4291013" y="1003526"/>
+                  </a:lnTo>
+                  <a:lnTo>
+                    <a:pt x="4361358" y="1006662"/>
+                  </a:lnTo>
+                  <a:lnTo>
+                    <a:pt x="4431702" y="1009759"/>
+                  </a:lnTo>
+                  <a:lnTo>
+                    <a:pt x="4502047" y="1012819"/>
+                  </a:lnTo>
+                  <a:lnTo>
+                    <a:pt x="4572391" y="1015840"/>
+                  </a:lnTo>
+                  <a:lnTo>
+                    <a:pt x="4642736" y="1018824"/>
+                  </a:lnTo>
+                  <a:lnTo>
+                    <a:pt x="4713080" y="1021771"/>
+                  </a:lnTo>
+                  <a:lnTo>
+                    <a:pt x="4783425" y="1024681"/>
+                  </a:lnTo>
+                  <a:lnTo>
+                    <a:pt x="4853769" y="1027556"/>
+                  </a:lnTo>
+                  <a:lnTo>
+                    <a:pt x="4924114" y="1030395"/>
+                  </a:lnTo>
+                  <a:lnTo>
+                    <a:pt x="4994458" y="1033199"/>
+                  </a:lnTo>
+                  <a:lnTo>
+                    <a:pt x="5064803" y="1035968"/>
+                  </a:lnTo>
+                  <a:lnTo>
+                    <a:pt x="5135147" y="1038703"/>
+                  </a:lnTo>
+                  <a:lnTo>
+                    <a:pt x="5205492" y="1041405"/>
+                  </a:lnTo>
+                  <a:lnTo>
+                    <a:pt x="5275836" y="1044073"/>
+                  </a:lnTo>
+                  <a:lnTo>
+                    <a:pt x="5346181" y="1046707"/>
+                  </a:lnTo>
+                  <a:lnTo>
+                    <a:pt x="5416525" y="1049310"/>
+                  </a:lnTo>
+                  <a:lnTo>
+                    <a:pt x="5486870" y="1051880"/>
+                  </a:lnTo>
+                  <a:lnTo>
+                    <a:pt x="5557214" y="1054418"/>
+                  </a:lnTo>
+                  <a:lnTo>
+                    <a:pt x="5627559" y="1056925"/>
+                  </a:lnTo>
+                  <a:lnTo>
+                    <a:pt x="5697903" y="1059401"/>
+                  </a:lnTo>
+                  <a:lnTo>
+                    <a:pt x="5768248" y="1061847"/>
+                  </a:lnTo>
+                  <a:lnTo>
+                    <a:pt x="5838592" y="1064262"/>
+                  </a:lnTo>
+                  <a:lnTo>
+                    <a:pt x="5908937" y="1066647"/>
+                  </a:lnTo>
+                  <a:lnTo>
+                    <a:pt x="5979281" y="1069003"/>
+                  </a:lnTo>
+                  <a:lnTo>
+                    <a:pt x="6049626" y="1071330"/>
+                  </a:lnTo>
+                  <a:lnTo>
+                    <a:pt x="6119970" y="1073628"/>
+                  </a:lnTo>
+                  <a:lnTo>
+                    <a:pt x="6190315" y="1075897"/>
+                  </a:lnTo>
+                  <a:lnTo>
+                    <a:pt x="6260659" y="1078138"/>
+                  </a:lnTo>
+                  <a:lnTo>
+                    <a:pt x="6331004" y="1080352"/>
+                  </a:lnTo>
+                  <a:lnTo>
+                    <a:pt x="6401348" y="1082539"/>
+                  </a:lnTo>
+                  <a:lnTo>
+                    <a:pt x="6471693" y="1084698"/>
+                  </a:lnTo>
+                  <a:lnTo>
+                    <a:pt x="6542037" y="1086831"/>
+                  </a:lnTo>
+                  <a:lnTo>
+                    <a:pt x="6612382" y="1088937"/>
+                  </a:lnTo>
+                  <a:lnTo>
+                    <a:pt x="6682726" y="1091017"/>
+                  </a:lnTo>
+                  <a:lnTo>
+                    <a:pt x="6753071" y="1093072"/>
+                  </a:lnTo>
+                  <a:lnTo>
+                    <a:pt x="6823415" y="1095101"/>
+                  </a:lnTo>
+                  <a:lnTo>
+                    <a:pt x="6893760" y="1097105"/>
+                  </a:lnTo>
+                  <a:lnTo>
+                    <a:pt x="6964104" y="1099084"/>
+                  </a:lnTo>
+                  <a:lnTo>
+                    <a:pt x="6964104" y="1201069"/>
+                  </a:lnTo>
+                  <a:lnTo>
+                    <a:pt x="6893760" y="1199208"/>
+                  </a:lnTo>
+                  <a:lnTo>
+                    <a:pt x="6823415" y="1197284"/>
+                  </a:lnTo>
+                  <a:lnTo>
+                    <a:pt x="6753071" y="1195297"/>
+                  </a:lnTo>
+                  <a:lnTo>
+                    <a:pt x="6682726" y="1193244"/>
+                  </a:lnTo>
+                  <a:lnTo>
+                    <a:pt x="6612382" y="1191123"/>
+                  </a:lnTo>
+                  <a:lnTo>
+                    <a:pt x="6542037" y="1188932"/>
+                  </a:lnTo>
+                  <a:lnTo>
+                    <a:pt x="6471693" y="1186668"/>
+                  </a:lnTo>
+                  <a:lnTo>
+                    <a:pt x="6401348" y="1184328"/>
+                  </a:lnTo>
+                  <a:lnTo>
+                    <a:pt x="6331004" y="1181912"/>
+                  </a:lnTo>
+                  <a:lnTo>
+                    <a:pt x="6260659" y="1179415"/>
+                  </a:lnTo>
+                  <a:lnTo>
+                    <a:pt x="6190315" y="1176835"/>
+                  </a:lnTo>
+                  <a:lnTo>
+                    <a:pt x="6119970" y="1174170"/>
+                  </a:lnTo>
+                  <a:lnTo>
+                    <a:pt x="6049626" y="1171416"/>
+                  </a:lnTo>
+                  <a:lnTo>
+                    <a:pt x="5979281" y="1168571"/>
+                  </a:lnTo>
+                  <a:lnTo>
+                    <a:pt x="5908937" y="1165632"/>
+                  </a:lnTo>
+                  <a:lnTo>
+                    <a:pt x="5838592" y="1162595"/>
+                  </a:lnTo>
+                  <a:lnTo>
+                    <a:pt x="5768248" y="1159457"/>
+                  </a:lnTo>
+                  <a:lnTo>
+                    <a:pt x="5697903" y="1156216"/>
+                  </a:lnTo>
+                  <a:lnTo>
+                    <a:pt x="5627559" y="1152867"/>
+                  </a:lnTo>
+                  <a:lnTo>
+                    <a:pt x="5557214" y="1149406"/>
+                  </a:lnTo>
+                  <a:lnTo>
+                    <a:pt x="5486870" y="1145831"/>
+                  </a:lnTo>
+                  <a:lnTo>
+                    <a:pt x="5416525" y="1142138"/>
+                  </a:lnTo>
+                  <a:lnTo>
+                    <a:pt x="5346181" y="1138322"/>
+                  </a:lnTo>
+                  <a:lnTo>
+                    <a:pt x="5275836" y="1134380"/>
+                  </a:lnTo>
+                  <a:lnTo>
+                    <a:pt x="5205492" y="1130306"/>
+                  </a:lnTo>
+                  <a:lnTo>
+                    <a:pt x="5135147" y="1126098"/>
+                  </a:lnTo>
+                  <a:lnTo>
+                    <a:pt x="5064803" y="1121750"/>
+                  </a:lnTo>
+                  <a:lnTo>
+                    <a:pt x="4994458" y="1117258"/>
+                  </a:lnTo>
+                  <a:lnTo>
+                    <a:pt x="4924114" y="1112617"/>
+                  </a:lnTo>
+                  <a:lnTo>
+                    <a:pt x="4853769" y="1107822"/>
+                  </a:lnTo>
+                  <a:lnTo>
+                    <a:pt x="4783425" y="1102868"/>
+                  </a:lnTo>
+                  <a:lnTo>
+                    <a:pt x="4713080" y="1097749"/>
+                  </a:lnTo>
+                  <a:lnTo>
+                    <a:pt x="4642736" y="1092461"/>
+                  </a:lnTo>
+                  <a:lnTo>
+                    <a:pt x="4572391" y="1086998"/>
+                  </a:lnTo>
+                  <a:lnTo>
+                    <a:pt x="4502047" y="1081353"/>
+                  </a:lnTo>
+                  <a:lnTo>
+                    <a:pt x="4431702" y="1075521"/>
+                  </a:lnTo>
+                  <a:lnTo>
+                    <a:pt x="4361358" y="1069496"/>
+                  </a:lnTo>
+                  <a:lnTo>
+                    <a:pt x="4291013" y="1063271"/>
+                  </a:lnTo>
+                  <a:lnTo>
+                    <a:pt x="4220669" y="1056839"/>
+                  </a:lnTo>
+                  <a:lnTo>
+                    <a:pt x="4150324" y="1050195"/>
+                  </a:lnTo>
+                  <a:lnTo>
+                    <a:pt x="4079980" y="1043329"/>
+                  </a:lnTo>
+                  <a:lnTo>
+                    <a:pt x="4009635" y="1036237"/>
+                  </a:lnTo>
+                  <a:lnTo>
+                    <a:pt x="3939291" y="1028908"/>
+                  </a:lnTo>
+                  <a:lnTo>
+                    <a:pt x="3868946" y="1021337"/>
+                  </a:lnTo>
+                  <a:lnTo>
+                    <a:pt x="3798602" y="1013515"/>
+                  </a:lnTo>
+                  <a:lnTo>
+                    <a:pt x="3728257" y="1005434"/>
+                  </a:lnTo>
+                  <a:lnTo>
+                    <a:pt x="3657913" y="997084"/>
+                  </a:lnTo>
+                  <a:lnTo>
+                    <a:pt x="3587569" y="988457"/>
+                  </a:lnTo>
+                  <a:lnTo>
+                    <a:pt x="3517224" y="979545"/>
+                  </a:lnTo>
+                  <a:lnTo>
+                    <a:pt x="3446880" y="970336"/>
+                  </a:lnTo>
+                  <a:lnTo>
+                    <a:pt x="3376535" y="960823"/>
+                  </a:lnTo>
+                  <a:lnTo>
+                    <a:pt x="3306191" y="955265"/>
+                  </a:lnTo>
+                  <a:lnTo>
+                    <a:pt x="3235846" y="951486"/>
+                  </a:lnTo>
+                  <a:lnTo>
+                    <a:pt x="3165502" y="947659"/>
+                  </a:lnTo>
+                  <a:lnTo>
+                    <a:pt x="3095157" y="943784"/>
+                  </a:lnTo>
+                  <a:lnTo>
+                    <a:pt x="3024813" y="939861"/>
+                  </a:lnTo>
+                  <a:lnTo>
+                    <a:pt x="2954468" y="935889"/>
+                  </a:lnTo>
+                  <a:lnTo>
+                    <a:pt x="2884124" y="931866"/>
+                  </a:lnTo>
+                  <a:lnTo>
+                    <a:pt x="2813779" y="927794"/>
+                  </a:lnTo>
+                  <a:lnTo>
+                    <a:pt x="2743435" y="923671"/>
+                  </a:lnTo>
+                  <a:lnTo>
+                    <a:pt x="2673090" y="919496"/>
+                  </a:lnTo>
+                  <a:lnTo>
+                    <a:pt x="2602746" y="915268"/>
+                  </a:lnTo>
+                  <a:lnTo>
+                    <a:pt x="2532401" y="910988"/>
+                  </a:lnTo>
+                  <a:lnTo>
+                    <a:pt x="2462057" y="906654"/>
+                  </a:lnTo>
+                  <a:lnTo>
+                    <a:pt x="2391712" y="902266"/>
+                  </a:lnTo>
+                  <a:lnTo>
+                    <a:pt x="2321368" y="897823"/>
+                  </a:lnTo>
+                  <a:lnTo>
+                    <a:pt x="2251023" y="893325"/>
+                  </a:lnTo>
+                  <a:lnTo>
+                    <a:pt x="2180679" y="888770"/>
+                  </a:lnTo>
+                  <a:lnTo>
+                    <a:pt x="2110334" y="884158"/>
+                  </a:lnTo>
+                  <a:lnTo>
+                    <a:pt x="2039990" y="879488"/>
+                  </a:lnTo>
+                  <a:lnTo>
+                    <a:pt x="1969645" y="874760"/>
+                  </a:lnTo>
+                  <a:lnTo>
+                    <a:pt x="1899301" y="869973"/>
+                  </a:lnTo>
+                  <a:lnTo>
+                    <a:pt x="1828956" y="865126"/>
+                  </a:lnTo>
+                  <a:lnTo>
+                    <a:pt x="1758612" y="860218"/>
+                  </a:lnTo>
+                  <a:lnTo>
+                    <a:pt x="1688267" y="855249"/>
+                  </a:lnTo>
+                  <a:lnTo>
+                    <a:pt x="1617923" y="850217"/>
+                  </a:lnTo>
+                  <a:lnTo>
+                    <a:pt x="1547578" y="845123"/>
+                  </a:lnTo>
+                  <a:lnTo>
+                    <a:pt x="1477234" y="839964"/>
+                  </a:lnTo>
+                  <a:lnTo>
+                    <a:pt x="1406889" y="834742"/>
+                  </a:lnTo>
+                  <a:lnTo>
+                    <a:pt x="1336545" y="829453"/>
+                  </a:lnTo>
+                  <a:lnTo>
+                    <a:pt x="1266200" y="824099"/>
+                  </a:lnTo>
+                  <a:lnTo>
+                    <a:pt x="1195856" y="818678"/>
+                  </a:lnTo>
+                  <a:lnTo>
+                    <a:pt x="1125511" y="813188"/>
+                  </a:lnTo>
+                  <a:lnTo>
+                    <a:pt x="1055167" y="807630"/>
+                  </a:lnTo>
+                  <a:lnTo>
+                    <a:pt x="984822" y="802003"/>
+                  </a:lnTo>
+                  <a:lnTo>
+                    <a:pt x="914478" y="796305"/>
+                  </a:lnTo>
+                  <a:lnTo>
+                    <a:pt x="844133" y="790535"/>
+                  </a:lnTo>
+                  <a:lnTo>
+                    <a:pt x="773789" y="784694"/>
+                  </a:lnTo>
+                  <a:lnTo>
+                    <a:pt x="703444" y="778779"/>
+                  </a:lnTo>
+                  <a:lnTo>
+                    <a:pt x="633100" y="772790"/>
+                  </a:lnTo>
+                  <a:lnTo>
+                    <a:pt x="562755" y="766727"/>
+                  </a:lnTo>
+                  <a:lnTo>
+                    <a:pt x="492411" y="760587"/>
+                  </a:lnTo>
+                  <a:lnTo>
+                    <a:pt x="422066" y="754371"/>
+                  </a:lnTo>
+                  <a:lnTo>
+                    <a:pt x="351722" y="748076"/>
+                  </a:lnTo>
+                  <a:lnTo>
+                    <a:pt x="281377" y="741703"/>
+                  </a:lnTo>
+                  <a:lnTo>
+                    <a:pt x="211033" y="735251"/>
+                  </a:lnTo>
+                  <a:lnTo>
+                    <a:pt x="140688" y="728717"/>
+                  </a:lnTo>
+                  <a:lnTo>
+                    <a:pt x="70344" y="722102"/>
+                  </a:lnTo>
+                  <a:lnTo>
+                    <a:pt x="0" y="715403"/>
+                  </a:lnTo>
+                  <a:close/>
+                </a:path>
+              </a:pathLst>
+            </a:custGeom>
+            <a:solidFill>
+              <a:srgbClr val="FF8C00">
+                <a:alpha val="20000"/>
+              </a:srgbClr>
+            </a:solidFill>
+          </p:spPr>
+          <p:txBody>
+            <a:bodyPr/>
+            <a:lstStyle/>
+            <a:p/>
+          </p:txBody>
+        </p:sp>
+        <p:sp>
+          <p:nvSpPr>
+            <p:cNvPr id="67" name="pl67"/>
+            <p:cNvSpPr/>
+            <p:nvPr/>
+          </p:nvSpPr>
+          <p:spPr>
+            <a:xfrm>
+              <a:off x="1496519" y="4336484"/>
+              <a:ext cx="6702897" cy="1099084"/>
+            </a:xfrm>
+            <a:custGeom>
+              <a:avLst/>
+              <a:pathLst>
+                <a:path w="6702897" h="1099084">
+                  <a:moveTo>
+                    <a:pt x="0" y="0"/>
+                  </a:moveTo>
+                  <a:lnTo>
+                    <a:pt x="20170" y="11842"/>
+                  </a:lnTo>
+                  <a:lnTo>
+                    <a:pt x="90515" y="51818"/>
+                  </a:lnTo>
+                  <a:lnTo>
+                    <a:pt x="160859" y="90510"/>
+                  </a:lnTo>
+                  <a:lnTo>
+                    <a:pt x="231204" y="127960"/>
+                  </a:lnTo>
+                  <a:lnTo>
+                    <a:pt x="301548" y="164208"/>
+                  </a:lnTo>
+                  <a:lnTo>
+                    <a:pt x="371893" y="199292"/>
+                  </a:lnTo>
+                  <a:lnTo>
+                    <a:pt x="442237" y="233251"/>
+                  </a:lnTo>
+                  <a:lnTo>
+                    <a:pt x="512581" y="266119"/>
+                  </a:lnTo>
+                  <a:lnTo>
+                    <a:pt x="582926" y="297932"/>
+                  </a:lnTo>
+                  <a:lnTo>
+                    <a:pt x="653270" y="328724"/>
+                  </a:lnTo>
+                  <a:lnTo>
+                    <a:pt x="723615" y="358528"/>
+                  </a:lnTo>
+                  <a:lnTo>
+                    <a:pt x="793959" y="387375"/>
+                  </a:lnTo>
+                  <a:lnTo>
+                    <a:pt x="864304" y="415296"/>
+                  </a:lnTo>
+                  <a:lnTo>
+                    <a:pt x="934648" y="442320"/>
+                  </a:lnTo>
+                  <a:lnTo>
+                    <a:pt x="1004993" y="468478"/>
+                  </a:lnTo>
+                  <a:lnTo>
+                    <a:pt x="1075337" y="493795"/>
+                  </a:lnTo>
+                  <a:lnTo>
+                    <a:pt x="1145682" y="518300"/>
+                  </a:lnTo>
+                  <a:lnTo>
+                    <a:pt x="1216026" y="542019"/>
+                  </a:lnTo>
+                  <a:lnTo>
+                    <a:pt x="1286371" y="564976"/>
+                  </a:lnTo>
+                  <a:lnTo>
+                    <a:pt x="1356715" y="587196"/>
+                  </a:lnTo>
+                  <a:lnTo>
+                    <a:pt x="1427060" y="608702"/>
+                  </a:lnTo>
+                  <a:lnTo>
+                    <a:pt x="1497404" y="629519"/>
+                  </a:lnTo>
+                  <a:lnTo>
+                    <a:pt x="1567749" y="649667"/>
+                  </a:lnTo>
+                  <a:lnTo>
+                    <a:pt x="1638093" y="669169"/>
+                  </a:lnTo>
+                  <a:lnTo>
+                    <a:pt x="1708438" y="688044"/>
+                  </a:lnTo>
+                  <a:lnTo>
+                    <a:pt x="1778782" y="706314"/>
+                  </a:lnTo>
+                  <a:lnTo>
+                    <a:pt x="1849127" y="723997"/>
+                  </a:lnTo>
+                  <a:lnTo>
+                    <a:pt x="1919471" y="741113"/>
+                  </a:lnTo>
+                  <a:lnTo>
+                    <a:pt x="1989816" y="757679"/>
+                  </a:lnTo>
+                  <a:lnTo>
+                    <a:pt x="2060160" y="773713"/>
+                  </a:lnTo>
+                  <a:lnTo>
+                    <a:pt x="2130505" y="789233"/>
+                  </a:lnTo>
+                  <a:lnTo>
+                    <a:pt x="2200849" y="804254"/>
+                  </a:lnTo>
+                  <a:lnTo>
+                    <a:pt x="2271194" y="818794"/>
+                  </a:lnTo>
+                  <a:lnTo>
+                    <a:pt x="2341538" y="832867"/>
+                  </a:lnTo>
+                  <a:lnTo>
+                    <a:pt x="2411883" y="846487"/>
+                  </a:lnTo>
+                  <a:lnTo>
+                    <a:pt x="2482227" y="859671"/>
+                  </a:lnTo>
+                  <a:lnTo>
+                    <a:pt x="2552572" y="872432"/>
+                  </a:lnTo>
+                  <a:lnTo>
+                    <a:pt x="2622916" y="884783"/>
+                  </a:lnTo>
+                  <a:lnTo>
+                    <a:pt x="2693261" y="896737"/>
+                  </a:lnTo>
+                  <a:lnTo>
+                    <a:pt x="2763605" y="908308"/>
+                  </a:lnTo>
+                  <a:lnTo>
+                    <a:pt x="2833950" y="919507"/>
+                  </a:lnTo>
+                  <a:lnTo>
+                    <a:pt x="2904294" y="930347"/>
+                  </a:lnTo>
+                  <a:lnTo>
+                    <a:pt x="2974639" y="940839"/>
+                  </a:lnTo>
+                  <a:lnTo>
+                    <a:pt x="3044983" y="950994"/>
+                  </a:lnTo>
+                  <a:lnTo>
+                    <a:pt x="3115328" y="958998"/>
+                  </a:lnTo>
+                  <a:lnTo>
+                    <a:pt x="3185672" y="962685"/>
+                  </a:lnTo>
+                  <a:lnTo>
+                    <a:pt x="3256017" y="966326"/>
+                  </a:lnTo>
+                  <a:lnTo>
+                    <a:pt x="3326361" y="969922"/>
+                  </a:lnTo>
+                  <a:lnTo>
+                    <a:pt x="3396706" y="973473"/>
+                  </a:lnTo>
+                  <a:lnTo>
+                    <a:pt x="3467050" y="976981"/>
+                  </a:lnTo>
+                  <a:lnTo>
+                    <a:pt x="3537395" y="980446"/>
+                  </a:lnTo>
+                  <a:lnTo>
+                    <a:pt x="3607739" y="983867"/>
+                  </a:lnTo>
+                  <a:lnTo>
+                    <a:pt x="3678084" y="987246"/>
+                  </a:lnTo>
+                  <a:lnTo>
+                    <a:pt x="3748428" y="990584"/>
+                  </a:lnTo>
+                  <a:lnTo>
+                    <a:pt x="3818773" y="993880"/>
+                  </a:lnTo>
+                  <a:lnTo>
+                    <a:pt x="3889117" y="997135"/>
+                  </a:lnTo>
+                  <a:lnTo>
+                    <a:pt x="3959462" y="1000350"/>
+                  </a:lnTo>
+                  <a:lnTo>
+                    <a:pt x="4029806" y="1003526"/>
+                  </a:lnTo>
+                  <a:lnTo>
+                    <a:pt x="4100151" y="1006662"/>
+                  </a:lnTo>
+                  <a:lnTo>
+                    <a:pt x="4170495" y="1009759"/>
+                  </a:lnTo>
+                  <a:lnTo>
+                    <a:pt x="4240839" y="1012819"/>
+                  </a:lnTo>
+                  <a:lnTo>
+                    <a:pt x="4311184" y="1015840"/>
+                  </a:lnTo>
+                  <a:lnTo>
+                    <a:pt x="4381528" y="1018824"/>
+                  </a:lnTo>
+                  <a:lnTo>
+                    <a:pt x="4451873" y="1021771"/>
+                  </a:lnTo>
+                  <a:lnTo>
+                    <a:pt x="4522217" y="1024681"/>
+                  </a:lnTo>
+                  <a:lnTo>
+                    <a:pt x="4592562" y="1027556"/>
+                  </a:lnTo>
+                  <a:lnTo>
+                    <a:pt x="4662906" y="1030395"/>
+                  </a:lnTo>
+                  <a:lnTo>
+                    <a:pt x="4733251" y="1033199"/>
+                  </a:lnTo>
+                  <a:lnTo>
+                    <a:pt x="4803595" y="1035968"/>
+                  </a:lnTo>
+                  <a:lnTo>
+                    <a:pt x="4873940" y="1038703"/>
+                  </a:lnTo>
+                  <a:lnTo>
+                    <a:pt x="4944284" y="1041405"/>
+                  </a:lnTo>
+                  <a:lnTo>
+                    <a:pt x="5014629" y="1044073"/>
+                  </a:lnTo>
+                  <a:lnTo>
+                    <a:pt x="5084973" y="1046707"/>
+                  </a:lnTo>
+                  <a:lnTo>
+                    <a:pt x="5155318" y="1049310"/>
+                  </a:lnTo>
+                  <a:lnTo>
+                    <a:pt x="5225662" y="1051880"/>
+                  </a:lnTo>
+                  <a:lnTo>
+                    <a:pt x="5296007" y="1054418"/>
+                  </a:lnTo>
+                  <a:lnTo>
+                    <a:pt x="5366351" y="1056925"/>
+                  </a:lnTo>
+                  <a:lnTo>
+                    <a:pt x="5436696" y="1059401"/>
+                  </a:lnTo>
+                  <a:lnTo>
+                    <a:pt x="5507040" y="1061847"/>
+                  </a:lnTo>
+                  <a:lnTo>
+                    <a:pt x="5577385" y="1064262"/>
+                  </a:lnTo>
+                  <a:lnTo>
+                    <a:pt x="5647729" y="1066647"/>
+                  </a:lnTo>
+                  <a:lnTo>
+                    <a:pt x="5718074" y="1069003"/>
+                  </a:lnTo>
+                  <a:lnTo>
+                    <a:pt x="5788418" y="1071330"/>
+                  </a:lnTo>
+                  <a:lnTo>
+                    <a:pt x="5858763" y="1073628"/>
+                  </a:lnTo>
+                  <a:lnTo>
+                    <a:pt x="5929107" y="1075897"/>
+                  </a:lnTo>
+                  <a:lnTo>
+                    <a:pt x="5999452" y="1078138"/>
+                  </a:lnTo>
+                  <a:lnTo>
+                    <a:pt x="6069796" y="1080352"/>
+                  </a:lnTo>
+                  <a:lnTo>
+                    <a:pt x="6140141" y="1082539"/>
+                  </a:lnTo>
+                  <a:lnTo>
+                    <a:pt x="6210485" y="1084698"/>
+                  </a:lnTo>
+                  <a:lnTo>
+                    <a:pt x="6280830" y="1086831"/>
+                  </a:lnTo>
+                  <a:lnTo>
+                    <a:pt x="6351174" y="1088937"/>
+                  </a:lnTo>
+                  <a:lnTo>
+                    <a:pt x="6421519" y="1091017"/>
+                  </a:lnTo>
+                  <a:lnTo>
+                    <a:pt x="6491863" y="1093072"/>
+                  </a:lnTo>
+                  <a:lnTo>
+                    <a:pt x="6562208" y="1095101"/>
+                  </a:lnTo>
+                  <a:lnTo>
+                    <a:pt x="6632552" y="1097105"/>
+                  </a:lnTo>
+                  <a:lnTo>
+                    <a:pt x="6702897" y="1099084"/>
+                  </a:lnTo>
+                </a:path>
+              </a:pathLst>
+            </a:custGeom>
+          </p:spPr>
+          <p:txBody>
+            <a:bodyPr/>
+            <a:lstStyle/>
+            <a:p/>
+          </p:txBody>
+        </p:sp>
+        <p:sp>
+          <p:nvSpPr>
+            <p:cNvPr id="68" name="pl68"/>
+            <p:cNvSpPr/>
+            <p:nvPr/>
+          </p:nvSpPr>
+          <p:spPr>
+            <a:xfrm>
+              <a:off x="1235312" y="5051888"/>
+              <a:ext cx="6964104" cy="485665"/>
+            </a:xfrm>
+            <a:custGeom>
+              <a:avLst/>
+              <a:pathLst>
+                <a:path w="6964104" h="485665">
+                  <a:moveTo>
+                    <a:pt x="6964104" y="485665"/>
+                  </a:moveTo>
+                  <a:lnTo>
+                    <a:pt x="6893760" y="483804"/>
+                  </a:lnTo>
+                  <a:lnTo>
+                    <a:pt x="6823415" y="481880"/>
+                  </a:lnTo>
+                  <a:lnTo>
+                    <a:pt x="6753071" y="479893"/>
+                  </a:lnTo>
+                  <a:lnTo>
+                    <a:pt x="6682726" y="477840"/>
+                  </a:lnTo>
+                  <a:lnTo>
+                    <a:pt x="6612382" y="475719"/>
+                  </a:lnTo>
+                  <a:lnTo>
+                    <a:pt x="6542037" y="473528"/>
+                  </a:lnTo>
+                  <a:lnTo>
+                    <a:pt x="6471693" y="471264"/>
+                  </a:lnTo>
+                  <a:lnTo>
+                    <a:pt x="6401348" y="468924"/>
+                  </a:lnTo>
+                  <a:lnTo>
+                    <a:pt x="6331004" y="466508"/>
+                  </a:lnTo>
+                  <a:lnTo>
+                    <a:pt x="6260659" y="464011"/>
+                  </a:lnTo>
+                  <a:lnTo>
+                    <a:pt x="6190315" y="461431"/>
+                  </a:lnTo>
+                  <a:lnTo>
+                    <a:pt x="6119970" y="458766"/>
+                  </a:lnTo>
+                  <a:lnTo>
+                    <a:pt x="6049626" y="456012"/>
+                  </a:lnTo>
+                  <a:lnTo>
+                    <a:pt x="5979281" y="453167"/>
+                  </a:lnTo>
+                  <a:lnTo>
+                    <a:pt x="5908937" y="450228"/>
+                  </a:lnTo>
+                  <a:lnTo>
+                    <a:pt x="5838592" y="447191"/>
+                  </a:lnTo>
+                  <a:lnTo>
+                    <a:pt x="5768248" y="444053"/>
+                  </a:lnTo>
+                  <a:lnTo>
+                    <a:pt x="5697903" y="440812"/>
+                  </a:lnTo>
+                  <a:lnTo>
+                    <a:pt x="5627559" y="437463"/>
+                  </a:lnTo>
+                  <a:lnTo>
+                    <a:pt x="5557214" y="434002"/>
+                  </a:lnTo>
+                  <a:lnTo>
+                    <a:pt x="5486870" y="430428"/>
+                  </a:lnTo>
+                  <a:lnTo>
+                    <a:pt x="5416525" y="426734"/>
+                  </a:lnTo>
+                  <a:lnTo>
+                    <a:pt x="5346181" y="422918"/>
+                  </a:lnTo>
+                  <a:lnTo>
+                    <a:pt x="5275836" y="418976"/>
+                  </a:lnTo>
+                  <a:lnTo>
+                    <a:pt x="5205492" y="414902"/>
+                  </a:lnTo>
+                  <a:lnTo>
+                    <a:pt x="5135147" y="410694"/>
+                  </a:lnTo>
+                  <a:lnTo>
+                    <a:pt x="5064803" y="406346"/>
+                  </a:lnTo>
+                  <a:lnTo>
+                    <a:pt x="4994458" y="401854"/>
+                  </a:lnTo>
+                  <a:lnTo>
+                    <a:pt x="4924114" y="397213"/>
+                  </a:lnTo>
+                  <a:lnTo>
+                    <a:pt x="4853769" y="392418"/>
+                  </a:lnTo>
+                  <a:lnTo>
+                    <a:pt x="4783425" y="387464"/>
+                  </a:lnTo>
+                  <a:lnTo>
+                    <a:pt x="4713080" y="382345"/>
+                  </a:lnTo>
+                  <a:lnTo>
+                    <a:pt x="4642736" y="377057"/>
+                  </a:lnTo>
+                  <a:lnTo>
+                    <a:pt x="4572391" y="371594"/>
+                  </a:lnTo>
+                  <a:lnTo>
+                    <a:pt x="4502047" y="365949"/>
+                  </a:lnTo>
+                  <a:lnTo>
+                    <a:pt x="4431702" y="360117"/>
+                  </a:lnTo>
+                  <a:lnTo>
+                    <a:pt x="4361358" y="354092"/>
+                  </a:lnTo>
+                  <a:lnTo>
+                    <a:pt x="4291013" y="347867"/>
+                  </a:lnTo>
+                  <a:lnTo>
+                    <a:pt x="4220669" y="341436"/>
+                  </a:lnTo>
+                  <a:lnTo>
+                    <a:pt x="4150324" y="334791"/>
+                  </a:lnTo>
+                  <a:lnTo>
+                    <a:pt x="4079980" y="327926"/>
+                  </a:lnTo>
+                  <a:lnTo>
+                    <a:pt x="4009635" y="320833"/>
+                  </a:lnTo>
+                  <a:lnTo>
+                    <a:pt x="3939291" y="313505"/>
+                  </a:lnTo>
+                  <a:lnTo>
+                    <a:pt x="3868946" y="305933"/>
+                  </a:lnTo>
+                  <a:lnTo>
+                    <a:pt x="3798602" y="298111"/>
+                  </a:lnTo>
+                  <a:lnTo>
+                    <a:pt x="3728257" y="290030"/>
+                  </a:lnTo>
+                  <a:lnTo>
+                    <a:pt x="3657913" y="281680"/>
+                  </a:lnTo>
+                  <a:lnTo>
+                    <a:pt x="3587569" y="273053"/>
+                  </a:lnTo>
+                  <a:lnTo>
+                    <a:pt x="3517224" y="264141"/>
+                  </a:lnTo>
+                  <a:lnTo>
+                    <a:pt x="3446880" y="254933"/>
+                  </a:lnTo>
+                  <a:lnTo>
+                    <a:pt x="3376535" y="245419"/>
+                  </a:lnTo>
+                  <a:lnTo>
+                    <a:pt x="3306191" y="239861"/>
+                  </a:lnTo>
+                  <a:lnTo>
+                    <a:pt x="3235846" y="236082"/>
+                  </a:lnTo>
+                  <a:lnTo>
+                    <a:pt x="3165502" y="232255"/>
+                  </a:lnTo>
+                  <a:lnTo>
+                    <a:pt x="3095157" y="228380"/>
+                  </a:lnTo>
+                  <a:lnTo>
+                    <a:pt x="3024813" y="224457"/>
+                  </a:lnTo>
+                  <a:lnTo>
+                    <a:pt x="2954468" y="220485"/>
+                  </a:lnTo>
+                  <a:lnTo>
+                    <a:pt x="2884124" y="216463"/>
+                  </a:lnTo>
+                  <a:lnTo>
+                    <a:pt x="2813779" y="212390"/>
+                  </a:lnTo>
+                  <a:lnTo>
+                    <a:pt x="2743435" y="208267"/>
+                  </a:lnTo>
+                  <a:lnTo>
+                    <a:pt x="2673090" y="204092"/>
+                  </a:lnTo>
+                  <a:lnTo>
+                    <a:pt x="2602746" y="199864"/>
+                  </a:lnTo>
+                  <a:lnTo>
+                    <a:pt x="2532401" y="195584"/>
+                  </a:lnTo>
+                  <a:lnTo>
+                    <a:pt x="2462057" y="191250"/>
+                  </a:lnTo>
+                  <a:lnTo>
+                    <a:pt x="2391712" y="186862"/>
+                  </a:lnTo>
+                  <a:lnTo>
+                    <a:pt x="2321368" y="182419"/>
+                  </a:lnTo>
+                  <a:lnTo>
+                    <a:pt x="2251023" y="177921"/>
+                  </a:lnTo>
+                  <a:lnTo>
+                    <a:pt x="2180679" y="173366"/>
+                  </a:lnTo>
+                  <a:lnTo>
+                    <a:pt x="2110334" y="168754"/>
+                  </a:lnTo>
+                  <a:lnTo>
+                    <a:pt x="2039990" y="164084"/>
+                  </a:lnTo>
+                  <a:lnTo>
+                    <a:pt x="1969645" y="159356"/>
+                  </a:lnTo>
+                  <a:lnTo>
+                    <a:pt x="1899301" y="154569"/>
+                  </a:lnTo>
+                  <a:lnTo>
+                    <a:pt x="1828956" y="149722"/>
+                  </a:lnTo>
+                  <a:lnTo>
+                    <a:pt x="1758612" y="144814"/>
+                  </a:lnTo>
+                  <a:lnTo>
+                    <a:pt x="1688267" y="139845"/>
+                  </a:lnTo>
+                  <a:lnTo>
+                    <a:pt x="1617923" y="134813"/>
+                  </a:lnTo>
+                  <a:lnTo>
+                    <a:pt x="1547578" y="129719"/>
+                  </a:lnTo>
+                  <a:lnTo>
+                    <a:pt x="1477234" y="124561"/>
+                  </a:lnTo>
+                  <a:lnTo>
+                    <a:pt x="1406889" y="119338"/>
+                  </a:lnTo>
+                  <a:lnTo>
+                    <a:pt x="1336545" y="114050"/>
+                  </a:lnTo>
+                  <a:lnTo>
+                    <a:pt x="1266200" y="108695"/>
+                  </a:lnTo>
+                  <a:lnTo>
+                    <a:pt x="1195856" y="103274"/>
+                  </a:lnTo>
+                  <a:lnTo>
+                    <a:pt x="1125511" y="97784"/>
+                  </a:lnTo>
+                  <a:lnTo>
+                    <a:pt x="1055167" y="92226"/>
+                  </a:lnTo>
+                  <a:lnTo>
+                    <a:pt x="984822" y="86599"/>
+                  </a:lnTo>
+                  <a:lnTo>
+                    <a:pt x="914478" y="80901"/>
+                  </a:lnTo>
+                  <a:lnTo>
+                    <a:pt x="844133" y="75131"/>
+                  </a:lnTo>
+                  <a:lnTo>
+                    <a:pt x="773789" y="69290"/>
+                  </a:lnTo>
+                  <a:lnTo>
+                    <a:pt x="703444" y="63375"/>
+                  </a:lnTo>
+                  <a:lnTo>
+                    <a:pt x="633100" y="57387"/>
+                  </a:lnTo>
+                  <a:lnTo>
+                    <a:pt x="562755" y="51323"/>
+                  </a:lnTo>
+                  <a:lnTo>
+                    <a:pt x="492411" y="45183"/>
+                  </a:lnTo>
+                  <a:lnTo>
+                    <a:pt x="422066" y="38967"/>
+                  </a:lnTo>
+                  <a:lnTo>
+                    <a:pt x="351722" y="32673"/>
+                  </a:lnTo>
+                  <a:lnTo>
+                    <a:pt x="281377" y="26299"/>
+                  </a:lnTo>
+                  <a:lnTo>
+                    <a:pt x="211033" y="19847"/>
+                  </a:lnTo>
+                  <a:lnTo>
+                    <a:pt x="140688" y="13313"/>
+                  </a:lnTo>
+                  <a:lnTo>
+                    <a:pt x="70344" y="6698"/>
+                  </a:lnTo>
+                  <a:lnTo>
+                    <a:pt x="0" y="0"/>
+                  </a:lnTo>
+                </a:path>
+              </a:pathLst>
+            </a:custGeom>
+          </p:spPr>
+          <p:txBody>
+            <a:bodyPr/>
+            <a:lstStyle/>
+            <a:p/>
+          </p:txBody>
+        </p:sp>
+        <p:sp>
+          <p:nvSpPr>
+            <p:cNvPr id="69" name="pl69"/>
+            <p:cNvSpPr/>
+            <p:nvPr/>
+          </p:nvSpPr>
+          <p:spPr>
+            <a:xfrm>
+              <a:off x="1235312" y="4716878"/>
+              <a:ext cx="6964104" cy="782598"/>
+            </a:xfrm>
+            <a:custGeom>
+              <a:avLst/>
+              <a:pathLst>
+                <a:path w="6964104" h="782598">
+                  <a:moveTo>
+                    <a:pt x="0" y="0"/>
+                  </a:moveTo>
+                  <a:lnTo>
+                    <a:pt x="70344" y="19536"/>
+                  </a:lnTo>
+                  <a:lnTo>
+                    <a:pt x="140688" y="38636"/>
+                  </a:lnTo>
+                  <a:lnTo>
+                    <a:pt x="211033" y="57312"/>
+                  </a:lnTo>
+                  <a:lnTo>
+                    <a:pt x="281377" y="75571"/>
+                  </a:lnTo>
+                  <a:lnTo>
+                    <a:pt x="351722" y="93423"/>
+                  </a:lnTo>
+                  <a:lnTo>
+                    <a:pt x="422066" y="110878"/>
+                  </a:lnTo>
+                  <a:lnTo>
+                    <a:pt x="492411" y="127943"/>
+                  </a:lnTo>
+                  <a:lnTo>
+                    <a:pt x="562755" y="144629"/>
+                  </a:lnTo>
+                  <a:lnTo>
+                    <a:pt x="633100" y="160943"/>
+                  </a:lnTo>
+                  <a:lnTo>
+                    <a:pt x="703444" y="176893"/>
+                  </a:lnTo>
+                  <a:lnTo>
+                    <a:pt x="773789" y="192488"/>
+                  </a:lnTo>
+                  <a:lnTo>
+                    <a:pt x="844133" y="207735"/>
+                  </a:lnTo>
+                  <a:lnTo>
+                    <a:pt x="914478" y="222642"/>
+                  </a:lnTo>
+                  <a:lnTo>
+                    <a:pt x="984822" y="237218"/>
+                  </a:lnTo>
+                  <a:lnTo>
+                    <a:pt x="1055167" y="251469"/>
+                  </a:lnTo>
+                  <a:lnTo>
+                    <a:pt x="1125511" y="265402"/>
+                  </a:lnTo>
+                  <a:lnTo>
+                    <a:pt x="1195856" y="279024"/>
+                  </a:lnTo>
+                  <a:lnTo>
+                    <a:pt x="1266200" y="292344"/>
+                  </a:lnTo>
+                  <a:lnTo>
+                    <a:pt x="1336545" y="305366"/>
+                  </a:lnTo>
+                  <a:lnTo>
+                    <a:pt x="1406889" y="318098"/>
+                  </a:lnTo>
+                  <a:lnTo>
+                    <a:pt x="1477234" y="330547"/>
+                  </a:lnTo>
+                  <a:lnTo>
+                    <a:pt x="1547578" y="342718"/>
+                  </a:lnTo>
+                  <a:lnTo>
+                    <a:pt x="1617923" y="354618"/>
+                  </a:lnTo>
+                  <a:lnTo>
+                    <a:pt x="1688267" y="366253"/>
+                  </a:lnTo>
+                  <a:lnTo>
+                    <a:pt x="1758612" y="377629"/>
+                  </a:lnTo>
+                  <a:lnTo>
+                    <a:pt x="1828956" y="388751"/>
+                  </a:lnTo>
+                  <a:lnTo>
+                    <a:pt x="1899301" y="399625"/>
+                  </a:lnTo>
+                  <a:lnTo>
+                    <a:pt x="1969645" y="410257"/>
+                  </a:lnTo>
+                  <a:lnTo>
+                    <a:pt x="2039990" y="420653"/>
+                  </a:lnTo>
+                  <a:lnTo>
+                    <a:pt x="2110334" y="430816"/>
+                  </a:lnTo>
+                  <a:lnTo>
+                    <a:pt x="2180679" y="440753"/>
+                  </a:lnTo>
+                  <a:lnTo>
+                    <a:pt x="2251023" y="450469"/>
+                  </a:lnTo>
+                  <a:lnTo>
+                    <a:pt x="2321368" y="459968"/>
+                  </a:lnTo>
+                  <a:lnTo>
+                    <a:pt x="2391712" y="469256"/>
+                  </a:lnTo>
+                  <a:lnTo>
+                    <a:pt x="2462057" y="478337"/>
+                  </a:lnTo>
+                  <a:lnTo>
+                    <a:pt x="2532401" y="487215"/>
+                  </a:lnTo>
+                  <a:lnTo>
+                    <a:pt x="2602746" y="495895"/>
+                  </a:lnTo>
+                  <a:lnTo>
+                    <a:pt x="2673090" y="504382"/>
+                  </a:lnTo>
+                  <a:lnTo>
+                    <a:pt x="2743435" y="512680"/>
+                  </a:lnTo>
+                  <a:lnTo>
+                    <a:pt x="2813779" y="520794"/>
+                  </a:lnTo>
+                  <a:lnTo>
+                    <a:pt x="2884124" y="528726"/>
+                  </a:lnTo>
+                  <a:lnTo>
+                    <a:pt x="2954468" y="536482"/>
+                  </a:lnTo>
+                  <a:lnTo>
+                    <a:pt x="3024813" y="544064"/>
+                  </a:lnTo>
+                  <a:lnTo>
+                    <a:pt x="3095157" y="551478"/>
+                  </a:lnTo>
+                  <a:lnTo>
+                    <a:pt x="3165502" y="558727"/>
+                  </a:lnTo>
+                  <a:lnTo>
+                    <a:pt x="3235846" y="565814"/>
+                  </a:lnTo>
+                  <a:lnTo>
+                    <a:pt x="3306191" y="572743"/>
+                  </a:lnTo>
+                  <a:lnTo>
+                    <a:pt x="3376535" y="579518"/>
+                  </a:lnTo>
+                  <a:lnTo>
+                    <a:pt x="3446880" y="586142"/>
+                  </a:lnTo>
+                  <a:lnTo>
+                    <a:pt x="3517224" y="592618"/>
+                  </a:lnTo>
+                  <a:lnTo>
+                    <a:pt x="3587569" y="598950"/>
+                  </a:lnTo>
+                  <a:lnTo>
+                    <a:pt x="3657913" y="605141"/>
+                  </a:lnTo>
+                  <a:lnTo>
+                    <a:pt x="3728257" y="611194"/>
+                  </a:lnTo>
+                  <a:lnTo>
+                    <a:pt x="3798602" y="617112"/>
+                  </a:lnTo>
+                  <a:lnTo>
+                    <a:pt x="3868946" y="622899"/>
+                  </a:lnTo>
+                  <a:lnTo>
+                    <a:pt x="3939291" y="628556"/>
+                  </a:lnTo>
+                  <a:lnTo>
+                    <a:pt x="4009635" y="634087"/>
+                  </a:lnTo>
+                  <a:lnTo>
+                    <a:pt x="4079980" y="639495"/>
+                  </a:lnTo>
+                  <a:lnTo>
+                    <a:pt x="4150324" y="644783"/>
+                  </a:lnTo>
+                  <a:lnTo>
+                    <a:pt x="4220669" y="649953"/>
+                  </a:lnTo>
+                  <a:lnTo>
+                    <a:pt x="4291013" y="655007"/>
+                  </a:lnTo>
+                  <a:lnTo>
+                    <a:pt x="4361358" y="659949"/>
+                  </a:lnTo>
+                  <a:lnTo>
+                    <a:pt x="4431702" y="664781"/>
+                  </a:lnTo>
+                  <a:lnTo>
+                    <a:pt x="4502047" y="669505"/>
+                  </a:lnTo>
+                  <a:lnTo>
+                    <a:pt x="4572391" y="674124"/>
+                  </a:lnTo>
+                  <a:lnTo>
+                    <a:pt x="4642736" y="678640"/>
+                  </a:lnTo>
+                  <a:lnTo>
+                    <a:pt x="4713080" y="683055"/>
+                  </a:lnTo>
+                  <a:lnTo>
+                    <a:pt x="4783425" y="687372"/>
+                  </a:lnTo>
+                  <a:lnTo>
+                    <a:pt x="4853769" y="691593"/>
+                  </a:lnTo>
+                  <a:lnTo>
+                    <a:pt x="4924114" y="695720"/>
+                  </a:lnTo>
+                  <a:lnTo>
+                    <a:pt x="4994458" y="699755"/>
+                  </a:lnTo>
+                  <a:lnTo>
+                    <a:pt x="5064803" y="703700"/>
+                  </a:lnTo>
+                  <a:lnTo>
+                    <a:pt x="5135147" y="707557"/>
+                  </a:lnTo>
+                  <a:lnTo>
+                    <a:pt x="5205492" y="711328"/>
+                  </a:lnTo>
+                  <a:lnTo>
+                    <a:pt x="5275836" y="715015"/>
+                  </a:lnTo>
+                  <a:lnTo>
+                    <a:pt x="5346181" y="718620"/>
+                  </a:lnTo>
+                  <a:lnTo>
+                    <a:pt x="5416525" y="722144"/>
+                  </a:lnTo>
+                  <a:lnTo>
+                    <a:pt x="5486870" y="725590"/>
+                  </a:lnTo>
+                  <a:lnTo>
+                    <a:pt x="5557214" y="728960"/>
+                  </a:lnTo>
+                  <a:lnTo>
+                    <a:pt x="5627559" y="732254"/>
+                  </a:lnTo>
+                  <a:lnTo>
+                    <a:pt x="5697903" y="735475"/>
+                  </a:lnTo>
+                  <a:lnTo>
+                    <a:pt x="5768248" y="738624"/>
+                  </a:lnTo>
+                  <a:lnTo>
+                    <a:pt x="5838592" y="741703"/>
+                  </a:lnTo>
+                  <a:lnTo>
+                    <a:pt x="5908937" y="744713"/>
+                  </a:lnTo>
+                  <a:lnTo>
+                    <a:pt x="5979281" y="747656"/>
+                  </a:lnTo>
+                  <a:lnTo>
+                    <a:pt x="6049626" y="750534"/>
+                  </a:lnTo>
+                  <a:lnTo>
+                    <a:pt x="6119970" y="753347"/>
+                  </a:lnTo>
+                  <a:lnTo>
+                    <a:pt x="6190315" y="756098"/>
+                  </a:lnTo>
+                  <a:lnTo>
+                    <a:pt x="6260659" y="758788"/>
+                  </a:lnTo>
+                  <a:lnTo>
+                    <a:pt x="6331004" y="761417"/>
+                  </a:lnTo>
+                  <a:lnTo>
+                    <a:pt x="6401348" y="763988"/>
+                  </a:lnTo>
+                  <a:lnTo>
+                    <a:pt x="6471693" y="766502"/>
+                  </a:lnTo>
+                  <a:lnTo>
+                    <a:pt x="6542037" y="768960"/>
+                  </a:lnTo>
+                  <a:lnTo>
+                    <a:pt x="6612382" y="771363"/>
+                  </a:lnTo>
+                  <a:lnTo>
+                    <a:pt x="6682726" y="773712"/>
+                  </a:lnTo>
+                  <a:lnTo>
+                    <a:pt x="6753071" y="776009"/>
+                  </a:lnTo>
+                  <a:lnTo>
+                    <a:pt x="6823415" y="778255"/>
+                  </a:lnTo>
+                  <a:lnTo>
+                    <a:pt x="6893760" y="780451"/>
+                  </a:lnTo>
+                  <a:lnTo>
+                    <a:pt x="6964104" y="782598"/>
+                  </a:lnTo>
+                </a:path>
+              </a:pathLst>
+            </a:custGeom>
+            <a:ln w="27101" cap="flat">
+              <a:solidFill>
+                <a:srgbClr val="FF8C00">
+                  <a:alpha val="100000"/>
+                </a:srgbClr>
+              </a:solidFill>
+              <a:prstDash val="solid"/>
+              <a:round/>
+            </a:ln>
+          </p:spPr>
+          <p:txBody>
+            <a:bodyPr/>
+            <a:lstStyle/>
+            <a:p/>
+          </p:txBody>
+        </p:sp>
+        <p:sp>
+          <p:nvSpPr>
+            <p:cNvPr id="70" name="pl70"/>
+            <p:cNvSpPr/>
+            <p:nvPr/>
+          </p:nvSpPr>
+          <p:spPr>
+            <a:xfrm>
+              <a:off x="887106" y="5294352"/>
+              <a:ext cx="7660515" cy="0"/>
+            </a:xfrm>
+            <a:custGeom>
+              <a:avLst/>
+              <a:pathLst>
+                <a:path w="7660515" h="0">
+                  <a:moveTo>
+                    <a:pt x="0" y="0"/>
+                  </a:moveTo>
+                  <a:lnTo>
+                    <a:pt x="7660515" y="0"/>
+                  </a:lnTo>
+                  <a:lnTo>
+                    <a:pt x="7660515" y="0"/>
+                  </a:lnTo>
+                </a:path>
+              </a:pathLst>
+            </a:custGeom>
+            <a:ln w="13550" cap="flat">
+              <a:solidFill>
+                <a:srgbClr val="7F7F7F">
+                  <a:alpha val="100000"/>
+                </a:srgbClr>
+              </a:solidFill>
+              <a:prstDash val="dash"/>
+              <a:round/>
+            </a:ln>
+          </p:spPr>
+          <p:txBody>
+            <a:bodyPr/>
+            <a:lstStyle/>
+            <a:p/>
+          </p:txBody>
+        </p:sp>
+        <p:sp>
+          <p:nvSpPr>
+            <p:cNvPr id="71" name="pl71"/>
+            <p:cNvSpPr/>
+            <p:nvPr/>
+          </p:nvSpPr>
+          <p:spPr>
+            <a:xfrm>
+              <a:off x="4590457" y="4336484"/>
+              <a:ext cx="0" cy="1317069"/>
+            </a:xfrm>
+            <a:custGeom>
+              <a:avLst/>
+              <a:pathLst>
+                <a:path w="0" h="1317069">
+                  <a:moveTo>
+                    <a:pt x="0" y="1317069"/>
+                  </a:moveTo>
+                  <a:lnTo>
+                    <a:pt x="0" y="0"/>
+                  </a:lnTo>
+                  <a:lnTo>
+                    <a:pt x="0" y="0"/>
+                  </a:lnTo>
+                </a:path>
+              </a:pathLst>
+            </a:custGeom>
+            <a:ln w="13550" cap="flat">
+              <a:solidFill>
+                <a:srgbClr val="666666">
+                  <a:alpha val="100000"/>
+                </a:srgbClr>
+              </a:solidFill>
+              <a:prstDash val="dot"/>
+              <a:round/>
+            </a:ln>
+          </p:spPr>
+          <p:txBody>
+            <a:bodyPr/>
+            <a:lstStyle/>
+            <a:p/>
+          </p:txBody>
+        </p:sp>
+        <p:sp>
+          <p:nvSpPr>
+            <p:cNvPr id="72" name="tx72"/>
+            <p:cNvSpPr/>
+            <p:nvPr/>
+          </p:nvSpPr>
+          <p:spPr>
+            <a:xfrm>
+              <a:off x="762297" y="5553636"/>
+              <a:ext cx="62179" cy="80101"/>
+            </a:xfrm>
+            <a:prstGeom prst="rect">
+              <a:avLst/>
+            </a:prstGeom>
+            <a:noFill/>
+          </p:spPr>
+          <p:txBody>
+            <a:bodyPr lIns="0" rIns="0" tIns="0" bIns="0" anchorCtr="1" anchor="ctr" wrap="none"/>
+            <a:lstStyle/>
+            <a:p>
+              <a:pPr algn="l" marL="0" marR="0" indent="0">
+                <a:lnSpc>
+                  <a:spcPts val="880"/>
+                </a:lnSpc>
+                <a:spcBef>
+                  <a:spcPts val="0"/>
+                </a:spcBef>
+                <a:spcAft>
+                  <a:spcPts val="0"/>
+                </a:spcAft>
+              </a:pPr>
+              <a:r>
+                <a:rPr sz="880">
+                  <a:solidFill>
+                    <a:srgbClr val="4D4D4D">
+                      <a:alpha val="100000"/>
+                    </a:srgbClr>
+                  </a:solidFill>
+                  <a:latin typeface="Helvetica"/>
+                  <a:cs typeface="Helvetica"/>
+                </a:rPr>
+                <a:t>0</a:t>
+              </a:r>
+            </a:p>
+          </p:txBody>
+        </p:sp>
+        <p:sp>
+          <p:nvSpPr>
+            <p:cNvPr id="73" name="tx73"/>
+            <p:cNvSpPr/>
+            <p:nvPr/>
+          </p:nvSpPr>
+          <p:spPr>
+            <a:xfrm>
+              <a:off x="762297" y="5254302"/>
+              <a:ext cx="62179" cy="80101"/>
+            </a:xfrm>
+            <a:prstGeom prst="rect">
+              <a:avLst/>
+            </a:prstGeom>
+            <a:noFill/>
+          </p:spPr>
+          <p:txBody>
+            <a:bodyPr lIns="0" rIns="0" tIns="0" bIns="0" anchorCtr="1" anchor="ctr" wrap="none"/>
+            <a:lstStyle/>
+            <a:p>
+              <a:pPr algn="l" marL="0" marR="0" indent="0">
+                <a:lnSpc>
+                  <a:spcPts val="880"/>
+                </a:lnSpc>
+                <a:spcBef>
+                  <a:spcPts val="0"/>
+                </a:spcBef>
+                <a:spcAft>
+                  <a:spcPts val="0"/>
+                </a:spcAft>
+              </a:pPr>
+              <a:r>
+                <a:rPr sz="880">
+                  <a:solidFill>
+                    <a:srgbClr val="4D4D4D">
+                      <a:alpha val="100000"/>
+                    </a:srgbClr>
+                  </a:solidFill>
+                  <a:latin typeface="Helvetica"/>
+                  <a:cs typeface="Helvetica"/>
+                </a:rPr>
+                <a:t>1</a:t>
+              </a:r>
+            </a:p>
+          </p:txBody>
+        </p:sp>
+        <p:sp>
+          <p:nvSpPr>
+            <p:cNvPr id="74" name="tx74"/>
+            <p:cNvSpPr/>
+            <p:nvPr/>
+          </p:nvSpPr>
+          <p:spPr>
+            <a:xfrm>
+              <a:off x="762297" y="4954968"/>
+              <a:ext cx="62179" cy="80101"/>
+            </a:xfrm>
+            <a:prstGeom prst="rect">
+              <a:avLst/>
+            </a:prstGeom>
+            <a:noFill/>
+          </p:spPr>
+          <p:txBody>
+            <a:bodyPr lIns="0" rIns="0" tIns="0" bIns="0" anchorCtr="1" anchor="ctr" wrap="none"/>
+            <a:lstStyle/>
+            <a:p>
+              <a:pPr algn="l" marL="0" marR="0" indent="0">
+                <a:lnSpc>
+                  <a:spcPts val="880"/>
+                </a:lnSpc>
+                <a:spcBef>
+                  <a:spcPts val="0"/>
+                </a:spcBef>
+                <a:spcAft>
+                  <a:spcPts val="0"/>
+                </a:spcAft>
+              </a:pPr>
+              <a:r>
+                <a:rPr sz="880">
+                  <a:solidFill>
+                    <a:srgbClr val="4D4D4D">
+                      <a:alpha val="100000"/>
+                    </a:srgbClr>
+                  </a:solidFill>
+                  <a:latin typeface="Helvetica"/>
+                  <a:cs typeface="Helvetica"/>
+                </a:rPr>
+                <a:t>2</a:t>
+              </a:r>
+            </a:p>
+          </p:txBody>
+        </p:sp>
+        <p:sp>
+          <p:nvSpPr>
+            <p:cNvPr id="75" name="tx75"/>
+            <p:cNvSpPr/>
+            <p:nvPr/>
+          </p:nvSpPr>
+          <p:spPr>
+            <a:xfrm>
+              <a:off x="762297" y="4655634"/>
+              <a:ext cx="62179" cy="80101"/>
+            </a:xfrm>
+            <a:prstGeom prst="rect">
+              <a:avLst/>
+            </a:prstGeom>
+            <a:noFill/>
+          </p:spPr>
+          <p:txBody>
+            <a:bodyPr lIns="0" rIns="0" tIns="0" bIns="0" anchorCtr="1" anchor="ctr" wrap="none"/>
+            <a:lstStyle/>
+            <a:p>
+              <a:pPr algn="l" marL="0" marR="0" indent="0">
+                <a:lnSpc>
+                  <a:spcPts val="880"/>
+                </a:lnSpc>
+                <a:spcBef>
+                  <a:spcPts val="0"/>
+                </a:spcBef>
+                <a:spcAft>
+                  <a:spcPts val="0"/>
+                </a:spcAft>
+              </a:pPr>
+              <a:r>
+                <a:rPr sz="880">
+                  <a:solidFill>
+                    <a:srgbClr val="4D4D4D">
+                      <a:alpha val="100000"/>
+                    </a:srgbClr>
+                  </a:solidFill>
+                  <a:latin typeface="Helvetica"/>
+                  <a:cs typeface="Helvetica"/>
+                </a:rPr>
+                <a:t>3</a:t>
+              </a:r>
+            </a:p>
+          </p:txBody>
+        </p:sp>
+        <p:sp>
+          <p:nvSpPr>
+            <p:cNvPr id="76" name="tx76"/>
+            <p:cNvSpPr/>
+            <p:nvPr/>
+          </p:nvSpPr>
+          <p:spPr>
+            <a:xfrm>
+              <a:off x="762297" y="4356300"/>
+              <a:ext cx="62179" cy="80101"/>
+            </a:xfrm>
+            <a:prstGeom prst="rect">
+              <a:avLst/>
+            </a:prstGeom>
+            <a:noFill/>
+          </p:spPr>
+          <p:txBody>
+            <a:bodyPr lIns="0" rIns="0" tIns="0" bIns="0" anchorCtr="1" anchor="ctr" wrap="none"/>
+            <a:lstStyle/>
+            <a:p>
+              <a:pPr algn="l" marL="0" marR="0" indent="0">
+                <a:lnSpc>
+                  <a:spcPts val="880"/>
+                </a:lnSpc>
+                <a:spcBef>
+                  <a:spcPts val="0"/>
+                </a:spcBef>
+                <a:spcAft>
+                  <a:spcPts val="0"/>
+                </a:spcAft>
+              </a:pPr>
+              <a:r>
+                <a:rPr sz="880">
+                  <a:solidFill>
+                    <a:srgbClr val="4D4D4D">
+                      <a:alpha val="100000"/>
+                    </a:srgbClr>
+                  </a:solidFill>
+                  <a:latin typeface="Helvetica"/>
+                  <a:cs typeface="Helvetica"/>
+                </a:rPr>
+                <a:t>4</a:t>
+              </a:r>
+            </a:p>
+          </p:txBody>
+        </p:sp>
+        <p:sp>
+          <p:nvSpPr>
+            <p:cNvPr id="77" name="tx77"/>
+            <p:cNvSpPr/>
+            <p:nvPr/>
+          </p:nvSpPr>
+          <p:spPr>
+            <a:xfrm>
+              <a:off x="1133333" y="5716183"/>
+              <a:ext cx="161574" cy="80101"/>
+            </a:xfrm>
+            <a:prstGeom prst="rect">
+              <a:avLst/>
+            </a:prstGeom>
+            <a:noFill/>
+          </p:spPr>
+          <p:txBody>
+            <a:bodyPr lIns="0" rIns="0" tIns="0" bIns="0" anchorCtr="1" anchor="ctr" wrap="none"/>
+            <a:lstStyle/>
+            <a:p>
+              <a:pPr algn="l" marL="0" marR="0" indent="0">
+                <a:lnSpc>
+                  <a:spcPts val="880"/>
+                </a:lnSpc>
+                <a:spcBef>
+                  <a:spcPts val="0"/>
+                </a:spcBef>
+                <a:spcAft>
+                  <a:spcPts val="0"/>
+                </a:spcAft>
+              </a:pPr>
+              <a:r>
+                <a:rPr sz="880">
+                  <a:solidFill>
+                    <a:srgbClr val="4D4D4D">
+                      <a:alpha val="100000"/>
+                    </a:srgbClr>
+                  </a:solidFill>
+                  <a:latin typeface="Helvetica"/>
+                  <a:cs typeface="Helvetica"/>
+                </a:rPr>
+                <a:t>-40</a:t>
+              </a:r>
+            </a:p>
+          </p:txBody>
+        </p:sp>
+        <p:sp>
+          <p:nvSpPr>
+            <p:cNvPr id="78" name="tx78"/>
+            <p:cNvSpPr/>
+            <p:nvPr/>
+          </p:nvSpPr>
+          <p:spPr>
+            <a:xfrm>
+              <a:off x="1978619" y="5716183"/>
+              <a:ext cx="161574" cy="80101"/>
+            </a:xfrm>
+            <a:prstGeom prst="rect">
+              <a:avLst/>
+            </a:prstGeom>
+            <a:noFill/>
+          </p:spPr>
+          <p:txBody>
+            <a:bodyPr lIns="0" rIns="0" tIns="0" bIns="0" anchorCtr="1" anchor="ctr" wrap="none"/>
+            <a:lstStyle/>
+            <a:p>
+              <a:pPr algn="l" marL="0" marR="0" indent="0">
+                <a:lnSpc>
+                  <a:spcPts val="880"/>
+                </a:lnSpc>
+                <a:spcBef>
+                  <a:spcPts val="0"/>
+                </a:spcBef>
+                <a:spcAft>
+                  <a:spcPts val="0"/>
+                </a:spcAft>
+              </a:pPr>
+              <a:r>
+                <a:rPr sz="880">
+                  <a:solidFill>
+                    <a:srgbClr val="4D4D4D">
+                      <a:alpha val="100000"/>
+                    </a:srgbClr>
+                  </a:solidFill>
+                  <a:latin typeface="Helvetica"/>
+                  <a:cs typeface="Helvetica"/>
+                </a:rPr>
+                <a:t>-30</a:t>
+              </a:r>
+            </a:p>
+          </p:txBody>
+        </p:sp>
+        <p:sp>
+          <p:nvSpPr>
+            <p:cNvPr id="79" name="tx79"/>
+            <p:cNvSpPr/>
+            <p:nvPr/>
+          </p:nvSpPr>
+          <p:spPr>
+            <a:xfrm>
+              <a:off x="2823906" y="5716183"/>
+              <a:ext cx="161574" cy="80101"/>
+            </a:xfrm>
+            <a:prstGeom prst="rect">
+              <a:avLst/>
+            </a:prstGeom>
+            <a:noFill/>
+          </p:spPr>
+          <p:txBody>
+            <a:bodyPr lIns="0" rIns="0" tIns="0" bIns="0" anchorCtr="1" anchor="ctr" wrap="none"/>
+            <a:lstStyle/>
+            <a:p>
+              <a:pPr algn="l" marL="0" marR="0" indent="0">
+                <a:lnSpc>
+                  <a:spcPts val="880"/>
+                </a:lnSpc>
+                <a:spcBef>
+                  <a:spcPts val="0"/>
+                </a:spcBef>
+                <a:spcAft>
+                  <a:spcPts val="0"/>
+                </a:spcAft>
+              </a:pPr>
+              <a:r>
+                <a:rPr sz="880">
+                  <a:solidFill>
+                    <a:srgbClr val="4D4D4D">
+                      <a:alpha val="100000"/>
+                    </a:srgbClr>
+                  </a:solidFill>
+                  <a:latin typeface="Helvetica"/>
+                  <a:cs typeface="Helvetica"/>
+                </a:rPr>
+                <a:t>-20</a:t>
+              </a:r>
+            </a:p>
+          </p:txBody>
+        </p:sp>
+        <p:sp>
+          <p:nvSpPr>
+            <p:cNvPr id="80" name="tx80"/>
+            <p:cNvSpPr/>
+            <p:nvPr/>
+          </p:nvSpPr>
+          <p:spPr>
+            <a:xfrm>
+              <a:off x="3669192" y="5716183"/>
+              <a:ext cx="161574" cy="80101"/>
+            </a:xfrm>
+            <a:prstGeom prst="rect">
+              <a:avLst/>
+            </a:prstGeom>
+            <a:noFill/>
+          </p:spPr>
+          <p:txBody>
+            <a:bodyPr lIns="0" rIns="0" tIns="0" bIns="0" anchorCtr="1" anchor="ctr" wrap="none"/>
+            <a:lstStyle/>
+            <a:p>
+              <a:pPr algn="l" marL="0" marR="0" indent="0">
+                <a:lnSpc>
+                  <a:spcPts val="880"/>
+                </a:lnSpc>
+                <a:spcBef>
+                  <a:spcPts val="0"/>
+                </a:spcBef>
+                <a:spcAft>
+                  <a:spcPts val="0"/>
+                </a:spcAft>
+              </a:pPr>
+              <a:r>
+                <a:rPr sz="880">
+                  <a:solidFill>
+                    <a:srgbClr val="4D4D4D">
+                      <a:alpha val="100000"/>
+                    </a:srgbClr>
+                  </a:solidFill>
+                  <a:latin typeface="Helvetica"/>
+                  <a:cs typeface="Helvetica"/>
+                </a:rPr>
+                <a:t>-10</a:t>
+              </a:r>
+            </a:p>
+          </p:txBody>
+        </p:sp>
+        <p:sp>
+          <p:nvSpPr>
+            <p:cNvPr id="81" name="tx81"/>
+            <p:cNvSpPr/>
+            <p:nvPr/>
+          </p:nvSpPr>
+          <p:spPr>
+            <a:xfrm>
+              <a:off x="4564176" y="5716183"/>
+              <a:ext cx="62179" cy="80101"/>
+            </a:xfrm>
+            <a:prstGeom prst="rect">
+              <a:avLst/>
+            </a:prstGeom>
+            <a:noFill/>
+          </p:spPr>
+          <p:txBody>
+            <a:bodyPr lIns="0" rIns="0" tIns="0" bIns="0" anchorCtr="1" anchor="ctr" wrap="none"/>
+            <a:lstStyle/>
+            <a:p>
+              <a:pPr algn="l" marL="0" marR="0" indent="0">
+                <a:lnSpc>
+                  <a:spcPts val="880"/>
+                </a:lnSpc>
+                <a:spcBef>
+                  <a:spcPts val="0"/>
+                </a:spcBef>
+                <a:spcAft>
+                  <a:spcPts val="0"/>
+                </a:spcAft>
+              </a:pPr>
+              <a:r>
+                <a:rPr sz="880">
+                  <a:solidFill>
+                    <a:srgbClr val="4D4D4D">
+                      <a:alpha val="100000"/>
+                    </a:srgbClr>
+                  </a:solidFill>
+                  <a:latin typeface="Helvetica"/>
+                  <a:cs typeface="Helvetica"/>
+                </a:rPr>
+                <a:t>0</a:t>
+              </a:r>
+            </a:p>
+          </p:txBody>
+        </p:sp>
+        <p:sp>
+          <p:nvSpPr>
+            <p:cNvPr id="82" name="tx82"/>
+            <p:cNvSpPr/>
+            <p:nvPr/>
+          </p:nvSpPr>
+          <p:spPr>
+            <a:xfrm>
+              <a:off x="5378373" y="5716183"/>
+              <a:ext cx="124358" cy="80101"/>
+            </a:xfrm>
+            <a:prstGeom prst="rect">
+              <a:avLst/>
+            </a:prstGeom>
+            <a:noFill/>
+          </p:spPr>
+          <p:txBody>
+            <a:bodyPr lIns="0" rIns="0" tIns="0" bIns="0" anchorCtr="1" anchor="ctr" wrap="none"/>
+            <a:lstStyle/>
+            <a:p>
+              <a:pPr algn="l" marL="0" marR="0" indent="0">
+                <a:lnSpc>
+                  <a:spcPts val="880"/>
+                </a:lnSpc>
+                <a:spcBef>
+                  <a:spcPts val="0"/>
+                </a:spcBef>
+                <a:spcAft>
+                  <a:spcPts val="0"/>
+                </a:spcAft>
+              </a:pPr>
+              <a:r>
+                <a:rPr sz="880">
+                  <a:solidFill>
+                    <a:srgbClr val="4D4D4D">
+                      <a:alpha val="100000"/>
+                    </a:srgbClr>
+                  </a:solidFill>
+                  <a:latin typeface="Helvetica"/>
+                  <a:cs typeface="Helvetica"/>
+                </a:rPr>
+                <a:t>10</a:t>
+              </a:r>
+            </a:p>
+          </p:txBody>
+        </p:sp>
+        <p:sp>
+          <p:nvSpPr>
+            <p:cNvPr id="83" name="tx83"/>
+            <p:cNvSpPr/>
+            <p:nvPr/>
+          </p:nvSpPr>
+          <p:spPr>
+            <a:xfrm>
+              <a:off x="6223659" y="5716183"/>
+              <a:ext cx="124358" cy="80101"/>
+            </a:xfrm>
+            <a:prstGeom prst="rect">
+              <a:avLst/>
+            </a:prstGeom>
+            <a:noFill/>
+          </p:spPr>
+          <p:txBody>
+            <a:bodyPr lIns="0" rIns="0" tIns="0" bIns="0" anchorCtr="1" anchor="ctr" wrap="none"/>
+            <a:lstStyle/>
+            <a:p>
+              <a:pPr algn="l" marL="0" marR="0" indent="0">
+                <a:lnSpc>
+                  <a:spcPts val="880"/>
+                </a:lnSpc>
+                <a:spcBef>
+                  <a:spcPts val="0"/>
+                </a:spcBef>
+                <a:spcAft>
+                  <a:spcPts val="0"/>
+                </a:spcAft>
+              </a:pPr>
+              <a:r>
+                <a:rPr sz="880">
+                  <a:solidFill>
+                    <a:srgbClr val="4D4D4D">
+                      <a:alpha val="100000"/>
+                    </a:srgbClr>
+                  </a:solidFill>
+                  <a:latin typeface="Helvetica"/>
+                  <a:cs typeface="Helvetica"/>
+                </a:rPr>
+                <a:t>20</a:t>
+              </a:r>
+            </a:p>
+          </p:txBody>
+        </p:sp>
+        <p:sp>
+          <p:nvSpPr>
+            <p:cNvPr id="84" name="tx84"/>
+            <p:cNvSpPr/>
+            <p:nvPr/>
+          </p:nvSpPr>
+          <p:spPr>
+            <a:xfrm>
+              <a:off x="7068946" y="5716183"/>
+              <a:ext cx="124358" cy="80101"/>
+            </a:xfrm>
+            <a:prstGeom prst="rect">
+              <a:avLst/>
+            </a:prstGeom>
+            <a:noFill/>
+          </p:spPr>
+          <p:txBody>
+            <a:bodyPr lIns="0" rIns="0" tIns="0" bIns="0" anchorCtr="1" anchor="ctr" wrap="none"/>
+            <a:lstStyle/>
+            <a:p>
+              <a:pPr algn="l" marL="0" marR="0" indent="0">
+                <a:lnSpc>
+                  <a:spcPts val="880"/>
+                </a:lnSpc>
+                <a:spcBef>
+                  <a:spcPts val="0"/>
+                </a:spcBef>
+                <a:spcAft>
+                  <a:spcPts val="0"/>
+                </a:spcAft>
+              </a:pPr>
+              <a:r>
+                <a:rPr sz="880">
+                  <a:solidFill>
+                    <a:srgbClr val="4D4D4D">
+                      <a:alpha val="100000"/>
+                    </a:srgbClr>
+                  </a:solidFill>
+                  <a:latin typeface="Helvetica"/>
+                  <a:cs typeface="Helvetica"/>
+                </a:rPr>
+                <a:t>30</a:t>
+              </a:r>
+            </a:p>
+          </p:txBody>
+        </p:sp>
+        <p:sp>
+          <p:nvSpPr>
+            <p:cNvPr id="85" name="tx85"/>
+            <p:cNvSpPr/>
+            <p:nvPr/>
+          </p:nvSpPr>
+          <p:spPr>
+            <a:xfrm>
+              <a:off x="7914232" y="5716183"/>
+              <a:ext cx="124358" cy="80101"/>
+            </a:xfrm>
+            <a:prstGeom prst="rect">
+              <a:avLst/>
+            </a:prstGeom>
+            <a:noFill/>
+          </p:spPr>
+          <p:txBody>
+            <a:bodyPr lIns="0" rIns="0" tIns="0" bIns="0" anchorCtr="1" anchor="ctr" wrap="none"/>
+            <a:lstStyle/>
+            <a:p>
+              <a:pPr algn="l" marL="0" marR="0" indent="0">
+                <a:lnSpc>
+                  <a:spcPts val="880"/>
+                </a:lnSpc>
+                <a:spcBef>
+                  <a:spcPts val="0"/>
+                </a:spcBef>
+                <a:spcAft>
+                  <a:spcPts val="0"/>
+                </a:spcAft>
+              </a:pPr>
+              <a:r>
+                <a:rPr sz="880">
+                  <a:solidFill>
+                    <a:srgbClr val="4D4D4D">
+                      <a:alpha val="100000"/>
+                    </a:srgbClr>
+                  </a:solidFill>
+                  <a:latin typeface="Helvetica"/>
+                  <a:cs typeface="Helvetica"/>
+                </a:rPr>
+                <a:t>40</a:t>
+              </a:r>
+            </a:p>
+          </p:txBody>
+        </p:sp>
+        <p:sp>
+          <p:nvSpPr>
+            <p:cNvPr id="86" name="tx86"/>
+            <p:cNvSpPr/>
+            <p:nvPr/>
+          </p:nvSpPr>
+          <p:spPr>
+            <a:xfrm>
+              <a:off x="2928340" y="5855859"/>
+              <a:ext cx="3578047" cy="100218"/>
+            </a:xfrm>
+            <a:prstGeom prst="rect">
+              <a:avLst/>
+            </a:prstGeom>
+            <a:noFill/>
+          </p:spPr>
+          <p:txBody>
+            <a:bodyPr lIns="0" rIns="0" tIns="0" bIns="0" anchorCtr="1" anchor="ctr" wrap="none"/>
+            <a:lstStyle/>
+            <a:p>
+              <a:pPr algn="l" marL="0" marR="0" indent="0">
+                <a:lnSpc>
+                  <a:spcPts val="1100"/>
+                </a:lnSpc>
+                <a:spcBef>
+                  <a:spcPts val="0"/>
+                </a:spcBef>
+                <a:spcAft>
+                  <a:spcPts val="0"/>
+                </a:spcAft>
+              </a:pPr>
+              <a:r>
+                <a:rPr sz="1100">
+                  <a:solidFill>
+                    <a:srgbClr val="000000">
+                      <a:alpha val="100000"/>
+                    </a:srgbClr>
+                  </a:solidFill>
+                  <a:latin typeface="Helvetica"/>
+                  <a:cs typeface="Helvetica"/>
+                </a:rPr>
+                <a:t>eGFR difference (%): 100 × (CKD-EPI Cr-Cys − CG) / CG</a:t>
+              </a:r>
+            </a:p>
+          </p:txBody>
+        </p:sp>
+        <p:sp>
+          <p:nvSpPr>
+            <p:cNvPr id="87" name="tx87"/>
+            <p:cNvSpPr/>
+            <p:nvPr/>
+          </p:nvSpPr>
+          <p:spPr>
+            <a:xfrm rot="-5400000">
+              <a:off x="138035" y="4944909"/>
+              <a:ext cx="1016904" cy="100218"/>
+            </a:xfrm>
+            <a:prstGeom prst="rect">
+              <a:avLst/>
+            </a:prstGeom>
+            <a:noFill/>
+          </p:spPr>
+          <p:txBody>
+            <a:bodyPr lIns="0" rIns="0" tIns="0" bIns="0" anchorCtr="1" anchor="ctr" wrap="none"/>
+            <a:lstStyle/>
+            <a:p>
+              <a:pPr algn="l" marL="0" marR="0" indent="0">
+                <a:lnSpc>
+                  <a:spcPts val="1100"/>
+                </a:lnSpc>
+                <a:spcBef>
+                  <a:spcPts val="0"/>
+                </a:spcBef>
+                <a:spcAft>
+                  <a:spcPts val="0"/>
+                </a:spcAft>
+              </a:pPr>
+              <a:r>
+                <a:rPr sz="1100">
+                  <a:solidFill>
+                    <a:srgbClr val="000000">
+                      <a:alpha val="100000"/>
+                    </a:srgbClr>
+                  </a:solidFill>
+                  <a:latin typeface="Helvetica"/>
+                  <a:cs typeface="Helvetica"/>
+                </a:rPr>
+                <a:t>subHR (95% CI)</a:t>
+              </a:r>
+            </a:p>
+          </p:txBody>
+        </p:sp>
+        <p:sp>
+          <p:nvSpPr>
+            <p:cNvPr id="88" name="tx88"/>
+            <p:cNvSpPr/>
+            <p:nvPr/>
+          </p:nvSpPr>
+          <p:spPr>
+            <a:xfrm>
+              <a:off x="887106" y="4159544"/>
+              <a:ext cx="7052127" cy="82021"/>
+            </a:xfrm>
+            <a:prstGeom prst="rect">
+              <a:avLst/>
+            </a:prstGeom>
+            <a:noFill/>
+          </p:spPr>
+          <p:txBody>
+            <a:bodyPr lIns="0" rIns="0" tIns="0" bIns="0" anchorCtr="1" anchor="ctr" wrap="none"/>
+            <a:lstStyle/>
+            <a:p>
+              <a:pPr algn="l" marL="0" marR="0" indent="0">
+                <a:lnSpc>
+                  <a:spcPts val="900"/>
+                </a:lnSpc>
+                <a:spcBef>
+                  <a:spcPts val="0"/>
+                </a:spcBef>
+                <a:spcAft>
+                  <a:spcPts val="0"/>
+                </a:spcAft>
+              </a:pPr>
+              <a:r>
+                <a:rPr sz="900">
+                  <a:solidFill>
+                    <a:srgbClr val="404040">
+                      <a:alpha val="100000"/>
+                    </a:srgbClr>
+                  </a:solidFill>
+                  <a:latin typeface="Helvetica"/>
+                  <a:cs typeface="Helvetica"/>
+                </a:rPr>
+                <a:t>subHR per 10 % decline: 1.31 (1.16-1.48), p_Bonf = &lt;0.001 (n = 6)  |  per IQR decline (Δ = 29.3 %): 2.21 (1.55-3.15)  |  IQR: [-14.6, 14.7] %</a:t>
+              </a:r>
+            </a:p>
+          </p:txBody>
+        </p:sp>
+        <p:sp>
+          <p:nvSpPr>
+            <p:cNvPr id="89" name="tx89"/>
+            <p:cNvSpPr/>
+            <p:nvPr/>
+          </p:nvSpPr>
+          <p:spPr>
+            <a:xfrm>
+              <a:off x="887106" y="3932770"/>
               <a:ext cx="2039386" cy="120152"/>
             </a:xfrm>
             <a:prstGeom prst="rect">
